--- a/aulas/aula-01-databricks-sql/aula-01-imersao-agosto.pptx
+++ b/aulas/aula-01-databricks-sql/aula-01-imersao-agosto.pptx
@@ -20,6 +20,16 @@
     <p:sldId id="268" r:id="rId14"/>
     <p:sldId id="312" r:id="rId63"/>
     <p:sldId id="313" r:id="rId64"/>
+    <p:sldId id="314" r:id="rId36"/>
+    <p:sldId id="315" r:id="rId65"/>
+    <p:sldId id="316" r:id="rId66"/>
+    <p:sldId id="317" r:id="rId67"/>
+    <p:sldId id="318" r:id="rId68"/>
+    <p:sldId id="319" r:id="rId69"/>
+    <p:sldId id="320" r:id="rId70"/>
+    <p:sldId id="321" r:id="rId71"/>
+    <p:sldId id="322" r:id="rId72"/>
+    <p:sldId id="323" r:id="rId73"/>
     <p:sldId id="269" r:id="rId15"/>
     <p:sldId id="270" r:id="rId16"/>
     <p:sldId id="271" r:id="rId17"/>
@@ -2958,94 +2968,6 @@
             <a:fld id="{F7021451-1387-4CA6-816F-3879F97B5CBC}" type="slidenum">
               <a:rPr lang="en-US"/>
               <a:t>34</a:t>
-            </a:fld>
-            <a:endParaRPr lang="en-US"/>
-          </a:p>
-        </p:txBody>
-      </p:sp>
-    </p:spTree>
-    <p:extLst>
-      <p:ext uri="{BB962C8B-B14F-4D97-AF65-F5344CB8AC3E}">
-        <p14:creationId xmlns:p14="http://schemas.microsoft.com/office/powerpoint/2010/main" val="1024086991"/>
-      </p:ext>
-    </p:extLst>
-  </p:cSld>
-  <p:clrMapOvr>
-    <a:masterClrMapping/>
-  </p:clrMapOvr>
-</p:notes>
-</file>
-
-<file path=ppt/notesSlides/notesSlide35.xml><?xml version="1.0" encoding="utf-8"?>
-<p:notes xmlns:a="http://schemas.openxmlformats.org/drawingml/2006/main" xmlns:r="http://schemas.openxmlformats.org/officeDocument/2006/relationships" xmlns:p="http://schemas.openxmlformats.org/presentationml/2006/main">
-  <p:cSld>
-    <p:spTree>
-      <p:nvGrpSpPr>
-        <p:cNvPr id="1" name=""/>
-        <p:cNvGrpSpPr/>
-        <p:nvPr/>
-      </p:nvGrpSpPr>
-      <p:grpSpPr>
-        <a:xfrm>
-          <a:off x="0" y="0"/>
-          <a:ext cx="0" cy="0"/>
-          <a:chOff x="0" y="0"/>
-          <a:chExt cx="0" cy="0"/>
-        </a:xfrm>
-      </p:grpSpPr>
-      <p:sp>
-        <p:nvSpPr>
-          <p:cNvPr id="2" name="Slide Image Placeholder 1"/>
-          <p:cNvSpPr>
-            <a:spLocks noGrp="1" noRot="1" noChangeAspect="1"/>
-          </p:cNvSpPr>
-          <p:nvPr>
-            <p:ph type="sldImg"/>
-          </p:nvPr>
-        </p:nvSpPr>
-        <p:spPr/>
-      </p:sp>
-      <p:sp>
-        <p:nvSpPr>
-          <p:cNvPr id="3" name="Notes Placeholder 2"/>
-          <p:cNvSpPr>
-            <a:spLocks noGrp="1"/>
-          </p:cNvSpPr>
-          <p:nvPr>
-            <p:ph type="body" idx="1"/>
-          </p:nvPr>
-        </p:nvSpPr>
-        <p:spPr/>
-        <p:txBody>
-          <a:bodyPr/>
-          <a:lstStyle/>
-          <a:p>
-            <a:r>
-              <a:rPr lang="en-US" dirty="0"/>
-              <a:t/>
-            </a:r>
-            <a:endParaRPr lang="en-US" dirty="0"/>
-          </a:p>
-        </p:txBody>
-      </p:sp>
-      <p:sp>
-        <p:nvSpPr>
-          <p:cNvPr id="4" name="Slide Number Placeholder 3"/>
-          <p:cNvSpPr>
-            <a:spLocks noGrp="1"/>
-          </p:cNvSpPr>
-          <p:nvPr>
-            <p:ph type="sldNum" sz="quarter" idx="10"/>
-          </p:nvPr>
-        </p:nvSpPr>
-        <p:spPr/>
-        <p:txBody>
-          <a:bodyPr/>
-          <a:lstStyle/>
-          <a:p>
-            <a:fld id="{F7021451-1387-4CA6-816F-3879F97B5CBC}" type="slidenum">
-              <a:rPr lang="en-US"/>
-              <a:t>35</a:t>
             </a:fld>
             <a:endParaRPr lang="en-US"/>
           </a:p>
@@ -26468,584 +26390,6 @@
 
 <file path=ppt/slides/slide41.xml><?xml version="1.0" encoding="utf-8"?>
 <p:sld xmlns:a="http://schemas.openxmlformats.org/drawingml/2006/main" xmlns:r="http://schemas.openxmlformats.org/officeDocument/2006/relationships" xmlns:p="http://schemas.openxmlformats.org/presentationml/2006/main">
-  <p:cSld name="Slide 35">
-    <p:bg>
-      <p:bgPr>
-        <a:solidFill>
-          <a:srgbClr val="070C16"/>
-        </a:solidFill>
-      </p:bgPr>
-    </p:bg>
-    <p:spTree>
-      <p:nvGrpSpPr>
-        <p:cNvPr id="1" name=""/>
-        <p:cNvGrpSpPr/>
-        <p:nvPr/>
-      </p:nvGrpSpPr>
-      <p:grpSpPr>
-        <a:xfrm>
-          <a:off x="0" y="0"/>
-          <a:ext cx="0" cy="0"/>
-          <a:chOff x="0" y="0"/>
-          <a:chExt cx="0" cy="0"/>
-        </a:xfrm>
-      </p:grpSpPr>
-      <p:sp>
-        <p:nvSpPr>
-          <p:cNvPr id="2" name="Text 0"/>
-          <p:cNvSpPr/>
-          <p:nvPr/>
-        </p:nvSpPr>
-        <p:spPr>
-          <a:xfrm>
-            <a:off x="411480" y="411480"/>
-            <a:ext cx="7315200" cy="256032"/>
-          </a:xfrm>
-          <a:prstGeom prst="rect">
-            <a:avLst/>
-          </a:prstGeom>
-          <a:noFill/>
-          <a:ln/>
-        </p:spPr>
-        <p:txBody>
-          <a:bodyPr wrap="square" lIns="0" tIns="0" rIns="0" bIns="0" rtlCol="0" anchor="ctr"/>
-          <a:lstStyle/>
-          <a:p>
-            <a:pPr indent="0" marL="0">
-              <a:buNone/>
-            </a:pPr>
-            <a:r>
-              <a:rPr lang="en-US" sz="1100" b="1" spc="160" kern="0" dirty="0">
-                <a:solidFill>
-                  <a:srgbClr val="3B9DF5"/>
-                </a:solidFill>
-                <a:latin typeface="Arial" pitchFamily="34" charset="0"/>
-                <a:ea typeface="Arial" pitchFamily="34" charset="-122"/>
-                <a:cs typeface="Arial" pitchFamily="34" charset="-120"/>
-              </a:rPr>
-              <a:t>AMBIENTE 04</a:t>
-            </a:r>
-            <a:endParaRPr lang="en-US" sz="1100" dirty="0"/>
-          </a:p>
-        </p:txBody>
-      </p:sp>
-      <p:sp>
-        <p:nvSpPr>
-          <p:cNvPr id="3" name="Text 1"/>
-          <p:cNvSpPr/>
-          <p:nvPr/>
-        </p:nvSpPr>
-        <p:spPr>
-          <a:xfrm>
-            <a:off x="411480" y="822960"/>
-            <a:ext cx="8321040" cy="1005840"/>
-          </a:xfrm>
-          <a:prstGeom prst="rect">
-            <a:avLst/>
-          </a:prstGeom>
-          <a:noFill/>
-          <a:ln/>
-        </p:spPr>
-        <p:txBody>
-          <a:bodyPr wrap="square" lIns="0" tIns="0" rIns="0" bIns="0" rtlCol="0" anchor="ctr"/>
-          <a:lstStyle/>
-          <a:p>
-            <a:pPr indent="0" marL="0">
-              <a:lnSpc>
-                <a:spcPts val="4000"/>
-              </a:lnSpc>
-              <a:buNone/>
-            </a:pPr>
-            <a:r>
-              <a:rPr lang="en-US" sz="3400" b="1" dirty="0">
-                <a:solidFill>
-                  <a:srgbClr val="FFFFFF"/>
-                </a:solidFill>
-                <a:latin typeface="Arial" pitchFamily="34" charset="0"/>
-                <a:ea typeface="Arial" pitchFamily="34" charset="-122"/>
-                <a:cs typeface="Arial" pitchFamily="34" charset="-120"/>
-              </a:rPr>
-              <a:t>Claude Code</a:t>
-            </a:r>
-            <a:endParaRPr lang="en-US" sz="3400" dirty="0"/>
-          </a:p>
-        </p:txBody>
-      </p:sp>
-      <p:sp>
-        <p:nvSpPr>
-          <p:cNvPr id="4" name="Text 2"/>
-          <p:cNvSpPr/>
-          <p:nvPr/>
-        </p:nvSpPr>
-        <p:spPr>
-          <a:xfrm>
-            <a:off x="411480" y="1874520"/>
-            <a:ext cx="7863840" cy="411480"/>
-          </a:xfrm>
-          <a:prstGeom prst="rect">
-            <a:avLst/>
-          </a:prstGeom>
-          <a:noFill/>
-          <a:ln/>
-        </p:spPr>
-        <p:txBody>
-          <a:bodyPr wrap="square" lIns="0" tIns="0" rIns="0" bIns="0" rtlCol="0" anchor="ctr"/>
-          <a:lstStyle/>
-          <a:p>
-            <a:pPr indent="0" marL="0">
-              <a:lnSpc>
-                <a:spcPts val="2200"/>
-              </a:lnSpc>
-              <a:buNone/>
-            </a:pPr>
-            <a:r>
-              <a:rPr lang="en-US" sz="1400" dirty="0">
-                <a:solidFill>
-                  <a:srgbClr val="9BAAC0"/>
-                </a:solidFill>
-                <a:latin typeface="Arial" pitchFamily="34" charset="0"/>
-                <a:ea typeface="Arial" pitchFamily="34" charset="-122"/>
-                <a:cs typeface="Arial" pitchFamily="34" charset="-120"/>
-              </a:rPr>
-              <a:t>Esse não responde pergunta. Ele constrói.</a:t>
-            </a:r>
-            <a:endParaRPr lang="en-US" sz="1400" dirty="0"/>
-          </a:p>
-        </p:txBody>
-      </p:sp>
-      <p:sp>
-        <p:nvSpPr>
-          <p:cNvPr id="5" name="Shape 3"/>
-          <p:cNvSpPr/>
-          <p:nvPr/>
-        </p:nvSpPr>
-        <p:spPr>
-          <a:xfrm>
-            <a:off x="411480" y="2514600"/>
-            <a:ext cx="2663952" cy="1600200"/>
-          </a:xfrm>
-          <a:prstGeom prst="roundRect">
-            <a:avLst>
-              <a:gd name="adj" fmla="val 2857"/>
-            </a:avLst>
-          </a:prstGeom>
-          <a:solidFill>
-            <a:srgbClr val="0D1522"/>
-          </a:solidFill>
-          <a:ln w="12700">
-            <a:solidFill>
-              <a:srgbClr val="1F3A5A"/>
-            </a:solidFill>
-            <a:prstDash val="solid"/>
-          </a:ln>
-        </p:spPr>
-        <p:txBody>
-          <a:bodyPr/>
-          <a:p/>
-        </p:txBody>
-      </p:sp>
-      <p:sp>
-        <p:nvSpPr>
-          <p:cNvPr id="6" name="Text 4"/>
-          <p:cNvSpPr/>
-          <p:nvPr/>
-        </p:nvSpPr>
-        <p:spPr>
-          <a:xfrm>
-            <a:off x="612648" y="2715768"/>
-            <a:ext cx="2261616" cy="512064"/>
-          </a:xfrm>
-          <a:prstGeom prst="rect">
-            <a:avLst/>
-          </a:prstGeom>
-          <a:noFill/>
-          <a:ln/>
-        </p:spPr>
-        <p:txBody>
-          <a:bodyPr wrap="square" lIns="0" tIns="0" rIns="0" bIns="0" rtlCol="0" anchor="t"/>
-          <a:lstStyle/>
-          <a:p>
-            <a:pPr indent="0" marL="0">
-              <a:lnSpc>
-                <a:spcPts val="1800"/>
-              </a:lnSpc>
-              <a:buNone/>
-            </a:pPr>
-            <a:r>
-              <a:rPr lang="en-US" sz="1450" b="1" dirty="0">
-                <a:solidFill>
-                  <a:srgbClr val="FFFFFF"/>
-                </a:solidFill>
-                <a:latin typeface="Arial" pitchFamily="34" charset="0"/>
-                <a:ea typeface="Arial" pitchFamily="34" charset="-122"/>
-                <a:cs typeface="Arial" pitchFamily="34" charset="-120"/>
-              </a:rPr>
-              <a:t>Onde ganha</a:t>
-            </a:r>
-            <a:endParaRPr lang="en-US" sz="1450" dirty="0"/>
-          </a:p>
-        </p:txBody>
-      </p:sp>
-      <p:sp>
-        <p:nvSpPr>
-          <p:cNvPr id="7" name="Text 5"/>
-          <p:cNvSpPr/>
-          <p:nvPr/>
-        </p:nvSpPr>
-        <p:spPr>
-          <a:xfrm>
-            <a:off x="612648" y="3264408"/>
-            <a:ext cx="2261616" cy="685800"/>
-          </a:xfrm>
-          <a:prstGeom prst="rect">
-            <a:avLst/>
-          </a:prstGeom>
-          <a:noFill/>
-          <a:ln/>
-        </p:spPr>
-        <p:txBody>
-          <a:bodyPr wrap="square" lIns="0" tIns="0" rIns="0" bIns="0" rtlCol="0" anchor="ctr"/>
-          <a:lstStyle/>
-          <a:p>
-            <a:pPr indent="0" marL="0">
-              <a:lnSpc>
-                <a:spcPts val="1400"/>
-              </a:lnSpc>
-              <a:buNone/>
-            </a:pPr>
-            <a:r>
-              <a:rPr lang="en-US" sz="1050" dirty="0">
-                <a:solidFill>
-                  <a:srgbClr val="9BAAC0"/>
-                </a:solidFill>
-                <a:latin typeface="Arial" pitchFamily="34" charset="0"/>
-                <a:ea typeface="Arial" pitchFamily="34" charset="-122"/>
-                <a:cs typeface="Arial" pitchFamily="34" charset="-120"/>
-              </a:rPr>
-              <a:t>Escreve o código, roda no seu ambiente e versiona no Git</a:t>
-            </a:r>
-            <a:endParaRPr lang="en-US" sz="1050" dirty="0"/>
-          </a:p>
-        </p:txBody>
-      </p:sp>
-      <p:sp>
-        <p:nvSpPr>
-          <p:cNvPr id="8" name="Shape 6"/>
-          <p:cNvSpPr/>
-          <p:nvPr/>
-        </p:nvSpPr>
-        <p:spPr>
-          <a:xfrm>
-            <a:off x="3240024" y="2514600"/>
-            <a:ext cx="2663952" cy="1600200"/>
-          </a:xfrm>
-          <a:prstGeom prst="roundRect">
-            <a:avLst>
-              <a:gd name="adj" fmla="val 2857"/>
-            </a:avLst>
-          </a:prstGeom>
-          <a:solidFill>
-            <a:srgbClr val="0D1522"/>
-          </a:solidFill>
-          <a:ln w="12700">
-            <a:solidFill>
-              <a:srgbClr val="1F3A5A"/>
-            </a:solidFill>
-            <a:prstDash val="solid"/>
-          </a:ln>
-        </p:spPr>
-        <p:txBody>
-          <a:bodyPr/>
-          <a:p/>
-        </p:txBody>
-      </p:sp>
-      <p:sp>
-        <p:nvSpPr>
-          <p:cNvPr id="9" name="Text 7"/>
-          <p:cNvSpPr/>
-          <p:nvPr/>
-        </p:nvSpPr>
-        <p:spPr>
-          <a:xfrm>
-            <a:off x="3441192" y="2715768"/>
-            <a:ext cx="2261616" cy="512064"/>
-          </a:xfrm>
-          <a:prstGeom prst="rect">
-            <a:avLst/>
-          </a:prstGeom>
-          <a:noFill/>
-          <a:ln/>
-        </p:spPr>
-        <p:txBody>
-          <a:bodyPr wrap="square" lIns="0" tIns="0" rIns="0" bIns="0" rtlCol="0" anchor="t"/>
-          <a:lstStyle/>
-          <a:p>
-            <a:pPr indent="0" marL="0">
-              <a:lnSpc>
-                <a:spcPts val="1800"/>
-              </a:lnSpc>
-              <a:buNone/>
-            </a:pPr>
-            <a:r>
-              <a:rPr lang="en-US" sz="1450" b="1" dirty="0">
-                <a:solidFill>
-                  <a:srgbClr val="FFFFFF"/>
-                </a:solidFill>
-                <a:latin typeface="Arial" pitchFamily="34" charset="0"/>
-                <a:ea typeface="Arial" pitchFamily="34" charset="-122"/>
-                <a:cs typeface="Arial" pitchFamily="34" charset="-120"/>
-              </a:rPr>
-              <a:t>Onde perde</a:t>
-            </a:r>
-            <a:endParaRPr lang="en-US" sz="1450" dirty="0"/>
-          </a:p>
-        </p:txBody>
-      </p:sp>
-      <p:sp>
-        <p:nvSpPr>
-          <p:cNvPr id="10" name="Text 8"/>
-          <p:cNvSpPr/>
-          <p:nvPr/>
-        </p:nvSpPr>
-        <p:spPr>
-          <a:xfrm>
-            <a:off x="3441192" y="3264408"/>
-            <a:ext cx="2261616" cy="685800"/>
-          </a:xfrm>
-          <a:prstGeom prst="rect">
-            <a:avLst/>
-          </a:prstGeom>
-          <a:noFill/>
-          <a:ln/>
-        </p:spPr>
-        <p:txBody>
-          <a:bodyPr wrap="square" lIns="0" tIns="0" rIns="0" bIns="0" rtlCol="0" anchor="ctr"/>
-          <a:lstStyle/>
-          <a:p>
-            <a:pPr indent="0" marL="0">
-              <a:lnSpc>
-                <a:spcPts val="1400"/>
-              </a:lnSpc>
-              <a:buNone/>
-            </a:pPr>
-            <a:r>
-              <a:rPr lang="en-US" sz="1050" dirty="0">
-                <a:solidFill>
-                  <a:srgbClr val="9BAAC0"/>
-                </a:solidFill>
-                <a:latin typeface="Arial" pitchFamily="34" charset="0"/>
-                <a:ea typeface="Arial" pitchFamily="34" charset="-122"/>
-                <a:cs typeface="Arial" pitchFamily="34" charset="-120"/>
-              </a:rPr>
-              <a:t>Precisa de contexto e de alguém que saiba revisar o resultado</a:t>
-            </a:r>
-            <a:endParaRPr lang="en-US" sz="1050" dirty="0"/>
-          </a:p>
-        </p:txBody>
-      </p:sp>
-      <p:sp>
-        <p:nvSpPr>
-          <p:cNvPr id="11" name="Shape 9"/>
-          <p:cNvSpPr/>
-          <p:nvPr/>
-        </p:nvSpPr>
-        <p:spPr>
-          <a:xfrm>
-            <a:off x="6068568" y="2514600"/>
-            <a:ext cx="2663952" cy="1600200"/>
-          </a:xfrm>
-          <a:prstGeom prst="roundRect">
-            <a:avLst>
-              <a:gd name="adj" fmla="val 2857"/>
-            </a:avLst>
-          </a:prstGeom>
-          <a:solidFill>
-            <a:srgbClr val="0D1522"/>
-          </a:solidFill>
-          <a:ln w="12700">
-            <a:solidFill>
-              <a:srgbClr val="1F3A5A"/>
-            </a:solidFill>
-            <a:prstDash val="solid"/>
-          </a:ln>
-        </p:spPr>
-        <p:txBody>
-          <a:bodyPr/>
-          <a:p/>
-        </p:txBody>
-      </p:sp>
-      <p:sp>
-        <p:nvSpPr>
-          <p:cNvPr id="12" name="Text 10"/>
-          <p:cNvSpPr/>
-          <p:nvPr/>
-        </p:nvSpPr>
-        <p:spPr>
-          <a:xfrm>
-            <a:off x="6269736" y="2715768"/>
-            <a:ext cx="2261616" cy="512064"/>
-          </a:xfrm>
-          <a:prstGeom prst="rect">
-            <a:avLst/>
-          </a:prstGeom>
-          <a:noFill/>
-          <a:ln/>
-        </p:spPr>
-        <p:txBody>
-          <a:bodyPr wrap="square" lIns="0" tIns="0" rIns="0" bIns="0" rtlCol="0" anchor="t"/>
-          <a:lstStyle/>
-          <a:p>
-            <a:pPr indent="0" marL="0">
-              <a:lnSpc>
-                <a:spcPts val="1800"/>
-              </a:lnSpc>
-              <a:buNone/>
-            </a:pPr>
-            <a:r>
-              <a:rPr lang="en-US" sz="1450" b="1" dirty="0">
-                <a:solidFill>
-                  <a:srgbClr val="FFFFFF"/>
-                </a:solidFill>
-                <a:latin typeface="Arial" pitchFamily="34" charset="0"/>
-                <a:ea typeface="Arial" pitchFamily="34" charset="-122"/>
-                <a:cs typeface="Arial" pitchFamily="34" charset="-120"/>
-              </a:rPr>
-              <a:t>Quando usar</a:t>
-            </a:r>
-            <a:endParaRPr lang="en-US" sz="1450" dirty="0"/>
-          </a:p>
-        </p:txBody>
-      </p:sp>
-      <p:sp>
-        <p:nvSpPr>
-          <p:cNvPr id="13" name="Text 11"/>
-          <p:cNvSpPr/>
-          <p:nvPr/>
-        </p:nvSpPr>
-        <p:spPr>
-          <a:xfrm>
-            <a:off x="6269736" y="3264408"/>
-            <a:ext cx="2261616" cy="685800"/>
-          </a:xfrm>
-          <a:prstGeom prst="rect">
-            <a:avLst/>
-          </a:prstGeom>
-          <a:noFill/>
-          <a:ln/>
-        </p:spPr>
-        <p:txBody>
-          <a:bodyPr wrap="square" lIns="0" tIns="0" rIns="0" bIns="0" rtlCol="0" anchor="ctr"/>
-          <a:lstStyle/>
-          <a:p>
-            <a:pPr indent="0" marL="0">
-              <a:lnSpc>
-                <a:spcPts val="1400"/>
-              </a:lnSpc>
-              <a:buNone/>
-            </a:pPr>
-            <a:r>
-              <a:rPr lang="en-US" sz="1050" dirty="0">
-                <a:solidFill>
-                  <a:srgbClr val="9BAAC0"/>
-                </a:solidFill>
-                <a:latin typeface="Arial" pitchFamily="34" charset="0"/>
-                <a:ea typeface="Arial" pitchFamily="34" charset="-122"/>
-                <a:cs typeface="Arial" pitchFamily="34" charset="-120"/>
-              </a:rPr>
-              <a:t>Quando o trabalho é construir, não consultar</a:t>
-            </a:r>
-            <a:endParaRPr lang="en-US" sz="1050" dirty="0"/>
-          </a:p>
-        </p:txBody>
-      </p:sp>
-      <p:sp>
-        <p:nvSpPr>
-          <p:cNvPr id="14" name="Text 12"/>
-          <p:cNvSpPr/>
-          <p:nvPr/>
-        </p:nvSpPr>
-        <p:spPr>
-          <a:xfrm>
-            <a:off x="411480" y="4251960"/>
-            <a:ext cx="8229600" cy="365760"/>
-          </a:xfrm>
-          <a:prstGeom prst="rect">
-            <a:avLst/>
-          </a:prstGeom>
-          <a:noFill/>
-          <a:ln/>
-        </p:spPr>
-        <p:txBody>
-          <a:bodyPr wrap="square" lIns="0" tIns="0" rIns="0" bIns="0" rtlCol="0" anchor="ctr"/>
-          <a:lstStyle/>
-          <a:p>
-            <a:pPr indent="0" marL="0">
-              <a:buNone/>
-            </a:pPr>
-            <a:r>
-              <a:rPr lang="en-US" sz="1400" dirty="0">
-                <a:solidFill>
-                  <a:srgbClr val="7CC8FF"/>
-                </a:solidFill>
-                <a:latin typeface="Arial" pitchFamily="34" charset="0"/>
-                <a:ea typeface="Arial" pitchFamily="34" charset="-122"/>
-                <a:cs typeface="Arial" pitchFamily="34" charset="-120"/>
-              </a:rPr>
-              <a:t>A diferença entre pedir uma análise e ter alguém trabalhando pra você.</a:t>
-            </a:r>
-            <a:endParaRPr lang="en-US" sz="1400" dirty="0"/>
-          </a:p>
-        </p:txBody>
-      </p:sp>
-      <p:sp>
-        <p:nvSpPr>
-          <p:cNvPr id="15" name="Text 13"/>
-          <p:cNvSpPr/>
-          <p:nvPr/>
-        </p:nvSpPr>
-        <p:spPr>
-          <a:xfrm>
-            <a:off x="411480" y="4681728"/>
-            <a:ext cx="2743200" cy="228600"/>
-          </a:xfrm>
-          <a:prstGeom prst="rect">
-            <a:avLst/>
-          </a:prstGeom>
-          <a:noFill/>
-          <a:ln/>
-        </p:spPr>
-        <p:txBody>
-          <a:bodyPr wrap="square" lIns="0" tIns="0" rIns="0" bIns="0" rtlCol="0" anchor="ctr"/>
-          <a:lstStyle/>
-          <a:p>
-            <a:pPr indent="0" marL="0">
-              <a:buNone/>
-            </a:pPr>
-            <a:r>
-              <a:rPr lang="en-US" sz="800" b="1" spc="200" kern="0" dirty="0">
-                <a:solidFill>
-                  <a:srgbClr val="566A85"/>
-                </a:solidFill>
-                <a:latin typeface="Arial" pitchFamily="34" charset="0"/>
-                <a:ea typeface="Arial" pitchFamily="34" charset="-122"/>
-                <a:cs typeface="Arial" pitchFamily="34" charset="-120"/>
-              </a:rPr>
-              <a:t>JORNADA DE DADOS</a:t>
-            </a:r>
-            <a:endParaRPr lang="en-US" sz="800" dirty="0"/>
-          </a:p>
-        </p:txBody>
-      </p:sp>
-    </p:spTree>
-  </p:cSld>
-  <p:clrMapOvr>
-    <a:masterClrMapping/>
-  </p:clrMapOvr>
-</p:sld>
-</file>
-
-<file path=ppt/slides/slide42.xml><?xml version="1.0" encoding="utf-8"?>
-<p:sld xmlns:a="http://schemas.openxmlformats.org/drawingml/2006/main" xmlns:r="http://schemas.openxmlformats.org/officeDocument/2006/relationships" xmlns:p="http://schemas.openxmlformats.org/presentationml/2006/main">
   <p:cSld name="Slide 36">
     <p:bg>
       <p:bgPr>
@@ -27595,7 +26939,7 @@
 </p:sld>
 </file>
 
-<file path=ppt/slides/slide43.xml><?xml version="1.0" encoding="utf-8"?>
+<file path=ppt/slides/slide42.xml><?xml version="1.0" encoding="utf-8"?>
 <p:sld xmlns:a="http://schemas.openxmlformats.org/drawingml/2006/main" xmlns:r="http://schemas.openxmlformats.org/officeDocument/2006/relationships" xmlns:p="http://schemas.openxmlformats.org/presentationml/2006/main">
   <p:cSld name="Slide 37">
     <p:bg>
@@ -27773,7 +27117,7 @@
 </p:sld>
 </file>
 
-<file path=ppt/slides/slide44.xml><?xml version="1.0" encoding="utf-8"?>
+<file path=ppt/slides/slide43.xml><?xml version="1.0" encoding="utf-8"?>
 <p:sld xmlns:a="http://schemas.openxmlformats.org/drawingml/2006/main" xmlns:r="http://schemas.openxmlformats.org/officeDocument/2006/relationships" xmlns:p="http://schemas.openxmlformats.org/presentationml/2006/main">
   <p:cSld name="Slide 38">
     <p:bg>
@@ -29170,7 +28514,7 @@
 </p:sld>
 </file>
 
-<file path=ppt/slides/slide45.xml><?xml version="1.0" encoding="utf-8"?>
+<file path=ppt/slides/slide44.xml><?xml version="1.0" encoding="utf-8"?>
 <p:sld xmlns:a="http://schemas.openxmlformats.org/drawingml/2006/main" xmlns:r="http://schemas.openxmlformats.org/officeDocument/2006/relationships" xmlns:p="http://schemas.openxmlformats.org/presentationml/2006/main">
   <p:cSld name="Slide 39">
     <p:bg>
@@ -31590,7 +30934,7 @@
 </p:sld>
 </file>
 
-<file path=ppt/slides/slide46.xml><?xml version="1.0" encoding="utf-8"?>
+<file path=ppt/slides/slide45.xml><?xml version="1.0" encoding="utf-8"?>
 <p:sld xmlns:a="http://schemas.openxmlformats.org/drawingml/2006/main" xmlns:r="http://schemas.openxmlformats.org/officeDocument/2006/relationships" xmlns:p="http://schemas.openxmlformats.org/presentationml/2006/main">
   <p:cSld name="Slide 40">
     <p:bg>
@@ -32352,7 +31696,7 @@
 </p:sld>
 </file>
 
-<file path=ppt/slides/slide47.xml><?xml version="1.0" encoding="utf-8"?>
+<file path=ppt/slides/slide46.xml><?xml version="1.0" encoding="utf-8"?>
 <p:sld xmlns:a="http://schemas.openxmlformats.org/drawingml/2006/main" xmlns:r="http://schemas.openxmlformats.org/officeDocument/2006/relationships" xmlns:p="http://schemas.openxmlformats.org/presentationml/2006/main">
   <p:cSld name="Slide 41">
     <p:bg>
@@ -33366,6 +32710,760 @@
 </p:sld>
 </file>
 
+<file path=ppt/slides/slide47.xml><?xml version="1.0" encoding="utf-8"?>
+<p:sld xmlns:a="http://schemas.openxmlformats.org/drawingml/2006/main" xmlns:p="http://schemas.openxmlformats.org/presentationml/2006/main" xmlns:r="http://schemas.openxmlformats.org/officeDocument/2006/relationships">
+  <p:cSld>
+    <p:spTree>
+      <p:nvGrpSpPr>
+        <p:cNvPr id="1" name=""/>
+        <p:cNvGrpSpPr/>
+        <p:nvPr/>
+      </p:nvGrpSpPr>
+      <p:grpSpPr/>
+      <p:sp>
+        <p:nvSpPr>
+          <p:cNvPr id="2" name="Text 0"/>
+          <p:cNvSpPr/>
+          <p:nvPr/>
+        </p:nvSpPr>
+        <p:spPr>
+          <a:xfrm>
+            <a:off x="411480" y="411480"/>
+            <a:ext cx="7315200" cy="256032"/>
+          </a:xfrm>
+          <a:prstGeom prst="rect">
+            <a:avLst/>
+          </a:prstGeom>
+          <a:noFill/>
+          <a:ln/>
+        </p:spPr>
+        <p:txBody>
+          <a:bodyPr wrap="square" lIns="0" tIns="0" rIns="0" bIns="0" rtlCol="0" anchor="ctr"/>
+          <a:lstStyle/>
+          <a:p>
+            <a:pPr indent="0" marL="0">
+              <a:buNone/>
+            </a:pPr>
+            <a:r>
+              <a:rPr lang="en-US" sz="1100" b="1" spc="160" kern="0" dirty="0">
+                <a:solidFill>
+                  <a:srgbClr val="3B9DF5"/>
+                </a:solidFill>
+                <a:latin typeface="Arial" pitchFamily="34" charset="0"/>
+                <a:ea typeface="Arial" pitchFamily="34" charset="-122"/>
+                <a:cs typeface="Arial" pitchFamily="34" charset="-120"/>
+              </a:rPr>
+              <a:t>O NÚMERO QUE A GENTE PROCURAVA</a:t>
+            </a:r>
+            <a:endParaRPr lang="en-US" sz="1100" dirty="0"/>
+          </a:p>
+        </p:txBody>
+      </p:sp>
+      <p:sp>
+        <p:nvSpPr>
+          <p:cNvPr id="3" name="Text 1"/>
+          <p:cNvSpPr/>
+          <p:nvPr/>
+        </p:nvSpPr>
+        <p:spPr>
+          <a:xfrm>
+            <a:off x="411480" y="822960"/>
+            <a:ext cx="8321040" cy="1005840"/>
+          </a:xfrm>
+          <a:prstGeom prst="rect">
+            <a:avLst/>
+          </a:prstGeom>
+          <a:noFill/>
+          <a:ln/>
+        </p:spPr>
+        <p:txBody>
+          <a:bodyPr wrap="square" lIns="0" tIns="0" rIns="0" bIns="0" rtlCol="0" anchor="ctr"/>
+          <a:lstStyle/>
+          <a:p>
+            <a:pPr indent="0" marL="0">
+              <a:lnSpc>
+                <a:spcPts val="4000"/>
+              </a:lnSpc>
+              <a:buNone/>
+            </a:pPr>
+            <a:r>
+              <a:rPr lang="en-US" sz="3200" b="1" dirty="0">
+                <a:solidFill>
+                  <a:srgbClr val="FFFFFF"/>
+                </a:solidFill>
+                <a:latin typeface="Arial" pitchFamily="34" charset="0"/>
+                <a:ea typeface="Arial" pitchFamily="34" charset="-122"/>
+                <a:cs typeface="Arial" pitchFamily="34" charset="-120"/>
+              </a:rPr>
+              <a:t>A resposta da noite</a:t>
+            </a:r>
+            <a:endParaRPr lang="en-US" sz="3200" dirty="0"/>
+          </a:p>
+        </p:txBody>
+      </p:sp>
+      <p:sp>
+        <p:nvSpPr>
+          <p:cNvPr id="4" name="Shape 2"/>
+          <p:cNvSpPr/>
+          <p:nvPr/>
+        </p:nvSpPr>
+        <p:spPr>
+          <a:xfrm>
+            <a:off x="411480" y="2194560"/>
+            <a:ext cx="1956816" cy="1737360"/>
+          </a:xfrm>
+          <a:prstGeom prst="roundRect">
+            <a:avLst>
+              <a:gd name="adj" fmla="val 2632"/>
+            </a:avLst>
+          </a:prstGeom>
+          <a:solidFill>
+            <a:srgbClr val="0D1522"/>
+          </a:solidFill>
+          <a:ln w="12700">
+            <a:solidFill>
+              <a:srgbClr val="1F3A5A"/>
+            </a:solidFill>
+            <a:prstDash val="solid"/>
+          </a:ln>
+        </p:spPr>
+        <p:txBody>
+          <a:bodyPr/>
+          <a:p/>
+        </p:txBody>
+      </p:sp>
+      <p:sp>
+        <p:nvSpPr>
+          <p:cNvPr id="5" name="Text 3"/>
+          <p:cNvSpPr/>
+          <p:nvPr/>
+        </p:nvSpPr>
+        <p:spPr>
+          <a:xfrm>
+            <a:off x="612648" y="2359152"/>
+            <a:ext cx="1554480" cy="274320"/>
+          </a:xfrm>
+          <a:prstGeom prst="rect">
+            <a:avLst/>
+          </a:prstGeom>
+          <a:noFill/>
+          <a:ln/>
+        </p:spPr>
+        <p:txBody>
+          <a:bodyPr wrap="square" lIns="0" tIns="0" rIns="0" bIns="0" rtlCol="0" anchor="ctr"/>
+          <a:lstStyle/>
+          <a:p>
+            <a:pPr indent="0" marL="0">
+              <a:buNone/>
+            </a:pPr>
+            <a:r>
+              <a:rPr lang="en-US" sz="1100" b="1" dirty="0">
+                <a:solidFill>
+                  <a:srgbClr val="3B9DF5"/>
+                </a:solidFill>
+                <a:latin typeface="Arial" pitchFamily="34" charset="0"/>
+                <a:ea typeface="Arial" pitchFamily="34" charset="-122"/>
+                <a:cs typeface="Arial" pitchFamily="34" charset="-120"/>
+              </a:rPr>
+              <a:t>R$</a:t>
+            </a:r>
+            <a:endParaRPr lang="en-US" sz="1100" dirty="0"/>
+          </a:p>
+        </p:txBody>
+      </p:sp>
+      <p:sp>
+        <p:nvSpPr>
+          <p:cNvPr id="6" name="Text 4"/>
+          <p:cNvSpPr/>
+          <p:nvPr/>
+        </p:nvSpPr>
+        <p:spPr>
+          <a:xfrm>
+            <a:off x="612648" y="2633472"/>
+            <a:ext cx="1554480" cy="512064"/>
+          </a:xfrm>
+          <a:prstGeom prst="rect">
+            <a:avLst/>
+          </a:prstGeom>
+          <a:noFill/>
+          <a:ln/>
+        </p:spPr>
+        <p:txBody>
+          <a:bodyPr wrap="square" lIns="0" tIns="0" rIns="0" bIns="0" rtlCol="0" anchor="t"/>
+          <a:lstStyle/>
+          <a:p>
+            <a:pPr indent="0" marL="0">
+              <a:lnSpc>
+                <a:spcPts val="1800"/>
+              </a:lnSpc>
+              <a:buNone/>
+            </a:pPr>
+            <a:r>
+              <a:rPr lang="en-US" sz="1450" b="1" dirty="0">
+                <a:solidFill>
+                  <a:srgbClr val="FFFFFF"/>
+                </a:solidFill>
+                <a:latin typeface="Arial" pitchFamily="34" charset="0"/>
+                <a:ea typeface="Arial" pitchFamily="34" charset="-122"/>
+                <a:cs typeface="Arial" pitchFamily="34" charset="-120"/>
+              </a:rPr>
+              <a:t>102,3 milhões</a:t>
+            </a:r>
+            <a:endParaRPr lang="en-US" sz="1450" dirty="0"/>
+          </a:p>
+        </p:txBody>
+      </p:sp>
+      <p:sp>
+        <p:nvSpPr>
+          <p:cNvPr id="7" name="Text 5"/>
+          <p:cNvSpPr/>
+          <p:nvPr/>
+        </p:nvSpPr>
+        <p:spPr>
+          <a:xfrm>
+            <a:off x="612648" y="3163824"/>
+            <a:ext cx="1554480" cy="621792"/>
+          </a:xfrm>
+          <a:prstGeom prst="rect">
+            <a:avLst/>
+          </a:prstGeom>
+          <a:noFill/>
+          <a:ln/>
+        </p:spPr>
+        <p:txBody>
+          <a:bodyPr wrap="square" lIns="0" tIns="0" rIns="0" bIns="0" rtlCol="0" anchor="ctr"/>
+          <a:lstStyle/>
+          <a:p>
+            <a:pPr indent="0" marL="0">
+              <a:lnSpc>
+                <a:spcPts val="1400"/>
+              </a:lnSpc>
+              <a:buNone/>
+            </a:pPr>
+            <a:r>
+              <a:rPr lang="en-US" sz="1050" dirty="0">
+                <a:solidFill>
+                  <a:srgbClr val="9BAAC0"/>
+                </a:solidFill>
+                <a:latin typeface="Arial" pitchFamily="34" charset="0"/>
+                <a:ea typeface="Arial" pitchFamily="34" charset="-122"/>
+                <a:cs typeface="Arial" pitchFamily="34" charset="-120"/>
+              </a:rPr>
+              <a:t>Receita dos 24 meses, 27.772 pedidos faturados</a:t>
+            </a:r>
+            <a:endParaRPr lang="en-US" sz="1050" dirty="0"/>
+          </a:p>
+        </p:txBody>
+      </p:sp>
+      <p:sp>
+        <p:nvSpPr>
+          <p:cNvPr id="8" name="Shape 6"/>
+          <p:cNvSpPr/>
+          <p:nvPr/>
+        </p:nvSpPr>
+        <p:spPr>
+          <a:xfrm>
+            <a:off x="2532888" y="2194560"/>
+            <a:ext cx="1956816" cy="1737360"/>
+          </a:xfrm>
+          <a:prstGeom prst="roundRect">
+            <a:avLst>
+              <a:gd name="adj" fmla="val 2632"/>
+            </a:avLst>
+          </a:prstGeom>
+          <a:solidFill>
+            <a:srgbClr val="0D1522"/>
+          </a:solidFill>
+          <a:ln w="12700">
+            <a:solidFill>
+              <a:srgbClr val="1F3A5A"/>
+            </a:solidFill>
+            <a:prstDash val="solid"/>
+          </a:ln>
+        </p:spPr>
+        <p:txBody>
+          <a:bodyPr/>
+          <a:p/>
+        </p:txBody>
+      </p:sp>
+      <p:sp>
+        <p:nvSpPr>
+          <p:cNvPr id="9" name="Text 7"/>
+          <p:cNvSpPr/>
+          <p:nvPr/>
+        </p:nvSpPr>
+        <p:spPr>
+          <a:xfrm>
+            <a:off x="2734056" y="2359152"/>
+            <a:ext cx="1554480" cy="274320"/>
+          </a:xfrm>
+          <a:prstGeom prst="rect">
+            <a:avLst/>
+          </a:prstGeom>
+          <a:noFill/>
+          <a:ln/>
+        </p:spPr>
+        <p:txBody>
+          <a:bodyPr wrap="square" lIns="0" tIns="0" rIns="0" bIns="0" rtlCol="0" anchor="ctr"/>
+          <a:lstStyle/>
+          <a:p>
+            <a:pPr indent="0" marL="0">
+              <a:buNone/>
+            </a:pPr>
+            <a:r>
+              <a:rPr lang="en-US" sz="1100" b="1" dirty="0">
+                <a:solidFill>
+                  <a:srgbClr val="3B9DF5"/>
+                </a:solidFill>
+                <a:latin typeface="Arial" pitchFamily="34" charset="0"/>
+                <a:ea typeface="Arial" pitchFamily="34" charset="-122"/>
+                <a:cs typeface="Arial" pitchFamily="34" charset="-120"/>
+              </a:rPr>
+              <a:t>R$</a:t>
+            </a:r>
+            <a:endParaRPr lang="en-US" sz="1100" dirty="0"/>
+          </a:p>
+        </p:txBody>
+      </p:sp>
+      <p:sp>
+        <p:nvSpPr>
+          <p:cNvPr id="10" name="Text 8"/>
+          <p:cNvSpPr/>
+          <p:nvPr/>
+        </p:nvSpPr>
+        <p:spPr>
+          <a:xfrm>
+            <a:off x="2734056" y="2633472"/>
+            <a:ext cx="1554480" cy="512064"/>
+          </a:xfrm>
+          <a:prstGeom prst="rect">
+            <a:avLst/>
+          </a:prstGeom>
+          <a:noFill/>
+          <a:ln/>
+        </p:spPr>
+        <p:txBody>
+          <a:bodyPr wrap="square" lIns="0" tIns="0" rIns="0" bIns="0" rtlCol="0" anchor="t"/>
+          <a:lstStyle/>
+          <a:p>
+            <a:pPr indent="0" marL="0">
+              <a:lnSpc>
+                <a:spcPts val="1800"/>
+              </a:lnSpc>
+              <a:buNone/>
+            </a:pPr>
+            <a:r>
+              <a:rPr lang="en-US" sz="1450" b="1" dirty="0">
+                <a:solidFill>
+                  <a:srgbClr val="FFFFFF"/>
+                </a:solidFill>
+                <a:latin typeface="Arial" pitchFamily="34" charset="0"/>
+                <a:ea typeface="Arial" pitchFamily="34" charset="-122"/>
+                <a:cs typeface="Arial" pitchFamily="34" charset="-120"/>
+              </a:rPr>
+              <a:t>3.683,70</a:t>
+            </a:r>
+            <a:endParaRPr lang="en-US" sz="1450" dirty="0"/>
+          </a:p>
+        </p:txBody>
+      </p:sp>
+      <p:sp>
+        <p:nvSpPr>
+          <p:cNvPr id="11" name="Text 9"/>
+          <p:cNvSpPr/>
+          <p:nvPr/>
+        </p:nvSpPr>
+        <p:spPr>
+          <a:xfrm>
+            <a:off x="2734056" y="3163824"/>
+            <a:ext cx="1554480" cy="621792"/>
+          </a:xfrm>
+          <a:prstGeom prst="rect">
+            <a:avLst/>
+          </a:prstGeom>
+          <a:noFill/>
+          <a:ln/>
+        </p:spPr>
+        <p:txBody>
+          <a:bodyPr wrap="square" lIns="0" tIns="0" rIns="0" bIns="0" rtlCol="0" anchor="ctr"/>
+          <a:lstStyle/>
+          <a:p>
+            <a:pPr indent="0" marL="0">
+              <a:lnSpc>
+                <a:spcPts val="1400"/>
+              </a:lnSpc>
+              <a:buNone/>
+            </a:pPr>
+            <a:r>
+              <a:rPr lang="en-US" sz="1050" dirty="0">
+                <a:solidFill>
+                  <a:srgbClr val="9BAAC0"/>
+                </a:solidFill>
+                <a:latin typeface="Arial" pitchFamily="34" charset="0"/>
+                <a:ea typeface="Arial" pitchFamily="34" charset="-122"/>
+                <a:cs typeface="Arial" pitchFamily="34" charset="-120"/>
+              </a:rPr>
+              <a:t>Ticket médio por pedido</a:t>
+            </a:r>
+            <a:endParaRPr lang="en-US" sz="1050" dirty="0"/>
+          </a:p>
+        </p:txBody>
+      </p:sp>
+      <p:sp>
+        <p:nvSpPr>
+          <p:cNvPr id="12" name="Shape 10"/>
+          <p:cNvSpPr/>
+          <p:nvPr/>
+        </p:nvSpPr>
+        <p:spPr>
+          <a:xfrm>
+            <a:off x="4654296" y="2194560"/>
+            <a:ext cx="1956816" cy="1737360"/>
+          </a:xfrm>
+          <a:prstGeom prst="roundRect">
+            <a:avLst>
+              <a:gd name="adj" fmla="val 2632"/>
+            </a:avLst>
+          </a:prstGeom>
+          <a:solidFill>
+            <a:srgbClr val="0D1522"/>
+          </a:solidFill>
+          <a:ln w="12700">
+            <a:solidFill>
+              <a:srgbClr val="1F3A5A"/>
+            </a:solidFill>
+            <a:prstDash val="solid"/>
+          </a:ln>
+        </p:spPr>
+        <p:txBody>
+          <a:bodyPr/>
+          <a:p/>
+        </p:txBody>
+      </p:sp>
+      <p:sp>
+        <p:nvSpPr>
+          <p:cNvPr id="13" name="Text 11"/>
+          <p:cNvSpPr/>
+          <p:nvPr/>
+        </p:nvSpPr>
+        <p:spPr>
+          <a:xfrm>
+            <a:off x="4855464" y="2359152"/>
+            <a:ext cx="1554480" cy="274320"/>
+          </a:xfrm>
+          <a:prstGeom prst="rect">
+            <a:avLst/>
+          </a:prstGeom>
+          <a:noFill/>
+          <a:ln/>
+        </p:spPr>
+        <p:txBody>
+          <a:bodyPr wrap="square" lIns="0" tIns="0" rIns="0" bIns="0" rtlCol="0" anchor="ctr"/>
+          <a:lstStyle/>
+          <a:p>
+            <a:pPr indent="0" marL="0">
+              <a:buNone/>
+            </a:pPr>
+            <a:r>
+              <a:rPr lang="en-US" sz="1100" b="1" dirty="0">
+                <a:solidFill>
+                  <a:srgbClr val="3B9DF5"/>
+                </a:solidFill>
+                <a:latin typeface="Arial" pitchFamily="34" charset="0"/>
+                <a:ea typeface="Arial" pitchFamily="34" charset="-122"/>
+                <a:cs typeface="Arial" pitchFamily="34" charset="-120"/>
+              </a:rPr>
+              <a:t>↑</a:t>
+            </a:r>
+            <a:endParaRPr lang="en-US" sz="1100" dirty="0"/>
+          </a:p>
+        </p:txBody>
+      </p:sp>
+      <p:sp>
+        <p:nvSpPr>
+          <p:cNvPr id="14" name="Text 12"/>
+          <p:cNvSpPr/>
+          <p:nvPr/>
+        </p:nvSpPr>
+        <p:spPr>
+          <a:xfrm>
+            <a:off x="4855464" y="2633472"/>
+            <a:ext cx="1554480" cy="512064"/>
+          </a:xfrm>
+          <a:prstGeom prst="rect">
+            <a:avLst/>
+          </a:prstGeom>
+          <a:noFill/>
+          <a:ln/>
+        </p:spPr>
+        <p:txBody>
+          <a:bodyPr wrap="square" lIns="0" tIns="0" rIns="0" bIns="0" rtlCol="0" anchor="t"/>
+          <a:lstStyle/>
+          <a:p>
+            <a:pPr indent="0" marL="0">
+              <a:lnSpc>
+                <a:spcPts val="1800"/>
+              </a:lnSpc>
+              <a:buNone/>
+            </a:pPr>
+            <a:r>
+              <a:rPr lang="en-US" sz="1450" b="1" dirty="0">
+                <a:solidFill>
+                  <a:srgbClr val="FFFFFF"/>
+                </a:solidFill>
+                <a:latin typeface="Arial" pitchFamily="34" charset="0"/>
+                <a:ea typeface="Arial" pitchFamily="34" charset="-122"/>
+                <a:cs typeface="Arial" pitchFamily="34" charset="-120"/>
+              </a:rPr>
+              <a:t>Outubro/2025</a:t>
+            </a:r>
+            <a:endParaRPr lang="en-US" sz="1450" dirty="0"/>
+          </a:p>
+        </p:txBody>
+      </p:sp>
+      <p:sp>
+        <p:nvSpPr>
+          <p:cNvPr id="15" name="Text 13"/>
+          <p:cNvSpPr/>
+          <p:nvPr/>
+        </p:nvSpPr>
+        <p:spPr>
+          <a:xfrm>
+            <a:off x="4855464" y="3163824"/>
+            <a:ext cx="1554480" cy="621792"/>
+          </a:xfrm>
+          <a:prstGeom prst="rect">
+            <a:avLst/>
+          </a:prstGeom>
+          <a:noFill/>
+          <a:ln/>
+        </p:spPr>
+        <p:txBody>
+          <a:bodyPr wrap="square" lIns="0" tIns="0" rIns="0" bIns="0" rtlCol="0" anchor="ctr"/>
+          <a:lstStyle/>
+          <a:p>
+            <a:pPr indent="0" marL="0">
+              <a:lnSpc>
+                <a:spcPts val="1400"/>
+              </a:lnSpc>
+              <a:buNone/>
+            </a:pPr>
+            <a:r>
+              <a:rPr lang="en-US" sz="1050" dirty="0">
+                <a:solidFill>
+                  <a:srgbClr val="9BAAC0"/>
+                </a:solidFill>
+                <a:latin typeface="Arial" pitchFamily="34" charset="0"/>
+                <a:ea typeface="Arial" pitchFamily="34" charset="-122"/>
+                <a:cs typeface="Arial" pitchFamily="34" charset="-120"/>
+              </a:rPr>
+              <a:t>O pico: R$ 7,0 milhões em um mês</a:t>
+            </a:r>
+            <a:endParaRPr lang="en-US" sz="1050" dirty="0"/>
+          </a:p>
+        </p:txBody>
+      </p:sp>
+      <p:sp>
+        <p:nvSpPr>
+          <p:cNvPr id="16" name="Shape 14"/>
+          <p:cNvSpPr/>
+          <p:nvPr/>
+        </p:nvSpPr>
+        <p:spPr>
+          <a:xfrm>
+            <a:off x="6775704" y="2194560"/>
+            <a:ext cx="1956816" cy="1737360"/>
+          </a:xfrm>
+          <a:prstGeom prst="roundRect">
+            <a:avLst>
+              <a:gd name="adj" fmla="val 2632"/>
+            </a:avLst>
+          </a:prstGeom>
+          <a:solidFill>
+            <a:srgbClr val="0D1522"/>
+          </a:solidFill>
+          <a:ln w="12700">
+            <a:solidFill>
+              <a:srgbClr val="1F3A5A"/>
+            </a:solidFill>
+            <a:prstDash val="solid"/>
+          </a:ln>
+        </p:spPr>
+        <p:txBody>
+          <a:bodyPr/>
+          <a:p/>
+        </p:txBody>
+      </p:sp>
+      <p:sp>
+        <p:nvSpPr>
+          <p:cNvPr id="17" name="Text 15"/>
+          <p:cNvSpPr/>
+          <p:nvPr/>
+        </p:nvSpPr>
+        <p:spPr>
+          <a:xfrm>
+            <a:off x="6976872" y="2359152"/>
+            <a:ext cx="1554480" cy="274320"/>
+          </a:xfrm>
+          <a:prstGeom prst="rect">
+            <a:avLst/>
+          </a:prstGeom>
+          <a:noFill/>
+          <a:ln/>
+        </p:spPr>
+        <p:txBody>
+          <a:bodyPr wrap="square" lIns="0" tIns="0" rIns="0" bIns="0" rtlCol="0" anchor="ctr"/>
+          <a:lstStyle/>
+          <a:p>
+            <a:pPr indent="0" marL="0">
+              <a:buNone/>
+            </a:pPr>
+            <a:r>
+              <a:rPr lang="en-US" sz="1100" b="1" dirty="0">
+                <a:solidFill>
+                  <a:srgbClr val="3B9DF5"/>
+                </a:solidFill>
+                <a:latin typeface="Arial" pitchFamily="34" charset="0"/>
+                <a:ea typeface="Arial" pitchFamily="34" charset="-122"/>
+                <a:cs typeface="Arial" pitchFamily="34" charset="-120"/>
+              </a:rPr>
+              <a:t>↓</a:t>
+            </a:r>
+            <a:endParaRPr lang="en-US" sz="1100" dirty="0"/>
+          </a:p>
+        </p:txBody>
+      </p:sp>
+      <p:sp>
+        <p:nvSpPr>
+          <p:cNvPr id="18" name="Text 16"/>
+          <p:cNvSpPr/>
+          <p:nvPr/>
+        </p:nvSpPr>
+        <p:spPr>
+          <a:xfrm>
+            <a:off x="6976872" y="2633472"/>
+            <a:ext cx="1554480" cy="512064"/>
+          </a:xfrm>
+          <a:prstGeom prst="rect">
+            <a:avLst/>
+          </a:prstGeom>
+          <a:noFill/>
+          <a:ln/>
+        </p:spPr>
+        <p:txBody>
+          <a:bodyPr wrap="square" lIns="0" tIns="0" rIns="0" bIns="0" rtlCol="0" anchor="t"/>
+          <a:lstStyle/>
+          <a:p>
+            <a:pPr indent="0" marL="0">
+              <a:lnSpc>
+                <a:spcPts val="1800"/>
+              </a:lnSpc>
+              <a:buNone/>
+            </a:pPr>
+            <a:r>
+              <a:rPr lang="en-US" sz="1450" b="1" dirty="0">
+                <a:solidFill>
+                  <a:srgbClr val="FFFFFF"/>
+                </a:solidFill>
+                <a:latin typeface="Arial" pitchFamily="34" charset="0"/>
+                <a:ea typeface="Arial" pitchFamily="34" charset="-122"/>
+                <a:cs typeface="Arial" pitchFamily="34" charset="-120"/>
+              </a:rPr>
+              <a:t>Janeiro/2026</a:t>
+            </a:r>
+            <a:endParaRPr lang="en-US" sz="1450" dirty="0"/>
+          </a:p>
+        </p:txBody>
+      </p:sp>
+      <p:sp>
+        <p:nvSpPr>
+          <p:cNvPr id="19" name="Text 17"/>
+          <p:cNvSpPr/>
+          <p:nvPr/>
+        </p:nvSpPr>
+        <p:spPr>
+          <a:xfrm>
+            <a:off x="6976872" y="3163824"/>
+            <a:ext cx="1554480" cy="621792"/>
+          </a:xfrm>
+          <a:prstGeom prst="rect">
+            <a:avLst/>
+          </a:prstGeom>
+          <a:noFill/>
+          <a:ln/>
+        </p:spPr>
+        <p:txBody>
+          <a:bodyPr wrap="square" lIns="0" tIns="0" rIns="0" bIns="0" rtlCol="0" anchor="ctr"/>
+          <a:lstStyle/>
+          <a:p>
+            <a:pPr indent="0" marL="0">
+              <a:lnSpc>
+                <a:spcPts val="1400"/>
+              </a:lnSpc>
+              <a:buNone/>
+            </a:pPr>
+            <a:r>
+              <a:rPr lang="en-US" sz="1050" dirty="0">
+                <a:solidFill>
+                  <a:srgbClr val="9BAAC0"/>
+                </a:solidFill>
+                <a:latin typeface="Arial" pitchFamily="34" charset="0"/>
+                <a:ea typeface="Arial" pitchFamily="34" charset="-122"/>
+                <a:cs typeface="Arial" pitchFamily="34" charset="-120"/>
+              </a:rPr>
+              <a:t>O vale: R$ 2,5 milhões — o varejo já abasteceu</a:t>
+            </a:r>
+            <a:endParaRPr lang="en-US" sz="1050" dirty="0"/>
+          </a:p>
+        </p:txBody>
+      </p:sp>
+      <p:sp>
+        <p:nvSpPr>
+          <p:cNvPr id="20" name="Text 18"/>
+          <p:cNvSpPr/>
+          <p:nvPr/>
+        </p:nvSpPr>
+        <p:spPr>
+          <a:xfrm>
+            <a:off x="411480" y="4681728"/>
+            <a:ext cx="2743200" cy="228600"/>
+          </a:xfrm>
+          <a:prstGeom prst="rect">
+            <a:avLst/>
+          </a:prstGeom>
+          <a:noFill/>
+          <a:ln/>
+        </p:spPr>
+        <p:txBody>
+          <a:bodyPr wrap="square" lIns="0" tIns="0" rIns="0" bIns="0" rtlCol="0" anchor="ctr"/>
+          <a:lstStyle/>
+          <a:p>
+            <a:pPr indent="0" marL="0">
+              <a:buNone/>
+            </a:pPr>
+            <a:r>
+              <a:rPr lang="en-US" sz="800" b="1" spc="200" kern="0" dirty="0">
+                <a:solidFill>
+                  <a:srgbClr val="566A85"/>
+                </a:solidFill>
+                <a:latin typeface="Arial" pitchFamily="34" charset="0"/>
+                <a:ea typeface="Arial" pitchFamily="34" charset="-122"/>
+                <a:cs typeface="Arial" pitchFamily="34" charset="-120"/>
+              </a:rPr>
+              <a:t>JORNADA DE DADOS</a:t>
+            </a:r>
+            <a:endParaRPr lang="en-US" sz="800" dirty="0"/>
+          </a:p>
+        </p:txBody>
+      </p:sp>
+    </p:spTree>
+  </p:cSld>
+  <p:clrMapOvr>
+    <a:masterClrMapping/>
+  </p:clrMapOvr>
+</p:sld>
+</file>
+
 <file path=ppt/slides/slide48.xml><?xml version="1.0" encoding="utf-8"?>
 <p:sld xmlns:a="http://schemas.openxmlformats.org/drawingml/2006/main" xmlns:p="http://schemas.openxmlformats.org/presentationml/2006/main" xmlns:r="http://schemas.openxmlformats.org/officeDocument/2006/relationships">
   <p:cSld>
@@ -33409,7 +33507,7 @@
                 <a:ea typeface="Arial" pitchFamily="34" charset="-122"/>
                 <a:cs typeface="Arial" pitchFamily="34" charset="-120"/>
               </a:rPr>
-              <a:t>O NÚMERO QUE A GENTE PROCURAVA</a:t>
+              <a:t>O MOMENTO DA VERDADE</a:t>
             </a:r>
             <a:endParaRPr lang="en-US" sz="1100" dirty="0"/>
           </a:p>
@@ -33443,7 +33541,7 @@
               <a:buNone/>
             </a:pPr>
             <a:r>
-              <a:rPr lang="en-US" sz="3200" b="1" dirty="0">
+              <a:rPr lang="en-US" sz="3100" b="1" dirty="0">
                 <a:solidFill>
                   <a:srgbClr val="FFFFFF"/>
                 </a:solidFill>
@@ -33451,9 +33549,9 @@
                 <a:ea typeface="Arial" pitchFamily="34" charset="-122"/>
                 <a:cs typeface="Arial" pitchFamily="34" charset="-120"/>
               </a:rPr>
-              <a:t>A resposta da noite</a:t>
-            </a:r>
-            <a:endParaRPr lang="en-US" sz="3200" dirty="0"/>
+              <a:t>A query que não roda</a:t>
+            </a:r>
+            <a:endParaRPr lang="en-US" sz="3100" dirty="0"/>
           </a:p>
         </p:txBody>
       </p:sp>
@@ -33465,20 +33563,18 @@
         </p:nvSpPr>
         <p:spPr>
           <a:xfrm>
-            <a:off x="411480" y="2194560"/>
-            <a:ext cx="1956816" cy="1737360"/>
-          </a:xfrm>
-          <a:prstGeom prst="roundRect">
-            <a:avLst>
-              <a:gd name="adj" fmla="val 2632"/>
-            </a:avLst>
+            <a:off x="457200" y="2157984"/>
+            <a:ext cx="91440" cy="91440"/>
+          </a:xfrm>
+          <a:prstGeom prst="ellipse">
+            <a:avLst/>
           </a:prstGeom>
           <a:solidFill>
-            <a:srgbClr val="0D1522"/>
+            <a:srgbClr val="3B9DF5"/>
           </a:solidFill>
           <a:ln w="12700">
             <a:solidFill>
-              <a:srgbClr val="1F3A5A"/>
+              <a:srgbClr val="333333"/>
             </a:solidFill>
             <a:prstDash val="solid"/>
           </a:ln>
@@ -33496,143 +33592,57 @@
         </p:nvSpPr>
         <p:spPr>
           <a:xfrm>
-            <a:off x="612648" y="2359152"/>
-            <a:ext cx="1554480" cy="274320"/>
-          </a:xfrm>
-          <a:prstGeom prst="rect">
-            <a:avLst/>
-          </a:prstGeom>
-          <a:noFill/>
-          <a:ln/>
-        </p:spPr>
-        <p:txBody>
-          <a:bodyPr wrap="square" lIns="0" tIns="0" rIns="0" bIns="0" rtlCol="0" anchor="ctr"/>
-          <a:lstStyle/>
-          <a:p>
-            <a:pPr indent="0" marL="0">
-              <a:buNone/>
-            </a:pPr>
-            <a:r>
-              <a:rPr lang="en-US" sz="1100" b="1" dirty="0">
-                <a:solidFill>
-                  <a:srgbClr val="3B9DF5"/>
-                </a:solidFill>
-                <a:latin typeface="Arial" pitchFamily="34" charset="0"/>
-                <a:ea typeface="Arial" pitchFamily="34" charset="-122"/>
-                <a:cs typeface="Arial" pitchFamily="34" charset="-120"/>
-              </a:rPr>
-              <a:t>R$</a:t>
-            </a:r>
-            <a:endParaRPr lang="en-US" sz="1100" dirty="0"/>
-          </a:p>
-        </p:txBody>
-      </p:sp>
-      <p:sp>
-        <p:nvSpPr>
-          <p:cNvPr id="6" name="Text 4"/>
-          <p:cNvSpPr/>
-          <p:nvPr/>
-        </p:nvSpPr>
-        <p:spPr>
-          <a:xfrm>
-            <a:off x="612648" y="2633472"/>
-            <a:ext cx="1554480" cy="512064"/>
-          </a:xfrm>
-          <a:prstGeom prst="rect">
-            <a:avLst/>
-          </a:prstGeom>
-          <a:noFill/>
-          <a:ln/>
-        </p:spPr>
-        <p:txBody>
-          <a:bodyPr wrap="square" lIns="0" tIns="0" rIns="0" bIns="0" rtlCol="0" anchor="t"/>
-          <a:lstStyle/>
-          <a:p>
-            <a:pPr indent="0" marL="0">
-              <a:lnSpc>
-                <a:spcPts val="1800"/>
-              </a:lnSpc>
-              <a:buNone/>
-            </a:pPr>
-            <a:r>
-              <a:rPr lang="en-US" sz="1450" b="1" dirty="0">
-                <a:solidFill>
-                  <a:srgbClr val="FFFFFF"/>
-                </a:solidFill>
-                <a:latin typeface="Arial" pitchFamily="34" charset="0"/>
-                <a:ea typeface="Arial" pitchFamily="34" charset="-122"/>
-                <a:cs typeface="Arial" pitchFamily="34" charset="-120"/>
-              </a:rPr>
-              <a:t>102,3 milhões</a:t>
-            </a:r>
-            <a:endParaRPr lang="en-US" sz="1450" dirty="0"/>
-          </a:p>
-        </p:txBody>
-      </p:sp>
-      <p:sp>
-        <p:nvSpPr>
-          <p:cNvPr id="7" name="Text 5"/>
-          <p:cNvSpPr/>
-          <p:nvPr/>
-        </p:nvSpPr>
-        <p:spPr>
-          <a:xfrm>
-            <a:off x="612648" y="3163824"/>
-            <a:ext cx="1554480" cy="621792"/>
-          </a:xfrm>
-          <a:prstGeom prst="rect">
-            <a:avLst/>
-          </a:prstGeom>
-          <a:noFill/>
-          <a:ln/>
-        </p:spPr>
-        <p:txBody>
-          <a:bodyPr wrap="square" lIns="0" tIns="0" rIns="0" bIns="0" rtlCol="0" anchor="ctr"/>
-          <a:lstStyle/>
-          <a:p>
-            <a:pPr indent="0" marL="0">
-              <a:lnSpc>
-                <a:spcPts val="1400"/>
-              </a:lnSpc>
-              <a:buNone/>
-            </a:pPr>
-            <a:r>
-              <a:rPr lang="en-US" sz="1050" dirty="0">
-                <a:solidFill>
-                  <a:srgbClr val="9BAAC0"/>
-                </a:solidFill>
-                <a:latin typeface="Arial" pitchFamily="34" charset="0"/>
-                <a:ea typeface="Arial" pitchFamily="34" charset="-122"/>
-                <a:cs typeface="Arial" pitchFamily="34" charset="-120"/>
-              </a:rPr>
-              <a:t>Receita dos 24 meses, 27.772 pedidos faturados</a:t>
-            </a:r>
-            <a:endParaRPr lang="en-US" sz="1050" dirty="0"/>
-          </a:p>
-        </p:txBody>
-      </p:sp>
-      <p:sp>
-        <p:nvSpPr>
-          <p:cNvPr id="8" name="Shape 6"/>
-          <p:cNvSpPr/>
-          <p:nvPr/>
-        </p:nvSpPr>
-        <p:spPr>
-          <a:xfrm>
-            <a:off x="2532888" y="2194560"/>
-            <a:ext cx="1956816" cy="1737360"/>
-          </a:xfrm>
-          <a:prstGeom prst="roundRect">
-            <a:avLst>
-              <a:gd name="adj" fmla="val 2632"/>
-            </a:avLst>
+            <a:off x="713232" y="2057400"/>
+            <a:ext cx="7955280" cy="347472"/>
+          </a:xfrm>
+          <a:prstGeom prst="rect">
+            <a:avLst/>
+          </a:prstGeom>
+          <a:noFill/>
+          <a:ln/>
+        </p:spPr>
+        <p:txBody>
+          <a:bodyPr wrap="square" lIns="0" tIns="0" rIns="0" bIns="0" rtlCol="0" anchor="ctr"/>
+          <a:lstStyle/>
+          <a:p>
+            <a:pPr indent="0" marL="0">
+              <a:buNone/>
+            </a:pPr>
+            <a:r>
+              <a:rPr lang="en-US" sz="1500" dirty="0">
+                <a:solidFill>
+                  <a:srgbClr val="D9CFD1"/>
+                </a:solidFill>
+                <a:latin typeface="Arial" pitchFamily="34" charset="0"/>
+                <a:ea typeface="Arial" pitchFamily="34" charset="-122"/>
+                <a:cs typeface="Arial" pitchFamily="34" charset="-120"/>
+              </a:rPr>
+              <a:t>3.443 pedidos (12%) têm a data escrita como 15/10/2025 em vez de 2025-10-15</a:t>
+            </a:r>
+            <a:endParaRPr lang="en-US" sz="1500" dirty="0"/>
+          </a:p>
+        </p:txBody>
+      </p:sp>
+      <p:sp>
+        <p:nvSpPr>
+          <p:cNvPr id="6" name="Shape 4"/>
+          <p:cNvSpPr/>
+          <p:nvPr/>
+        </p:nvSpPr>
+        <p:spPr>
+          <a:xfrm>
+            <a:off x="457200" y="2578608"/>
+            <a:ext cx="91440" cy="91440"/>
+          </a:xfrm>
+          <a:prstGeom prst="ellipse">
+            <a:avLst/>
           </a:prstGeom>
           <a:solidFill>
-            <a:srgbClr val="0D1522"/>
+            <a:srgbClr val="3B9DF5"/>
           </a:solidFill>
           <a:ln w="12700">
             <a:solidFill>
-              <a:srgbClr val="1F3A5A"/>
+              <a:srgbClr val="333333"/>
             </a:solidFill>
             <a:prstDash val="solid"/>
           </a:ln>
@@ -33644,149 +33654,63 @@
       </p:sp>
       <p:sp>
         <p:nvSpPr>
-          <p:cNvPr id="9" name="Text 7"/>
-          <p:cNvSpPr/>
-          <p:nvPr/>
-        </p:nvSpPr>
-        <p:spPr>
-          <a:xfrm>
-            <a:off x="2734056" y="2359152"/>
-            <a:ext cx="1554480" cy="274320"/>
-          </a:xfrm>
-          <a:prstGeom prst="rect">
-            <a:avLst/>
-          </a:prstGeom>
-          <a:noFill/>
-          <a:ln/>
-        </p:spPr>
-        <p:txBody>
-          <a:bodyPr wrap="square" lIns="0" tIns="0" rIns="0" bIns="0" rtlCol="0" anchor="ctr"/>
-          <a:lstStyle/>
-          <a:p>
-            <a:pPr indent="0" marL="0">
-              <a:buNone/>
-            </a:pPr>
-            <a:r>
-              <a:rPr lang="en-US" sz="1100" b="1" dirty="0">
-                <a:solidFill>
-                  <a:srgbClr val="3B9DF5"/>
-                </a:solidFill>
-                <a:latin typeface="Arial" pitchFamily="34" charset="0"/>
-                <a:ea typeface="Arial" pitchFamily="34" charset="-122"/>
-                <a:cs typeface="Arial" pitchFamily="34" charset="-120"/>
-              </a:rPr>
-              <a:t>R$</a:t>
-            </a:r>
-            <a:endParaRPr lang="en-US" sz="1100" dirty="0"/>
-          </a:p>
-        </p:txBody>
-      </p:sp>
-      <p:sp>
-        <p:nvSpPr>
-          <p:cNvPr id="10" name="Text 8"/>
-          <p:cNvSpPr/>
-          <p:nvPr/>
-        </p:nvSpPr>
-        <p:spPr>
-          <a:xfrm>
-            <a:off x="2734056" y="2633472"/>
-            <a:ext cx="1554480" cy="512064"/>
-          </a:xfrm>
-          <a:prstGeom prst="rect">
-            <a:avLst/>
-          </a:prstGeom>
-          <a:noFill/>
-          <a:ln/>
-        </p:spPr>
-        <p:txBody>
-          <a:bodyPr wrap="square" lIns="0" tIns="0" rIns="0" bIns="0" rtlCol="0" anchor="t"/>
-          <a:lstStyle/>
-          <a:p>
-            <a:pPr indent="0" marL="0">
-              <a:lnSpc>
-                <a:spcPts val="1800"/>
-              </a:lnSpc>
-              <a:buNone/>
-            </a:pPr>
-            <a:r>
-              <a:rPr lang="en-US" sz="1450" b="1" dirty="0">
-                <a:solidFill>
-                  <a:srgbClr val="FFFFFF"/>
-                </a:solidFill>
-                <a:latin typeface="Arial" pitchFamily="34" charset="0"/>
-                <a:ea typeface="Arial" pitchFamily="34" charset="-122"/>
-                <a:cs typeface="Arial" pitchFamily="34" charset="-120"/>
-              </a:rPr>
-              <a:t>3.683,70</a:t>
-            </a:r>
-            <a:endParaRPr lang="en-US" sz="1450" dirty="0"/>
-          </a:p>
-        </p:txBody>
-      </p:sp>
-      <p:sp>
-        <p:nvSpPr>
-          <p:cNvPr id="11" name="Text 9"/>
-          <p:cNvSpPr/>
-          <p:nvPr/>
-        </p:nvSpPr>
-        <p:spPr>
-          <a:xfrm>
-            <a:off x="2734056" y="3163824"/>
-            <a:ext cx="1554480" cy="621792"/>
-          </a:xfrm>
-          <a:prstGeom prst="rect">
-            <a:avLst/>
-          </a:prstGeom>
-          <a:noFill/>
-          <a:ln/>
-        </p:spPr>
-        <p:txBody>
-          <a:bodyPr wrap="square" lIns="0" tIns="0" rIns="0" bIns="0" rtlCol="0" anchor="ctr"/>
-          <a:lstStyle/>
-          <a:p>
-            <a:pPr indent="0" marL="0">
-              <a:lnSpc>
-                <a:spcPts val="1400"/>
-              </a:lnSpc>
-              <a:buNone/>
-            </a:pPr>
-            <a:r>
-              <a:rPr lang="en-US" sz="1050" dirty="0">
-                <a:solidFill>
-                  <a:srgbClr val="9BAAC0"/>
-                </a:solidFill>
-                <a:latin typeface="Arial" pitchFamily="34" charset="0"/>
-                <a:ea typeface="Arial" pitchFamily="34" charset="-122"/>
-                <a:cs typeface="Arial" pitchFamily="34" charset="-120"/>
-              </a:rPr>
-              <a:t>Ticket médio por pedido</a:t>
-            </a:r>
-            <a:endParaRPr lang="en-US" sz="1050" dirty="0"/>
-          </a:p>
-        </p:txBody>
-      </p:sp>
-      <p:sp>
-        <p:nvSpPr>
-          <p:cNvPr id="12" name="Shape 10"/>
-          <p:cNvSpPr/>
-          <p:nvPr/>
-        </p:nvSpPr>
-        <p:spPr>
-          <a:xfrm>
-            <a:off x="4654296" y="2194560"/>
-            <a:ext cx="1956816" cy="1737360"/>
-          </a:xfrm>
-          <a:prstGeom prst="roundRect">
-            <a:avLst>
-              <a:gd name="adj" fmla="val 2632"/>
-            </a:avLst>
+          <p:cNvPr id="7" name="Text 5"/>
+          <p:cNvSpPr/>
+          <p:nvPr/>
+        </p:nvSpPr>
+        <p:spPr>
+          <a:xfrm>
+            <a:off x="713232" y="2478024"/>
+            <a:ext cx="7955280" cy="347472"/>
+          </a:xfrm>
+          <a:prstGeom prst="rect">
+            <a:avLst/>
+          </a:prstGeom>
+          <a:noFill/>
+          <a:ln/>
+        </p:spPr>
+        <p:txBody>
+          <a:bodyPr wrap="square" lIns="0" tIns="0" rIns="0" bIns="0" rtlCol="0" anchor="ctr"/>
+          <a:lstStyle/>
+          <a:p>
+            <a:pPr indent="0" marL="0">
+              <a:buNone/>
+            </a:pPr>
+            <a:r>
+              <a:rPr lang="en-US" sz="1500" dirty="0">
+                <a:solidFill>
+                  <a:srgbClr val="D9CFD1"/>
+                </a:solidFill>
+                <a:latin typeface="Arial" pitchFamily="34" charset="0"/>
+                <a:ea typeface="Arial" pitchFamily="34" charset="-122"/>
+                <a:cs typeface="Arial" pitchFamily="34" charset="-120"/>
+              </a:rPr>
+              <a:t>date_trunc('month', data_pedido) tenta converter, não consegue e derruba a query</a:t>
+            </a:r>
+            <a:endParaRPr lang="en-US" sz="1500" dirty="0"/>
+          </a:p>
+        </p:txBody>
+      </p:sp>
+      <p:sp>
+        <p:nvSpPr>
+          <p:cNvPr id="8" name="Shape 6"/>
+          <p:cNvSpPr/>
+          <p:nvPr/>
+        </p:nvSpPr>
+        <p:spPr>
+          <a:xfrm>
+            <a:off x="457200" y="2999232"/>
+            <a:ext cx="91440" cy="91440"/>
+          </a:xfrm>
+          <a:prstGeom prst="ellipse">
+            <a:avLst/>
           </a:prstGeom>
           <a:solidFill>
-            <a:srgbClr val="0D1522"/>
+            <a:srgbClr val="3B9DF5"/>
           </a:solidFill>
           <a:ln w="12700">
             <a:solidFill>
-              <a:srgbClr val="1F3A5A"/>
+              <a:srgbClr val="333333"/>
             </a:solidFill>
             <a:prstDash val="solid"/>
           </a:ln>
@@ -33798,149 +33722,63 @@
       </p:sp>
       <p:sp>
         <p:nvSpPr>
-          <p:cNvPr id="13" name="Text 11"/>
-          <p:cNvSpPr/>
-          <p:nvPr/>
-        </p:nvSpPr>
-        <p:spPr>
-          <a:xfrm>
-            <a:off x="4855464" y="2359152"/>
-            <a:ext cx="1554480" cy="274320"/>
-          </a:xfrm>
-          <a:prstGeom prst="rect">
-            <a:avLst/>
-          </a:prstGeom>
-          <a:noFill/>
-          <a:ln/>
-        </p:spPr>
-        <p:txBody>
-          <a:bodyPr wrap="square" lIns="0" tIns="0" rIns="0" bIns="0" rtlCol="0" anchor="ctr"/>
-          <a:lstStyle/>
-          <a:p>
-            <a:pPr indent="0" marL="0">
-              <a:buNone/>
-            </a:pPr>
-            <a:r>
-              <a:rPr lang="en-US" sz="1100" b="1" dirty="0">
-                <a:solidFill>
-                  <a:srgbClr val="3B9DF5"/>
-                </a:solidFill>
-                <a:latin typeface="Arial" pitchFamily="34" charset="0"/>
-                <a:ea typeface="Arial" pitchFamily="34" charset="-122"/>
-                <a:cs typeface="Arial" pitchFamily="34" charset="-120"/>
-              </a:rPr>
-              <a:t>↑</a:t>
-            </a:r>
-            <a:endParaRPr lang="en-US" sz="1100" dirty="0"/>
-          </a:p>
-        </p:txBody>
-      </p:sp>
-      <p:sp>
-        <p:nvSpPr>
-          <p:cNvPr id="14" name="Text 12"/>
-          <p:cNvSpPr/>
-          <p:nvPr/>
-        </p:nvSpPr>
-        <p:spPr>
-          <a:xfrm>
-            <a:off x="4855464" y="2633472"/>
-            <a:ext cx="1554480" cy="512064"/>
-          </a:xfrm>
-          <a:prstGeom prst="rect">
-            <a:avLst/>
-          </a:prstGeom>
-          <a:noFill/>
-          <a:ln/>
-        </p:spPr>
-        <p:txBody>
-          <a:bodyPr wrap="square" lIns="0" tIns="0" rIns="0" bIns="0" rtlCol="0" anchor="t"/>
-          <a:lstStyle/>
-          <a:p>
-            <a:pPr indent="0" marL="0">
-              <a:lnSpc>
-                <a:spcPts val="1800"/>
-              </a:lnSpc>
-              <a:buNone/>
-            </a:pPr>
-            <a:r>
-              <a:rPr lang="en-US" sz="1450" b="1" dirty="0">
-                <a:solidFill>
-                  <a:srgbClr val="FFFFFF"/>
-                </a:solidFill>
-                <a:latin typeface="Arial" pitchFamily="34" charset="0"/>
-                <a:ea typeface="Arial" pitchFamily="34" charset="-122"/>
-                <a:cs typeface="Arial" pitchFamily="34" charset="-120"/>
-              </a:rPr>
-              <a:t>Outubro/2025</a:t>
-            </a:r>
-            <a:endParaRPr lang="en-US" sz="1450" dirty="0"/>
-          </a:p>
-        </p:txBody>
-      </p:sp>
-      <p:sp>
-        <p:nvSpPr>
-          <p:cNvPr id="15" name="Text 13"/>
-          <p:cNvSpPr/>
-          <p:nvPr/>
-        </p:nvSpPr>
-        <p:spPr>
-          <a:xfrm>
-            <a:off x="4855464" y="3163824"/>
-            <a:ext cx="1554480" cy="621792"/>
-          </a:xfrm>
-          <a:prstGeom prst="rect">
-            <a:avLst/>
-          </a:prstGeom>
-          <a:noFill/>
-          <a:ln/>
-        </p:spPr>
-        <p:txBody>
-          <a:bodyPr wrap="square" lIns="0" tIns="0" rIns="0" bIns="0" rtlCol="0" anchor="ctr"/>
-          <a:lstStyle/>
-          <a:p>
-            <a:pPr indent="0" marL="0">
-              <a:lnSpc>
-                <a:spcPts val="1400"/>
-              </a:lnSpc>
-              <a:buNone/>
-            </a:pPr>
-            <a:r>
-              <a:rPr lang="en-US" sz="1050" dirty="0">
-                <a:solidFill>
-                  <a:srgbClr val="9BAAC0"/>
-                </a:solidFill>
-                <a:latin typeface="Arial" pitchFamily="34" charset="0"/>
-                <a:ea typeface="Arial" pitchFamily="34" charset="-122"/>
-                <a:cs typeface="Arial" pitchFamily="34" charset="-120"/>
-              </a:rPr>
-              <a:t>O pico: R$ 7,0 milhões em um mês</a:t>
-            </a:r>
-            <a:endParaRPr lang="en-US" sz="1050" dirty="0"/>
-          </a:p>
-        </p:txBody>
-      </p:sp>
-      <p:sp>
-        <p:nvSpPr>
-          <p:cNvPr id="16" name="Shape 14"/>
-          <p:cNvSpPr/>
-          <p:nvPr/>
-        </p:nvSpPr>
-        <p:spPr>
-          <a:xfrm>
-            <a:off x="6775704" y="2194560"/>
-            <a:ext cx="1956816" cy="1737360"/>
-          </a:xfrm>
-          <a:prstGeom prst="roundRect">
-            <a:avLst>
-              <a:gd name="adj" fmla="val 2632"/>
-            </a:avLst>
+          <p:cNvPr id="9" name="Text 7"/>
+          <p:cNvSpPr/>
+          <p:nvPr/>
+        </p:nvSpPr>
+        <p:spPr>
+          <a:xfrm>
+            <a:off x="713232" y="2898648"/>
+            <a:ext cx="7955280" cy="347472"/>
+          </a:xfrm>
+          <a:prstGeom prst="rect">
+            <a:avLst/>
+          </a:prstGeom>
+          <a:noFill/>
+          <a:ln/>
+        </p:spPr>
+        <p:txBody>
+          <a:bodyPr wrap="square" lIns="0" tIns="0" rIns="0" bIns="0" rtlCol="0" anchor="ctr"/>
+          <a:lstStyle/>
+          <a:p>
+            <a:pPr indent="0" marL="0">
+              <a:buNone/>
+            </a:pPr>
+            <a:r>
+              <a:rPr lang="en-US" sz="1500" dirty="0">
+                <a:solidFill>
+                  <a:srgbClr val="D9CFD1"/>
+                </a:solidFill>
+                <a:latin typeface="Arial" pitchFamily="34" charset="0"/>
+                <a:ea typeface="Arial" pitchFamily="34" charset="-122"/>
+                <a:cs typeface="Arial" pitchFamily="34" charset="-120"/>
+              </a:rPr>
+              <a:t>Não é resposta errada em silêncio: é erro na cara, e isso é melhor</a:t>
+            </a:r>
+            <a:endParaRPr lang="en-US" sz="1500" dirty="0"/>
+          </a:p>
+        </p:txBody>
+      </p:sp>
+      <p:sp>
+        <p:nvSpPr>
+          <p:cNvPr id="10" name="Shape 8"/>
+          <p:cNvSpPr/>
+          <p:nvPr/>
+        </p:nvSpPr>
+        <p:spPr>
+          <a:xfrm>
+            <a:off x="457200" y="3419856"/>
+            <a:ext cx="91440" cy="91440"/>
+          </a:xfrm>
+          <a:prstGeom prst="ellipse">
+            <a:avLst/>
           </a:prstGeom>
           <a:solidFill>
-            <a:srgbClr val="0D1522"/>
+            <a:srgbClr val="3B9DF5"/>
           </a:solidFill>
           <a:ln w="12700">
             <a:solidFill>
-              <a:srgbClr val="1F3A5A"/>
+              <a:srgbClr val="333333"/>
             </a:solidFill>
             <a:prstDash val="solid"/>
           </a:ln>
@@ -33952,130 +33790,153 @@
       </p:sp>
       <p:sp>
         <p:nvSpPr>
-          <p:cNvPr id="17" name="Text 15"/>
-          <p:cNvSpPr/>
-          <p:nvPr/>
-        </p:nvSpPr>
-        <p:spPr>
-          <a:xfrm>
-            <a:off x="6976872" y="2359152"/>
-            <a:ext cx="1554480" cy="274320"/>
-          </a:xfrm>
-          <a:prstGeom prst="rect">
-            <a:avLst/>
-          </a:prstGeom>
-          <a:noFill/>
-          <a:ln/>
-        </p:spPr>
-        <p:txBody>
-          <a:bodyPr wrap="square" lIns="0" tIns="0" rIns="0" bIns="0" rtlCol="0" anchor="ctr"/>
-          <a:lstStyle/>
-          <a:p>
-            <a:pPr indent="0" marL="0">
-              <a:buNone/>
-            </a:pPr>
-            <a:r>
-              <a:rPr lang="en-US" sz="1100" b="1" dirty="0">
-                <a:solidFill>
-                  <a:srgbClr val="3B9DF5"/>
-                </a:solidFill>
-                <a:latin typeface="Arial" pitchFamily="34" charset="0"/>
-                <a:ea typeface="Arial" pitchFamily="34" charset="-122"/>
-                <a:cs typeface="Arial" pitchFamily="34" charset="-120"/>
-              </a:rPr>
-              <a:t>↓</a:t>
-            </a:r>
-            <a:endParaRPr lang="en-US" sz="1100" dirty="0"/>
-          </a:p>
-        </p:txBody>
-      </p:sp>
-      <p:sp>
-        <p:nvSpPr>
-          <p:cNvPr id="18" name="Text 16"/>
-          <p:cNvSpPr/>
-          <p:nvPr/>
-        </p:nvSpPr>
-        <p:spPr>
-          <a:xfrm>
-            <a:off x="6976872" y="2633472"/>
-            <a:ext cx="1554480" cy="512064"/>
-          </a:xfrm>
-          <a:prstGeom prst="rect">
-            <a:avLst/>
-          </a:prstGeom>
-          <a:noFill/>
-          <a:ln/>
-        </p:spPr>
-        <p:txBody>
-          <a:bodyPr wrap="square" lIns="0" tIns="0" rIns="0" bIns="0" rtlCol="0" anchor="t"/>
-          <a:lstStyle/>
-          <a:p>
-            <a:pPr indent="0" marL="0">
-              <a:lnSpc>
-                <a:spcPts val="1800"/>
-              </a:lnSpc>
-              <a:buNone/>
-            </a:pPr>
-            <a:r>
-              <a:rPr lang="en-US" sz="1450" b="1" dirty="0">
-                <a:solidFill>
-                  <a:srgbClr val="FFFFFF"/>
-                </a:solidFill>
-                <a:latin typeface="Arial" pitchFamily="34" charset="0"/>
-                <a:ea typeface="Arial" pitchFamily="34" charset="-122"/>
-                <a:cs typeface="Arial" pitchFamily="34" charset="-120"/>
-              </a:rPr>
-              <a:t>Janeiro/2026</a:t>
-            </a:r>
-            <a:endParaRPr lang="en-US" sz="1450" dirty="0"/>
-          </a:p>
-        </p:txBody>
-      </p:sp>
-      <p:sp>
-        <p:nvSpPr>
-          <p:cNvPr id="19" name="Text 17"/>
-          <p:cNvSpPr/>
-          <p:nvPr/>
-        </p:nvSpPr>
-        <p:spPr>
-          <a:xfrm>
-            <a:off x="6976872" y="3163824"/>
-            <a:ext cx="1554480" cy="621792"/>
-          </a:xfrm>
-          <a:prstGeom prst="rect">
-            <a:avLst/>
-          </a:prstGeom>
-          <a:noFill/>
-          <a:ln/>
-        </p:spPr>
-        <p:txBody>
-          <a:bodyPr wrap="square" lIns="0" tIns="0" rIns="0" bIns="0" rtlCol="0" anchor="ctr"/>
-          <a:lstStyle/>
-          <a:p>
-            <a:pPr indent="0" marL="0">
-              <a:lnSpc>
-                <a:spcPts val="1400"/>
-              </a:lnSpc>
-              <a:buNone/>
-            </a:pPr>
-            <a:r>
-              <a:rPr lang="en-US" sz="1050" dirty="0">
-                <a:solidFill>
-                  <a:srgbClr val="9BAAC0"/>
-                </a:solidFill>
-                <a:latin typeface="Arial" pitchFamily="34" charset="0"/>
-                <a:ea typeface="Arial" pitchFamily="34" charset="-122"/>
-                <a:cs typeface="Arial" pitchFamily="34" charset="-120"/>
-              </a:rPr>
-              <a:t>O vale: R$ 2,5 milhões — o varejo já abasteceu</a:t>
-            </a:r>
-            <a:endParaRPr lang="en-US" sz="1050" dirty="0"/>
-          </a:p>
-        </p:txBody>
-      </p:sp>
-      <p:sp>
-        <p:nvSpPr>
-          <p:cNvPr id="20" name="Text 18"/>
+          <p:cNvPr id="11" name="Text 9"/>
+          <p:cNvSpPr/>
+          <p:nvPr/>
+        </p:nvSpPr>
+        <p:spPr>
+          <a:xfrm>
+            <a:off x="713232" y="3319272"/>
+            <a:ext cx="7955280" cy="347472"/>
+          </a:xfrm>
+          <a:prstGeom prst="rect">
+            <a:avLst/>
+          </a:prstGeom>
+          <a:noFill/>
+          <a:ln/>
+        </p:spPr>
+        <p:txBody>
+          <a:bodyPr wrap="square" lIns="0" tIns="0" rIns="0" bIns="0" rtlCol="0" anchor="ctr"/>
+          <a:lstStyle/>
+          <a:p>
+            <a:pPr indent="0" marL="0">
+              <a:buNone/>
+            </a:pPr>
+            <a:r>
+              <a:rPr lang="en-US" sz="1500" dirty="0">
+                <a:solidFill>
+                  <a:srgbClr val="D9CFD1"/>
+                </a:solidFill>
+                <a:latin typeface="Arial" pitchFamily="34" charset="0"/>
+                <a:ea typeface="Arial" pitchFamily="34" charset="-122"/>
+                <a:cs typeface="Arial" pitchFamily="34" charset="-120"/>
+              </a:rPr>
+              <a:t>try_to_date devolve NULL em vez de quebrar — aí o coalesce tenta os dois formatos</a:t>
+            </a:r>
+            <a:endParaRPr lang="en-US" sz="1500" dirty="0"/>
+          </a:p>
+        </p:txBody>
+      </p:sp>
+      <p:sp>
+        <p:nvSpPr>
+          <p:cNvPr id="12" name="Shape 10"/>
+          <p:cNvSpPr/>
+          <p:nvPr/>
+        </p:nvSpPr>
+        <p:spPr>
+          <a:xfrm>
+            <a:off x="457200" y="3840480"/>
+            <a:ext cx="91440" cy="91440"/>
+          </a:xfrm>
+          <a:prstGeom prst="ellipse">
+            <a:avLst/>
+          </a:prstGeom>
+          <a:solidFill>
+            <a:srgbClr val="3B9DF5"/>
+          </a:solidFill>
+          <a:ln w="12700">
+            <a:solidFill>
+              <a:srgbClr val="333333"/>
+            </a:solidFill>
+            <a:prstDash val="solid"/>
+          </a:ln>
+        </p:spPr>
+        <p:txBody>
+          <a:bodyPr/>
+          <a:p/>
+        </p:txBody>
+      </p:sp>
+      <p:sp>
+        <p:nvSpPr>
+          <p:cNvPr id="13" name="Text 11"/>
+          <p:cNvSpPr/>
+          <p:nvPr/>
+        </p:nvSpPr>
+        <p:spPr>
+          <a:xfrm>
+            <a:off x="713232" y="3739896"/>
+            <a:ext cx="7955280" cy="347472"/>
+          </a:xfrm>
+          <a:prstGeom prst="rect">
+            <a:avLst/>
+          </a:prstGeom>
+          <a:noFill/>
+          <a:ln/>
+        </p:spPr>
+        <p:txBody>
+          <a:bodyPr wrap="square" lIns="0" tIns="0" rIns="0" bIns="0" rtlCol="0" anchor="ctr"/>
+          <a:lstStyle/>
+          <a:p>
+            <a:pPr indent="0" marL="0">
+              <a:buNone/>
+            </a:pPr>
+            <a:r>
+              <a:rPr lang="en-US" sz="1500" dirty="0">
+                <a:solidFill>
+                  <a:srgbClr val="D9CFD1"/>
+                </a:solidFill>
+                <a:latin typeface="Arial" pitchFamily="34" charset="0"/>
+                <a:ea typeface="Arial" pitchFamily="34" charset="-122"/>
+                <a:cs typeface="Arial" pitchFamily="34" charset="-120"/>
+              </a:rPr>
+              <a:t>Esse coalesce é um rascunho da camada silver. Amanhã ele vira pipeline</a:t>
+            </a:r>
+            <a:endParaRPr lang="en-US" sz="1500" dirty="0"/>
+          </a:p>
+        </p:txBody>
+      </p:sp>
+      <p:sp>
+        <p:nvSpPr>
+          <p:cNvPr id="14" name="Text 12"/>
+          <p:cNvSpPr/>
+          <p:nvPr/>
+        </p:nvSpPr>
+        <p:spPr>
+          <a:xfrm>
+            <a:off x="411480" y="4297680"/>
+            <a:ext cx="8229600" cy="365760"/>
+          </a:xfrm>
+          <a:prstGeom prst="rect">
+            <a:avLst/>
+          </a:prstGeom>
+          <a:noFill/>
+          <a:ln/>
+        </p:spPr>
+        <p:txBody>
+          <a:bodyPr wrap="square" lIns="0" tIns="0" rIns="0" bIns="0" rtlCol="0" anchor="ctr"/>
+          <a:lstStyle/>
+          <a:p>
+            <a:pPr indent="0" marL="0">
+              <a:buNone/>
+            </a:pPr>
+            <a:r>
+              <a:rPr lang="en-US" sz="1300" dirty="0">
+                <a:solidFill>
+                  <a:srgbClr val="7CC8FF"/>
+                </a:solidFill>
+                <a:latin typeface="Arial" pitchFamily="34" charset="0"/>
+                <a:ea typeface="Arial" pitchFamily="34" charset="-122"/>
+                <a:cs typeface="Arial" pitchFamily="34" charset="-120"/>
+              </a:rPr>
+              <a:t>Repara na ordem: eu rodo a query errada primeiro, de propósito. O erro é que explica por que a noite 2 existe.</a:t>
+            </a:r>
+            <a:endParaRPr lang="en-US" sz="1300" dirty="0"/>
+          </a:p>
+        </p:txBody>
+      </p:sp>
+      <p:sp>
+        <p:nvSpPr>
+          <p:cNvPr id="15" name="Text 13"/>
           <p:cNvSpPr/>
           <p:nvPr/>
         </p:nvSpPr>
@@ -34163,7 +34024,7 @@
                 <a:ea typeface="Arial" pitchFamily="34" charset="-122"/>
                 <a:cs typeface="Arial" pitchFamily="34" charset="-120"/>
               </a:rPr>
-              <a:t>O MOMENTO DA VERDADE</a:t>
+              <a:t>ARQUITETURA MEDALLION</a:t>
             </a:r>
             <a:endParaRPr lang="en-US" sz="1100" dirty="0"/>
           </a:p>
@@ -34197,7 +34058,7 @@
               <a:buNone/>
             </a:pPr>
             <a:r>
-              <a:rPr lang="en-US" sz="3100" b="1" dirty="0">
+              <a:rPr lang="en-US" sz="3200" b="1" dirty="0">
                 <a:solidFill>
                   <a:srgbClr val="FFFFFF"/>
                 </a:solidFill>
@@ -34205,9 +34066,9 @@
                 <a:ea typeface="Arial" pitchFamily="34" charset="-122"/>
                 <a:cs typeface="Arial" pitchFamily="34" charset="-120"/>
               </a:rPr>
-              <a:t>A query que não roda</a:t>
-            </a:r>
-            <a:endParaRPr lang="en-US" sz="3100" dirty="0"/>
+              <a:t>O que ficou de pé no catálogo</a:t>
+            </a:r>
+            <a:endParaRPr lang="en-US" sz="3200" dirty="0"/>
           </a:p>
         </p:txBody>
       </p:sp>
@@ -34219,26 +34080,24 @@
         </p:nvSpPr>
         <p:spPr>
           <a:xfrm>
-            <a:off x="457200" y="2157984"/>
-            <a:ext cx="91440" cy="91440"/>
-          </a:xfrm>
-          <a:prstGeom prst="ellipse">
-            <a:avLst/>
+            <a:off x="411480" y="2194560"/>
+            <a:ext cx="1956816" cy="1737360"/>
+          </a:xfrm>
+          <a:prstGeom prst="roundRect">
+            <a:avLst>
+              <a:gd name="adj" fmla="val 2632"/>
+            </a:avLst>
           </a:prstGeom>
           <a:solidFill>
-            <a:srgbClr val="3B9DF5"/>
+            <a:srgbClr val="0D1522"/>
           </a:solidFill>
           <a:ln w="12700">
             <a:solidFill>
-              <a:srgbClr val="333333"/>
+              <a:srgbClr val="1F3A5A"/>
             </a:solidFill>
             <a:prstDash val="solid"/>
           </a:ln>
         </p:spPr>
-        <p:txBody>
-          <a:bodyPr/>
-          <a:p/>
-        </p:txBody>
       </p:sp>
       <p:sp>
         <p:nvSpPr>
@@ -34248,351 +34107,574 @@
         </p:nvSpPr>
         <p:spPr>
           <a:xfrm>
-            <a:off x="713232" y="2057400"/>
-            <a:ext cx="7955280" cy="347472"/>
-          </a:xfrm>
-          <a:prstGeom prst="rect">
-            <a:avLst/>
-          </a:prstGeom>
-          <a:noFill/>
-          <a:ln/>
-        </p:spPr>
-        <p:txBody>
-          <a:bodyPr wrap="square" lIns="0" tIns="0" rIns="0" bIns="0" rtlCol="0" anchor="ctr"/>
-          <a:lstStyle/>
-          <a:p>
-            <a:pPr indent="0" marL="0">
-              <a:buNone/>
-            </a:pPr>
-            <a:r>
-              <a:rPr lang="en-US" sz="1500" dirty="0">
-                <a:solidFill>
-                  <a:srgbClr val="D9CFD1"/>
-                </a:solidFill>
-                <a:latin typeface="Arial" pitchFamily="34" charset="0"/>
-                <a:ea typeface="Arial" pitchFamily="34" charset="-122"/>
-                <a:cs typeface="Arial" pitchFamily="34" charset="-120"/>
-              </a:rPr>
-              <a:t>3.443 pedidos (12%) têm a data escrita como 15/10/2025 em vez de 2025-10-15</a:t>
-            </a:r>
-            <a:endParaRPr lang="en-US" sz="1500" dirty="0"/>
-          </a:p>
-        </p:txBody>
-      </p:sp>
-      <p:sp>
-        <p:nvSpPr>
-          <p:cNvPr id="6" name="Shape 4"/>
-          <p:cNvSpPr/>
-          <p:nvPr/>
-        </p:nvSpPr>
-        <p:spPr>
-          <a:xfrm>
-            <a:off x="457200" y="2578608"/>
-            <a:ext cx="91440" cy="91440"/>
-          </a:xfrm>
-          <a:prstGeom prst="ellipse">
-            <a:avLst/>
+            <a:off x="612648" y="2359152"/>
+            <a:ext cx="1554480" cy="274320"/>
+          </a:xfrm>
+          <a:prstGeom prst="rect">
+            <a:avLst/>
+          </a:prstGeom>
+          <a:noFill/>
+          <a:ln/>
+        </p:spPr>
+        <p:txBody>
+          <a:bodyPr wrap="square" lIns="0" tIns="0" rIns="0" bIns="0" rtlCol="0" anchor="ctr"/>
+          <a:lstStyle/>
+          <a:p>
+            <a:pPr indent="0" marL="0">
+              <a:buNone/>
+            </a:pPr>
+            <a:r>
+              <a:rPr lang="en-US" sz="1100" b="1" dirty="0">
+                <a:solidFill>
+                  <a:srgbClr val="3B9DF5"/>
+                </a:solidFill>
+                <a:latin typeface="Arial" pitchFamily="34" charset="0"/>
+                <a:ea typeface="Arial" pitchFamily="34" charset="-122"/>
+                <a:cs typeface="Arial" pitchFamily="34" charset="-120"/>
+              </a:rPr>
+              <a:t>01</a:t>
+            </a:r>
+            <a:endParaRPr lang="en-US" sz="1100" dirty="0"/>
+          </a:p>
+        </p:txBody>
+      </p:sp>
+      <p:sp>
+        <p:nvSpPr>
+          <p:cNvPr id="6" name="Text 4"/>
+          <p:cNvSpPr/>
+          <p:nvPr/>
+        </p:nvSpPr>
+        <p:spPr>
+          <a:xfrm>
+            <a:off x="612648" y="2633472"/>
+            <a:ext cx="1554480" cy="512064"/>
+          </a:xfrm>
+          <a:prstGeom prst="rect">
+            <a:avLst/>
+          </a:prstGeom>
+          <a:noFill/>
+          <a:ln/>
+        </p:spPr>
+        <p:txBody>
+          <a:bodyPr wrap="square" lIns="0" tIns="0" rIns="0" bIns="0" rtlCol="0" anchor="t"/>
+          <a:lstStyle/>
+          <a:p>
+            <a:pPr indent="0" marL="0">
+              <a:lnSpc>
+                <a:spcPts val="1800"/>
+              </a:lnSpc>
+              <a:buNone/>
+            </a:pPr>
+            <a:r>
+              <a:rPr lang="en-US" sz="1450" b="1" dirty="0">
+                <a:solidFill>
+                  <a:srgbClr val="FFFFFF"/>
+                </a:solidFill>
+                <a:latin typeface="Arial" pitchFamily="34" charset="0"/>
+                <a:ea typeface="Arial" pitchFamily="34" charset="-122"/>
+                <a:cs typeface="Arial" pitchFamily="34" charset="-120"/>
+              </a:rPr>
+              <a:t>bronze</a:t>
+            </a:r>
+            <a:endParaRPr lang="en-US" sz="1450" dirty="0"/>
+          </a:p>
+        </p:txBody>
+      </p:sp>
+      <p:sp>
+        <p:nvSpPr>
+          <p:cNvPr id="7" name="Text 5"/>
+          <p:cNvSpPr/>
+          <p:nvPr/>
+        </p:nvSpPr>
+        <p:spPr>
+          <a:xfrm>
+            <a:off x="612648" y="3163824"/>
+            <a:ext cx="1554480" cy="621792"/>
+          </a:xfrm>
+          <a:prstGeom prst="rect">
+            <a:avLst/>
+          </a:prstGeom>
+          <a:noFill/>
+          <a:ln/>
+        </p:spPr>
+        <p:txBody>
+          <a:bodyPr wrap="square" lIns="0" tIns="0" rIns="0" bIns="0" rtlCol="0" anchor="ctr"/>
+          <a:lstStyle/>
+          <a:p>
+            <a:pPr indent="0" marL="0">
+              <a:lnSpc>
+                <a:spcPts val="1400"/>
+              </a:lnSpc>
+              <a:buNone/>
+            </a:pPr>
+            <a:r>
+              <a:rPr lang="en-US" sz="1050" dirty="0">
+                <a:solidFill>
+                  <a:srgbClr val="9BAAC0"/>
+                </a:solidFill>
+                <a:latin typeface="Arial" pitchFamily="34" charset="0"/>
+                <a:ea typeface="Arial" pitchFamily="34" charset="-122"/>
+                <a:cs typeface="Arial" pitchFamily="34" charset="-120"/>
+              </a:rPr>
+              <a:t>10 tabelas, 313.551 linhas. Tudo texto, sujeira preservada</a:t>
+            </a:r>
+            <a:endParaRPr lang="en-US" sz="1050" dirty="0"/>
+          </a:p>
+        </p:txBody>
+      </p:sp>
+      <p:sp>
+        <p:nvSpPr>
+          <p:cNvPr id="8" name="Shape 6"/>
+          <p:cNvSpPr/>
+          <p:nvPr/>
+        </p:nvSpPr>
+        <p:spPr>
+          <a:xfrm>
+            <a:off x="2532888" y="2194560"/>
+            <a:ext cx="1956816" cy="1737360"/>
+          </a:xfrm>
+          <a:prstGeom prst="roundRect">
+            <a:avLst>
+              <a:gd name="adj" fmla="val 2632"/>
+            </a:avLst>
           </a:prstGeom>
           <a:solidFill>
-            <a:srgbClr val="3B9DF5"/>
+            <a:srgbClr val="0D1522"/>
           </a:solidFill>
           <a:ln w="12700">
             <a:solidFill>
-              <a:srgbClr val="333333"/>
+              <a:srgbClr val="1F3A5A"/>
             </a:solidFill>
             <a:prstDash val="solid"/>
           </a:ln>
         </p:spPr>
-        <p:txBody>
-          <a:bodyPr/>
-          <a:p/>
-        </p:txBody>
-      </p:sp>
-      <p:sp>
-        <p:nvSpPr>
-          <p:cNvPr id="7" name="Text 5"/>
-          <p:cNvSpPr/>
-          <p:nvPr/>
-        </p:nvSpPr>
-        <p:spPr>
-          <a:xfrm>
-            <a:off x="713232" y="2478024"/>
-            <a:ext cx="7955280" cy="347472"/>
-          </a:xfrm>
-          <a:prstGeom prst="rect">
-            <a:avLst/>
-          </a:prstGeom>
-          <a:noFill/>
-          <a:ln/>
-        </p:spPr>
-        <p:txBody>
-          <a:bodyPr wrap="square" lIns="0" tIns="0" rIns="0" bIns="0" rtlCol="0" anchor="ctr"/>
-          <a:lstStyle/>
-          <a:p>
-            <a:pPr indent="0" marL="0">
-              <a:buNone/>
-            </a:pPr>
-            <a:r>
-              <a:rPr lang="en-US" sz="1500" dirty="0">
-                <a:solidFill>
-                  <a:srgbClr val="D9CFD1"/>
-                </a:solidFill>
-                <a:latin typeface="Arial" pitchFamily="34" charset="0"/>
-                <a:ea typeface="Arial" pitchFamily="34" charset="-122"/>
-                <a:cs typeface="Arial" pitchFamily="34" charset="-120"/>
-              </a:rPr>
-              <a:t>date_trunc('month', data_pedido) tenta converter, não consegue e derruba a query</a:t>
-            </a:r>
-            <a:endParaRPr lang="en-US" sz="1500" dirty="0"/>
-          </a:p>
-        </p:txBody>
-      </p:sp>
-      <p:sp>
-        <p:nvSpPr>
-          <p:cNvPr id="8" name="Shape 6"/>
-          <p:cNvSpPr/>
-          <p:nvPr/>
-        </p:nvSpPr>
-        <p:spPr>
-          <a:xfrm>
-            <a:off x="457200" y="2999232"/>
-            <a:ext cx="91440" cy="91440"/>
-          </a:xfrm>
-          <a:prstGeom prst="ellipse">
-            <a:avLst/>
+      </p:sp>
+      <p:sp>
+        <p:nvSpPr>
+          <p:cNvPr id="9" name="Text 7"/>
+          <p:cNvSpPr/>
+          <p:nvPr/>
+        </p:nvSpPr>
+        <p:spPr>
+          <a:xfrm>
+            <a:off x="2734056" y="2359152"/>
+            <a:ext cx="1554480" cy="274320"/>
+          </a:xfrm>
+          <a:prstGeom prst="rect">
+            <a:avLst/>
+          </a:prstGeom>
+          <a:noFill/>
+          <a:ln/>
+        </p:spPr>
+        <p:txBody>
+          <a:bodyPr wrap="square" lIns="0" tIns="0" rIns="0" bIns="0" rtlCol="0" anchor="ctr"/>
+          <a:lstStyle/>
+          <a:p>
+            <a:pPr indent="0" marL="0">
+              <a:buNone/>
+            </a:pPr>
+            <a:r>
+              <a:rPr lang="en-US" sz="1100" b="1" dirty="0">
+                <a:solidFill>
+                  <a:srgbClr val="3B9DF5"/>
+                </a:solidFill>
+                <a:latin typeface="Arial" pitchFamily="34" charset="0"/>
+                <a:ea typeface="Arial" pitchFamily="34" charset="-122"/>
+                <a:cs typeface="Arial" pitchFamily="34" charset="-120"/>
+              </a:rPr>
+              <a:t>02</a:t>
+            </a:r>
+            <a:endParaRPr lang="en-US" sz="1100" dirty="0"/>
+          </a:p>
+        </p:txBody>
+      </p:sp>
+      <p:sp>
+        <p:nvSpPr>
+          <p:cNvPr id="10" name="Text 8"/>
+          <p:cNvSpPr/>
+          <p:nvPr/>
+        </p:nvSpPr>
+        <p:spPr>
+          <a:xfrm>
+            <a:off x="2734056" y="2633472"/>
+            <a:ext cx="1554480" cy="512064"/>
+          </a:xfrm>
+          <a:prstGeom prst="rect">
+            <a:avLst/>
+          </a:prstGeom>
+          <a:noFill/>
+          <a:ln/>
+        </p:spPr>
+        <p:txBody>
+          <a:bodyPr wrap="square" lIns="0" tIns="0" rIns="0" bIns="0" rtlCol="0" anchor="t"/>
+          <a:lstStyle/>
+          <a:p>
+            <a:pPr indent="0" marL="0">
+              <a:lnSpc>
+                <a:spcPts val="1800"/>
+              </a:lnSpc>
+              <a:buNone/>
+            </a:pPr>
+            <a:r>
+              <a:rPr lang="en-US" sz="1450" b="1" dirty="0">
+                <a:solidFill>
+                  <a:srgbClr val="FFFFFF"/>
+                </a:solidFill>
+                <a:latin typeface="Arial" pitchFamily="34" charset="0"/>
+                <a:ea typeface="Arial" pitchFamily="34" charset="-122"/>
+                <a:cs typeface="Arial" pitchFamily="34" charset="-120"/>
+              </a:rPr>
+              <a:t>silver</a:t>
+            </a:r>
+            <a:endParaRPr lang="en-US" sz="1450" dirty="0"/>
+          </a:p>
+        </p:txBody>
+      </p:sp>
+      <p:sp>
+        <p:nvSpPr>
+          <p:cNvPr id="11" name="Text 9"/>
+          <p:cNvSpPr/>
+          <p:nvPr/>
+        </p:nvSpPr>
+        <p:spPr>
+          <a:xfrm>
+            <a:off x="2734056" y="3163824"/>
+            <a:ext cx="1554480" cy="621792"/>
+          </a:xfrm>
+          <a:prstGeom prst="rect">
+            <a:avLst/>
+          </a:prstGeom>
+          <a:noFill/>
+          <a:ln/>
+        </p:spPr>
+        <p:txBody>
+          <a:bodyPr wrap="square" lIns="0" tIns="0" rIns="0" bIns="0" rtlCol="0" anchor="ctr"/>
+          <a:lstStyle/>
+          <a:p>
+            <a:pPr indent="0" marL="0">
+              <a:lnSpc>
+                <a:spcPts val="1400"/>
+              </a:lnSpc>
+              <a:buNone/>
+            </a:pPr>
+            <a:r>
+              <a:rPr lang="en-US" sz="1050" dirty="0">
+                <a:solidFill>
+                  <a:srgbClr val="9BAAC0"/>
+                </a:solidFill>
+                <a:latin typeface="Arial" pitchFamily="34" charset="0"/>
+                <a:ea typeface="Arial" pitchFamily="34" charset="-122"/>
+                <a:cs typeface="Arial" pitchFamily="34" charset="-120"/>
+              </a:rPr>
+              <a:t>Criada e vazia. É o trabalho de amanhã</a:t>
+            </a:r>
+            <a:endParaRPr lang="en-US" sz="1050" dirty="0"/>
+          </a:p>
+        </p:txBody>
+      </p:sp>
+      <p:sp>
+        <p:nvSpPr>
+          <p:cNvPr id="12" name="Shape 10"/>
+          <p:cNvSpPr/>
+          <p:nvPr/>
+        </p:nvSpPr>
+        <p:spPr>
+          <a:xfrm>
+            <a:off x="4654296" y="2194560"/>
+            <a:ext cx="1956816" cy="1737360"/>
+          </a:xfrm>
+          <a:prstGeom prst="roundRect">
+            <a:avLst>
+              <a:gd name="adj" fmla="val 2632"/>
+            </a:avLst>
           </a:prstGeom>
           <a:solidFill>
-            <a:srgbClr val="3B9DF5"/>
+            <a:srgbClr val="0D1522"/>
           </a:solidFill>
           <a:ln w="12700">
             <a:solidFill>
-              <a:srgbClr val="333333"/>
+              <a:srgbClr val="1F3A5A"/>
             </a:solidFill>
             <a:prstDash val="solid"/>
           </a:ln>
         </p:spPr>
-        <p:txBody>
-          <a:bodyPr/>
-          <a:p/>
-        </p:txBody>
-      </p:sp>
-      <p:sp>
-        <p:nvSpPr>
-          <p:cNvPr id="9" name="Text 7"/>
-          <p:cNvSpPr/>
-          <p:nvPr/>
-        </p:nvSpPr>
-        <p:spPr>
-          <a:xfrm>
-            <a:off x="713232" y="2898648"/>
-            <a:ext cx="7955280" cy="347472"/>
-          </a:xfrm>
-          <a:prstGeom prst="rect">
-            <a:avLst/>
-          </a:prstGeom>
-          <a:noFill/>
-          <a:ln/>
-        </p:spPr>
-        <p:txBody>
-          <a:bodyPr wrap="square" lIns="0" tIns="0" rIns="0" bIns="0" rtlCol="0" anchor="ctr"/>
-          <a:lstStyle/>
-          <a:p>
-            <a:pPr indent="0" marL="0">
-              <a:buNone/>
-            </a:pPr>
-            <a:r>
-              <a:rPr lang="en-US" sz="1500" dirty="0">
-                <a:solidFill>
-                  <a:srgbClr val="D9CFD1"/>
-                </a:solidFill>
-                <a:latin typeface="Arial" pitchFamily="34" charset="0"/>
-                <a:ea typeface="Arial" pitchFamily="34" charset="-122"/>
-                <a:cs typeface="Arial" pitchFamily="34" charset="-120"/>
-              </a:rPr>
-              <a:t>Não é resposta errada em silêncio: é erro na cara, e isso é melhor</a:t>
-            </a:r>
-            <a:endParaRPr lang="en-US" sz="1500" dirty="0"/>
-          </a:p>
-        </p:txBody>
-      </p:sp>
-      <p:sp>
-        <p:nvSpPr>
-          <p:cNvPr id="10" name="Shape 8"/>
-          <p:cNvSpPr/>
-          <p:nvPr/>
-        </p:nvSpPr>
-        <p:spPr>
-          <a:xfrm>
-            <a:off x="457200" y="3419856"/>
-            <a:ext cx="91440" cy="91440"/>
-          </a:xfrm>
-          <a:prstGeom prst="ellipse">
-            <a:avLst/>
+      </p:sp>
+      <p:sp>
+        <p:nvSpPr>
+          <p:cNvPr id="13" name="Text 11"/>
+          <p:cNvSpPr/>
+          <p:nvPr/>
+        </p:nvSpPr>
+        <p:spPr>
+          <a:xfrm>
+            <a:off x="4855464" y="2359152"/>
+            <a:ext cx="1554480" cy="274320"/>
+          </a:xfrm>
+          <a:prstGeom prst="rect">
+            <a:avLst/>
+          </a:prstGeom>
+          <a:noFill/>
+          <a:ln/>
+        </p:spPr>
+        <p:txBody>
+          <a:bodyPr wrap="square" lIns="0" tIns="0" rIns="0" bIns="0" rtlCol="0" anchor="ctr"/>
+          <a:lstStyle/>
+          <a:p>
+            <a:pPr indent="0" marL="0">
+              <a:buNone/>
+            </a:pPr>
+            <a:r>
+              <a:rPr lang="en-US" sz="1100" b="1" dirty="0">
+                <a:solidFill>
+                  <a:srgbClr val="3B9DF5"/>
+                </a:solidFill>
+                <a:latin typeface="Arial" pitchFamily="34" charset="0"/>
+                <a:ea typeface="Arial" pitchFamily="34" charset="-122"/>
+                <a:cs typeface="Arial" pitchFamily="34" charset="-120"/>
+              </a:rPr>
+              <a:t>03</a:t>
+            </a:r>
+            <a:endParaRPr lang="en-US" sz="1100" dirty="0"/>
+          </a:p>
+        </p:txBody>
+      </p:sp>
+      <p:sp>
+        <p:nvSpPr>
+          <p:cNvPr id="14" name="Text 12"/>
+          <p:cNvSpPr/>
+          <p:nvPr/>
+        </p:nvSpPr>
+        <p:spPr>
+          <a:xfrm>
+            <a:off x="4855464" y="2633472"/>
+            <a:ext cx="1554480" cy="512064"/>
+          </a:xfrm>
+          <a:prstGeom prst="rect">
+            <a:avLst/>
+          </a:prstGeom>
+          <a:noFill/>
+          <a:ln/>
+        </p:spPr>
+        <p:txBody>
+          <a:bodyPr wrap="square" lIns="0" tIns="0" rIns="0" bIns="0" rtlCol="0" anchor="t"/>
+          <a:lstStyle/>
+          <a:p>
+            <a:pPr indent="0" marL="0">
+              <a:lnSpc>
+                <a:spcPts val="1800"/>
+              </a:lnSpc>
+              <a:buNone/>
+            </a:pPr>
+            <a:r>
+              <a:rPr lang="en-US" sz="1450" b="1" dirty="0">
+                <a:solidFill>
+                  <a:srgbClr val="FFFFFF"/>
+                </a:solidFill>
+                <a:latin typeface="Arial" pitchFamily="34" charset="0"/>
+                <a:ea typeface="Arial" pitchFamily="34" charset="-122"/>
+                <a:cs typeface="Arial" pitchFamily="34" charset="-120"/>
+              </a:rPr>
+              <a:t>gold</a:t>
+            </a:r>
+            <a:endParaRPr lang="en-US" sz="1450" dirty="0"/>
+          </a:p>
+        </p:txBody>
+      </p:sp>
+      <p:sp>
+        <p:nvSpPr>
+          <p:cNvPr id="15" name="Text 13"/>
+          <p:cNvSpPr/>
+          <p:nvPr/>
+        </p:nvSpPr>
+        <p:spPr>
+          <a:xfrm>
+            <a:off x="4855464" y="3163824"/>
+            <a:ext cx="1554480" cy="621792"/>
+          </a:xfrm>
+          <a:prstGeom prst="rect">
+            <a:avLst/>
+          </a:prstGeom>
+          <a:noFill/>
+          <a:ln/>
+        </p:spPr>
+        <p:txBody>
+          <a:bodyPr wrap="square" lIns="0" tIns="0" rIns="0" bIns="0" rtlCol="0" anchor="ctr"/>
+          <a:lstStyle/>
+          <a:p>
+            <a:pPr indent="0" marL="0">
+              <a:lnSpc>
+                <a:spcPts val="1400"/>
+              </a:lnSpc>
+              <a:buNone/>
+            </a:pPr>
+            <a:r>
+              <a:rPr lang="en-US" sz="1050" dirty="0">
+                <a:solidFill>
+                  <a:srgbClr val="9BAAC0"/>
+                </a:solidFill>
+                <a:latin typeface="Arial" pitchFamily="34" charset="0"/>
+                <a:ea typeface="Arial" pitchFamily="34" charset="-122"/>
+                <a:cs typeface="Arial" pitchFamily="34" charset="-120"/>
+              </a:rPr>
+              <a:t>Criada e vazia. Fatos e dimensões vêm depois</a:t>
+            </a:r>
+            <a:endParaRPr lang="en-US" sz="1050" dirty="0"/>
+          </a:p>
+        </p:txBody>
+      </p:sp>
+      <p:sp>
+        <p:nvSpPr>
+          <p:cNvPr id="16" name="Shape 14"/>
+          <p:cNvSpPr/>
+          <p:nvPr/>
+        </p:nvSpPr>
+        <p:spPr>
+          <a:xfrm>
+            <a:off x="6775704" y="2194560"/>
+            <a:ext cx="1956816" cy="1737360"/>
+          </a:xfrm>
+          <a:prstGeom prst="roundRect">
+            <a:avLst>
+              <a:gd name="adj" fmla="val 2632"/>
+            </a:avLst>
           </a:prstGeom>
           <a:solidFill>
-            <a:srgbClr val="3B9DF5"/>
+            <a:srgbClr val="0D1522"/>
           </a:solidFill>
           <a:ln w="12700">
             <a:solidFill>
-              <a:srgbClr val="333333"/>
+              <a:srgbClr val="1F3A5A"/>
             </a:solidFill>
             <a:prstDash val="solid"/>
           </a:ln>
         </p:spPr>
-        <p:txBody>
-          <a:bodyPr/>
-          <a:p/>
-        </p:txBody>
-      </p:sp>
-      <p:sp>
-        <p:nvSpPr>
-          <p:cNvPr id="11" name="Text 9"/>
-          <p:cNvSpPr/>
-          <p:nvPr/>
-        </p:nvSpPr>
-        <p:spPr>
-          <a:xfrm>
-            <a:off x="713232" y="3319272"/>
-            <a:ext cx="7955280" cy="347472"/>
-          </a:xfrm>
-          <a:prstGeom prst="rect">
-            <a:avLst/>
-          </a:prstGeom>
-          <a:noFill/>
-          <a:ln/>
-        </p:spPr>
-        <p:txBody>
-          <a:bodyPr wrap="square" lIns="0" tIns="0" rIns="0" bIns="0" rtlCol="0" anchor="ctr"/>
-          <a:lstStyle/>
-          <a:p>
-            <a:pPr indent="0" marL="0">
-              <a:buNone/>
-            </a:pPr>
-            <a:r>
-              <a:rPr lang="en-US" sz="1500" dirty="0">
-                <a:solidFill>
-                  <a:srgbClr val="D9CFD1"/>
-                </a:solidFill>
-                <a:latin typeface="Arial" pitchFamily="34" charset="0"/>
-                <a:ea typeface="Arial" pitchFamily="34" charset="-122"/>
-                <a:cs typeface="Arial" pitchFamily="34" charset="-120"/>
-              </a:rPr>
-              <a:t>try_to_date devolve NULL em vez de quebrar — aí o coalesce tenta os dois formatos</a:t>
-            </a:r>
-            <a:endParaRPr lang="en-US" sz="1500" dirty="0"/>
-          </a:p>
-        </p:txBody>
-      </p:sp>
-      <p:sp>
-        <p:nvSpPr>
-          <p:cNvPr id="12" name="Shape 10"/>
-          <p:cNvSpPr/>
-          <p:nvPr/>
-        </p:nvSpPr>
-        <p:spPr>
-          <a:xfrm>
-            <a:off x="457200" y="3840480"/>
-            <a:ext cx="91440" cy="91440"/>
-          </a:xfrm>
-          <a:prstGeom prst="ellipse">
-            <a:avLst/>
-          </a:prstGeom>
-          <a:solidFill>
-            <a:srgbClr val="3B9DF5"/>
-          </a:solidFill>
-          <a:ln w="12700">
-            <a:solidFill>
-              <a:srgbClr val="333333"/>
-            </a:solidFill>
-            <a:prstDash val="solid"/>
-          </a:ln>
-        </p:spPr>
-        <p:txBody>
-          <a:bodyPr/>
-          <a:p/>
-        </p:txBody>
-      </p:sp>
-      <p:sp>
-        <p:nvSpPr>
-          <p:cNvPr id="13" name="Text 11"/>
-          <p:cNvSpPr/>
-          <p:nvPr/>
-        </p:nvSpPr>
-        <p:spPr>
-          <a:xfrm>
-            <a:off x="713232" y="3739896"/>
-            <a:ext cx="7955280" cy="347472"/>
-          </a:xfrm>
-          <a:prstGeom prst="rect">
-            <a:avLst/>
-          </a:prstGeom>
-          <a:noFill/>
-          <a:ln/>
-        </p:spPr>
-        <p:txBody>
-          <a:bodyPr wrap="square" lIns="0" tIns="0" rIns="0" bIns="0" rtlCol="0" anchor="ctr"/>
-          <a:lstStyle/>
-          <a:p>
-            <a:pPr indent="0" marL="0">
-              <a:buNone/>
-            </a:pPr>
-            <a:r>
-              <a:rPr lang="en-US" sz="1500" dirty="0">
-                <a:solidFill>
-                  <a:srgbClr val="D9CFD1"/>
-                </a:solidFill>
-                <a:latin typeface="Arial" pitchFamily="34" charset="0"/>
-                <a:ea typeface="Arial" pitchFamily="34" charset="-122"/>
-                <a:cs typeface="Arial" pitchFamily="34" charset="-120"/>
-              </a:rPr>
-              <a:t>Esse coalesce é um rascunho da camada silver. Amanhã ele vira pipeline</a:t>
-            </a:r>
-            <a:endParaRPr lang="en-US" sz="1500" dirty="0"/>
-          </a:p>
-        </p:txBody>
-      </p:sp>
-      <p:sp>
-        <p:nvSpPr>
-          <p:cNvPr id="14" name="Text 12"/>
-          <p:cNvSpPr/>
-          <p:nvPr/>
-        </p:nvSpPr>
-        <p:spPr>
-          <a:xfrm>
-            <a:off x="411480" y="4297680"/>
-            <a:ext cx="8229600" cy="365760"/>
-          </a:xfrm>
-          <a:prstGeom prst="rect">
-            <a:avLst/>
-          </a:prstGeom>
-          <a:noFill/>
-          <a:ln/>
-        </p:spPr>
-        <p:txBody>
-          <a:bodyPr wrap="square" lIns="0" tIns="0" rIns="0" bIns="0" rtlCol="0" anchor="ctr"/>
-          <a:lstStyle/>
-          <a:p>
-            <a:pPr indent="0" marL="0">
-              <a:buNone/>
-            </a:pPr>
-            <a:r>
-              <a:rPr lang="en-US" sz="1300" dirty="0">
-                <a:solidFill>
-                  <a:srgbClr val="7CC8FF"/>
-                </a:solidFill>
-                <a:latin typeface="Arial" pitchFamily="34" charset="0"/>
-                <a:ea typeface="Arial" pitchFamily="34" charset="-122"/>
-                <a:cs typeface="Arial" pitchFamily="34" charset="-120"/>
-              </a:rPr>
-              <a:t>Repara na ordem: eu rodo a query errada primeiro, de propósito. O erro é que explica por que a noite 2 existe.</a:t>
-            </a:r>
-            <a:endParaRPr lang="en-US" sz="1300" dirty="0"/>
-          </a:p>
-        </p:txBody>
-      </p:sp>
-      <p:sp>
-        <p:nvSpPr>
-          <p:cNvPr id="15" name="Text 13"/>
+      </p:sp>
+      <p:sp>
+        <p:nvSpPr>
+          <p:cNvPr id="17" name="Text 15"/>
+          <p:cNvSpPr/>
+          <p:nvPr/>
+        </p:nvSpPr>
+        <p:spPr>
+          <a:xfrm>
+            <a:off x="6976872" y="2359152"/>
+            <a:ext cx="1554480" cy="274320"/>
+          </a:xfrm>
+          <a:prstGeom prst="rect">
+            <a:avLst/>
+          </a:prstGeom>
+          <a:noFill/>
+          <a:ln/>
+        </p:spPr>
+        <p:txBody>
+          <a:bodyPr wrap="square" lIns="0" tIns="0" rIns="0" bIns="0" rtlCol="0" anchor="ctr"/>
+          <a:lstStyle/>
+          <a:p>
+            <a:pPr indent="0" marL="0">
+              <a:buNone/>
+            </a:pPr>
+            <a:r>
+              <a:rPr lang="en-US" sz="1100" b="1" dirty="0">
+                <a:solidFill>
+                  <a:srgbClr val="3B9DF5"/>
+                </a:solidFill>
+                <a:latin typeface="Arial" pitchFamily="34" charset="0"/>
+                <a:ea typeface="Arial" pitchFamily="34" charset="-122"/>
+                <a:cs typeface="Arial" pitchFamily="34" charset="-120"/>
+              </a:rPr>
+              <a:t>04</a:t>
+            </a:r>
+            <a:endParaRPr lang="en-US" sz="1100" dirty="0"/>
+          </a:p>
+        </p:txBody>
+      </p:sp>
+      <p:sp>
+        <p:nvSpPr>
+          <p:cNvPr id="18" name="Text 16"/>
+          <p:cNvSpPr/>
+          <p:nvPr/>
+        </p:nvSpPr>
+        <p:spPr>
+          <a:xfrm>
+            <a:off x="6976872" y="2633472"/>
+            <a:ext cx="1554480" cy="512064"/>
+          </a:xfrm>
+          <a:prstGeom prst="rect">
+            <a:avLst/>
+          </a:prstGeom>
+          <a:noFill/>
+          <a:ln/>
+        </p:spPr>
+        <p:txBody>
+          <a:bodyPr wrap="square" lIns="0" tIns="0" rIns="0" bIns="0" rtlCol="0" anchor="t"/>
+          <a:lstStyle/>
+          <a:p>
+            <a:pPr indent="0" marL="0">
+              <a:lnSpc>
+                <a:spcPts val="1800"/>
+              </a:lnSpc>
+              <a:buNone/>
+            </a:pPr>
+            <a:r>
+              <a:rPr lang="en-US" sz="1450" b="1" dirty="0">
+                <a:solidFill>
+                  <a:srgbClr val="FFFFFF"/>
+                </a:solidFill>
+                <a:latin typeface="Arial" pitchFamily="34" charset="0"/>
+                <a:ea typeface="Arial" pitchFamily="34" charset="-122"/>
+                <a:cs typeface="Arial" pitchFamily="34" charset="-120"/>
+              </a:rPr>
+              <a:t>job</a:t>
+            </a:r>
+            <a:endParaRPr lang="en-US" sz="1450" dirty="0"/>
+          </a:p>
+        </p:txBody>
+      </p:sp>
+      <p:sp>
+        <p:nvSpPr>
+          <p:cNvPr id="19" name="Text 17"/>
+          <p:cNvSpPr/>
+          <p:nvPr/>
+        </p:nvSpPr>
+        <p:spPr>
+          <a:xfrm>
+            <a:off x="6976872" y="3163824"/>
+            <a:ext cx="1554480" cy="621792"/>
+          </a:xfrm>
+          <a:prstGeom prst="rect">
+            <a:avLst/>
+          </a:prstGeom>
+          <a:noFill/>
+          <a:ln/>
+        </p:spPr>
+        <p:txBody>
+          <a:bodyPr wrap="square" lIns="0" tIns="0" rIns="0" bIns="0" rtlCol="0" anchor="ctr"/>
+          <a:lstStyle/>
+          <a:p>
+            <a:pPr indent="0" marL="0">
+              <a:lnSpc>
+                <a:spcPts val="1400"/>
+              </a:lnSpc>
+              <a:buNone/>
+            </a:pPr>
+            <a:r>
+              <a:rPr lang="en-US" sz="1050" dirty="0">
+                <a:solidFill>
+                  <a:srgbClr val="9BAAC0"/>
+                </a:solidFill>
+                <a:latin typeface="Arial" pitchFamily="34" charset="0"/>
+                <a:ea typeface="Arial" pitchFamily="34" charset="-122"/>
+                <a:cs typeface="Arial" pitchFamily="34" charset="-120"/>
+              </a:rPr>
+              <a:t>Deploy por bundle, 2 tarefas, 9 verificações passando</a:t>
+            </a:r>
+            <a:endParaRPr lang="en-US" sz="1050" dirty="0"/>
+          </a:p>
+        </p:txBody>
+      </p:sp>
+      <p:sp>
+        <p:nvSpPr>
+          <p:cNvPr id="20" name="Text 18"/>
           <p:cNvSpPr/>
           <p:nvPr/>
         </p:nvSpPr>
@@ -35226,744 +35308,6 @@
 </file>
 
 <file path=ppt/slides/slide50.xml><?xml version="1.0" encoding="utf-8"?>
-<p:sld xmlns:a="http://schemas.openxmlformats.org/drawingml/2006/main" xmlns:p="http://schemas.openxmlformats.org/presentationml/2006/main" xmlns:r="http://schemas.openxmlformats.org/officeDocument/2006/relationships">
-  <p:cSld>
-    <p:spTree>
-      <p:nvGrpSpPr>
-        <p:cNvPr id="1" name=""/>
-        <p:cNvGrpSpPr/>
-        <p:nvPr/>
-      </p:nvGrpSpPr>
-      <p:grpSpPr/>
-      <p:sp>
-        <p:nvSpPr>
-          <p:cNvPr id="2" name="Text 0"/>
-          <p:cNvSpPr/>
-          <p:nvPr/>
-        </p:nvSpPr>
-        <p:spPr>
-          <a:xfrm>
-            <a:off x="411480" y="411480"/>
-            <a:ext cx="7315200" cy="256032"/>
-          </a:xfrm>
-          <a:prstGeom prst="rect">
-            <a:avLst/>
-          </a:prstGeom>
-          <a:noFill/>
-          <a:ln/>
-        </p:spPr>
-        <p:txBody>
-          <a:bodyPr wrap="square" lIns="0" tIns="0" rIns="0" bIns="0" rtlCol="0" anchor="ctr"/>
-          <a:lstStyle/>
-          <a:p>
-            <a:pPr indent="0" marL="0">
-              <a:buNone/>
-            </a:pPr>
-            <a:r>
-              <a:rPr lang="en-US" sz="1100" b="1" spc="160" kern="0" dirty="0">
-                <a:solidFill>
-                  <a:srgbClr val="3B9DF5"/>
-                </a:solidFill>
-                <a:latin typeface="Arial" pitchFamily="34" charset="0"/>
-                <a:ea typeface="Arial" pitchFamily="34" charset="-122"/>
-                <a:cs typeface="Arial" pitchFamily="34" charset="-120"/>
-              </a:rPr>
-              <a:t>ARQUITETURA MEDALLION</a:t>
-            </a:r>
-            <a:endParaRPr lang="en-US" sz="1100" dirty="0"/>
-          </a:p>
-        </p:txBody>
-      </p:sp>
-      <p:sp>
-        <p:nvSpPr>
-          <p:cNvPr id="3" name="Text 1"/>
-          <p:cNvSpPr/>
-          <p:nvPr/>
-        </p:nvSpPr>
-        <p:spPr>
-          <a:xfrm>
-            <a:off x="411480" y="822960"/>
-            <a:ext cx="8321040" cy="1005840"/>
-          </a:xfrm>
-          <a:prstGeom prst="rect">
-            <a:avLst/>
-          </a:prstGeom>
-          <a:noFill/>
-          <a:ln/>
-        </p:spPr>
-        <p:txBody>
-          <a:bodyPr wrap="square" lIns="0" tIns="0" rIns="0" bIns="0" rtlCol="0" anchor="ctr"/>
-          <a:lstStyle/>
-          <a:p>
-            <a:pPr indent="0" marL="0">
-              <a:lnSpc>
-                <a:spcPts val="4000"/>
-              </a:lnSpc>
-              <a:buNone/>
-            </a:pPr>
-            <a:r>
-              <a:rPr lang="en-US" sz="3200" b="1" dirty="0">
-                <a:solidFill>
-                  <a:srgbClr val="FFFFFF"/>
-                </a:solidFill>
-                <a:latin typeface="Arial" pitchFamily="34" charset="0"/>
-                <a:ea typeface="Arial" pitchFamily="34" charset="-122"/>
-                <a:cs typeface="Arial" pitchFamily="34" charset="-120"/>
-              </a:rPr>
-              <a:t>O que ficou de pé no catálogo</a:t>
-            </a:r>
-            <a:endParaRPr lang="en-US" sz="3200" dirty="0"/>
-          </a:p>
-        </p:txBody>
-      </p:sp>
-      <p:sp>
-        <p:nvSpPr>
-          <p:cNvPr id="4" name="Shape 2"/>
-          <p:cNvSpPr/>
-          <p:nvPr/>
-        </p:nvSpPr>
-        <p:spPr>
-          <a:xfrm>
-            <a:off x="411480" y="2194560"/>
-            <a:ext cx="1956816" cy="1737360"/>
-          </a:xfrm>
-          <a:prstGeom prst="roundRect">
-            <a:avLst>
-              <a:gd name="adj" fmla="val 2632"/>
-            </a:avLst>
-          </a:prstGeom>
-          <a:solidFill>
-            <a:srgbClr val="0D1522"/>
-          </a:solidFill>
-          <a:ln w="12700">
-            <a:solidFill>
-              <a:srgbClr val="1F3A5A"/>
-            </a:solidFill>
-            <a:prstDash val="solid"/>
-          </a:ln>
-        </p:spPr>
-      </p:sp>
-      <p:sp>
-        <p:nvSpPr>
-          <p:cNvPr id="5" name="Text 3"/>
-          <p:cNvSpPr/>
-          <p:nvPr/>
-        </p:nvSpPr>
-        <p:spPr>
-          <a:xfrm>
-            <a:off x="612648" y="2359152"/>
-            <a:ext cx="1554480" cy="274320"/>
-          </a:xfrm>
-          <a:prstGeom prst="rect">
-            <a:avLst/>
-          </a:prstGeom>
-          <a:noFill/>
-          <a:ln/>
-        </p:spPr>
-        <p:txBody>
-          <a:bodyPr wrap="square" lIns="0" tIns="0" rIns="0" bIns="0" rtlCol="0" anchor="ctr"/>
-          <a:lstStyle/>
-          <a:p>
-            <a:pPr indent="0" marL="0">
-              <a:buNone/>
-            </a:pPr>
-            <a:r>
-              <a:rPr lang="en-US" sz="1100" b="1" dirty="0">
-                <a:solidFill>
-                  <a:srgbClr val="3B9DF5"/>
-                </a:solidFill>
-                <a:latin typeface="Arial" pitchFamily="34" charset="0"/>
-                <a:ea typeface="Arial" pitchFamily="34" charset="-122"/>
-                <a:cs typeface="Arial" pitchFamily="34" charset="-120"/>
-              </a:rPr>
-              <a:t>01</a:t>
-            </a:r>
-            <a:endParaRPr lang="en-US" sz="1100" dirty="0"/>
-          </a:p>
-        </p:txBody>
-      </p:sp>
-      <p:sp>
-        <p:nvSpPr>
-          <p:cNvPr id="6" name="Text 4"/>
-          <p:cNvSpPr/>
-          <p:nvPr/>
-        </p:nvSpPr>
-        <p:spPr>
-          <a:xfrm>
-            <a:off x="612648" y="2633472"/>
-            <a:ext cx="1554480" cy="512064"/>
-          </a:xfrm>
-          <a:prstGeom prst="rect">
-            <a:avLst/>
-          </a:prstGeom>
-          <a:noFill/>
-          <a:ln/>
-        </p:spPr>
-        <p:txBody>
-          <a:bodyPr wrap="square" lIns="0" tIns="0" rIns="0" bIns="0" rtlCol="0" anchor="t"/>
-          <a:lstStyle/>
-          <a:p>
-            <a:pPr indent="0" marL="0">
-              <a:lnSpc>
-                <a:spcPts val="1800"/>
-              </a:lnSpc>
-              <a:buNone/>
-            </a:pPr>
-            <a:r>
-              <a:rPr lang="en-US" sz="1450" b="1" dirty="0">
-                <a:solidFill>
-                  <a:srgbClr val="FFFFFF"/>
-                </a:solidFill>
-                <a:latin typeface="Arial" pitchFamily="34" charset="0"/>
-                <a:ea typeface="Arial" pitchFamily="34" charset="-122"/>
-                <a:cs typeface="Arial" pitchFamily="34" charset="-120"/>
-              </a:rPr>
-              <a:t>bronze</a:t>
-            </a:r>
-            <a:endParaRPr lang="en-US" sz="1450" dirty="0"/>
-          </a:p>
-        </p:txBody>
-      </p:sp>
-      <p:sp>
-        <p:nvSpPr>
-          <p:cNvPr id="7" name="Text 5"/>
-          <p:cNvSpPr/>
-          <p:nvPr/>
-        </p:nvSpPr>
-        <p:spPr>
-          <a:xfrm>
-            <a:off x="612648" y="3163824"/>
-            <a:ext cx="1554480" cy="621792"/>
-          </a:xfrm>
-          <a:prstGeom prst="rect">
-            <a:avLst/>
-          </a:prstGeom>
-          <a:noFill/>
-          <a:ln/>
-        </p:spPr>
-        <p:txBody>
-          <a:bodyPr wrap="square" lIns="0" tIns="0" rIns="0" bIns="0" rtlCol="0" anchor="ctr"/>
-          <a:lstStyle/>
-          <a:p>
-            <a:pPr indent="0" marL="0">
-              <a:lnSpc>
-                <a:spcPts val="1400"/>
-              </a:lnSpc>
-              <a:buNone/>
-            </a:pPr>
-            <a:r>
-              <a:rPr lang="en-US" sz="1050" dirty="0">
-                <a:solidFill>
-                  <a:srgbClr val="9BAAC0"/>
-                </a:solidFill>
-                <a:latin typeface="Arial" pitchFamily="34" charset="0"/>
-                <a:ea typeface="Arial" pitchFamily="34" charset="-122"/>
-                <a:cs typeface="Arial" pitchFamily="34" charset="-120"/>
-              </a:rPr>
-              <a:t>10 tabelas, 313.551 linhas. Tudo texto, sujeira preservada</a:t>
-            </a:r>
-            <a:endParaRPr lang="en-US" sz="1050" dirty="0"/>
-          </a:p>
-        </p:txBody>
-      </p:sp>
-      <p:sp>
-        <p:nvSpPr>
-          <p:cNvPr id="8" name="Shape 6"/>
-          <p:cNvSpPr/>
-          <p:nvPr/>
-        </p:nvSpPr>
-        <p:spPr>
-          <a:xfrm>
-            <a:off x="2532888" y="2194560"/>
-            <a:ext cx="1956816" cy="1737360"/>
-          </a:xfrm>
-          <a:prstGeom prst="roundRect">
-            <a:avLst>
-              <a:gd name="adj" fmla="val 2632"/>
-            </a:avLst>
-          </a:prstGeom>
-          <a:solidFill>
-            <a:srgbClr val="0D1522"/>
-          </a:solidFill>
-          <a:ln w="12700">
-            <a:solidFill>
-              <a:srgbClr val="1F3A5A"/>
-            </a:solidFill>
-            <a:prstDash val="solid"/>
-          </a:ln>
-        </p:spPr>
-      </p:sp>
-      <p:sp>
-        <p:nvSpPr>
-          <p:cNvPr id="9" name="Text 7"/>
-          <p:cNvSpPr/>
-          <p:nvPr/>
-        </p:nvSpPr>
-        <p:spPr>
-          <a:xfrm>
-            <a:off x="2734056" y="2359152"/>
-            <a:ext cx="1554480" cy="274320"/>
-          </a:xfrm>
-          <a:prstGeom prst="rect">
-            <a:avLst/>
-          </a:prstGeom>
-          <a:noFill/>
-          <a:ln/>
-        </p:spPr>
-        <p:txBody>
-          <a:bodyPr wrap="square" lIns="0" tIns="0" rIns="0" bIns="0" rtlCol="0" anchor="ctr"/>
-          <a:lstStyle/>
-          <a:p>
-            <a:pPr indent="0" marL="0">
-              <a:buNone/>
-            </a:pPr>
-            <a:r>
-              <a:rPr lang="en-US" sz="1100" b="1" dirty="0">
-                <a:solidFill>
-                  <a:srgbClr val="3B9DF5"/>
-                </a:solidFill>
-                <a:latin typeface="Arial" pitchFamily="34" charset="0"/>
-                <a:ea typeface="Arial" pitchFamily="34" charset="-122"/>
-                <a:cs typeface="Arial" pitchFamily="34" charset="-120"/>
-              </a:rPr>
-              <a:t>02</a:t>
-            </a:r>
-            <a:endParaRPr lang="en-US" sz="1100" dirty="0"/>
-          </a:p>
-        </p:txBody>
-      </p:sp>
-      <p:sp>
-        <p:nvSpPr>
-          <p:cNvPr id="10" name="Text 8"/>
-          <p:cNvSpPr/>
-          <p:nvPr/>
-        </p:nvSpPr>
-        <p:spPr>
-          <a:xfrm>
-            <a:off x="2734056" y="2633472"/>
-            <a:ext cx="1554480" cy="512064"/>
-          </a:xfrm>
-          <a:prstGeom prst="rect">
-            <a:avLst/>
-          </a:prstGeom>
-          <a:noFill/>
-          <a:ln/>
-        </p:spPr>
-        <p:txBody>
-          <a:bodyPr wrap="square" lIns="0" tIns="0" rIns="0" bIns="0" rtlCol="0" anchor="t"/>
-          <a:lstStyle/>
-          <a:p>
-            <a:pPr indent="0" marL="0">
-              <a:lnSpc>
-                <a:spcPts val="1800"/>
-              </a:lnSpc>
-              <a:buNone/>
-            </a:pPr>
-            <a:r>
-              <a:rPr lang="en-US" sz="1450" b="1" dirty="0">
-                <a:solidFill>
-                  <a:srgbClr val="FFFFFF"/>
-                </a:solidFill>
-                <a:latin typeface="Arial" pitchFamily="34" charset="0"/>
-                <a:ea typeface="Arial" pitchFamily="34" charset="-122"/>
-                <a:cs typeface="Arial" pitchFamily="34" charset="-120"/>
-              </a:rPr>
-              <a:t>silver</a:t>
-            </a:r>
-            <a:endParaRPr lang="en-US" sz="1450" dirty="0"/>
-          </a:p>
-        </p:txBody>
-      </p:sp>
-      <p:sp>
-        <p:nvSpPr>
-          <p:cNvPr id="11" name="Text 9"/>
-          <p:cNvSpPr/>
-          <p:nvPr/>
-        </p:nvSpPr>
-        <p:spPr>
-          <a:xfrm>
-            <a:off x="2734056" y="3163824"/>
-            <a:ext cx="1554480" cy="621792"/>
-          </a:xfrm>
-          <a:prstGeom prst="rect">
-            <a:avLst/>
-          </a:prstGeom>
-          <a:noFill/>
-          <a:ln/>
-        </p:spPr>
-        <p:txBody>
-          <a:bodyPr wrap="square" lIns="0" tIns="0" rIns="0" bIns="0" rtlCol="0" anchor="ctr"/>
-          <a:lstStyle/>
-          <a:p>
-            <a:pPr indent="0" marL="0">
-              <a:lnSpc>
-                <a:spcPts val="1400"/>
-              </a:lnSpc>
-              <a:buNone/>
-            </a:pPr>
-            <a:r>
-              <a:rPr lang="en-US" sz="1050" dirty="0">
-                <a:solidFill>
-                  <a:srgbClr val="9BAAC0"/>
-                </a:solidFill>
-                <a:latin typeface="Arial" pitchFamily="34" charset="0"/>
-                <a:ea typeface="Arial" pitchFamily="34" charset="-122"/>
-                <a:cs typeface="Arial" pitchFamily="34" charset="-120"/>
-              </a:rPr>
-              <a:t>Criada e vazia. É o trabalho de amanhã</a:t>
-            </a:r>
-            <a:endParaRPr lang="en-US" sz="1050" dirty="0"/>
-          </a:p>
-        </p:txBody>
-      </p:sp>
-      <p:sp>
-        <p:nvSpPr>
-          <p:cNvPr id="12" name="Shape 10"/>
-          <p:cNvSpPr/>
-          <p:nvPr/>
-        </p:nvSpPr>
-        <p:spPr>
-          <a:xfrm>
-            <a:off x="4654296" y="2194560"/>
-            <a:ext cx="1956816" cy="1737360"/>
-          </a:xfrm>
-          <a:prstGeom prst="roundRect">
-            <a:avLst>
-              <a:gd name="adj" fmla="val 2632"/>
-            </a:avLst>
-          </a:prstGeom>
-          <a:solidFill>
-            <a:srgbClr val="0D1522"/>
-          </a:solidFill>
-          <a:ln w="12700">
-            <a:solidFill>
-              <a:srgbClr val="1F3A5A"/>
-            </a:solidFill>
-            <a:prstDash val="solid"/>
-          </a:ln>
-        </p:spPr>
-      </p:sp>
-      <p:sp>
-        <p:nvSpPr>
-          <p:cNvPr id="13" name="Text 11"/>
-          <p:cNvSpPr/>
-          <p:nvPr/>
-        </p:nvSpPr>
-        <p:spPr>
-          <a:xfrm>
-            <a:off x="4855464" y="2359152"/>
-            <a:ext cx="1554480" cy="274320"/>
-          </a:xfrm>
-          <a:prstGeom prst="rect">
-            <a:avLst/>
-          </a:prstGeom>
-          <a:noFill/>
-          <a:ln/>
-        </p:spPr>
-        <p:txBody>
-          <a:bodyPr wrap="square" lIns="0" tIns="0" rIns="0" bIns="0" rtlCol="0" anchor="ctr"/>
-          <a:lstStyle/>
-          <a:p>
-            <a:pPr indent="0" marL="0">
-              <a:buNone/>
-            </a:pPr>
-            <a:r>
-              <a:rPr lang="en-US" sz="1100" b="1" dirty="0">
-                <a:solidFill>
-                  <a:srgbClr val="3B9DF5"/>
-                </a:solidFill>
-                <a:latin typeface="Arial" pitchFamily="34" charset="0"/>
-                <a:ea typeface="Arial" pitchFamily="34" charset="-122"/>
-                <a:cs typeface="Arial" pitchFamily="34" charset="-120"/>
-              </a:rPr>
-              <a:t>03</a:t>
-            </a:r>
-            <a:endParaRPr lang="en-US" sz="1100" dirty="0"/>
-          </a:p>
-        </p:txBody>
-      </p:sp>
-      <p:sp>
-        <p:nvSpPr>
-          <p:cNvPr id="14" name="Text 12"/>
-          <p:cNvSpPr/>
-          <p:nvPr/>
-        </p:nvSpPr>
-        <p:spPr>
-          <a:xfrm>
-            <a:off x="4855464" y="2633472"/>
-            <a:ext cx="1554480" cy="512064"/>
-          </a:xfrm>
-          <a:prstGeom prst="rect">
-            <a:avLst/>
-          </a:prstGeom>
-          <a:noFill/>
-          <a:ln/>
-        </p:spPr>
-        <p:txBody>
-          <a:bodyPr wrap="square" lIns="0" tIns="0" rIns="0" bIns="0" rtlCol="0" anchor="t"/>
-          <a:lstStyle/>
-          <a:p>
-            <a:pPr indent="0" marL="0">
-              <a:lnSpc>
-                <a:spcPts val="1800"/>
-              </a:lnSpc>
-              <a:buNone/>
-            </a:pPr>
-            <a:r>
-              <a:rPr lang="en-US" sz="1450" b="1" dirty="0">
-                <a:solidFill>
-                  <a:srgbClr val="FFFFFF"/>
-                </a:solidFill>
-                <a:latin typeface="Arial" pitchFamily="34" charset="0"/>
-                <a:ea typeface="Arial" pitchFamily="34" charset="-122"/>
-                <a:cs typeface="Arial" pitchFamily="34" charset="-120"/>
-              </a:rPr>
-              <a:t>gold</a:t>
-            </a:r>
-            <a:endParaRPr lang="en-US" sz="1450" dirty="0"/>
-          </a:p>
-        </p:txBody>
-      </p:sp>
-      <p:sp>
-        <p:nvSpPr>
-          <p:cNvPr id="15" name="Text 13"/>
-          <p:cNvSpPr/>
-          <p:nvPr/>
-        </p:nvSpPr>
-        <p:spPr>
-          <a:xfrm>
-            <a:off x="4855464" y="3163824"/>
-            <a:ext cx="1554480" cy="621792"/>
-          </a:xfrm>
-          <a:prstGeom prst="rect">
-            <a:avLst/>
-          </a:prstGeom>
-          <a:noFill/>
-          <a:ln/>
-        </p:spPr>
-        <p:txBody>
-          <a:bodyPr wrap="square" lIns="0" tIns="0" rIns="0" bIns="0" rtlCol="0" anchor="ctr"/>
-          <a:lstStyle/>
-          <a:p>
-            <a:pPr indent="0" marL="0">
-              <a:lnSpc>
-                <a:spcPts val="1400"/>
-              </a:lnSpc>
-              <a:buNone/>
-            </a:pPr>
-            <a:r>
-              <a:rPr lang="en-US" sz="1050" dirty="0">
-                <a:solidFill>
-                  <a:srgbClr val="9BAAC0"/>
-                </a:solidFill>
-                <a:latin typeface="Arial" pitchFamily="34" charset="0"/>
-                <a:ea typeface="Arial" pitchFamily="34" charset="-122"/>
-                <a:cs typeface="Arial" pitchFamily="34" charset="-120"/>
-              </a:rPr>
-              <a:t>Criada e vazia. Fatos e dimensões vêm depois</a:t>
-            </a:r>
-            <a:endParaRPr lang="en-US" sz="1050" dirty="0"/>
-          </a:p>
-        </p:txBody>
-      </p:sp>
-      <p:sp>
-        <p:nvSpPr>
-          <p:cNvPr id="16" name="Shape 14"/>
-          <p:cNvSpPr/>
-          <p:nvPr/>
-        </p:nvSpPr>
-        <p:spPr>
-          <a:xfrm>
-            <a:off x="6775704" y="2194560"/>
-            <a:ext cx="1956816" cy="1737360"/>
-          </a:xfrm>
-          <a:prstGeom prst="roundRect">
-            <a:avLst>
-              <a:gd name="adj" fmla="val 2632"/>
-            </a:avLst>
-          </a:prstGeom>
-          <a:solidFill>
-            <a:srgbClr val="0D1522"/>
-          </a:solidFill>
-          <a:ln w="12700">
-            <a:solidFill>
-              <a:srgbClr val="1F3A5A"/>
-            </a:solidFill>
-            <a:prstDash val="solid"/>
-          </a:ln>
-        </p:spPr>
-      </p:sp>
-      <p:sp>
-        <p:nvSpPr>
-          <p:cNvPr id="17" name="Text 15"/>
-          <p:cNvSpPr/>
-          <p:nvPr/>
-        </p:nvSpPr>
-        <p:spPr>
-          <a:xfrm>
-            <a:off x="6976872" y="2359152"/>
-            <a:ext cx="1554480" cy="274320"/>
-          </a:xfrm>
-          <a:prstGeom prst="rect">
-            <a:avLst/>
-          </a:prstGeom>
-          <a:noFill/>
-          <a:ln/>
-        </p:spPr>
-        <p:txBody>
-          <a:bodyPr wrap="square" lIns="0" tIns="0" rIns="0" bIns="0" rtlCol="0" anchor="ctr"/>
-          <a:lstStyle/>
-          <a:p>
-            <a:pPr indent="0" marL="0">
-              <a:buNone/>
-            </a:pPr>
-            <a:r>
-              <a:rPr lang="en-US" sz="1100" b="1" dirty="0">
-                <a:solidFill>
-                  <a:srgbClr val="3B9DF5"/>
-                </a:solidFill>
-                <a:latin typeface="Arial" pitchFamily="34" charset="0"/>
-                <a:ea typeface="Arial" pitchFamily="34" charset="-122"/>
-                <a:cs typeface="Arial" pitchFamily="34" charset="-120"/>
-              </a:rPr>
-              <a:t>04</a:t>
-            </a:r>
-            <a:endParaRPr lang="en-US" sz="1100" dirty="0"/>
-          </a:p>
-        </p:txBody>
-      </p:sp>
-      <p:sp>
-        <p:nvSpPr>
-          <p:cNvPr id="18" name="Text 16"/>
-          <p:cNvSpPr/>
-          <p:nvPr/>
-        </p:nvSpPr>
-        <p:spPr>
-          <a:xfrm>
-            <a:off x="6976872" y="2633472"/>
-            <a:ext cx="1554480" cy="512064"/>
-          </a:xfrm>
-          <a:prstGeom prst="rect">
-            <a:avLst/>
-          </a:prstGeom>
-          <a:noFill/>
-          <a:ln/>
-        </p:spPr>
-        <p:txBody>
-          <a:bodyPr wrap="square" lIns="0" tIns="0" rIns="0" bIns="0" rtlCol="0" anchor="t"/>
-          <a:lstStyle/>
-          <a:p>
-            <a:pPr indent="0" marL="0">
-              <a:lnSpc>
-                <a:spcPts val="1800"/>
-              </a:lnSpc>
-              <a:buNone/>
-            </a:pPr>
-            <a:r>
-              <a:rPr lang="en-US" sz="1450" b="1" dirty="0">
-                <a:solidFill>
-                  <a:srgbClr val="FFFFFF"/>
-                </a:solidFill>
-                <a:latin typeface="Arial" pitchFamily="34" charset="0"/>
-                <a:ea typeface="Arial" pitchFamily="34" charset="-122"/>
-                <a:cs typeface="Arial" pitchFamily="34" charset="-120"/>
-              </a:rPr>
-              <a:t>job</a:t>
-            </a:r>
-            <a:endParaRPr lang="en-US" sz="1450" dirty="0"/>
-          </a:p>
-        </p:txBody>
-      </p:sp>
-      <p:sp>
-        <p:nvSpPr>
-          <p:cNvPr id="19" name="Text 17"/>
-          <p:cNvSpPr/>
-          <p:nvPr/>
-        </p:nvSpPr>
-        <p:spPr>
-          <a:xfrm>
-            <a:off x="6976872" y="3163824"/>
-            <a:ext cx="1554480" cy="621792"/>
-          </a:xfrm>
-          <a:prstGeom prst="rect">
-            <a:avLst/>
-          </a:prstGeom>
-          <a:noFill/>
-          <a:ln/>
-        </p:spPr>
-        <p:txBody>
-          <a:bodyPr wrap="square" lIns="0" tIns="0" rIns="0" bIns="0" rtlCol="0" anchor="ctr"/>
-          <a:lstStyle/>
-          <a:p>
-            <a:pPr indent="0" marL="0">
-              <a:lnSpc>
-                <a:spcPts val="1400"/>
-              </a:lnSpc>
-              <a:buNone/>
-            </a:pPr>
-            <a:r>
-              <a:rPr lang="en-US" sz="1050" dirty="0">
-                <a:solidFill>
-                  <a:srgbClr val="9BAAC0"/>
-                </a:solidFill>
-                <a:latin typeface="Arial" pitchFamily="34" charset="0"/>
-                <a:ea typeface="Arial" pitchFamily="34" charset="-122"/>
-                <a:cs typeface="Arial" pitchFamily="34" charset="-120"/>
-              </a:rPr>
-              <a:t>Deploy por bundle, 2 tarefas, 9 verificações passando</a:t>
-            </a:r>
-            <a:endParaRPr lang="en-US" sz="1050" dirty="0"/>
-          </a:p>
-        </p:txBody>
-      </p:sp>
-      <p:sp>
-        <p:nvSpPr>
-          <p:cNvPr id="20" name="Text 18"/>
-          <p:cNvSpPr/>
-          <p:nvPr/>
-        </p:nvSpPr>
-        <p:spPr>
-          <a:xfrm>
-            <a:off x="411480" y="4681728"/>
-            <a:ext cx="2743200" cy="228600"/>
-          </a:xfrm>
-          <a:prstGeom prst="rect">
-            <a:avLst/>
-          </a:prstGeom>
-          <a:noFill/>
-          <a:ln/>
-        </p:spPr>
-        <p:txBody>
-          <a:bodyPr wrap="square" lIns="0" tIns="0" rIns="0" bIns="0" rtlCol="0" anchor="ctr"/>
-          <a:lstStyle/>
-          <a:p>
-            <a:pPr indent="0" marL="0">
-              <a:buNone/>
-            </a:pPr>
-            <a:r>
-              <a:rPr lang="en-US" sz="800" b="1" spc="200" kern="0" dirty="0">
-                <a:solidFill>
-                  <a:srgbClr val="566A85"/>
-                </a:solidFill>
-                <a:latin typeface="Arial" pitchFamily="34" charset="0"/>
-                <a:ea typeface="Arial" pitchFamily="34" charset="-122"/>
-                <a:cs typeface="Arial" pitchFamily="34" charset="-120"/>
-              </a:rPr>
-              <a:t>JORNADA DE DADOS</a:t>
-            </a:r>
-            <a:endParaRPr lang="en-US" sz="800" dirty="0"/>
-          </a:p>
-        </p:txBody>
-      </p:sp>
-    </p:spTree>
-  </p:cSld>
-  <p:clrMapOvr>
-    <a:masterClrMapping/>
-  </p:clrMapOvr>
-</p:sld>
-</file>
-
-<file path=ppt/slides/slide51.xml><?xml version="1.0" encoding="utf-8"?>
 <p:sld xmlns:a="http://schemas.openxmlformats.org/drawingml/2006/main" xmlns:r="http://schemas.openxmlformats.org/officeDocument/2006/relationships" xmlns:p="http://schemas.openxmlformats.org/presentationml/2006/main">
   <p:cSld name="Slide 42">
     <p:bg>
@@ -36715,7 +36059,7 @@
 </p:sld>
 </file>
 
-<file path=ppt/slides/slide52.xml><?xml version="1.0" encoding="utf-8"?>
+<file path=ppt/slides/slide51.xml><?xml version="1.0" encoding="utf-8"?>
 <p:sld xmlns:a="http://schemas.openxmlformats.org/drawingml/2006/main" xmlns:r="http://schemas.openxmlformats.org/officeDocument/2006/relationships" xmlns:p="http://schemas.openxmlformats.org/presentationml/2006/main">
   <p:cSld name="Slide 43">
     <p:bg>
@@ -37163,7 +36507,7 @@
 </p:sld>
 </file>
 
-<file path=ppt/slides/slide53.xml><?xml version="1.0" encoding="utf-8"?>
+<file path=ppt/slides/slide52.xml><?xml version="1.0" encoding="utf-8"?>
 <p:sld xmlns:a="http://schemas.openxmlformats.org/drawingml/2006/main" xmlns:r="http://schemas.openxmlformats.org/officeDocument/2006/relationships" xmlns:p="http://schemas.openxmlformats.org/presentationml/2006/main">
   <p:cSld name="Slide 44">
     <p:bg>
@@ -38635,7 +37979,7 @@
 </p:sld>
 </file>
 
-<file path=ppt/slides/slide54.xml><?xml version="1.0" encoding="utf-8"?>
+<file path=ppt/slides/slide53.xml><?xml version="1.0" encoding="utf-8"?>
 <p:sld xmlns:a="http://schemas.openxmlformats.org/drawingml/2006/main" xmlns:r="http://schemas.openxmlformats.org/officeDocument/2006/relationships" xmlns:p="http://schemas.openxmlformats.org/presentationml/2006/main">
   <p:cSld name="Slide 45">
     <p:bg>
@@ -39193,7 +38537,7 @@
 </p:sld>
 </file>
 
-<file path=ppt/slides/slide55.xml><?xml version="1.0" encoding="utf-8"?>
+<file path=ppt/slides/slide54.xml><?xml version="1.0" encoding="utf-8"?>
 <p:sld xmlns:a="http://schemas.openxmlformats.org/drawingml/2006/main" xmlns:r="http://schemas.openxmlformats.org/officeDocument/2006/relationships" xmlns:p="http://schemas.openxmlformats.org/presentationml/2006/main">
   <p:cSld name="Slide 46">
     <p:bg>
@@ -39936,7 +39280,7 @@
 </p:sld>
 </file>
 
-<file path=ppt/slides/slide56.xml><?xml version="1.0" encoding="utf-8"?>
+<file path=ppt/slides/slide55.xml><?xml version="1.0" encoding="utf-8"?>
 <p:sld xmlns:a="http://schemas.openxmlformats.org/drawingml/2006/main" xmlns:r="http://schemas.openxmlformats.org/officeDocument/2006/relationships" xmlns:p="http://schemas.openxmlformats.org/presentationml/2006/main">
   <p:cSld name="Slide 47">
     <p:bg>
@@ -40353,7 +39697,7 @@
 </p:sld>
 </file>
 
-<file path=ppt/slides/slide57.xml><?xml version="1.0" encoding="utf-8"?>
+<file path=ppt/slides/slide56.xml><?xml version="1.0" encoding="utf-8"?>
 <p:sld xmlns:a="http://schemas.openxmlformats.org/drawingml/2006/main" xmlns:r="http://schemas.openxmlformats.org/officeDocument/2006/relationships" xmlns:p="http://schemas.openxmlformats.org/presentationml/2006/main">
   <p:cSld name="Slide 48">
     <p:bg>
@@ -41135,7 +40479,7 @@
 </p:sld>
 </file>
 
-<file path=ppt/slides/slide58.xml><?xml version="1.0" encoding="utf-8"?>
+<file path=ppt/slides/slide57.xml><?xml version="1.0" encoding="utf-8"?>
 <p:sld xmlns:a="http://schemas.openxmlformats.org/drawingml/2006/main" xmlns:r="http://schemas.openxmlformats.org/officeDocument/2006/relationships" xmlns:p="http://schemas.openxmlformats.org/presentationml/2006/main">
   <p:cSld name="Slide 49">
     <p:bg>
@@ -41369,6 +40713,690 @@
       <p:sp>
         <p:nvSpPr>
           <p:cNvPr id="7" name="Text 5"/>
+          <p:cNvSpPr/>
+          <p:nvPr/>
+        </p:nvSpPr>
+        <p:spPr>
+          <a:xfrm>
+            <a:off x="411480" y="4681728"/>
+            <a:ext cx="2743200" cy="228600"/>
+          </a:xfrm>
+          <a:prstGeom prst="rect">
+            <a:avLst/>
+          </a:prstGeom>
+          <a:noFill/>
+          <a:ln/>
+        </p:spPr>
+        <p:txBody>
+          <a:bodyPr wrap="square" lIns="0" tIns="0" rIns="0" bIns="0" rtlCol="0" anchor="ctr"/>
+          <a:lstStyle/>
+          <a:p>
+            <a:pPr indent="0" marL="0">
+              <a:buNone/>
+            </a:pPr>
+            <a:r>
+              <a:rPr lang="en-US" sz="800" b="1" spc="200" kern="0" dirty="0">
+                <a:solidFill>
+                  <a:srgbClr val="566A85"/>
+                </a:solidFill>
+                <a:latin typeface="Arial" pitchFamily="34" charset="0"/>
+                <a:ea typeface="Arial" pitchFamily="34" charset="-122"/>
+                <a:cs typeface="Arial" pitchFamily="34" charset="-120"/>
+              </a:rPr>
+              <a:t>JORNADA DE DADOS</a:t>
+            </a:r>
+            <a:endParaRPr lang="en-US" sz="800" dirty="0"/>
+          </a:p>
+        </p:txBody>
+      </p:sp>
+    </p:spTree>
+  </p:cSld>
+  <p:clrMapOvr>
+    <a:masterClrMapping/>
+  </p:clrMapOvr>
+</p:sld>
+</file>
+
+<file path=ppt/slides/slide58.xml><?xml version="1.0" encoding="utf-8"?>
+<p:sld xmlns:a="http://schemas.openxmlformats.org/drawingml/2006/main" xmlns:p="http://schemas.openxmlformats.org/presentationml/2006/main" xmlns:r="http://schemas.openxmlformats.org/officeDocument/2006/relationships">
+  <p:cSld>
+    <p:spTree>
+      <p:nvGrpSpPr>
+        <p:cNvPr id="1" name=""/>
+        <p:cNvGrpSpPr/>
+        <p:nvPr/>
+      </p:nvGrpSpPr>
+      <p:grpSpPr/>
+      <p:sp>
+        <p:nvSpPr>
+          <p:cNvPr id="2" name="Shape 0"/>
+          <p:cNvSpPr/>
+          <p:nvPr/>
+        </p:nvSpPr>
+        <p:spPr>
+          <a:xfrm>
+            <a:off x="0" y="0"/>
+            <a:ext cx="146304" cy="5143500"/>
+          </a:xfrm>
+          <a:prstGeom prst="rect">
+            <a:avLst/>
+          </a:prstGeom>
+          <a:solidFill>
+            <a:srgbClr val="3B9DF5"/>
+          </a:solidFill>
+          <a:ln w="12700">
+            <a:solidFill>
+              <a:srgbClr val="333333"/>
+            </a:solidFill>
+            <a:prstDash val="solid"/>
+          </a:ln>
+        </p:spPr>
+        <p:txBody>
+          <a:bodyPr/>
+          <a:p/>
+        </p:txBody>
+      </p:sp>
+      <p:sp>
+        <p:nvSpPr>
+          <p:cNvPr id="3" name="Text 1"/>
+          <p:cNvSpPr/>
+          <p:nvPr/>
+        </p:nvSpPr>
+        <p:spPr>
+          <a:xfrm>
+            <a:off x="640080" y="1417320"/>
+            <a:ext cx="1828800" cy="457200"/>
+          </a:xfrm>
+          <a:prstGeom prst="rect">
+            <a:avLst/>
+          </a:prstGeom>
+          <a:noFill/>
+          <a:ln/>
+        </p:spPr>
+        <p:txBody>
+          <a:bodyPr wrap="square" lIns="0" tIns="0" rIns="0" bIns="0" rtlCol="0" anchor="ctr"/>
+          <a:lstStyle/>
+          <a:p>
+            <a:pPr indent="0" marL="0">
+              <a:buNone/>
+            </a:pPr>
+            <a:r>
+              <a:rPr lang="en-US" sz="1300" b="1" spc="200" kern="0" dirty="0">
+                <a:solidFill>
+                  <a:srgbClr val="3B9DF5"/>
+                </a:solidFill>
+                <a:latin typeface="Arial" pitchFamily="34" charset="0"/>
+                <a:ea typeface="Arial" pitchFamily="34" charset="-122"/>
+                <a:cs typeface="Arial" pitchFamily="34" charset="-120"/>
+              </a:rPr>
+              <a:t>DINÂMICA 01</a:t>
+            </a:r>
+            <a:endParaRPr lang="en-US" sz="1300" dirty="0"/>
+          </a:p>
+        </p:txBody>
+      </p:sp>
+      <p:sp>
+        <p:nvSpPr>
+          <p:cNvPr id="4" name="Text 2"/>
+          <p:cNvSpPr/>
+          <p:nvPr/>
+        </p:nvSpPr>
+        <p:spPr>
+          <a:xfrm>
+            <a:off x="640080" y="1828800"/>
+            <a:ext cx="7863840" cy="1371600"/>
+          </a:xfrm>
+          <a:prstGeom prst="rect">
+            <a:avLst/>
+          </a:prstGeom>
+          <a:noFill/>
+          <a:ln/>
+        </p:spPr>
+        <p:txBody>
+          <a:bodyPr wrap="square" lIns="0" tIns="0" rIns="0" bIns="0" rtlCol="0" anchor="ctr"/>
+          <a:lstStyle/>
+          <a:p>
+            <a:pPr indent="0" marL="0">
+              <a:lnSpc>
+                <a:spcPts val="4800"/>
+              </a:lnSpc>
+              <a:buNone/>
+            </a:pPr>
+            <a:r>
+              <a:rPr lang="en-US" sz="4200" b="1" dirty="0">
+                <a:solidFill>
+                  <a:srgbClr val="FFFFFF"/>
+                </a:solidFill>
+                <a:latin typeface="Arial" pitchFamily="34" charset="0"/>
+                <a:ea typeface="Arial" pitchFamily="34" charset="-122"/>
+                <a:cs typeface="Arial" pitchFamily="34" charset="-120"/>
+              </a:rPr>
+              <a:t>Como poderíamos…</a:t>
+            </a:r>
+            <a:endParaRPr lang="en-US" sz="4200" dirty="0"/>
+          </a:p>
+        </p:txBody>
+      </p:sp>
+      <p:sp>
+        <p:nvSpPr>
+          <p:cNvPr id="5" name="Text 3"/>
+          <p:cNvSpPr/>
+          <p:nvPr/>
+        </p:nvSpPr>
+        <p:spPr>
+          <a:xfrm>
+            <a:off x="640080" y="3246120"/>
+            <a:ext cx="7315200" cy="548640"/>
+          </a:xfrm>
+          <a:prstGeom prst="rect">
+            <a:avLst/>
+          </a:prstGeom>
+          <a:noFill/>
+          <a:ln/>
+        </p:spPr>
+        <p:txBody>
+          <a:bodyPr wrap="square" lIns="0" tIns="0" rIns="0" bIns="0" rtlCol="0" anchor="ctr"/>
+          <a:lstStyle/>
+          <a:p>
+            <a:pPr indent="0" marL="0">
+              <a:buNone/>
+            </a:pPr>
+            <a:r>
+              <a:rPr lang="en-US" sz="1500" dirty="0">
+                <a:solidFill>
+                  <a:srgbClr val="9BAAC0"/>
+                </a:solidFill>
+                <a:latin typeface="Arial" pitchFamily="34" charset="0"/>
+                <a:ea typeface="Arial" pitchFamily="34" charset="-122"/>
+                <a:cs typeface="Arial" pitchFamily="34" charset="-120"/>
+              </a:rPr>
+              <a:t>Todo problema vira pergunta. Ninguém propõe solução ainda.</a:t>
+            </a:r>
+            <a:endParaRPr lang="en-US" sz="1500" dirty="0"/>
+          </a:p>
+        </p:txBody>
+      </p:sp>
+    </p:spTree>
+  </p:cSld>
+  <p:clrMapOvr>
+    <a:masterClrMapping/>
+  </p:clrMapOvr>
+</p:sld>
+</file>
+
+<file path=ppt/slides/slide59.xml><?xml version="1.0" encoding="utf-8"?>
+<p:sld xmlns:a="http://schemas.openxmlformats.org/drawingml/2006/main" xmlns:p="http://schemas.openxmlformats.org/presentationml/2006/main" xmlns:r="http://schemas.openxmlformats.org/officeDocument/2006/relationships">
+  <p:cSld>
+    <p:spTree>
+      <p:nvGrpSpPr>
+        <p:cNvPr id="1" name=""/>
+        <p:cNvGrpSpPr/>
+        <p:nvPr/>
+      </p:nvGrpSpPr>
+      <p:grpSpPr/>
+      <p:sp>
+        <p:nvSpPr>
+          <p:cNvPr id="2" name="Text 0"/>
+          <p:cNvSpPr/>
+          <p:nvPr/>
+        </p:nvSpPr>
+        <p:spPr>
+          <a:xfrm>
+            <a:off x="411480" y="411480"/>
+            <a:ext cx="7315200" cy="256032"/>
+          </a:xfrm>
+          <a:prstGeom prst="rect">
+            <a:avLst/>
+          </a:prstGeom>
+          <a:noFill/>
+          <a:ln/>
+        </p:spPr>
+        <p:txBody>
+          <a:bodyPr wrap="square" lIns="0" tIns="0" rIns="0" bIns="0" rtlCol="0" anchor="ctr"/>
+          <a:lstStyle/>
+          <a:p>
+            <a:pPr indent="0" marL="0">
+              <a:buNone/>
+            </a:pPr>
+            <a:r>
+              <a:rPr lang="en-US" sz="1100" b="1" spc="160" kern="0" dirty="0">
+                <a:solidFill>
+                  <a:srgbClr val="3B9DF5"/>
+                </a:solidFill>
+                <a:latin typeface="Arial" pitchFamily="34" charset="0"/>
+                <a:ea typeface="Arial" pitchFamily="34" charset="-122"/>
+                <a:cs typeface="Arial" pitchFamily="34" charset="-120"/>
+              </a:rPr>
+              <a:t>DINÂMICA 01 · O QUE A TURMA RESPONDEU</a:t>
+            </a:r>
+            <a:endParaRPr lang="en-US" sz="1100" dirty="0"/>
+          </a:p>
+        </p:txBody>
+      </p:sp>
+      <p:sp>
+        <p:nvSpPr>
+          <p:cNvPr id="3" name="Text 1"/>
+          <p:cNvSpPr/>
+          <p:nvPr/>
+        </p:nvSpPr>
+        <p:spPr>
+          <a:xfrm>
+            <a:off x="411480" y="822960"/>
+            <a:ext cx="8321040" cy="1005840"/>
+          </a:xfrm>
+          <a:prstGeom prst="rect">
+            <a:avLst/>
+          </a:prstGeom>
+          <a:noFill/>
+          <a:ln/>
+        </p:spPr>
+        <p:txBody>
+          <a:bodyPr wrap="square" lIns="0" tIns="0" rIns="0" bIns="0" rtlCol="0" anchor="ctr"/>
+          <a:lstStyle/>
+          <a:p>
+            <a:pPr indent="0" marL="0">
+              <a:lnSpc>
+                <a:spcPts val="4000"/>
+              </a:lnSpc>
+              <a:buNone/>
+            </a:pPr>
+            <a:r>
+              <a:rPr lang="en-US" sz="3100" b="1" dirty="0">
+                <a:solidFill>
+                  <a:srgbClr val="FFFFFF"/>
+                </a:solidFill>
+                <a:latin typeface="Arial" pitchFamily="34" charset="0"/>
+                <a:ea typeface="Arial" pitchFamily="34" charset="-122"/>
+                <a:cs typeface="Arial" pitchFamily="34" charset="-120"/>
+              </a:rPr>
+              <a:t>Como poderíamos…</a:t>
+            </a:r>
+            <a:endParaRPr lang="en-US" sz="3100" dirty="0"/>
+          </a:p>
+        </p:txBody>
+      </p:sp>
+      <p:sp>
+        <p:nvSpPr>
+          <p:cNvPr id="4" name="Shape 2"/>
+          <p:cNvSpPr/>
+          <p:nvPr/>
+        </p:nvSpPr>
+        <p:spPr>
+          <a:xfrm>
+            <a:off x="457200" y="2157984"/>
+            <a:ext cx="91440" cy="91440"/>
+          </a:xfrm>
+          <a:prstGeom prst="ellipse">
+            <a:avLst/>
+          </a:prstGeom>
+          <a:solidFill>
+            <a:srgbClr val="3B9DF5"/>
+          </a:solidFill>
+          <a:ln w="12700">
+            <a:solidFill>
+              <a:srgbClr val="333333"/>
+            </a:solidFill>
+            <a:prstDash val="solid"/>
+          </a:ln>
+        </p:spPr>
+        <p:txBody>
+          <a:bodyPr/>
+          <a:p/>
+        </p:txBody>
+      </p:sp>
+      <p:sp>
+        <p:nvSpPr>
+          <p:cNvPr id="5" name="Text 3"/>
+          <p:cNvSpPr/>
+          <p:nvPr/>
+        </p:nvSpPr>
+        <p:spPr>
+          <a:xfrm>
+            <a:off x="713232" y="2057400"/>
+            <a:ext cx="7955280" cy="347472"/>
+          </a:xfrm>
+          <a:prstGeom prst="rect">
+            <a:avLst/>
+          </a:prstGeom>
+          <a:noFill/>
+          <a:ln/>
+        </p:spPr>
+        <p:txBody>
+          <a:bodyPr wrap="square" lIns="0" tIns="0" rIns="0" bIns="0" rtlCol="0" anchor="ctr"/>
+          <a:lstStyle/>
+          <a:p>
+            <a:pPr indent="0" marL="0">
+              <a:buNone/>
+            </a:pPr>
+            <a:r>
+              <a:rPr lang="en-US" sz="1500" dirty="0">
+                <a:solidFill>
+                  <a:srgbClr val="D9CFD1"/>
+                </a:solidFill>
+                <a:latin typeface="Arial" pitchFamily="34" charset="0"/>
+                <a:ea typeface="Arial" pitchFamily="34" charset="-122"/>
+                <a:cs typeface="Arial" pitchFamily="34" charset="-120"/>
+              </a:rPr>
+              <a:t>…saber quem vai comprar antes de o vendedor sair para a rua?</a:t>
+            </a:r>
+            <a:endParaRPr lang="en-US" sz="1500" dirty="0"/>
+          </a:p>
+        </p:txBody>
+      </p:sp>
+      <p:sp>
+        <p:nvSpPr>
+          <p:cNvPr id="6" name="Shape 4"/>
+          <p:cNvSpPr/>
+          <p:nvPr/>
+        </p:nvSpPr>
+        <p:spPr>
+          <a:xfrm>
+            <a:off x="457200" y="2578608"/>
+            <a:ext cx="91440" cy="91440"/>
+          </a:xfrm>
+          <a:prstGeom prst="ellipse">
+            <a:avLst/>
+          </a:prstGeom>
+          <a:solidFill>
+            <a:srgbClr val="3B9DF5"/>
+          </a:solidFill>
+          <a:ln w="12700">
+            <a:solidFill>
+              <a:srgbClr val="333333"/>
+            </a:solidFill>
+            <a:prstDash val="solid"/>
+          </a:ln>
+        </p:spPr>
+        <p:txBody>
+          <a:bodyPr/>
+          <a:p/>
+        </p:txBody>
+      </p:sp>
+      <p:sp>
+        <p:nvSpPr>
+          <p:cNvPr id="7" name="Text 5"/>
+          <p:cNvSpPr/>
+          <p:nvPr/>
+        </p:nvSpPr>
+        <p:spPr>
+          <a:xfrm>
+            <a:off x="713232" y="2478024"/>
+            <a:ext cx="7955280" cy="347472"/>
+          </a:xfrm>
+          <a:prstGeom prst="rect">
+            <a:avLst/>
+          </a:prstGeom>
+          <a:noFill/>
+          <a:ln/>
+        </p:spPr>
+        <p:txBody>
+          <a:bodyPr wrap="square" lIns="0" tIns="0" rIns="0" bIns="0" rtlCol="0" anchor="ctr"/>
+          <a:lstStyle/>
+          <a:p>
+            <a:pPr indent="0" marL="0">
+              <a:buNone/>
+            </a:pPr>
+            <a:r>
+              <a:rPr lang="en-US" sz="1500" dirty="0">
+                <a:solidFill>
+                  <a:srgbClr val="D9CFD1"/>
+                </a:solidFill>
+                <a:latin typeface="Arial" pitchFamily="34" charset="0"/>
+                <a:ea typeface="Arial" pitchFamily="34" charset="-122"/>
+                <a:cs typeface="Arial" pitchFamily="34" charset="-120"/>
+              </a:rPr>
+              <a:t>…perceber que um cliente sumiu enquanto ainda dá para trazer de volta?</a:t>
+            </a:r>
+            <a:endParaRPr lang="en-US" sz="1500" dirty="0"/>
+          </a:p>
+        </p:txBody>
+      </p:sp>
+      <p:sp>
+        <p:nvSpPr>
+          <p:cNvPr id="8" name="Shape 6"/>
+          <p:cNvSpPr/>
+          <p:nvPr/>
+        </p:nvSpPr>
+        <p:spPr>
+          <a:xfrm>
+            <a:off x="457200" y="2999232"/>
+            <a:ext cx="91440" cy="91440"/>
+          </a:xfrm>
+          <a:prstGeom prst="ellipse">
+            <a:avLst/>
+          </a:prstGeom>
+          <a:solidFill>
+            <a:srgbClr val="3B9DF5"/>
+          </a:solidFill>
+          <a:ln w="12700">
+            <a:solidFill>
+              <a:srgbClr val="333333"/>
+            </a:solidFill>
+            <a:prstDash val="solid"/>
+          </a:ln>
+        </p:spPr>
+        <p:txBody>
+          <a:bodyPr/>
+          <a:p/>
+        </p:txBody>
+      </p:sp>
+      <p:sp>
+        <p:nvSpPr>
+          <p:cNvPr id="9" name="Text 7"/>
+          <p:cNvSpPr/>
+          <p:nvPr/>
+        </p:nvSpPr>
+        <p:spPr>
+          <a:xfrm>
+            <a:off x="713232" y="2898648"/>
+            <a:ext cx="7955280" cy="347472"/>
+          </a:xfrm>
+          <a:prstGeom prst="rect">
+            <a:avLst/>
+          </a:prstGeom>
+          <a:noFill/>
+          <a:ln/>
+        </p:spPr>
+        <p:txBody>
+          <a:bodyPr wrap="square" lIns="0" tIns="0" rIns="0" bIns="0" rtlCol="0" anchor="ctr"/>
+          <a:lstStyle/>
+          <a:p>
+            <a:pPr indent="0" marL="0">
+              <a:buNone/>
+            </a:pPr>
+            <a:r>
+              <a:rPr lang="en-US" sz="1500" dirty="0">
+                <a:solidFill>
+                  <a:srgbClr val="D9CFD1"/>
+                </a:solidFill>
+                <a:latin typeface="Arial" pitchFamily="34" charset="0"/>
+                <a:ea typeface="Arial" pitchFamily="34" charset="-122"/>
+                <a:cs typeface="Arial" pitchFamily="34" charset="-120"/>
+              </a:rPr>
+              <a:t>…evitar as 4.946 visitas que encontram o cliente ausente?</a:t>
+            </a:r>
+            <a:endParaRPr lang="en-US" sz="1500" dirty="0"/>
+          </a:p>
+        </p:txBody>
+      </p:sp>
+      <p:sp>
+        <p:nvSpPr>
+          <p:cNvPr id="10" name="Shape 8"/>
+          <p:cNvSpPr/>
+          <p:nvPr/>
+        </p:nvSpPr>
+        <p:spPr>
+          <a:xfrm>
+            <a:off x="457200" y="3419856"/>
+            <a:ext cx="91440" cy="91440"/>
+          </a:xfrm>
+          <a:prstGeom prst="ellipse">
+            <a:avLst/>
+          </a:prstGeom>
+          <a:solidFill>
+            <a:srgbClr val="3B9DF5"/>
+          </a:solidFill>
+          <a:ln w="12700">
+            <a:solidFill>
+              <a:srgbClr val="333333"/>
+            </a:solidFill>
+            <a:prstDash val="solid"/>
+          </a:ln>
+        </p:spPr>
+        <p:txBody>
+          <a:bodyPr/>
+          <a:p/>
+        </p:txBody>
+      </p:sp>
+      <p:sp>
+        <p:nvSpPr>
+          <p:cNvPr id="11" name="Text 9"/>
+          <p:cNvSpPr/>
+          <p:nvPr/>
+        </p:nvSpPr>
+        <p:spPr>
+          <a:xfrm>
+            <a:off x="713232" y="3319272"/>
+            <a:ext cx="7955280" cy="347472"/>
+          </a:xfrm>
+          <a:prstGeom prst="rect">
+            <a:avLst/>
+          </a:prstGeom>
+          <a:noFill/>
+          <a:ln/>
+        </p:spPr>
+        <p:txBody>
+          <a:bodyPr wrap="square" lIns="0" tIns="0" rIns="0" bIns="0" rtlCol="0" anchor="ctr"/>
+          <a:lstStyle/>
+          <a:p>
+            <a:pPr indent="0" marL="0">
+              <a:buNone/>
+            </a:pPr>
+            <a:r>
+              <a:rPr lang="en-US" sz="1500" dirty="0">
+                <a:solidFill>
+                  <a:srgbClr val="D9CFD1"/>
+                </a:solidFill>
+                <a:latin typeface="Arial" pitchFamily="34" charset="0"/>
+                <a:ea typeface="Arial" pitchFamily="34" charset="-122"/>
+                <a:cs typeface="Arial" pitchFamily="34" charset="-120"/>
+              </a:rPr>
+              <a:t>…saber em julho quanto outubro vai vender, para comprar estoque a tempo?</a:t>
+            </a:r>
+            <a:endParaRPr lang="en-US" sz="1500" dirty="0"/>
+          </a:p>
+        </p:txBody>
+      </p:sp>
+      <p:sp>
+        <p:nvSpPr>
+          <p:cNvPr id="12" name="Shape 10"/>
+          <p:cNvSpPr/>
+          <p:nvPr/>
+        </p:nvSpPr>
+        <p:spPr>
+          <a:xfrm>
+            <a:off x="457200" y="3840480"/>
+            <a:ext cx="91440" cy="91440"/>
+          </a:xfrm>
+          <a:prstGeom prst="ellipse">
+            <a:avLst/>
+          </a:prstGeom>
+          <a:solidFill>
+            <a:srgbClr val="3B9DF5"/>
+          </a:solidFill>
+          <a:ln w="12700">
+            <a:solidFill>
+              <a:srgbClr val="333333"/>
+            </a:solidFill>
+            <a:prstDash val="solid"/>
+          </a:ln>
+        </p:spPr>
+        <p:txBody>
+          <a:bodyPr/>
+          <a:p/>
+        </p:txBody>
+      </p:sp>
+      <p:sp>
+        <p:nvSpPr>
+          <p:cNvPr id="13" name="Text 11"/>
+          <p:cNvSpPr/>
+          <p:nvPr/>
+        </p:nvSpPr>
+        <p:spPr>
+          <a:xfrm>
+            <a:off x="713232" y="3739896"/>
+            <a:ext cx="7955280" cy="347472"/>
+          </a:xfrm>
+          <a:prstGeom prst="rect">
+            <a:avLst/>
+          </a:prstGeom>
+          <a:noFill/>
+          <a:ln/>
+        </p:spPr>
+        <p:txBody>
+          <a:bodyPr wrap="square" lIns="0" tIns="0" rIns="0" bIns="0" rtlCol="0" anchor="ctr"/>
+          <a:lstStyle/>
+          <a:p>
+            <a:pPr indent="0" marL="0">
+              <a:buNone/>
+            </a:pPr>
+            <a:r>
+              <a:rPr lang="en-US" sz="1500" dirty="0">
+                <a:solidFill>
+                  <a:srgbClr val="D9CFD1"/>
+                </a:solidFill>
+                <a:latin typeface="Arial" pitchFamily="34" charset="0"/>
+                <a:ea typeface="Arial" pitchFamily="34" charset="-122"/>
+                <a:cs typeface="Arial" pitchFamily="34" charset="-120"/>
+              </a:rPr>
+              <a:t>…descobrir se vender mais está dando lucro, e não só faturamento?</a:t>
+            </a:r>
+            <a:endParaRPr lang="en-US" sz="1500" dirty="0"/>
+          </a:p>
+        </p:txBody>
+      </p:sp>
+      <p:sp>
+        <p:nvSpPr>
+          <p:cNvPr id="14" name="Text 12"/>
+          <p:cNvSpPr/>
+          <p:nvPr/>
+        </p:nvSpPr>
+        <p:spPr>
+          <a:xfrm>
+            <a:off x="411480" y="4297680"/>
+            <a:ext cx="8229600" cy="365760"/>
+          </a:xfrm>
+          <a:prstGeom prst="rect">
+            <a:avLst/>
+          </a:prstGeom>
+          <a:noFill/>
+          <a:ln/>
+        </p:spPr>
+        <p:txBody>
+          <a:bodyPr wrap="square" lIns="0" tIns="0" rIns="0" bIns="0" rtlCol="0" anchor="ctr"/>
+          <a:lstStyle/>
+          <a:p>
+            <a:pPr indent="0" marL="0">
+              <a:buNone/>
+            </a:pPr>
+            <a:r>
+              <a:rPr lang="en-US" sz="1300" dirty="0">
+                <a:solidFill>
+                  <a:srgbClr val="7CC8FF"/>
+                </a:solidFill>
+                <a:latin typeface="Arial" pitchFamily="34" charset="0"/>
+                <a:ea typeface="Arial" pitchFamily="34" charset="-122"/>
+                <a:cs typeface="Arial" pitchFamily="34" charset="-120"/>
+              </a:rPr>
+              <a:t>A regra: nenhuma frase pode conter a solução. 'Como poderíamos ter um dashboard' está errado — dashboard é resposta.</a:t>
+            </a:r>
+            <a:endParaRPr lang="en-US" sz="1300" dirty="0"/>
+          </a:p>
+        </p:txBody>
+      </p:sp>
+      <p:sp>
+        <p:nvSpPr>
+          <p:cNvPr id="15" name="Text 13"/>
           <p:cNvSpPr/>
           <p:nvPr/>
         </p:nvSpPr>
@@ -41983,6 +42011,2742 @@
       <p:sp>
         <p:nvSpPr>
           <p:cNvPr id="16" name="Text 14"/>
+          <p:cNvSpPr/>
+          <p:nvPr/>
+        </p:nvSpPr>
+        <p:spPr>
+          <a:xfrm>
+            <a:off x="411480" y="4681728"/>
+            <a:ext cx="2743200" cy="228600"/>
+          </a:xfrm>
+          <a:prstGeom prst="rect">
+            <a:avLst/>
+          </a:prstGeom>
+          <a:noFill/>
+          <a:ln/>
+        </p:spPr>
+        <p:txBody>
+          <a:bodyPr wrap="square" lIns="0" tIns="0" rIns="0" bIns="0" rtlCol="0" anchor="ctr"/>
+          <a:lstStyle/>
+          <a:p>
+            <a:pPr indent="0" marL="0">
+              <a:buNone/>
+            </a:pPr>
+            <a:r>
+              <a:rPr lang="en-US" sz="800" b="1" spc="200" kern="0" dirty="0">
+                <a:solidFill>
+                  <a:srgbClr val="566A85"/>
+                </a:solidFill>
+                <a:latin typeface="Arial" pitchFamily="34" charset="0"/>
+                <a:ea typeface="Arial" pitchFamily="34" charset="-122"/>
+                <a:cs typeface="Arial" pitchFamily="34" charset="-120"/>
+              </a:rPr>
+              <a:t>JORNADA DE DADOS</a:t>
+            </a:r>
+            <a:endParaRPr lang="en-US" sz="800" dirty="0"/>
+          </a:p>
+        </p:txBody>
+      </p:sp>
+    </p:spTree>
+  </p:cSld>
+  <p:clrMapOvr>
+    <a:masterClrMapping/>
+  </p:clrMapOvr>
+</p:sld>
+</file>
+
+<file path=ppt/slides/slide60.xml><?xml version="1.0" encoding="utf-8"?>
+<p:sld xmlns:a="http://schemas.openxmlformats.org/drawingml/2006/main" xmlns:p="http://schemas.openxmlformats.org/presentationml/2006/main" xmlns:r="http://schemas.openxmlformats.org/officeDocument/2006/relationships">
+  <p:cSld>
+    <p:spTree>
+      <p:nvGrpSpPr>
+        <p:cNvPr id="1" name=""/>
+        <p:cNvGrpSpPr/>
+        <p:nvPr/>
+      </p:nvGrpSpPr>
+      <p:grpSpPr/>
+      <p:sp>
+        <p:nvSpPr>
+          <p:cNvPr id="2" name="Shape 0"/>
+          <p:cNvSpPr/>
+          <p:nvPr/>
+        </p:nvSpPr>
+        <p:spPr>
+          <a:xfrm>
+            <a:off x="0" y="0"/>
+            <a:ext cx="146304" cy="5143500"/>
+          </a:xfrm>
+          <a:prstGeom prst="rect">
+            <a:avLst/>
+          </a:prstGeom>
+          <a:solidFill>
+            <a:srgbClr val="3B9DF5"/>
+          </a:solidFill>
+          <a:ln w="12700">
+            <a:solidFill>
+              <a:srgbClr val="333333"/>
+            </a:solidFill>
+            <a:prstDash val="solid"/>
+          </a:ln>
+        </p:spPr>
+        <p:txBody>
+          <a:bodyPr/>
+          <a:p/>
+        </p:txBody>
+      </p:sp>
+      <p:sp>
+        <p:nvSpPr>
+          <p:cNvPr id="3" name="Text 1"/>
+          <p:cNvSpPr/>
+          <p:nvPr/>
+        </p:nvSpPr>
+        <p:spPr>
+          <a:xfrm>
+            <a:off x="640080" y="1417320"/>
+            <a:ext cx="1828800" cy="457200"/>
+          </a:xfrm>
+          <a:prstGeom prst="rect">
+            <a:avLst/>
+          </a:prstGeom>
+          <a:noFill/>
+          <a:ln/>
+        </p:spPr>
+        <p:txBody>
+          <a:bodyPr wrap="square" lIns="0" tIns="0" rIns="0" bIns="0" rtlCol="0" anchor="ctr"/>
+          <a:lstStyle/>
+          <a:p>
+            <a:pPr indent="0" marL="0">
+              <a:buNone/>
+            </a:pPr>
+            <a:r>
+              <a:rPr lang="en-US" sz="1300" b="1" spc="200" kern="0" dirty="0">
+                <a:solidFill>
+                  <a:srgbClr val="3B9DF5"/>
+                </a:solidFill>
+                <a:latin typeface="Arial" pitchFamily="34" charset="0"/>
+                <a:ea typeface="Arial" pitchFamily="34" charset="-122"/>
+                <a:cs typeface="Arial" pitchFamily="34" charset="-120"/>
+              </a:rPr>
+              <a:t>DINÂMICA 02</a:t>
+            </a:r>
+            <a:endParaRPr lang="en-US" sz="1300" dirty="0"/>
+          </a:p>
+        </p:txBody>
+      </p:sp>
+      <p:sp>
+        <p:nvSpPr>
+          <p:cNvPr id="4" name="Text 2"/>
+          <p:cNvSpPr/>
+          <p:nvPr/>
+        </p:nvSpPr>
+        <p:spPr>
+          <a:xfrm>
+            <a:off x="640080" y="1828800"/>
+            <a:ext cx="7863840" cy="1371600"/>
+          </a:xfrm>
+          <a:prstGeom prst="rect">
+            <a:avLst/>
+          </a:prstGeom>
+          <a:noFill/>
+          <a:ln/>
+        </p:spPr>
+        <p:txBody>
+          <a:bodyPr wrap="square" lIns="0" tIns="0" rIns="0" bIns="0" rtlCol="0" anchor="ctr"/>
+          <a:lstStyle/>
+          <a:p>
+            <a:pPr indent="0" marL="0">
+              <a:lnSpc>
+                <a:spcPts val="4800"/>
+              </a:lnSpc>
+              <a:buNone/>
+            </a:pPr>
+            <a:r>
+              <a:rPr lang="en-US" sz="4200" b="1" dirty="0">
+                <a:solidFill>
+                  <a:srgbClr val="FFFFFF"/>
+                </a:solidFill>
+                <a:latin typeface="Arial" pitchFamily="34" charset="0"/>
+                <a:ea typeface="Arial" pitchFamily="34" charset="-122"/>
+                <a:cs typeface="Arial" pitchFamily="34" charset="-120"/>
+              </a:rPr>
+              <a:t>Nossa meta de 2 anos</a:t>
+            </a:r>
+            <a:endParaRPr lang="en-US" sz="4200" dirty="0"/>
+          </a:p>
+        </p:txBody>
+      </p:sp>
+      <p:sp>
+        <p:nvSpPr>
+          <p:cNvPr id="5" name="Text 3"/>
+          <p:cNvSpPr/>
+          <p:nvPr/>
+        </p:nvSpPr>
+        <p:spPr>
+          <a:xfrm>
+            <a:off x="640080" y="3246120"/>
+            <a:ext cx="7315200" cy="548640"/>
+          </a:xfrm>
+          <a:prstGeom prst="rect">
+            <a:avLst/>
+          </a:prstGeom>
+          <a:noFill/>
+          <a:ln/>
+        </p:spPr>
+        <p:txBody>
+          <a:bodyPr wrap="square" lIns="0" tIns="0" rIns="0" bIns="0" rtlCol="0" anchor="ctr"/>
+          <a:lstStyle/>
+          <a:p>
+            <a:pPr indent="0" marL="0">
+              <a:buNone/>
+            </a:pPr>
+            <a:r>
+              <a:rPr lang="en-US" sz="1500" dirty="0">
+                <a:solidFill>
+                  <a:srgbClr val="9BAAC0"/>
+                </a:solidFill>
+                <a:latin typeface="Arial" pitchFamily="34" charset="0"/>
+                <a:ea typeface="Arial" pitchFamily="34" charset="-122"/>
+                <a:cs typeface="Arial" pitchFamily="34" charset="-120"/>
+              </a:rPr>
+              <a:t>Escreva no passado, como se já tivesse acontecido.</a:t>
+            </a:r>
+            <a:endParaRPr lang="en-US" sz="1500" dirty="0"/>
+          </a:p>
+        </p:txBody>
+      </p:sp>
+    </p:spTree>
+  </p:cSld>
+  <p:clrMapOvr>
+    <a:masterClrMapping/>
+  </p:clrMapOvr>
+</p:sld>
+</file>
+
+<file path=ppt/slides/slide61.xml><?xml version="1.0" encoding="utf-8"?>
+<p:sld xmlns:a="http://schemas.openxmlformats.org/drawingml/2006/main" xmlns:p="http://schemas.openxmlformats.org/presentationml/2006/main" xmlns:r="http://schemas.openxmlformats.org/officeDocument/2006/relationships">
+  <p:cSld>
+    <p:spTree>
+      <p:nvGrpSpPr>
+        <p:cNvPr id="1" name=""/>
+        <p:cNvGrpSpPr/>
+        <p:nvPr/>
+      </p:nvGrpSpPr>
+      <p:grpSpPr/>
+      <p:sp>
+        <p:nvSpPr>
+          <p:cNvPr id="2" name="Text 0"/>
+          <p:cNvSpPr/>
+          <p:nvPr/>
+        </p:nvSpPr>
+        <p:spPr>
+          <a:xfrm>
+            <a:off x="411480" y="411480"/>
+            <a:ext cx="7315200" cy="256032"/>
+          </a:xfrm>
+          <a:prstGeom prst="rect">
+            <a:avLst/>
+          </a:prstGeom>
+          <a:noFill/>
+          <a:ln/>
+        </p:spPr>
+        <p:txBody>
+          <a:bodyPr wrap="square" lIns="0" tIns="0" rIns="0" bIns="0" rtlCol="0" anchor="ctr"/>
+          <a:lstStyle/>
+          <a:p>
+            <a:pPr indent="0" marL="0">
+              <a:buNone/>
+            </a:pPr>
+            <a:r>
+              <a:rPr lang="en-US" sz="1100" b="1" spc="160" kern="0" dirty="0">
+                <a:solidFill>
+                  <a:srgbClr val="3B9DF5"/>
+                </a:solidFill>
+                <a:latin typeface="Arial" pitchFamily="34" charset="0"/>
+                <a:ea typeface="Arial" pitchFamily="34" charset="-122"/>
+                <a:cs typeface="Arial" pitchFamily="34" charset="-120"/>
+              </a:rPr>
+              <a:t>DINÂMICA 02 · O QUE A TURMA RESPONDEU</a:t>
+            </a:r>
+            <a:endParaRPr lang="en-US" sz="1100" dirty="0"/>
+          </a:p>
+        </p:txBody>
+      </p:sp>
+      <p:sp>
+        <p:nvSpPr>
+          <p:cNvPr id="3" name="Text 1"/>
+          <p:cNvSpPr/>
+          <p:nvPr/>
+        </p:nvSpPr>
+        <p:spPr>
+          <a:xfrm>
+            <a:off x="411480" y="822960"/>
+            <a:ext cx="8321040" cy="1005840"/>
+          </a:xfrm>
+          <a:prstGeom prst="rect">
+            <a:avLst/>
+          </a:prstGeom>
+          <a:noFill/>
+          <a:ln/>
+        </p:spPr>
+        <p:txBody>
+          <a:bodyPr wrap="square" lIns="0" tIns="0" rIns="0" bIns="0" rtlCol="0" anchor="ctr"/>
+          <a:lstStyle/>
+          <a:p>
+            <a:pPr indent="0" marL="0">
+              <a:lnSpc>
+                <a:spcPts val="4000"/>
+              </a:lnSpc>
+              <a:buNone/>
+            </a:pPr>
+            <a:r>
+              <a:rPr lang="en-US" sz="3100" b="1" dirty="0">
+                <a:solidFill>
+                  <a:srgbClr val="FFFFFF"/>
+                </a:solidFill>
+                <a:latin typeface="Arial" pitchFamily="34" charset="0"/>
+                <a:ea typeface="Arial" pitchFamily="34" charset="-122"/>
+                <a:cs typeface="Arial" pitchFamily="34" charset="-120"/>
+              </a:rPr>
+              <a:t>Em agosto de 2028, olhando para trás</a:t>
+            </a:r>
+            <a:endParaRPr lang="en-US" sz="3100" dirty="0"/>
+          </a:p>
+        </p:txBody>
+      </p:sp>
+      <p:sp>
+        <p:nvSpPr>
+          <p:cNvPr id="4" name="Shape 2"/>
+          <p:cNvSpPr/>
+          <p:nvPr/>
+        </p:nvSpPr>
+        <p:spPr>
+          <a:xfrm>
+            <a:off x="457200" y="2157984"/>
+            <a:ext cx="91440" cy="91440"/>
+          </a:xfrm>
+          <a:prstGeom prst="ellipse">
+            <a:avLst/>
+          </a:prstGeom>
+          <a:solidFill>
+            <a:srgbClr val="3B9DF5"/>
+          </a:solidFill>
+          <a:ln w="12700">
+            <a:solidFill>
+              <a:srgbClr val="333333"/>
+            </a:solidFill>
+            <a:prstDash val="solid"/>
+          </a:ln>
+        </p:spPr>
+        <p:txBody>
+          <a:bodyPr/>
+          <a:p/>
+        </p:txBody>
+      </p:sp>
+      <p:sp>
+        <p:nvSpPr>
+          <p:cNvPr id="5" name="Text 3"/>
+          <p:cNvSpPr/>
+          <p:nvPr/>
+        </p:nvSpPr>
+        <p:spPr>
+          <a:xfrm>
+            <a:off x="713232" y="2057400"/>
+            <a:ext cx="7955280" cy="347472"/>
+          </a:xfrm>
+          <a:prstGeom prst="rect">
+            <a:avLst/>
+          </a:prstGeom>
+          <a:noFill/>
+          <a:ln/>
+        </p:spPr>
+        <p:txBody>
+          <a:bodyPr wrap="square" lIns="0" tIns="0" rIns="0" bIns="0" rtlCol="0" anchor="ctr"/>
+          <a:lstStyle/>
+          <a:p>
+            <a:pPr indent="0" marL="0">
+              <a:buNone/>
+            </a:pPr>
+            <a:r>
+              <a:rPr lang="en-US" sz="1500" dirty="0">
+                <a:solidFill>
+                  <a:srgbClr val="D9CFD1"/>
+                </a:solidFill>
+                <a:latin typeface="Arial" pitchFamily="34" charset="0"/>
+                <a:ea typeface="Arial" pitchFamily="34" charset="-122"/>
+                <a:cs typeface="Arial" pitchFamily="34" charset="-120"/>
+              </a:rPr>
+              <a:t>Todo vendedor abre a lista do dia já priorizada — e confia nela</a:t>
+            </a:r>
+            <a:endParaRPr lang="en-US" sz="1500" dirty="0"/>
+          </a:p>
+        </p:txBody>
+      </p:sp>
+      <p:sp>
+        <p:nvSpPr>
+          <p:cNvPr id="6" name="Shape 4"/>
+          <p:cNvSpPr/>
+          <p:nvPr/>
+        </p:nvSpPr>
+        <p:spPr>
+          <a:xfrm>
+            <a:off x="457200" y="2578608"/>
+            <a:ext cx="91440" cy="91440"/>
+          </a:xfrm>
+          <a:prstGeom prst="ellipse">
+            <a:avLst/>
+          </a:prstGeom>
+          <a:solidFill>
+            <a:srgbClr val="3B9DF5"/>
+          </a:solidFill>
+          <a:ln w="12700">
+            <a:solidFill>
+              <a:srgbClr val="333333"/>
+            </a:solidFill>
+            <a:prstDash val="solid"/>
+          </a:ln>
+        </p:spPr>
+        <p:txBody>
+          <a:bodyPr/>
+          <a:p/>
+        </p:txBody>
+      </p:sp>
+      <p:sp>
+        <p:nvSpPr>
+          <p:cNvPr id="7" name="Text 5"/>
+          <p:cNvSpPr/>
+          <p:nvPr/>
+        </p:nvSpPr>
+        <p:spPr>
+          <a:xfrm>
+            <a:off x="713232" y="2478024"/>
+            <a:ext cx="7955280" cy="347472"/>
+          </a:xfrm>
+          <a:prstGeom prst="rect">
+            <a:avLst/>
+          </a:prstGeom>
+          <a:noFill/>
+          <a:ln/>
+        </p:spPr>
+        <p:txBody>
+          <a:bodyPr wrap="square" lIns="0" tIns="0" rIns="0" bIns="0" rtlCol="0" anchor="ctr"/>
+          <a:lstStyle/>
+          <a:p>
+            <a:pPr indent="0" marL="0">
+              <a:buNone/>
+            </a:pPr>
+            <a:r>
+              <a:rPr lang="en-US" sz="1500" dirty="0">
+                <a:solidFill>
+                  <a:srgbClr val="D9CFD1"/>
+                </a:solidFill>
+                <a:latin typeface="Arial" pitchFamily="34" charset="0"/>
+                <a:ea typeface="Arial" pitchFamily="34" charset="-122"/>
+                <a:cs typeface="Arial" pitchFamily="34" charset="-120"/>
+              </a:rPr>
+              <a:t>O churn caiu de 6,5% para 4% da base com histórico</a:t>
+            </a:r>
+            <a:endParaRPr lang="en-US" sz="1500" dirty="0"/>
+          </a:p>
+        </p:txBody>
+      </p:sp>
+      <p:sp>
+        <p:nvSpPr>
+          <p:cNvPr id="8" name="Shape 6"/>
+          <p:cNvSpPr/>
+          <p:nvPr/>
+        </p:nvSpPr>
+        <p:spPr>
+          <a:xfrm>
+            <a:off x="457200" y="2999232"/>
+            <a:ext cx="91440" cy="91440"/>
+          </a:xfrm>
+          <a:prstGeom prst="ellipse">
+            <a:avLst/>
+          </a:prstGeom>
+          <a:solidFill>
+            <a:srgbClr val="3B9DF5"/>
+          </a:solidFill>
+          <a:ln w="12700">
+            <a:solidFill>
+              <a:srgbClr val="333333"/>
+            </a:solidFill>
+            <a:prstDash val="solid"/>
+          </a:ln>
+        </p:spPr>
+        <p:txBody>
+          <a:bodyPr/>
+          <a:p/>
+        </p:txBody>
+      </p:sp>
+      <p:sp>
+        <p:nvSpPr>
+          <p:cNvPr id="9" name="Text 7"/>
+          <p:cNvSpPr/>
+          <p:nvPr/>
+        </p:nvSpPr>
+        <p:spPr>
+          <a:xfrm>
+            <a:off x="713232" y="2898648"/>
+            <a:ext cx="7955280" cy="347472"/>
+          </a:xfrm>
+          <a:prstGeom prst="rect">
+            <a:avLst/>
+          </a:prstGeom>
+          <a:noFill/>
+          <a:ln/>
+        </p:spPr>
+        <p:txBody>
+          <a:bodyPr wrap="square" lIns="0" tIns="0" rIns="0" bIns="0" rtlCol="0" anchor="ctr"/>
+          <a:lstStyle/>
+          <a:p>
+            <a:pPr indent="0" marL="0">
+              <a:buNone/>
+            </a:pPr>
+            <a:r>
+              <a:rPr lang="en-US" sz="1500" dirty="0">
+                <a:solidFill>
+                  <a:srgbClr val="D9CFD1"/>
+                </a:solidFill>
+                <a:latin typeface="Arial" pitchFamily="34" charset="0"/>
+                <a:ea typeface="Arial" pitchFamily="34" charset="-122"/>
+                <a:cs typeface="Arial" pitchFamily="34" charset="-120"/>
+              </a:rPr>
+              <a:t>A conversão da visita subiu de 46% para 55%</a:t>
+            </a:r>
+            <a:endParaRPr lang="en-US" sz="1500" dirty="0"/>
+          </a:p>
+        </p:txBody>
+      </p:sp>
+      <p:sp>
+        <p:nvSpPr>
+          <p:cNvPr id="10" name="Shape 8"/>
+          <p:cNvSpPr/>
+          <p:nvPr/>
+        </p:nvSpPr>
+        <p:spPr>
+          <a:xfrm>
+            <a:off x="457200" y="3419856"/>
+            <a:ext cx="91440" cy="91440"/>
+          </a:xfrm>
+          <a:prstGeom prst="ellipse">
+            <a:avLst/>
+          </a:prstGeom>
+          <a:solidFill>
+            <a:srgbClr val="3B9DF5"/>
+          </a:solidFill>
+          <a:ln w="12700">
+            <a:solidFill>
+              <a:srgbClr val="333333"/>
+            </a:solidFill>
+            <a:prstDash val="solid"/>
+          </a:ln>
+        </p:spPr>
+        <p:txBody>
+          <a:bodyPr/>
+          <a:p/>
+        </p:txBody>
+      </p:sp>
+      <p:sp>
+        <p:nvSpPr>
+          <p:cNvPr id="11" name="Text 9"/>
+          <p:cNvSpPr/>
+          <p:nvPr/>
+        </p:nvSpPr>
+        <p:spPr>
+          <a:xfrm>
+            <a:off x="713232" y="3319272"/>
+            <a:ext cx="7955280" cy="347472"/>
+          </a:xfrm>
+          <a:prstGeom prst="rect">
+            <a:avLst/>
+          </a:prstGeom>
+          <a:noFill/>
+          <a:ln/>
+        </p:spPr>
+        <p:txBody>
+          <a:bodyPr wrap="square" lIns="0" tIns="0" rIns="0" bIns="0" rtlCol="0" anchor="ctr"/>
+          <a:lstStyle/>
+          <a:p>
+            <a:pPr indent="0" marL="0">
+              <a:buNone/>
+            </a:pPr>
+            <a:r>
+              <a:rPr lang="en-US" sz="1500" dirty="0">
+                <a:solidFill>
+                  <a:srgbClr val="D9CFD1"/>
+                </a:solidFill>
+                <a:latin typeface="Arial" pitchFamily="34" charset="0"/>
+                <a:ea typeface="Arial" pitchFamily="34" charset="-122"/>
+                <a:cs typeface="Arial" pitchFamily="34" charset="-120"/>
+              </a:rPr>
+              <a:t>Recuperamos os R$ 648 mil por trimestre que hoje somem sem ninguém ver</a:t>
+            </a:r>
+            <a:endParaRPr lang="en-US" sz="1500" dirty="0"/>
+          </a:p>
+        </p:txBody>
+      </p:sp>
+      <p:sp>
+        <p:nvSpPr>
+          <p:cNvPr id="12" name="Shape 10"/>
+          <p:cNvSpPr/>
+          <p:nvPr/>
+        </p:nvSpPr>
+        <p:spPr>
+          <a:xfrm>
+            <a:off x="457200" y="3840480"/>
+            <a:ext cx="91440" cy="91440"/>
+          </a:xfrm>
+          <a:prstGeom prst="ellipse">
+            <a:avLst/>
+          </a:prstGeom>
+          <a:solidFill>
+            <a:srgbClr val="3B9DF5"/>
+          </a:solidFill>
+          <a:ln w="12700">
+            <a:solidFill>
+              <a:srgbClr val="333333"/>
+            </a:solidFill>
+            <a:prstDash val="solid"/>
+          </a:ln>
+        </p:spPr>
+        <p:txBody>
+          <a:bodyPr/>
+          <a:p/>
+        </p:txBody>
+      </p:sp>
+      <p:sp>
+        <p:nvSpPr>
+          <p:cNvPr id="13" name="Text 11"/>
+          <p:cNvSpPr/>
+          <p:nvPr/>
+        </p:nvSpPr>
+        <p:spPr>
+          <a:xfrm>
+            <a:off x="713232" y="3739896"/>
+            <a:ext cx="7955280" cy="347472"/>
+          </a:xfrm>
+          <a:prstGeom prst="rect">
+            <a:avLst/>
+          </a:prstGeom>
+          <a:noFill/>
+          <a:ln/>
+        </p:spPr>
+        <p:txBody>
+          <a:bodyPr wrap="square" lIns="0" tIns="0" rIns="0" bIns="0" rtlCol="0" anchor="ctr"/>
+          <a:lstStyle/>
+          <a:p>
+            <a:pPr indent="0" marL="0">
+              <a:buNone/>
+            </a:pPr>
+            <a:r>
+              <a:rPr lang="en-US" sz="1500" dirty="0">
+                <a:solidFill>
+                  <a:srgbClr val="D9CFD1"/>
+                </a:solidFill>
+                <a:latin typeface="Arial" pitchFamily="34" charset="0"/>
+                <a:ea typeface="Arial" pitchFamily="34" charset="-122"/>
+                <a:cs typeface="Arial" pitchFamily="34" charset="-120"/>
+              </a:rPr>
+              <a:t>Ninguém mais pergunta na reunião de onde veio aquele número</a:t>
+            </a:r>
+            <a:endParaRPr lang="en-US" sz="1500" dirty="0"/>
+          </a:p>
+        </p:txBody>
+      </p:sp>
+      <p:sp>
+        <p:nvSpPr>
+          <p:cNvPr id="14" name="Text 12"/>
+          <p:cNvSpPr/>
+          <p:nvPr/>
+        </p:nvSpPr>
+        <p:spPr>
+          <a:xfrm>
+            <a:off x="411480" y="4297680"/>
+            <a:ext cx="8229600" cy="365760"/>
+          </a:xfrm>
+          <a:prstGeom prst="rect">
+            <a:avLst/>
+          </a:prstGeom>
+          <a:noFill/>
+          <a:ln/>
+        </p:spPr>
+        <p:txBody>
+          <a:bodyPr wrap="square" lIns="0" tIns="0" rIns="0" bIns="0" rtlCol="0" anchor="ctr"/>
+          <a:lstStyle/>
+          <a:p>
+            <a:pPr indent="0" marL="0">
+              <a:buNone/>
+            </a:pPr>
+            <a:r>
+              <a:rPr lang="en-US" sz="1300" dirty="0">
+                <a:solidFill>
+                  <a:srgbClr val="7CC8FF"/>
+                </a:solidFill>
+                <a:latin typeface="Arial" pitchFamily="34" charset="0"/>
+                <a:ea typeface="Arial" pitchFamily="34" charset="-122"/>
+                <a:cs typeface="Arial" pitchFamily="34" charset="-120"/>
+              </a:rPr>
+              <a:t>Meta sem número é desejo. Cada linha acima tem um valor medido hoje, então daqui a dois anos dá para dizer se aconteceu ou não.</a:t>
+            </a:r>
+            <a:endParaRPr lang="en-US" sz="1300" dirty="0"/>
+          </a:p>
+        </p:txBody>
+      </p:sp>
+      <p:sp>
+        <p:nvSpPr>
+          <p:cNvPr id="15" name="Text 13"/>
+          <p:cNvSpPr/>
+          <p:nvPr/>
+        </p:nvSpPr>
+        <p:spPr>
+          <a:xfrm>
+            <a:off x="411480" y="4681728"/>
+            <a:ext cx="2743200" cy="228600"/>
+          </a:xfrm>
+          <a:prstGeom prst="rect">
+            <a:avLst/>
+          </a:prstGeom>
+          <a:noFill/>
+          <a:ln/>
+        </p:spPr>
+        <p:txBody>
+          <a:bodyPr wrap="square" lIns="0" tIns="0" rIns="0" bIns="0" rtlCol="0" anchor="ctr"/>
+          <a:lstStyle/>
+          <a:p>
+            <a:pPr indent="0" marL="0">
+              <a:buNone/>
+            </a:pPr>
+            <a:r>
+              <a:rPr lang="en-US" sz="800" b="1" spc="200" kern="0" dirty="0">
+                <a:solidFill>
+                  <a:srgbClr val="566A85"/>
+                </a:solidFill>
+                <a:latin typeface="Arial" pitchFamily="34" charset="0"/>
+                <a:ea typeface="Arial" pitchFamily="34" charset="-122"/>
+                <a:cs typeface="Arial" pitchFamily="34" charset="-120"/>
+              </a:rPr>
+              <a:t>JORNADA DE DADOS</a:t>
+            </a:r>
+            <a:endParaRPr lang="en-US" sz="800" dirty="0"/>
+          </a:p>
+        </p:txBody>
+      </p:sp>
+    </p:spTree>
+  </p:cSld>
+  <p:clrMapOvr>
+    <a:masterClrMapping/>
+  </p:clrMapOvr>
+</p:sld>
+</file>
+
+<file path=ppt/slides/slide62.xml><?xml version="1.0" encoding="utf-8"?>
+<p:sld xmlns:a="http://schemas.openxmlformats.org/drawingml/2006/main" xmlns:p="http://schemas.openxmlformats.org/presentationml/2006/main" xmlns:r="http://schemas.openxmlformats.org/officeDocument/2006/relationships">
+  <p:cSld>
+    <p:spTree>
+      <p:nvGrpSpPr>
+        <p:cNvPr id="1" name=""/>
+        <p:cNvGrpSpPr/>
+        <p:nvPr/>
+      </p:nvGrpSpPr>
+      <p:grpSpPr/>
+      <p:sp>
+        <p:nvSpPr>
+          <p:cNvPr id="2" name="Shape 0"/>
+          <p:cNvSpPr/>
+          <p:nvPr/>
+        </p:nvSpPr>
+        <p:spPr>
+          <a:xfrm>
+            <a:off x="0" y="0"/>
+            <a:ext cx="146304" cy="5143500"/>
+          </a:xfrm>
+          <a:prstGeom prst="rect">
+            <a:avLst/>
+          </a:prstGeom>
+          <a:solidFill>
+            <a:srgbClr val="3B9DF5"/>
+          </a:solidFill>
+          <a:ln w="12700">
+            <a:solidFill>
+              <a:srgbClr val="333333"/>
+            </a:solidFill>
+            <a:prstDash val="solid"/>
+          </a:ln>
+        </p:spPr>
+        <p:txBody>
+          <a:bodyPr/>
+          <a:p/>
+        </p:txBody>
+      </p:sp>
+      <p:sp>
+        <p:nvSpPr>
+          <p:cNvPr id="3" name="Text 1"/>
+          <p:cNvSpPr/>
+          <p:nvPr/>
+        </p:nvSpPr>
+        <p:spPr>
+          <a:xfrm>
+            <a:off x="640080" y="1417320"/>
+            <a:ext cx="1828800" cy="457200"/>
+          </a:xfrm>
+          <a:prstGeom prst="rect">
+            <a:avLst/>
+          </a:prstGeom>
+          <a:noFill/>
+          <a:ln/>
+        </p:spPr>
+        <p:txBody>
+          <a:bodyPr wrap="square" lIns="0" tIns="0" rIns="0" bIns="0" rtlCol="0" anchor="ctr"/>
+          <a:lstStyle/>
+          <a:p>
+            <a:pPr indent="0" marL="0">
+              <a:buNone/>
+            </a:pPr>
+            <a:r>
+              <a:rPr lang="en-US" sz="1300" b="1" spc="200" kern="0" dirty="0">
+                <a:solidFill>
+                  <a:srgbClr val="3B9DF5"/>
+                </a:solidFill>
+                <a:latin typeface="Arial" pitchFamily="34" charset="0"/>
+                <a:ea typeface="Arial" pitchFamily="34" charset="-122"/>
+                <a:cs typeface="Arial" pitchFamily="34" charset="-120"/>
+              </a:rPr>
+              <a:t>DINÂMICA 03</a:t>
+            </a:r>
+            <a:endParaRPr lang="en-US" sz="1300" dirty="0"/>
+          </a:p>
+        </p:txBody>
+      </p:sp>
+      <p:sp>
+        <p:nvSpPr>
+          <p:cNvPr id="4" name="Text 2"/>
+          <p:cNvSpPr/>
+          <p:nvPr/>
+        </p:nvSpPr>
+        <p:spPr>
+          <a:xfrm>
+            <a:off x="640080" y="1828800"/>
+            <a:ext cx="7863840" cy="1371600"/>
+          </a:xfrm>
+          <a:prstGeom prst="rect">
+            <a:avLst/>
+          </a:prstGeom>
+          <a:noFill/>
+          <a:ln/>
+        </p:spPr>
+        <p:txBody>
+          <a:bodyPr wrap="square" lIns="0" tIns="0" rIns="0" bIns="0" rtlCol="0" anchor="ctr"/>
+          <a:lstStyle/>
+          <a:p>
+            <a:pPr indent="0" marL="0">
+              <a:lnSpc>
+                <a:spcPts val="4800"/>
+              </a:lnSpc>
+              <a:buNone/>
+            </a:pPr>
+            <a:r>
+              <a:rPr lang="en-US" sz="4200" b="1" dirty="0">
+                <a:solidFill>
+                  <a:srgbClr val="FFFFFF"/>
+                </a:solidFill>
+                <a:latin typeface="Arial" pitchFamily="34" charset="0"/>
+                <a:ea typeface="Arial" pitchFamily="34" charset="-122"/>
+                <a:cs typeface="Arial" pitchFamily="34" charset="-120"/>
+              </a:rPr>
+              <a:t>O que pode dar errado?</a:t>
+            </a:r>
+            <a:endParaRPr lang="en-US" sz="4200" dirty="0"/>
+          </a:p>
+        </p:txBody>
+      </p:sp>
+      <p:sp>
+        <p:nvSpPr>
+          <p:cNvPr id="5" name="Text 3"/>
+          <p:cNvSpPr/>
+          <p:nvPr/>
+        </p:nvSpPr>
+        <p:spPr>
+          <a:xfrm>
+            <a:off x="640080" y="3246120"/>
+            <a:ext cx="7315200" cy="548640"/>
+          </a:xfrm>
+          <a:prstGeom prst="rect">
+            <a:avLst/>
+          </a:prstGeom>
+          <a:noFill/>
+          <a:ln/>
+        </p:spPr>
+        <p:txBody>
+          <a:bodyPr wrap="square" lIns="0" tIns="0" rIns="0" bIns="0" rtlCol="0" anchor="ctr"/>
+          <a:lstStyle/>
+          <a:p>
+            <a:pPr indent="0" marL="0">
+              <a:buNone/>
+            </a:pPr>
+            <a:r>
+              <a:rPr lang="en-US" sz="1500" dirty="0">
+                <a:solidFill>
+                  <a:srgbClr val="9BAAC0"/>
+                </a:solidFill>
+                <a:latin typeface="Arial" pitchFamily="34" charset="0"/>
+                <a:ea typeface="Arial" pitchFamily="34" charset="-122"/>
+                <a:cs typeface="Arial" pitchFamily="34" charset="-120"/>
+              </a:rPr>
+              <a:t>Levantar risco antes de construir. Depois fica caro.</a:t>
+            </a:r>
+            <a:endParaRPr lang="en-US" sz="1500" dirty="0"/>
+          </a:p>
+        </p:txBody>
+      </p:sp>
+    </p:spTree>
+  </p:cSld>
+  <p:clrMapOvr>
+    <a:masterClrMapping/>
+  </p:clrMapOvr>
+</p:sld>
+</file>
+
+<file path=ppt/slides/slide63.xml><?xml version="1.0" encoding="utf-8"?>
+<p:sld xmlns:a="http://schemas.openxmlformats.org/drawingml/2006/main" xmlns:p="http://schemas.openxmlformats.org/presentationml/2006/main" xmlns:r="http://schemas.openxmlformats.org/officeDocument/2006/relationships">
+  <p:cSld>
+    <p:spTree>
+      <p:nvGrpSpPr>
+        <p:cNvPr id="1" name=""/>
+        <p:cNvGrpSpPr/>
+        <p:nvPr/>
+      </p:nvGrpSpPr>
+      <p:grpSpPr/>
+      <p:sp>
+        <p:nvSpPr>
+          <p:cNvPr id="2" name="Text 0"/>
+          <p:cNvSpPr/>
+          <p:nvPr/>
+        </p:nvSpPr>
+        <p:spPr>
+          <a:xfrm>
+            <a:off x="411480" y="411480"/>
+            <a:ext cx="7315200" cy="256032"/>
+          </a:xfrm>
+          <a:prstGeom prst="rect">
+            <a:avLst/>
+          </a:prstGeom>
+          <a:noFill/>
+          <a:ln/>
+        </p:spPr>
+        <p:txBody>
+          <a:bodyPr wrap="square" lIns="0" tIns="0" rIns="0" bIns="0" rtlCol="0" anchor="ctr"/>
+          <a:lstStyle/>
+          <a:p>
+            <a:pPr indent="0" marL="0">
+              <a:buNone/>
+            </a:pPr>
+            <a:r>
+              <a:rPr lang="en-US" sz="1100" b="1" spc="160" kern="0" dirty="0">
+                <a:solidFill>
+                  <a:srgbClr val="3B9DF5"/>
+                </a:solidFill>
+                <a:latin typeface="Arial" pitchFamily="34" charset="0"/>
+                <a:ea typeface="Arial" pitchFamily="34" charset="-122"/>
+                <a:cs typeface="Arial" pitchFamily="34" charset="-120"/>
+              </a:rPr>
+              <a:t>DINÂMICA 03 · RISCO E COMO MITIGAR</a:t>
+            </a:r>
+            <a:endParaRPr lang="en-US" sz="1100" dirty="0"/>
+          </a:p>
+        </p:txBody>
+      </p:sp>
+      <p:sp>
+        <p:nvSpPr>
+          <p:cNvPr id="3" name="Text 1"/>
+          <p:cNvSpPr/>
+          <p:nvPr/>
+        </p:nvSpPr>
+        <p:spPr>
+          <a:xfrm>
+            <a:off x="411480" y="822960"/>
+            <a:ext cx="8321040" cy="1005840"/>
+          </a:xfrm>
+          <a:prstGeom prst="rect">
+            <a:avLst/>
+          </a:prstGeom>
+          <a:noFill/>
+          <a:ln/>
+        </p:spPr>
+        <p:txBody>
+          <a:bodyPr wrap="square" lIns="0" tIns="0" rIns="0" bIns="0" rtlCol="0" anchor="ctr"/>
+          <a:lstStyle/>
+          <a:p>
+            <a:pPr indent="0" marL="0">
+              <a:lnSpc>
+                <a:spcPts val="4000"/>
+              </a:lnSpc>
+              <a:buNone/>
+            </a:pPr>
+            <a:r>
+              <a:rPr lang="en-US" sz="3100" b="1" dirty="0">
+                <a:solidFill>
+                  <a:srgbClr val="FFFFFF"/>
+                </a:solidFill>
+                <a:latin typeface="Arial" pitchFamily="34" charset="0"/>
+                <a:ea typeface="Arial" pitchFamily="34" charset="-122"/>
+                <a:cs typeface="Arial" pitchFamily="34" charset="-120"/>
+              </a:rPr>
+              <a:t>O que pode dar errado</a:t>
+            </a:r>
+            <a:endParaRPr lang="en-US" sz="3100" dirty="0"/>
+          </a:p>
+        </p:txBody>
+      </p:sp>
+      <p:sp>
+        <p:nvSpPr>
+          <p:cNvPr id="4" name="Shape 2"/>
+          <p:cNvSpPr/>
+          <p:nvPr/>
+        </p:nvSpPr>
+        <p:spPr>
+          <a:xfrm>
+            <a:off x="457200" y="2157984"/>
+            <a:ext cx="91440" cy="91440"/>
+          </a:xfrm>
+          <a:prstGeom prst="ellipse">
+            <a:avLst/>
+          </a:prstGeom>
+          <a:solidFill>
+            <a:srgbClr val="3B9DF5"/>
+          </a:solidFill>
+          <a:ln w="12700">
+            <a:solidFill>
+              <a:srgbClr val="333333"/>
+            </a:solidFill>
+            <a:prstDash val="solid"/>
+          </a:ln>
+        </p:spPr>
+        <p:txBody>
+          <a:bodyPr/>
+          <a:p/>
+        </p:txBody>
+      </p:sp>
+      <p:sp>
+        <p:nvSpPr>
+          <p:cNvPr id="5" name="Text 3"/>
+          <p:cNvSpPr/>
+          <p:nvPr/>
+        </p:nvSpPr>
+        <p:spPr>
+          <a:xfrm>
+            <a:off x="713232" y="2057400"/>
+            <a:ext cx="7955280" cy="347472"/>
+          </a:xfrm>
+          <a:prstGeom prst="rect">
+            <a:avLst/>
+          </a:prstGeom>
+          <a:noFill/>
+          <a:ln/>
+        </p:spPr>
+        <p:txBody>
+          <a:bodyPr wrap="square" lIns="0" tIns="0" rIns="0" bIns="0" rtlCol="0" anchor="ctr"/>
+          <a:lstStyle/>
+          <a:p>
+            <a:pPr indent="0" marL="0">
+              <a:buNone/>
+            </a:pPr>
+            <a:r>
+              <a:rPr lang="en-US" sz="1500" dirty="0">
+                <a:solidFill>
+                  <a:srgbClr val="D9CFD1"/>
+                </a:solidFill>
+                <a:latin typeface="Arial" pitchFamily="34" charset="0"/>
+                <a:ea typeface="Arial" pitchFamily="34" charset="-122"/>
+                <a:cs typeface="Arial" pitchFamily="34" charset="-120"/>
+              </a:rPr>
+              <a:t>Dado sujo derruba a análise → camada silver e 9 testes que quebram o pipeline</a:t>
+            </a:r>
+            <a:endParaRPr lang="en-US" sz="1500" dirty="0"/>
+          </a:p>
+        </p:txBody>
+      </p:sp>
+      <p:sp>
+        <p:nvSpPr>
+          <p:cNvPr id="6" name="Shape 4"/>
+          <p:cNvSpPr/>
+          <p:nvPr/>
+        </p:nvSpPr>
+        <p:spPr>
+          <a:xfrm>
+            <a:off x="457200" y="2578608"/>
+            <a:ext cx="91440" cy="91440"/>
+          </a:xfrm>
+          <a:prstGeom prst="ellipse">
+            <a:avLst/>
+          </a:prstGeom>
+          <a:solidFill>
+            <a:srgbClr val="3B9DF5"/>
+          </a:solidFill>
+          <a:ln w="12700">
+            <a:solidFill>
+              <a:srgbClr val="333333"/>
+            </a:solidFill>
+            <a:prstDash val="solid"/>
+          </a:ln>
+        </p:spPr>
+        <p:txBody>
+          <a:bodyPr/>
+          <a:p/>
+        </p:txBody>
+      </p:sp>
+      <p:sp>
+        <p:nvSpPr>
+          <p:cNvPr id="7" name="Text 5"/>
+          <p:cNvSpPr/>
+          <p:nvPr/>
+        </p:nvSpPr>
+        <p:spPr>
+          <a:xfrm>
+            <a:off x="713232" y="2478024"/>
+            <a:ext cx="7955280" cy="347472"/>
+          </a:xfrm>
+          <a:prstGeom prst="rect">
+            <a:avLst/>
+          </a:prstGeom>
+          <a:noFill/>
+          <a:ln/>
+        </p:spPr>
+        <p:txBody>
+          <a:bodyPr wrap="square" lIns="0" tIns="0" rIns="0" bIns="0" rtlCol="0" anchor="ctr"/>
+          <a:lstStyle/>
+          <a:p>
+            <a:pPr indent="0" marL="0">
+              <a:buNone/>
+            </a:pPr>
+            <a:r>
+              <a:rPr lang="en-US" sz="1500" dirty="0">
+                <a:solidFill>
+                  <a:srgbClr val="D9CFD1"/>
+                </a:solidFill>
+                <a:latin typeface="Arial" pitchFamily="34" charset="0"/>
+                <a:ea typeface="Arial" pitchFamily="34" charset="-122"/>
+                <a:cs typeface="Arial" pitchFamily="34" charset="-120"/>
+              </a:rPr>
+              <a:t>Ninguém usa a lista → começar com 1 vendedor, medir, só então expandir</a:t>
+            </a:r>
+            <a:endParaRPr lang="en-US" sz="1500" dirty="0"/>
+          </a:p>
+        </p:txBody>
+      </p:sp>
+      <p:sp>
+        <p:nvSpPr>
+          <p:cNvPr id="8" name="Shape 6"/>
+          <p:cNvSpPr/>
+          <p:nvPr/>
+        </p:nvSpPr>
+        <p:spPr>
+          <a:xfrm>
+            <a:off x="457200" y="2999232"/>
+            <a:ext cx="91440" cy="91440"/>
+          </a:xfrm>
+          <a:prstGeom prst="ellipse">
+            <a:avLst/>
+          </a:prstGeom>
+          <a:solidFill>
+            <a:srgbClr val="3B9DF5"/>
+          </a:solidFill>
+          <a:ln w="12700">
+            <a:solidFill>
+              <a:srgbClr val="333333"/>
+            </a:solidFill>
+            <a:prstDash val="solid"/>
+          </a:ln>
+        </p:spPr>
+        <p:txBody>
+          <a:bodyPr/>
+          <a:p/>
+        </p:txBody>
+      </p:sp>
+      <p:sp>
+        <p:nvSpPr>
+          <p:cNvPr id="9" name="Text 7"/>
+          <p:cNvSpPr/>
+          <p:nvPr/>
+        </p:nvSpPr>
+        <p:spPr>
+          <a:xfrm>
+            <a:off x="713232" y="2898648"/>
+            <a:ext cx="7955280" cy="347472"/>
+          </a:xfrm>
+          <a:prstGeom prst="rect">
+            <a:avLst/>
+          </a:prstGeom>
+          <a:noFill/>
+          <a:ln/>
+        </p:spPr>
+        <p:txBody>
+          <a:bodyPr wrap="square" lIns="0" tIns="0" rIns="0" bIns="0" rtlCol="0" anchor="ctr"/>
+          <a:lstStyle/>
+          <a:p>
+            <a:pPr indent="0" marL="0">
+              <a:buNone/>
+            </a:pPr>
+            <a:r>
+              <a:rPr lang="en-US" sz="1500" dirty="0">
+                <a:solidFill>
+                  <a:srgbClr val="D9CFD1"/>
+                </a:solidFill>
+                <a:latin typeface="Arial" pitchFamily="34" charset="0"/>
+                <a:ea typeface="Arial" pitchFamily="34" charset="-122"/>
+                <a:cs typeface="Arial" pitchFamily="34" charset="-120"/>
+              </a:rPr>
+              <a:t>O modelo vira caixa-preta → régua explicável de 72,7% como piso obrigatório</a:t>
+            </a:r>
+            <a:endParaRPr lang="en-US" sz="1500" dirty="0"/>
+          </a:p>
+        </p:txBody>
+      </p:sp>
+      <p:sp>
+        <p:nvSpPr>
+          <p:cNvPr id="10" name="Shape 8"/>
+          <p:cNvSpPr/>
+          <p:nvPr/>
+        </p:nvSpPr>
+        <p:spPr>
+          <a:xfrm>
+            <a:off x="457200" y="3419856"/>
+            <a:ext cx="91440" cy="91440"/>
+          </a:xfrm>
+          <a:prstGeom prst="ellipse">
+            <a:avLst/>
+          </a:prstGeom>
+          <a:solidFill>
+            <a:srgbClr val="3B9DF5"/>
+          </a:solidFill>
+          <a:ln w="12700">
+            <a:solidFill>
+              <a:srgbClr val="333333"/>
+            </a:solidFill>
+            <a:prstDash val="solid"/>
+          </a:ln>
+        </p:spPr>
+        <p:txBody>
+          <a:bodyPr/>
+          <a:p/>
+        </p:txBody>
+      </p:sp>
+      <p:sp>
+        <p:nvSpPr>
+          <p:cNvPr id="11" name="Text 9"/>
+          <p:cNvSpPr/>
+          <p:nvPr/>
+        </p:nvSpPr>
+        <p:spPr>
+          <a:xfrm>
+            <a:off x="713232" y="3319272"/>
+            <a:ext cx="7955280" cy="347472"/>
+          </a:xfrm>
+          <a:prstGeom prst="rect">
+            <a:avLst/>
+          </a:prstGeom>
+          <a:noFill/>
+          <a:ln/>
+        </p:spPr>
+        <p:txBody>
+          <a:bodyPr wrap="square" lIns="0" tIns="0" rIns="0" bIns="0" rtlCol="0" anchor="ctr"/>
+          <a:lstStyle/>
+          <a:p>
+            <a:pPr indent="0" marL="0">
+              <a:buNone/>
+            </a:pPr>
+            <a:r>
+              <a:rPr lang="en-US" sz="1500" dirty="0">
+                <a:solidFill>
+                  <a:srgbClr val="D9CFD1"/>
+                </a:solidFill>
+                <a:latin typeface="Arial" pitchFamily="34" charset="0"/>
+                <a:ea typeface="Arial" pitchFamily="34" charset="-122"/>
+                <a:cs typeface="Arial" pitchFamily="34" charset="-120"/>
+              </a:rPr>
+              <a:t>O custo estoura → serverless, e medir consumo por execução desde o dia 1</a:t>
+            </a:r>
+            <a:endParaRPr lang="en-US" sz="1500" dirty="0"/>
+          </a:p>
+        </p:txBody>
+      </p:sp>
+      <p:sp>
+        <p:nvSpPr>
+          <p:cNvPr id="12" name="Shape 10"/>
+          <p:cNvSpPr/>
+          <p:nvPr/>
+        </p:nvSpPr>
+        <p:spPr>
+          <a:xfrm>
+            <a:off x="457200" y="3840480"/>
+            <a:ext cx="91440" cy="91440"/>
+          </a:xfrm>
+          <a:prstGeom prst="ellipse">
+            <a:avLst/>
+          </a:prstGeom>
+          <a:solidFill>
+            <a:srgbClr val="3B9DF5"/>
+          </a:solidFill>
+          <a:ln w="12700">
+            <a:solidFill>
+              <a:srgbClr val="333333"/>
+            </a:solidFill>
+            <a:prstDash val="solid"/>
+          </a:ln>
+        </p:spPr>
+        <p:txBody>
+          <a:bodyPr/>
+          <a:p/>
+        </p:txBody>
+      </p:sp>
+      <p:sp>
+        <p:nvSpPr>
+          <p:cNvPr id="13" name="Text 11"/>
+          <p:cNvSpPr/>
+          <p:nvPr/>
+        </p:nvSpPr>
+        <p:spPr>
+          <a:xfrm>
+            <a:off x="713232" y="3739896"/>
+            <a:ext cx="7955280" cy="347472"/>
+          </a:xfrm>
+          <a:prstGeom prst="rect">
+            <a:avLst/>
+          </a:prstGeom>
+          <a:noFill/>
+          <a:ln/>
+        </p:spPr>
+        <p:txBody>
+          <a:bodyPr wrap="square" lIns="0" tIns="0" rIns="0" bIns="0" rtlCol="0" anchor="ctr"/>
+          <a:lstStyle/>
+          <a:p>
+            <a:pPr indent="0" marL="0">
+              <a:buNone/>
+            </a:pPr>
+            <a:r>
+              <a:rPr lang="en-US" sz="1500" dirty="0">
+                <a:solidFill>
+                  <a:srgbClr val="D9CFD1"/>
+                </a:solidFill>
+                <a:latin typeface="Arial" pitchFamily="34" charset="0"/>
+                <a:ea typeface="Arial" pitchFamily="34" charset="-122"/>
+                <a:cs typeface="Arial" pitchFamily="34" charset="-120"/>
+              </a:rPr>
+              <a:t>Pedem análise que o dado não sustenta → dizer não cedo, e mostrar por quê</a:t>
+            </a:r>
+            <a:endParaRPr lang="en-US" sz="1500" dirty="0"/>
+          </a:p>
+        </p:txBody>
+      </p:sp>
+      <p:sp>
+        <p:nvSpPr>
+          <p:cNvPr id="14" name="Text 12"/>
+          <p:cNvSpPr/>
+          <p:nvPr/>
+        </p:nvSpPr>
+        <p:spPr>
+          <a:xfrm>
+            <a:off x="411480" y="4297680"/>
+            <a:ext cx="8229600" cy="365760"/>
+          </a:xfrm>
+          <a:prstGeom prst="rect">
+            <a:avLst/>
+          </a:prstGeom>
+          <a:noFill/>
+          <a:ln/>
+        </p:spPr>
+        <p:txBody>
+          <a:bodyPr wrap="square" lIns="0" tIns="0" rIns="0" bIns="0" rtlCol="0" anchor="ctr"/>
+          <a:lstStyle/>
+          <a:p>
+            <a:pPr indent="0" marL="0">
+              <a:buNone/>
+            </a:pPr>
+            <a:r>
+              <a:rPr lang="en-US" sz="1300" dirty="0">
+                <a:solidFill>
+                  <a:srgbClr val="7CC8FF"/>
+                </a:solidFill>
+                <a:latin typeface="Arial" pitchFamily="34" charset="0"/>
+                <a:ea typeface="Arial" pitchFamily="34" charset="-122"/>
+                <a:cs typeface="Arial" pitchFamily="34" charset="-120"/>
+              </a:rPr>
+              <a:t>O último é o mais difícil: dizer 'com esse dado, não dá' para um diretor. O estoque cobre 27,4% das semanas — melhor falar isso hoje que no trimestre.</a:t>
+            </a:r>
+            <a:endParaRPr lang="en-US" sz="1300" dirty="0"/>
+          </a:p>
+        </p:txBody>
+      </p:sp>
+      <p:sp>
+        <p:nvSpPr>
+          <p:cNvPr id="15" name="Text 13"/>
+          <p:cNvSpPr/>
+          <p:nvPr/>
+        </p:nvSpPr>
+        <p:spPr>
+          <a:xfrm>
+            <a:off x="411480" y="4681728"/>
+            <a:ext cx="2743200" cy="228600"/>
+          </a:xfrm>
+          <a:prstGeom prst="rect">
+            <a:avLst/>
+          </a:prstGeom>
+          <a:noFill/>
+          <a:ln/>
+        </p:spPr>
+        <p:txBody>
+          <a:bodyPr wrap="square" lIns="0" tIns="0" rIns="0" bIns="0" rtlCol="0" anchor="ctr"/>
+          <a:lstStyle/>
+          <a:p>
+            <a:pPr indent="0" marL="0">
+              <a:buNone/>
+            </a:pPr>
+            <a:r>
+              <a:rPr lang="en-US" sz="800" b="1" spc="200" kern="0" dirty="0">
+                <a:solidFill>
+                  <a:srgbClr val="566A85"/>
+                </a:solidFill>
+                <a:latin typeface="Arial" pitchFamily="34" charset="0"/>
+                <a:ea typeface="Arial" pitchFamily="34" charset="-122"/>
+                <a:cs typeface="Arial" pitchFamily="34" charset="-120"/>
+              </a:rPr>
+              <a:t>JORNADA DE DADOS</a:t>
+            </a:r>
+            <a:endParaRPr lang="en-US" sz="800" dirty="0"/>
+          </a:p>
+        </p:txBody>
+      </p:sp>
+    </p:spTree>
+  </p:cSld>
+  <p:clrMapOvr>
+    <a:masterClrMapping/>
+  </p:clrMapOvr>
+</p:sld>
+</file>
+
+<file path=ppt/slides/slide64.xml><?xml version="1.0" encoding="utf-8"?>
+<p:sld xmlns:a="http://schemas.openxmlformats.org/drawingml/2006/main" xmlns:p="http://schemas.openxmlformats.org/presentationml/2006/main" xmlns:r="http://schemas.openxmlformats.org/officeDocument/2006/relationships">
+  <p:cSld>
+    <p:spTree>
+      <p:nvGrpSpPr>
+        <p:cNvPr id="1" name=""/>
+        <p:cNvGrpSpPr/>
+        <p:nvPr/>
+      </p:nvGrpSpPr>
+      <p:grpSpPr/>
+      <p:sp>
+        <p:nvSpPr>
+          <p:cNvPr id="2" name="Shape 0"/>
+          <p:cNvSpPr/>
+          <p:nvPr/>
+        </p:nvSpPr>
+        <p:spPr>
+          <a:xfrm>
+            <a:off x="0" y="0"/>
+            <a:ext cx="146304" cy="5143500"/>
+          </a:xfrm>
+          <a:prstGeom prst="rect">
+            <a:avLst/>
+          </a:prstGeom>
+          <a:solidFill>
+            <a:srgbClr val="3B9DF5"/>
+          </a:solidFill>
+          <a:ln w="12700">
+            <a:solidFill>
+              <a:srgbClr val="333333"/>
+            </a:solidFill>
+            <a:prstDash val="solid"/>
+          </a:ln>
+        </p:spPr>
+        <p:txBody>
+          <a:bodyPr/>
+          <a:p/>
+        </p:txBody>
+      </p:sp>
+      <p:sp>
+        <p:nvSpPr>
+          <p:cNvPr id="3" name="Text 1"/>
+          <p:cNvSpPr/>
+          <p:nvPr/>
+        </p:nvSpPr>
+        <p:spPr>
+          <a:xfrm>
+            <a:off x="640080" y="1417320"/>
+            <a:ext cx="1828800" cy="457200"/>
+          </a:xfrm>
+          <a:prstGeom prst="rect">
+            <a:avLst/>
+          </a:prstGeom>
+          <a:noFill/>
+          <a:ln/>
+        </p:spPr>
+        <p:txBody>
+          <a:bodyPr wrap="square" lIns="0" tIns="0" rIns="0" bIns="0" rtlCol="0" anchor="ctr"/>
+          <a:lstStyle/>
+          <a:p>
+            <a:pPr indent="0" marL="0">
+              <a:buNone/>
+            </a:pPr>
+            <a:r>
+              <a:rPr lang="en-US" sz="1300" b="1" spc="200" kern="0" dirty="0">
+                <a:solidFill>
+                  <a:srgbClr val="3B9DF5"/>
+                </a:solidFill>
+                <a:latin typeface="Arial" pitchFamily="34" charset="0"/>
+                <a:ea typeface="Arial" pitchFamily="34" charset="-122"/>
+                <a:cs typeface="Arial" pitchFamily="34" charset="-120"/>
+              </a:rPr>
+              <a:t>DINÂMICA 04</a:t>
+            </a:r>
+            <a:endParaRPr lang="en-US" sz="1300" dirty="0"/>
+          </a:p>
+        </p:txBody>
+      </p:sp>
+      <p:sp>
+        <p:nvSpPr>
+          <p:cNvPr id="4" name="Text 2"/>
+          <p:cNvSpPr/>
+          <p:nvPr/>
+        </p:nvSpPr>
+        <p:spPr>
+          <a:xfrm>
+            <a:off x="640080" y="1828800"/>
+            <a:ext cx="7863840" cy="1371600"/>
+          </a:xfrm>
+          <a:prstGeom prst="rect">
+            <a:avLst/>
+          </a:prstGeom>
+          <a:noFill/>
+          <a:ln/>
+        </p:spPr>
+        <p:txBody>
+          <a:bodyPr wrap="square" lIns="0" tIns="0" rIns="0" bIns="0" rtlCol="0" anchor="ctr"/>
+          <a:lstStyle/>
+          <a:p>
+            <a:pPr indent="0" marL="0">
+              <a:lnSpc>
+                <a:spcPts val="4800"/>
+              </a:lnSpc>
+              <a:buNone/>
+            </a:pPr>
+            <a:r>
+              <a:rPr lang="en-US" sz="4200" b="1" dirty="0">
+                <a:solidFill>
+                  <a:srgbClr val="FFFFFF"/>
+                </a:solidFill>
+                <a:latin typeface="Arial" pitchFamily="34" charset="0"/>
+                <a:ea typeface="Arial" pitchFamily="34" charset="-122"/>
+                <a:cs typeface="Arial" pitchFamily="34" charset="-120"/>
+              </a:rPr>
+              <a:t>Quem faz o quê?</a:t>
+            </a:r>
+            <a:endParaRPr lang="en-US" sz="4200" dirty="0"/>
+          </a:p>
+        </p:txBody>
+      </p:sp>
+      <p:sp>
+        <p:nvSpPr>
+          <p:cNvPr id="5" name="Text 3"/>
+          <p:cNvSpPr/>
+          <p:nvPr/>
+        </p:nvSpPr>
+        <p:spPr>
+          <a:xfrm>
+            <a:off x="640080" y="3246120"/>
+            <a:ext cx="7315200" cy="548640"/>
+          </a:xfrm>
+          <a:prstGeom prst="rect">
+            <a:avLst/>
+          </a:prstGeom>
+          <a:noFill/>
+          <a:ln/>
+        </p:spPr>
+        <p:txBody>
+          <a:bodyPr wrap="square" lIns="0" tIns="0" rIns="0" bIns="0" rtlCol="0" anchor="ctr"/>
+          <a:lstStyle/>
+          <a:p>
+            <a:pPr indent="0" marL="0">
+              <a:buNone/>
+            </a:pPr>
+            <a:r>
+              <a:rPr lang="en-US" sz="1500" dirty="0">
+                <a:solidFill>
+                  <a:srgbClr val="9BAAC0"/>
+                </a:solidFill>
+                <a:latin typeface="Arial" pitchFamily="34" charset="0"/>
+                <a:ea typeface="Arial" pitchFamily="34" charset="-122"/>
+                <a:cs typeface="Arial" pitchFamily="34" charset="-120"/>
+              </a:rPr>
+              <a:t>O caminho da pergunta até a ação — e o caminho de volta.</a:t>
+            </a:r>
+            <a:endParaRPr lang="en-US" sz="1500" dirty="0"/>
+          </a:p>
+        </p:txBody>
+      </p:sp>
+    </p:spTree>
+  </p:cSld>
+  <p:clrMapOvr>
+    <a:masterClrMapping/>
+  </p:clrMapOvr>
+</p:sld>
+</file>
+
+<file path=ppt/slides/slide65.xml><?xml version="1.0" encoding="utf-8"?>
+<p:sld xmlns:a="http://schemas.openxmlformats.org/drawingml/2006/main" xmlns:p="http://schemas.openxmlformats.org/presentationml/2006/main" xmlns:r="http://schemas.openxmlformats.org/officeDocument/2006/relationships">
+  <p:cSld>
+    <p:spTree>
+      <p:nvGrpSpPr>
+        <p:cNvPr id="1" name=""/>
+        <p:cNvGrpSpPr/>
+        <p:nvPr/>
+      </p:nvGrpSpPr>
+      <p:grpSpPr/>
+      <p:sp>
+        <p:nvSpPr>
+          <p:cNvPr id="2" name="Text 0"/>
+          <p:cNvSpPr/>
+          <p:nvPr/>
+        </p:nvSpPr>
+        <p:spPr>
+          <a:xfrm>
+            <a:off x="411480" y="411480"/>
+            <a:ext cx="7315200" cy="256032"/>
+          </a:xfrm>
+          <a:prstGeom prst="rect">
+            <a:avLst/>
+          </a:prstGeom>
+          <a:noFill/>
+          <a:ln/>
+        </p:spPr>
+        <p:txBody>
+          <a:bodyPr wrap="square" lIns="0" tIns="0" rIns="0" bIns="0" rtlCol="0" anchor="ctr"/>
+          <a:lstStyle/>
+          <a:p>
+            <a:pPr indent="0" marL="0">
+              <a:buNone/>
+            </a:pPr>
+            <a:r>
+              <a:rPr lang="en-US" sz="1100" b="1" spc="160" kern="0" dirty="0">
+                <a:solidFill>
+                  <a:srgbClr val="3B9DF5"/>
+                </a:solidFill>
+                <a:latin typeface="Arial" pitchFamily="34" charset="0"/>
+                <a:ea typeface="Arial" pitchFamily="34" charset="-122"/>
+                <a:cs typeface="Arial" pitchFamily="34" charset="-120"/>
+              </a:rPr>
+              <a:t>DINÂMICA 04 · O FLUXO DE ATORES</a:t>
+            </a:r>
+            <a:endParaRPr lang="en-US" sz="1100" dirty="0"/>
+          </a:p>
+        </p:txBody>
+      </p:sp>
+      <p:sp>
+        <p:nvSpPr>
+          <p:cNvPr id="3" name="Text 1"/>
+          <p:cNvSpPr/>
+          <p:nvPr/>
+        </p:nvSpPr>
+        <p:spPr>
+          <a:xfrm>
+            <a:off x="411480" y="822960"/>
+            <a:ext cx="8321040" cy="1005840"/>
+          </a:xfrm>
+          <a:prstGeom prst="rect">
+            <a:avLst/>
+          </a:prstGeom>
+          <a:noFill/>
+          <a:ln/>
+        </p:spPr>
+        <p:txBody>
+          <a:bodyPr wrap="square" lIns="0" tIns="0" rIns="0" bIns="0" rtlCol="0" anchor="ctr"/>
+          <a:lstStyle/>
+          <a:p>
+            <a:pPr indent="0" marL="0">
+              <a:lnSpc>
+                <a:spcPts val="4000"/>
+              </a:lnSpc>
+              <a:buNone/>
+            </a:pPr>
+            <a:r>
+              <a:rPr lang="en-US" sz="3100" b="1" dirty="0">
+                <a:solidFill>
+                  <a:srgbClr val="FFFFFF"/>
+                </a:solidFill>
+                <a:latin typeface="Arial" pitchFamily="34" charset="0"/>
+                <a:ea typeface="Arial" pitchFamily="34" charset="-122"/>
+                <a:cs typeface="Arial" pitchFamily="34" charset="-120"/>
+              </a:rPr>
+              <a:t>Quem faz o quê, e em que ordem</a:t>
+            </a:r>
+            <a:endParaRPr lang="en-US" sz="3100" dirty="0"/>
+          </a:p>
+        </p:txBody>
+      </p:sp>
+      <p:sp>
+        <p:nvSpPr>
+          <p:cNvPr id="4" name="Shape 2"/>
+          <p:cNvSpPr/>
+          <p:nvPr/>
+        </p:nvSpPr>
+        <p:spPr>
+          <a:xfrm>
+            <a:off x="457200" y="2157984"/>
+            <a:ext cx="91440" cy="91440"/>
+          </a:xfrm>
+          <a:prstGeom prst="ellipse">
+            <a:avLst/>
+          </a:prstGeom>
+          <a:solidFill>
+            <a:srgbClr val="3B9DF5"/>
+          </a:solidFill>
+          <a:ln w="12700">
+            <a:solidFill>
+              <a:srgbClr val="333333"/>
+            </a:solidFill>
+            <a:prstDash val="solid"/>
+          </a:ln>
+        </p:spPr>
+        <p:txBody>
+          <a:bodyPr/>
+          <a:p/>
+        </p:txBody>
+      </p:sp>
+      <p:sp>
+        <p:nvSpPr>
+          <p:cNvPr id="5" name="Text 3"/>
+          <p:cNvSpPr/>
+          <p:nvPr/>
+        </p:nvSpPr>
+        <p:spPr>
+          <a:xfrm>
+            <a:off x="713232" y="2057400"/>
+            <a:ext cx="7955280" cy="347472"/>
+          </a:xfrm>
+          <a:prstGeom prst="rect">
+            <a:avLst/>
+          </a:prstGeom>
+          <a:noFill/>
+          <a:ln/>
+        </p:spPr>
+        <p:txBody>
+          <a:bodyPr wrap="square" lIns="0" tIns="0" rIns="0" bIns="0" rtlCol="0" anchor="ctr"/>
+          <a:lstStyle/>
+          <a:p>
+            <a:pPr indent="0" marL="0">
+              <a:buNone/>
+            </a:pPr>
+            <a:r>
+              <a:rPr lang="en-US" sz="1500" dirty="0">
+                <a:solidFill>
+                  <a:srgbClr val="D9CFD1"/>
+                </a:solidFill>
+                <a:latin typeface="Arial" pitchFamily="34" charset="0"/>
+                <a:ea typeface="Arial" pitchFamily="34" charset="-122"/>
+                <a:cs typeface="Arial" pitchFamily="34" charset="-120"/>
+              </a:rPr>
+              <a:t>DIRETORIA pergunta 'quem vai comprar?' e cobra a resposta na segunda</a:t>
+            </a:r>
+            <a:endParaRPr lang="en-US" sz="1500" dirty="0"/>
+          </a:p>
+        </p:txBody>
+      </p:sp>
+      <p:sp>
+        <p:nvSpPr>
+          <p:cNvPr id="6" name="Shape 4"/>
+          <p:cNvSpPr/>
+          <p:nvPr/>
+        </p:nvSpPr>
+        <p:spPr>
+          <a:xfrm>
+            <a:off x="457200" y="2578608"/>
+            <a:ext cx="91440" cy="91440"/>
+          </a:xfrm>
+          <a:prstGeom prst="ellipse">
+            <a:avLst/>
+          </a:prstGeom>
+          <a:solidFill>
+            <a:srgbClr val="3B9DF5"/>
+          </a:solidFill>
+          <a:ln w="12700">
+            <a:solidFill>
+              <a:srgbClr val="333333"/>
+            </a:solidFill>
+            <a:prstDash val="solid"/>
+          </a:ln>
+        </p:spPr>
+        <p:txBody>
+          <a:bodyPr/>
+          <a:p/>
+        </p:txBody>
+      </p:sp>
+      <p:sp>
+        <p:nvSpPr>
+          <p:cNvPr id="7" name="Text 5"/>
+          <p:cNvSpPr/>
+          <p:nvPr/>
+        </p:nvSpPr>
+        <p:spPr>
+          <a:xfrm>
+            <a:off x="713232" y="2478024"/>
+            <a:ext cx="7955280" cy="347472"/>
+          </a:xfrm>
+          <a:prstGeom prst="rect">
+            <a:avLst/>
+          </a:prstGeom>
+          <a:noFill/>
+          <a:ln/>
+        </p:spPr>
+        <p:txBody>
+          <a:bodyPr wrap="square" lIns="0" tIns="0" rIns="0" bIns="0" rtlCol="0" anchor="ctr"/>
+          <a:lstStyle/>
+          <a:p>
+            <a:pPr indent="0" marL="0">
+              <a:buNone/>
+            </a:pPr>
+            <a:r>
+              <a:rPr lang="en-US" sz="1500" dirty="0">
+                <a:solidFill>
+                  <a:srgbClr val="D9CFD1"/>
+                </a:solidFill>
+                <a:latin typeface="Arial" pitchFamily="34" charset="0"/>
+                <a:ea typeface="Arial" pitchFamily="34" charset="-122"/>
+                <a:cs typeface="Arial" pitchFamily="34" charset="-120"/>
+              </a:rPr>
+              <a:t>ANALISTA transforma a pergunta em query, e a query em tabela que roda sozinha</a:t>
+            </a:r>
+            <a:endParaRPr lang="en-US" sz="1500" dirty="0"/>
+          </a:p>
+        </p:txBody>
+      </p:sp>
+      <p:sp>
+        <p:nvSpPr>
+          <p:cNvPr id="8" name="Shape 6"/>
+          <p:cNvSpPr/>
+          <p:nvPr/>
+        </p:nvSpPr>
+        <p:spPr>
+          <a:xfrm>
+            <a:off x="457200" y="2999232"/>
+            <a:ext cx="91440" cy="91440"/>
+          </a:xfrm>
+          <a:prstGeom prst="ellipse">
+            <a:avLst/>
+          </a:prstGeom>
+          <a:solidFill>
+            <a:srgbClr val="3B9DF5"/>
+          </a:solidFill>
+          <a:ln w="12700">
+            <a:solidFill>
+              <a:srgbClr val="333333"/>
+            </a:solidFill>
+            <a:prstDash val="solid"/>
+          </a:ln>
+        </p:spPr>
+        <p:txBody>
+          <a:bodyPr/>
+          <a:p/>
+        </p:txBody>
+      </p:sp>
+      <p:sp>
+        <p:nvSpPr>
+          <p:cNvPr id="9" name="Text 7"/>
+          <p:cNvSpPr/>
+          <p:nvPr/>
+        </p:nvSpPr>
+        <p:spPr>
+          <a:xfrm>
+            <a:off x="713232" y="2898648"/>
+            <a:ext cx="7955280" cy="347472"/>
+          </a:xfrm>
+          <a:prstGeom prst="rect">
+            <a:avLst/>
+          </a:prstGeom>
+          <a:noFill/>
+          <a:ln/>
+        </p:spPr>
+        <p:txBody>
+          <a:bodyPr wrap="square" lIns="0" tIns="0" rIns="0" bIns="0" rtlCol="0" anchor="ctr"/>
+          <a:lstStyle/>
+          <a:p>
+            <a:pPr indent="0" marL="0">
+              <a:buNone/>
+            </a:pPr>
+            <a:r>
+              <a:rPr lang="en-US" sz="1500" dirty="0">
+                <a:solidFill>
+                  <a:srgbClr val="D9CFD1"/>
+                </a:solidFill>
+                <a:latin typeface="Arial" pitchFamily="34" charset="0"/>
+                <a:ea typeface="Arial" pitchFamily="34" charset="-122"/>
+                <a:cs typeface="Arial" pitchFamily="34" charset="-120"/>
+              </a:rPr>
+              <a:t>VENDEDOR abre a lista, escolhe 20 nomes e sai para a rua</a:t>
+            </a:r>
+            <a:endParaRPr lang="en-US" sz="1500" dirty="0"/>
+          </a:p>
+        </p:txBody>
+      </p:sp>
+      <p:sp>
+        <p:nvSpPr>
+          <p:cNvPr id="10" name="Shape 8"/>
+          <p:cNvSpPr/>
+          <p:nvPr/>
+        </p:nvSpPr>
+        <p:spPr>
+          <a:xfrm>
+            <a:off x="457200" y="3419856"/>
+            <a:ext cx="91440" cy="91440"/>
+          </a:xfrm>
+          <a:prstGeom prst="ellipse">
+            <a:avLst/>
+          </a:prstGeom>
+          <a:solidFill>
+            <a:srgbClr val="3B9DF5"/>
+          </a:solidFill>
+          <a:ln w="12700">
+            <a:solidFill>
+              <a:srgbClr val="333333"/>
+            </a:solidFill>
+            <a:prstDash val="solid"/>
+          </a:ln>
+        </p:spPr>
+        <p:txBody>
+          <a:bodyPr/>
+          <a:p/>
+        </p:txBody>
+      </p:sp>
+      <p:sp>
+        <p:nvSpPr>
+          <p:cNvPr id="11" name="Text 9"/>
+          <p:cNvSpPr/>
+          <p:nvPr/>
+        </p:nvSpPr>
+        <p:spPr>
+          <a:xfrm>
+            <a:off x="713232" y="3319272"/>
+            <a:ext cx="7955280" cy="347472"/>
+          </a:xfrm>
+          <a:prstGeom prst="rect">
+            <a:avLst/>
+          </a:prstGeom>
+          <a:noFill/>
+          <a:ln/>
+        </p:spPr>
+        <p:txBody>
+          <a:bodyPr wrap="square" lIns="0" tIns="0" rIns="0" bIns="0" rtlCol="0" anchor="ctr"/>
+          <a:lstStyle/>
+          <a:p>
+            <a:pPr indent="0" marL="0">
+              <a:buNone/>
+            </a:pPr>
+            <a:r>
+              <a:rPr lang="en-US" sz="1500" dirty="0">
+                <a:solidFill>
+                  <a:srgbClr val="D9CFD1"/>
+                </a:solidFill>
+                <a:latin typeface="Arial" pitchFamily="34" charset="0"/>
+                <a:ea typeface="Arial" pitchFamily="34" charset="-122"/>
+                <a:cs typeface="Arial" pitchFamily="34" charset="-120"/>
+              </a:rPr>
+              <a:t>CLIENTE compra — ou não atende, ou pede justo o que está em ruptura</a:t>
+            </a:r>
+            <a:endParaRPr lang="en-US" sz="1500" dirty="0"/>
+          </a:p>
+        </p:txBody>
+      </p:sp>
+      <p:sp>
+        <p:nvSpPr>
+          <p:cNvPr id="12" name="Shape 10"/>
+          <p:cNvSpPr/>
+          <p:nvPr/>
+        </p:nvSpPr>
+        <p:spPr>
+          <a:xfrm>
+            <a:off x="457200" y="3840480"/>
+            <a:ext cx="91440" cy="91440"/>
+          </a:xfrm>
+          <a:prstGeom prst="ellipse">
+            <a:avLst/>
+          </a:prstGeom>
+          <a:solidFill>
+            <a:srgbClr val="3B9DF5"/>
+          </a:solidFill>
+          <a:ln w="12700">
+            <a:solidFill>
+              <a:srgbClr val="333333"/>
+            </a:solidFill>
+            <a:prstDash val="solid"/>
+          </a:ln>
+        </p:spPr>
+        <p:txBody>
+          <a:bodyPr/>
+          <a:p/>
+        </p:txBody>
+      </p:sp>
+      <p:sp>
+        <p:nvSpPr>
+          <p:cNvPr id="13" name="Text 11"/>
+          <p:cNvSpPr/>
+          <p:nvPr/>
+        </p:nvSpPr>
+        <p:spPr>
+          <a:xfrm>
+            <a:off x="713232" y="3739896"/>
+            <a:ext cx="7955280" cy="347472"/>
+          </a:xfrm>
+          <a:prstGeom prst="rect">
+            <a:avLst/>
+          </a:prstGeom>
+          <a:noFill/>
+          <a:ln/>
+        </p:spPr>
+        <p:txBody>
+          <a:bodyPr wrap="square" lIns="0" tIns="0" rIns="0" bIns="0" rtlCol="0" anchor="ctr"/>
+          <a:lstStyle/>
+          <a:p>
+            <a:pPr indent="0" marL="0">
+              <a:buNone/>
+            </a:pPr>
+            <a:r>
+              <a:rPr lang="en-US" sz="1500" dirty="0">
+                <a:solidFill>
+                  <a:srgbClr val="D9CFD1"/>
+                </a:solidFill>
+                <a:latin typeface="Arial" pitchFamily="34" charset="0"/>
+                <a:ea typeface="Arial" pitchFamily="34" charset="-122"/>
+                <a:cs typeface="Arial" pitchFamily="34" charset="-120"/>
+              </a:rPr>
+              <a:t>SISTEMA registra tudo, e o pedido de hoje vira o dado de amanhã</a:t>
+            </a:r>
+            <a:endParaRPr lang="en-US" sz="1500" dirty="0"/>
+          </a:p>
+        </p:txBody>
+      </p:sp>
+      <p:sp>
+        <p:nvSpPr>
+          <p:cNvPr id="14" name="Text 12"/>
+          <p:cNvSpPr/>
+          <p:nvPr/>
+        </p:nvSpPr>
+        <p:spPr>
+          <a:xfrm>
+            <a:off x="411480" y="4297680"/>
+            <a:ext cx="8229600" cy="365760"/>
+          </a:xfrm>
+          <a:prstGeom prst="rect">
+            <a:avLst/>
+          </a:prstGeom>
+          <a:noFill/>
+          <a:ln/>
+        </p:spPr>
+        <p:txBody>
+          <a:bodyPr wrap="square" lIns="0" tIns="0" rIns="0" bIns="0" rtlCol="0" anchor="ctr"/>
+          <a:lstStyle/>
+          <a:p>
+            <a:pPr indent="0" marL="0">
+              <a:buNone/>
+            </a:pPr>
+            <a:r>
+              <a:rPr lang="en-US" sz="1300" dirty="0">
+                <a:solidFill>
+                  <a:srgbClr val="7CC8FF"/>
+                </a:solidFill>
+                <a:latin typeface="Arial" pitchFamily="34" charset="0"/>
+                <a:ea typeface="Arial" pitchFamily="34" charset="-122"/>
+                <a:cs typeface="Arial" pitchFamily="34" charset="-120"/>
+              </a:rPr>
+              <a:t>O fluxo é um círculo, não uma linha. O que o vendedor faz hoje alimenta o modelo que vai orientá-lo na semana que vem.</a:t>
+            </a:r>
+            <a:endParaRPr lang="en-US" sz="1300" dirty="0"/>
+          </a:p>
+        </p:txBody>
+      </p:sp>
+      <p:sp>
+        <p:nvSpPr>
+          <p:cNvPr id="15" name="Text 13"/>
+          <p:cNvSpPr/>
+          <p:nvPr/>
+        </p:nvSpPr>
+        <p:spPr>
+          <a:xfrm>
+            <a:off x="411480" y="4681728"/>
+            <a:ext cx="2743200" cy="228600"/>
+          </a:xfrm>
+          <a:prstGeom prst="rect">
+            <a:avLst/>
+          </a:prstGeom>
+          <a:noFill/>
+          <a:ln/>
+        </p:spPr>
+        <p:txBody>
+          <a:bodyPr wrap="square" lIns="0" tIns="0" rIns="0" bIns="0" rtlCol="0" anchor="ctr"/>
+          <a:lstStyle/>
+          <a:p>
+            <a:pPr indent="0" marL="0">
+              <a:buNone/>
+            </a:pPr>
+            <a:r>
+              <a:rPr lang="en-US" sz="800" b="1" spc="200" kern="0" dirty="0">
+                <a:solidFill>
+                  <a:srgbClr val="566A85"/>
+                </a:solidFill>
+                <a:latin typeface="Arial" pitchFamily="34" charset="0"/>
+                <a:ea typeface="Arial" pitchFamily="34" charset="-122"/>
+                <a:cs typeface="Arial" pitchFamily="34" charset="-120"/>
+              </a:rPr>
+              <a:t>JORNADA DE DADOS</a:t>
+            </a:r>
+            <a:endParaRPr lang="en-US" sz="800" dirty="0"/>
+          </a:p>
+        </p:txBody>
+      </p:sp>
+    </p:spTree>
+  </p:cSld>
+  <p:clrMapOvr>
+    <a:masterClrMapping/>
+  </p:clrMapOvr>
+</p:sld>
+</file>
+
+<file path=ppt/slides/slide66.xml><?xml version="1.0" encoding="utf-8"?>
+<p:sld xmlns:a="http://schemas.openxmlformats.org/drawingml/2006/main" xmlns:p="http://schemas.openxmlformats.org/presentationml/2006/main" xmlns:r="http://schemas.openxmlformats.org/officeDocument/2006/relationships">
+  <p:cSld>
+    <p:spTree>
+      <p:nvGrpSpPr>
+        <p:cNvPr id="1" name=""/>
+        <p:cNvGrpSpPr/>
+        <p:nvPr/>
+      </p:nvGrpSpPr>
+      <p:grpSpPr/>
+      <p:sp>
+        <p:nvSpPr>
+          <p:cNvPr id="2" name="Shape 0"/>
+          <p:cNvSpPr/>
+          <p:nvPr/>
+        </p:nvSpPr>
+        <p:spPr>
+          <a:xfrm>
+            <a:off x="0" y="0"/>
+            <a:ext cx="146304" cy="5143500"/>
+          </a:xfrm>
+          <a:prstGeom prst="rect">
+            <a:avLst/>
+          </a:prstGeom>
+          <a:solidFill>
+            <a:srgbClr val="3B9DF5"/>
+          </a:solidFill>
+          <a:ln w="12700">
+            <a:solidFill>
+              <a:srgbClr val="333333"/>
+            </a:solidFill>
+            <a:prstDash val="solid"/>
+          </a:ln>
+        </p:spPr>
+        <p:txBody>
+          <a:bodyPr/>
+          <a:p/>
+        </p:txBody>
+      </p:sp>
+      <p:sp>
+        <p:nvSpPr>
+          <p:cNvPr id="3" name="Text 1"/>
+          <p:cNvSpPr/>
+          <p:nvPr/>
+        </p:nvSpPr>
+        <p:spPr>
+          <a:xfrm>
+            <a:off x="640080" y="1417320"/>
+            <a:ext cx="1828800" cy="457200"/>
+          </a:xfrm>
+          <a:prstGeom prst="rect">
+            <a:avLst/>
+          </a:prstGeom>
+          <a:noFill/>
+          <a:ln/>
+        </p:spPr>
+        <p:txBody>
+          <a:bodyPr wrap="square" lIns="0" tIns="0" rIns="0" bIns="0" rtlCol="0" anchor="ctr"/>
+          <a:lstStyle/>
+          <a:p>
+            <a:pPr indent="0" marL="0">
+              <a:buNone/>
+            </a:pPr>
+            <a:r>
+              <a:rPr lang="en-US" sz="1300" b="1" spc="200" kern="0" dirty="0">
+                <a:solidFill>
+                  <a:srgbClr val="3B9DF5"/>
+                </a:solidFill>
+                <a:latin typeface="Arial" pitchFamily="34" charset="0"/>
+                <a:ea typeface="Arial" pitchFamily="34" charset="-122"/>
+                <a:cs typeface="Arial" pitchFamily="34" charset="-120"/>
+              </a:rPr>
+              <a:t>DINÂMICA 05</a:t>
+            </a:r>
+            <a:endParaRPr lang="en-US" sz="1300" dirty="0"/>
+          </a:p>
+        </p:txBody>
+      </p:sp>
+      <p:sp>
+        <p:nvSpPr>
+          <p:cNvPr id="4" name="Text 2"/>
+          <p:cNvSpPr/>
+          <p:nvPr/>
+        </p:nvSpPr>
+        <p:spPr>
+          <a:xfrm>
+            <a:off x="640080" y="1828800"/>
+            <a:ext cx="7863840" cy="1371600"/>
+          </a:xfrm>
+          <a:prstGeom prst="rect">
+            <a:avLst/>
+          </a:prstGeom>
+          <a:noFill/>
+          <a:ln/>
+        </p:spPr>
+        <p:txBody>
+          <a:bodyPr wrap="square" lIns="0" tIns="0" rIns="0" bIns="0" rtlCol="0" anchor="ctr"/>
+          <a:lstStyle/>
+          <a:p>
+            <a:pPr indent="0" marL="0">
+              <a:lnSpc>
+                <a:spcPts val="4800"/>
+              </a:lnSpc>
+              <a:buNone/>
+            </a:pPr>
+            <a:r>
+              <a:rPr lang="en-US" sz="4200" b="1" dirty="0">
+                <a:solidFill>
+                  <a:srgbClr val="FFFFFF"/>
+                </a:solidFill>
+                <a:latin typeface="Arial" pitchFamily="34" charset="0"/>
+                <a:ea typeface="Arial" pitchFamily="34" charset="-122"/>
+                <a:cs typeface="Arial" pitchFamily="34" charset="-120"/>
+              </a:rPr>
+              <a:t>Qual é a menor coisa que já responde?</a:t>
+            </a:r>
+            <a:endParaRPr lang="en-US" sz="4200" dirty="0"/>
+          </a:p>
+        </p:txBody>
+      </p:sp>
+      <p:sp>
+        <p:nvSpPr>
+          <p:cNvPr id="5" name="Text 3"/>
+          <p:cNvSpPr/>
+          <p:nvPr/>
+        </p:nvSpPr>
+        <p:spPr>
+          <a:xfrm>
+            <a:off x="640080" y="3246120"/>
+            <a:ext cx="7315200" cy="548640"/>
+          </a:xfrm>
+          <a:prstGeom prst="rect">
+            <a:avLst/>
+          </a:prstGeom>
+          <a:noFill/>
+          <a:ln/>
+        </p:spPr>
+        <p:txBody>
+          <a:bodyPr wrap="square" lIns="0" tIns="0" rIns="0" bIns="0" rtlCol="0" anchor="ctr"/>
+          <a:lstStyle/>
+          <a:p>
+            <a:pPr indent="0" marL="0">
+              <a:buNone/>
+            </a:pPr>
+            <a:r>
+              <a:rPr lang="en-US" sz="1500" dirty="0">
+                <a:solidFill>
+                  <a:srgbClr val="9BAAC0"/>
+                </a:solidFill>
+                <a:latin typeface="Arial" pitchFamily="34" charset="0"/>
+                <a:ea typeface="Arial" pitchFamily="34" charset="-122"/>
+                <a:cs typeface="Arial" pitchFamily="34" charset="-120"/>
+              </a:rPr>
+              <a:t>Protótipo não é o produto final. É o suficiente para saber se presta.</a:t>
+            </a:r>
+            <a:endParaRPr lang="en-US" sz="1500" dirty="0"/>
+          </a:p>
+        </p:txBody>
+      </p:sp>
+    </p:spTree>
+  </p:cSld>
+  <p:clrMapOvr>
+    <a:masterClrMapping/>
+  </p:clrMapOvr>
+</p:sld>
+</file>
+
+<file path=ppt/slides/slide67.xml><?xml version="1.0" encoding="utf-8"?>
+<p:sld xmlns:a="http://schemas.openxmlformats.org/drawingml/2006/main" xmlns:p="http://schemas.openxmlformats.org/presentationml/2006/main" xmlns:r="http://schemas.openxmlformats.org/officeDocument/2006/relationships">
+  <p:cSld>
+    <p:spTree>
+      <p:nvGrpSpPr>
+        <p:cNvPr id="1" name=""/>
+        <p:cNvGrpSpPr/>
+        <p:nvPr/>
+      </p:nvGrpSpPr>
+      <p:grpSpPr/>
+      <p:sp>
+        <p:nvSpPr>
+          <p:cNvPr id="2" name="Text 0"/>
+          <p:cNvSpPr/>
+          <p:nvPr/>
+        </p:nvSpPr>
+        <p:spPr>
+          <a:xfrm>
+            <a:off x="411480" y="411480"/>
+            <a:ext cx="7315200" cy="256032"/>
+          </a:xfrm>
+          <a:prstGeom prst="rect">
+            <a:avLst/>
+          </a:prstGeom>
+          <a:noFill/>
+          <a:ln/>
+        </p:spPr>
+        <p:txBody>
+          <a:bodyPr wrap="square" lIns="0" tIns="0" rIns="0" bIns="0" rtlCol="0" anchor="ctr"/>
+          <a:lstStyle/>
+          <a:p>
+            <a:pPr indent="0" marL="0">
+              <a:buNone/>
+            </a:pPr>
+            <a:r>
+              <a:rPr lang="en-US" sz="1100" b="1" spc="160" kern="0" dirty="0">
+                <a:solidFill>
+                  <a:srgbClr val="3B9DF5"/>
+                </a:solidFill>
+                <a:latin typeface="Arial" pitchFamily="34" charset="0"/>
+                <a:ea typeface="Arial" pitchFamily="34" charset="-122"/>
+                <a:cs typeface="Arial" pitchFamily="34" charset="-120"/>
+              </a:rPr>
+              <a:t>DINÂMICA 05 · O PROTÓTIPO</a:t>
+            </a:r>
+            <a:endParaRPr lang="en-US" sz="1100" dirty="0"/>
+          </a:p>
+        </p:txBody>
+      </p:sp>
+      <p:sp>
+        <p:nvSpPr>
+          <p:cNvPr id="3" name="Text 1"/>
+          <p:cNvSpPr/>
+          <p:nvPr/>
+        </p:nvSpPr>
+        <p:spPr>
+          <a:xfrm>
+            <a:off x="411480" y="822960"/>
+            <a:ext cx="8321040" cy="1005840"/>
+          </a:xfrm>
+          <a:prstGeom prst="rect">
+            <a:avLst/>
+          </a:prstGeom>
+          <a:noFill/>
+          <a:ln/>
+        </p:spPr>
+        <p:txBody>
+          <a:bodyPr wrap="square" lIns="0" tIns="0" rIns="0" bIns="0" rtlCol="0" anchor="ctr"/>
+          <a:lstStyle/>
+          <a:p>
+            <a:pPr indent="0" marL="0">
+              <a:lnSpc>
+                <a:spcPts val="4000"/>
+              </a:lnSpc>
+              <a:buNone/>
+            </a:pPr>
+            <a:r>
+              <a:rPr lang="en-US" sz="3100" b="1" dirty="0">
+                <a:solidFill>
+                  <a:srgbClr val="FFFFFF"/>
+                </a:solidFill>
+                <a:latin typeface="Arial" pitchFamily="34" charset="0"/>
+                <a:ea typeface="Arial" pitchFamily="34" charset="-122"/>
+                <a:cs typeface="Arial" pitchFamily="34" charset="-120"/>
+              </a:rPr>
+              <a:t>A menor coisa que já responde</a:t>
+            </a:r>
+            <a:endParaRPr lang="en-US" sz="3100" dirty="0"/>
+          </a:p>
+        </p:txBody>
+      </p:sp>
+      <p:sp>
+        <p:nvSpPr>
+          <p:cNvPr id="4" name="Shape 2"/>
+          <p:cNvSpPr/>
+          <p:nvPr/>
+        </p:nvSpPr>
+        <p:spPr>
+          <a:xfrm>
+            <a:off x="457200" y="2157984"/>
+            <a:ext cx="91440" cy="91440"/>
+          </a:xfrm>
+          <a:prstGeom prst="ellipse">
+            <a:avLst/>
+          </a:prstGeom>
+          <a:solidFill>
+            <a:srgbClr val="3B9DF5"/>
+          </a:solidFill>
+          <a:ln w="12700">
+            <a:solidFill>
+              <a:srgbClr val="333333"/>
+            </a:solidFill>
+            <a:prstDash val="solid"/>
+          </a:ln>
+        </p:spPr>
+        <p:txBody>
+          <a:bodyPr/>
+          <a:p/>
+        </p:txBody>
+      </p:sp>
+      <p:sp>
+        <p:nvSpPr>
+          <p:cNvPr id="5" name="Text 3"/>
+          <p:cNvSpPr/>
+          <p:nvPr/>
+        </p:nvSpPr>
+        <p:spPr>
+          <a:xfrm>
+            <a:off x="713232" y="2057400"/>
+            <a:ext cx="7955280" cy="347472"/>
+          </a:xfrm>
+          <a:prstGeom prst="rect">
+            <a:avLst/>
+          </a:prstGeom>
+          <a:noFill/>
+          <a:ln/>
+        </p:spPr>
+        <p:txBody>
+          <a:bodyPr wrap="square" lIns="0" tIns="0" rIns="0" bIns="0" rtlCol="0" anchor="ctr"/>
+          <a:lstStyle/>
+          <a:p>
+            <a:pPr indent="0" marL="0">
+              <a:buNone/>
+            </a:pPr>
+            <a:r>
+              <a:rPr lang="en-US" sz="1500" dirty="0">
+                <a:solidFill>
+                  <a:srgbClr val="D9CFD1"/>
+                </a:solidFill>
+                <a:latin typeface="Arial" pitchFamily="34" charset="0"/>
+                <a:ea typeface="Arial" pitchFamily="34" charset="-122"/>
+                <a:cs typeface="Arial" pitchFamily="34" charset="-120"/>
+              </a:rPr>
+              <a:t>O protótipo foi UMA query: última compra + ritmo de compra do cliente</a:t>
+            </a:r>
+            <a:endParaRPr lang="en-US" sz="1500" dirty="0"/>
+          </a:p>
+        </p:txBody>
+      </p:sp>
+      <p:sp>
+        <p:nvSpPr>
+          <p:cNvPr id="6" name="Shape 4"/>
+          <p:cNvSpPr/>
+          <p:nvPr/>
+        </p:nvSpPr>
+        <p:spPr>
+          <a:xfrm>
+            <a:off x="457200" y="2578608"/>
+            <a:ext cx="91440" cy="91440"/>
+          </a:xfrm>
+          <a:prstGeom prst="ellipse">
+            <a:avLst/>
+          </a:prstGeom>
+          <a:solidFill>
+            <a:srgbClr val="3B9DF5"/>
+          </a:solidFill>
+          <a:ln w="12700">
+            <a:solidFill>
+              <a:srgbClr val="333333"/>
+            </a:solidFill>
+            <a:prstDash val="solid"/>
+          </a:ln>
+        </p:spPr>
+        <p:txBody>
+          <a:bodyPr/>
+          <a:p/>
+        </p:txBody>
+      </p:sp>
+      <p:sp>
+        <p:nvSpPr>
+          <p:cNvPr id="7" name="Text 5"/>
+          <p:cNvSpPr/>
+          <p:nvPr/>
+        </p:nvSpPr>
+        <p:spPr>
+          <a:xfrm>
+            <a:off x="713232" y="2478024"/>
+            <a:ext cx="7955280" cy="347472"/>
+          </a:xfrm>
+          <a:prstGeom prst="rect">
+            <a:avLst/>
+          </a:prstGeom>
+          <a:noFill/>
+          <a:ln/>
+        </p:spPr>
+        <p:txBody>
+          <a:bodyPr wrap="square" lIns="0" tIns="0" rIns="0" bIns="0" rtlCol="0" anchor="ctr"/>
+          <a:lstStyle/>
+          <a:p>
+            <a:pPr indent="0" marL="0">
+              <a:buNone/>
+            </a:pPr>
+            <a:r>
+              <a:rPr lang="en-US" sz="1500" dirty="0">
+                <a:solidFill>
+                  <a:srgbClr val="D9CFD1"/>
+                </a:solidFill>
+                <a:latin typeface="Arial" pitchFamily="34" charset="0"/>
+                <a:ea typeface="Arial" pitchFamily="34" charset="-122"/>
+                <a:cs typeface="Arial" pitchFamily="34" charset="-120"/>
+              </a:rPr>
+              <a:t>Zero modelo, zero dashboard, zero aplicativo — 40 linhas de SQL</a:t>
+            </a:r>
+            <a:endParaRPr lang="en-US" sz="1500" dirty="0"/>
+          </a:p>
+        </p:txBody>
+      </p:sp>
+      <p:sp>
+        <p:nvSpPr>
+          <p:cNvPr id="8" name="Shape 6"/>
+          <p:cNvSpPr/>
+          <p:nvPr/>
+        </p:nvSpPr>
+        <p:spPr>
+          <a:xfrm>
+            <a:off x="457200" y="2999232"/>
+            <a:ext cx="91440" cy="91440"/>
+          </a:xfrm>
+          <a:prstGeom prst="ellipse">
+            <a:avLst/>
+          </a:prstGeom>
+          <a:solidFill>
+            <a:srgbClr val="3B9DF5"/>
+          </a:solidFill>
+          <a:ln w="12700">
+            <a:solidFill>
+              <a:srgbClr val="333333"/>
+            </a:solidFill>
+            <a:prstDash val="solid"/>
+          </a:ln>
+        </p:spPr>
+        <p:txBody>
+          <a:bodyPr/>
+          <a:p/>
+        </p:txBody>
+      </p:sp>
+      <p:sp>
+        <p:nvSpPr>
+          <p:cNvPr id="9" name="Text 7"/>
+          <p:cNvSpPr/>
+          <p:nvPr/>
+        </p:nvSpPr>
+        <p:spPr>
+          <a:xfrm>
+            <a:off x="713232" y="2898648"/>
+            <a:ext cx="7955280" cy="347472"/>
+          </a:xfrm>
+          <a:prstGeom prst="rect">
+            <a:avLst/>
+          </a:prstGeom>
+          <a:noFill/>
+          <a:ln/>
+        </p:spPr>
+        <p:txBody>
+          <a:bodyPr wrap="square" lIns="0" tIns="0" rIns="0" bIns="0" rtlCol="0" anchor="ctr"/>
+          <a:lstStyle/>
+          <a:p>
+            <a:pPr indent="0" marL="0">
+              <a:buNone/>
+            </a:pPr>
+            <a:r>
+              <a:rPr lang="en-US" sz="1500" dirty="0">
+                <a:solidFill>
+                  <a:srgbClr val="D9CFD1"/>
+                </a:solidFill>
+                <a:latin typeface="Arial" pitchFamily="34" charset="0"/>
+                <a:ea typeface="Arial" pitchFamily="34" charset="-122"/>
+                <a:cs typeface="Arial" pitchFamily="34" charset="-120"/>
+              </a:rPr>
+              <a:t>O teste levou 25 segundos: 72,7% de acerto contra 42,3% de ligar para todos</a:t>
+            </a:r>
+            <a:endParaRPr lang="en-US" sz="1500" dirty="0"/>
+          </a:p>
+        </p:txBody>
+      </p:sp>
+      <p:sp>
+        <p:nvSpPr>
+          <p:cNvPr id="10" name="Shape 8"/>
+          <p:cNvSpPr/>
+          <p:nvPr/>
+        </p:nvSpPr>
+        <p:spPr>
+          <a:xfrm>
+            <a:off x="457200" y="3419856"/>
+            <a:ext cx="91440" cy="91440"/>
+          </a:xfrm>
+          <a:prstGeom prst="ellipse">
+            <a:avLst/>
+          </a:prstGeom>
+          <a:solidFill>
+            <a:srgbClr val="3B9DF5"/>
+          </a:solidFill>
+          <a:ln w="12700">
+            <a:solidFill>
+              <a:srgbClr val="333333"/>
+            </a:solidFill>
+            <a:prstDash val="solid"/>
+          </a:ln>
+        </p:spPr>
+        <p:txBody>
+          <a:bodyPr/>
+          <a:p/>
+        </p:txBody>
+      </p:sp>
+      <p:sp>
+        <p:nvSpPr>
+          <p:cNvPr id="11" name="Text 9"/>
+          <p:cNvSpPr/>
+          <p:nvPr/>
+        </p:nvSpPr>
+        <p:spPr>
+          <a:xfrm>
+            <a:off x="713232" y="3319272"/>
+            <a:ext cx="7955280" cy="347472"/>
+          </a:xfrm>
+          <a:prstGeom prst="rect">
+            <a:avLst/>
+          </a:prstGeom>
+          <a:noFill/>
+          <a:ln/>
+        </p:spPr>
+        <p:txBody>
+          <a:bodyPr wrap="square" lIns="0" tIns="0" rIns="0" bIns="0" rtlCol="0" anchor="ctr"/>
+          <a:lstStyle/>
+          <a:p>
+            <a:pPr indent="0" marL="0">
+              <a:buNone/>
+            </a:pPr>
+            <a:r>
+              <a:rPr lang="en-US" sz="1500" dirty="0">
+                <a:solidFill>
+                  <a:srgbClr val="D9CFD1"/>
+                </a:solidFill>
+                <a:latin typeface="Arial" pitchFamily="34" charset="0"/>
+                <a:ea typeface="Arial" pitchFamily="34" charset="-122"/>
+                <a:cs typeface="Arial" pitchFamily="34" charset="-120"/>
+              </a:rPr>
+              <a:t>Só então o modelo entrou — e teve de bater esse número para se justificar</a:t>
+            </a:r>
+            <a:endParaRPr lang="en-US" sz="1500" dirty="0"/>
+          </a:p>
+        </p:txBody>
+      </p:sp>
+      <p:sp>
+        <p:nvSpPr>
+          <p:cNvPr id="12" name="Shape 10"/>
+          <p:cNvSpPr/>
+          <p:nvPr/>
+        </p:nvSpPr>
+        <p:spPr>
+          <a:xfrm>
+            <a:off x="457200" y="3840480"/>
+            <a:ext cx="91440" cy="91440"/>
+          </a:xfrm>
+          <a:prstGeom prst="ellipse">
+            <a:avLst/>
+          </a:prstGeom>
+          <a:solidFill>
+            <a:srgbClr val="3B9DF5"/>
+          </a:solidFill>
+          <a:ln w="12700">
+            <a:solidFill>
+              <a:srgbClr val="333333"/>
+            </a:solidFill>
+            <a:prstDash val="solid"/>
+          </a:ln>
+        </p:spPr>
+        <p:txBody>
+          <a:bodyPr/>
+          <a:p/>
+        </p:txBody>
+      </p:sp>
+      <p:sp>
+        <p:nvSpPr>
+          <p:cNvPr id="13" name="Text 11"/>
+          <p:cNvSpPr/>
+          <p:nvPr/>
+        </p:nvSpPr>
+        <p:spPr>
+          <a:xfrm>
+            <a:off x="713232" y="3739896"/>
+            <a:ext cx="7955280" cy="347472"/>
+          </a:xfrm>
+          <a:prstGeom prst="rect">
+            <a:avLst/>
+          </a:prstGeom>
+          <a:noFill/>
+          <a:ln/>
+        </p:spPr>
+        <p:txBody>
+          <a:bodyPr wrap="square" lIns="0" tIns="0" rIns="0" bIns="0" rtlCol="0" anchor="ctr"/>
+          <a:lstStyle/>
+          <a:p>
+            <a:pPr indent="0" marL="0">
+              <a:buNone/>
+            </a:pPr>
+            <a:r>
+              <a:rPr lang="en-US" sz="1500" dirty="0">
+                <a:solidFill>
+                  <a:srgbClr val="D9CFD1"/>
+                </a:solidFill>
+                <a:latin typeface="Arial" pitchFamily="34" charset="0"/>
+                <a:ea typeface="Arial" pitchFamily="34" charset="-122"/>
+                <a:cs typeface="Arial" pitchFamily="34" charset="-120"/>
+              </a:rPr>
+              <a:t>O que NÃO fizemos: interface, integração e pipeline antes de saber se funcionava</a:t>
+            </a:r>
+            <a:endParaRPr lang="en-US" sz="1500" dirty="0"/>
+          </a:p>
+        </p:txBody>
+      </p:sp>
+      <p:sp>
+        <p:nvSpPr>
+          <p:cNvPr id="14" name="Text 12"/>
+          <p:cNvSpPr/>
+          <p:nvPr/>
+        </p:nvSpPr>
+        <p:spPr>
+          <a:xfrm>
+            <a:off x="411480" y="4297680"/>
+            <a:ext cx="8229600" cy="365760"/>
+          </a:xfrm>
+          <a:prstGeom prst="rect">
+            <a:avLst/>
+          </a:prstGeom>
+          <a:noFill/>
+          <a:ln/>
+        </p:spPr>
+        <p:txBody>
+          <a:bodyPr wrap="square" lIns="0" tIns="0" rIns="0" bIns="0" rtlCol="0" anchor="ctr"/>
+          <a:lstStyle/>
+          <a:p>
+            <a:pPr indent="0" marL="0">
+              <a:buNone/>
+            </a:pPr>
+            <a:r>
+              <a:rPr lang="en-US" sz="1300" dirty="0">
+                <a:solidFill>
+                  <a:srgbClr val="7CC8FF"/>
+                </a:solidFill>
+                <a:latin typeface="Arial" pitchFamily="34" charset="0"/>
+                <a:ea typeface="Arial" pitchFamily="34" charset="-122"/>
+                <a:cs typeface="Arial" pitchFamily="34" charset="-120"/>
+              </a:rPr>
+              <a:t>Protótipo que leva uma semana não é protótipo. Se a ideia for ruim, você quer descobrir hoje — não depois de a equipe já ter construído.</a:t>
+            </a:r>
+            <a:endParaRPr lang="en-US" sz="1300" dirty="0"/>
+          </a:p>
+        </p:txBody>
+      </p:sp>
+      <p:sp>
+        <p:nvSpPr>
+          <p:cNvPr id="15" name="Text 13"/>
           <p:cNvSpPr/>
           <p:nvPr/>
         </p:nvSpPr>

--- a/aulas/aula-01-databricks-sql/aula-01-imersao-agosto.pptx
+++ b/aulas/aula-01-databricks-sql/aula-01-imersao-agosto.pptx
@@ -13975,7 +13975,7 @@
                 <a:ea typeface="Arial" pitchFamily="34" charset="-122"/>
                 <a:cs typeface="Arial" pitchFamily="34" charset="-120"/>
               </a:rPr>
-              <a:t>Protótipo que leva uma semana não é protótipo. Se a ideia for ruim, você quer descobrir hoje — não depois de a equipe já ter construído.</a:t>
+              <a:t>Protótipo que leva uma semana não é protótipo. Agora pegue as cinco perguntas da dinâmica 1: qual delas dá para prototipar HOJE, com uma query?</a:t>
             </a:r>
             <a:endParaRPr lang="en-US" sz="1300" dirty="0"/>
           </a:p>
@@ -14029,6 +14029,523 @@
 </file>
 
 <file path=ppt/slides/slide26.xml><?xml version="1.0" encoding="utf-8"?>
+<p:sld xmlns:a="http://schemas.openxmlformats.org/drawingml/2006/main" xmlns:p="http://schemas.openxmlformats.org/presentationml/2006/main" xmlns:r="http://schemas.openxmlformats.org/officeDocument/2006/relationships">
+  <p:cSld>
+    <p:spTree>
+      <p:nvGrpSpPr>
+        <p:cNvPr id="1" name=""/>
+        <p:cNvGrpSpPr/>
+        <p:nvPr/>
+      </p:nvGrpSpPr>
+      <p:grpSpPr/>
+      <p:sp>
+        <p:nvSpPr>
+          <p:cNvPr id="2" name="Text 0"/>
+          <p:cNvSpPr/>
+          <p:nvPr/>
+        </p:nvSpPr>
+        <p:spPr>
+          <a:xfrm>
+            <a:off x="411480" y="411480"/>
+            <a:ext cx="7315200" cy="256032"/>
+          </a:xfrm>
+          <a:prstGeom prst="rect">
+            <a:avLst/>
+          </a:prstGeom>
+          <a:noFill/>
+          <a:ln/>
+        </p:spPr>
+        <p:txBody>
+          <a:bodyPr wrap="square" lIns="0" tIns="0" rIns="0" bIns="0" rtlCol="0" anchor="ctr"/>
+          <a:lstStyle/>
+          <a:p>
+            <a:pPr indent="0" marL="0">
+              <a:buNone/>
+            </a:pPr>
+            <a:r>
+              <a:rPr lang="en-US" sz="1100" b="1" spc="160" kern="0" dirty="0">
+                <a:solidFill>
+                  <a:srgbClr val="3B9DF5"/>
+                </a:solidFill>
+                <a:latin typeface="Arial" pitchFamily="34" charset="0"/>
+                <a:ea typeface="Arial" pitchFamily="34" charset="-122"/>
+                <a:cs typeface="Arial" pitchFamily="34" charset="-120"/>
+              </a:rPr>
+              <a:t>DA DINÂMICA PARA O CÓDIGO</a:t>
+            </a:r>
+            <a:endParaRPr lang="en-US" sz="1100" dirty="0"/>
+          </a:p>
+        </p:txBody>
+      </p:sp>
+      <p:sp>
+        <p:nvSpPr>
+          <p:cNvPr id="3" name="Text 1"/>
+          <p:cNvSpPr/>
+          <p:nvPr/>
+        </p:nvSpPr>
+        <p:spPr>
+          <a:xfrm>
+            <a:off x="411480" y="822960"/>
+            <a:ext cx="8321040" cy="1005840"/>
+          </a:xfrm>
+          <a:prstGeom prst="rect">
+            <a:avLst/>
+          </a:prstGeom>
+          <a:noFill/>
+          <a:ln/>
+        </p:spPr>
+        <p:txBody>
+          <a:bodyPr wrap="square" lIns="0" tIns="0" rIns="0" bIns="0" rtlCol="0" anchor="ctr"/>
+          <a:lstStyle/>
+          <a:p>
+            <a:pPr indent="0" marL="0">
+              <a:lnSpc>
+                <a:spcPts val="4000"/>
+              </a:lnSpc>
+              <a:buNone/>
+            </a:pPr>
+            <a:r>
+              <a:rPr lang="en-US" sz="3100" b="1" dirty="0">
+                <a:solidFill>
+                  <a:srgbClr val="FFFFFF"/>
+                </a:solidFill>
+                <a:latin typeface="Arial" pitchFamily="34" charset="0"/>
+                <a:ea typeface="Arial" pitchFamily="34" charset="-122"/>
+                <a:cs typeface="Arial" pitchFamily="34" charset="-120"/>
+              </a:rPr>
+              <a:t>Cada pergunta vira uma query</a:t>
+            </a:r>
+            <a:endParaRPr lang="en-US" sz="3100" dirty="0"/>
+          </a:p>
+        </p:txBody>
+      </p:sp>
+      <p:sp>
+        <p:nvSpPr>
+          <p:cNvPr id="4" name="Shape 2"/>
+          <p:cNvSpPr/>
+          <p:nvPr/>
+        </p:nvSpPr>
+        <p:spPr>
+          <a:xfrm>
+            <a:off x="457200" y="2157984"/>
+            <a:ext cx="91440" cy="91440"/>
+          </a:xfrm>
+          <a:prstGeom prst="ellipse">
+            <a:avLst/>
+          </a:prstGeom>
+          <a:solidFill>
+            <a:srgbClr val="3B9DF5"/>
+          </a:solidFill>
+          <a:ln w="12700">
+            <a:solidFill>
+              <a:srgbClr val="333333"/>
+            </a:solidFill>
+            <a:prstDash val="solid"/>
+          </a:ln>
+        </p:spPr>
+        <p:txBody>
+          <a:bodyPr/>
+          <a:p/>
+        </p:txBody>
+      </p:sp>
+      <p:sp>
+        <p:nvSpPr>
+          <p:cNvPr id="5" name="Text 3"/>
+          <p:cNvSpPr/>
+          <p:nvPr/>
+        </p:nvSpPr>
+        <p:spPr>
+          <a:xfrm>
+            <a:off x="713232" y="2057400"/>
+            <a:ext cx="7955280" cy="347472"/>
+          </a:xfrm>
+          <a:prstGeom prst="rect">
+            <a:avLst/>
+          </a:prstGeom>
+          <a:noFill/>
+          <a:ln/>
+        </p:spPr>
+        <p:txBody>
+          <a:bodyPr wrap="square" lIns="0" tIns="0" rIns="0" bIns="0" rtlCol="0" anchor="ctr"/>
+          <a:lstStyle/>
+          <a:p>
+            <a:pPr indent="0" marL="0">
+              <a:buNone/>
+            </a:pPr>
+            <a:r>
+              <a:rPr lang="en-US" sz="1500" dirty="0">
+                <a:solidFill>
+                  <a:srgbClr val="D9CFD1"/>
+                </a:solidFill>
+                <a:latin typeface="Arial" pitchFamily="34" charset="0"/>
+                <a:ea typeface="Arial" pitchFamily="34" charset="-122"/>
+                <a:cs typeface="Arial" pitchFamily="34" charset="-120"/>
+              </a:rPr>
+              <a:t>1 · Quem vai comprar? → última compra + ritmo do cliente · noite 3</a:t>
+            </a:r>
+            <a:endParaRPr lang="en-US" sz="1500" dirty="0"/>
+          </a:p>
+        </p:txBody>
+      </p:sp>
+      <p:sp>
+        <p:nvSpPr>
+          <p:cNvPr id="6" name="Shape 4"/>
+          <p:cNvSpPr/>
+          <p:nvPr/>
+        </p:nvSpPr>
+        <p:spPr>
+          <a:xfrm>
+            <a:off x="457200" y="2578608"/>
+            <a:ext cx="91440" cy="91440"/>
+          </a:xfrm>
+          <a:prstGeom prst="ellipse">
+            <a:avLst/>
+          </a:prstGeom>
+          <a:solidFill>
+            <a:srgbClr val="3B9DF5"/>
+          </a:solidFill>
+          <a:ln w="12700">
+            <a:solidFill>
+              <a:srgbClr val="333333"/>
+            </a:solidFill>
+            <a:prstDash val="solid"/>
+          </a:ln>
+        </p:spPr>
+        <p:txBody>
+          <a:bodyPr/>
+          <a:p/>
+        </p:txBody>
+      </p:sp>
+      <p:sp>
+        <p:nvSpPr>
+          <p:cNvPr id="7" name="Text 5"/>
+          <p:cNvSpPr/>
+          <p:nvPr/>
+        </p:nvSpPr>
+        <p:spPr>
+          <a:xfrm>
+            <a:off x="713232" y="2478024"/>
+            <a:ext cx="7955280" cy="347472"/>
+          </a:xfrm>
+          <a:prstGeom prst="rect">
+            <a:avLst/>
+          </a:prstGeom>
+          <a:noFill/>
+          <a:ln/>
+        </p:spPr>
+        <p:txBody>
+          <a:bodyPr wrap="square" lIns="0" tIns="0" rIns="0" bIns="0" rtlCol="0" anchor="ctr"/>
+          <a:lstStyle/>
+          <a:p>
+            <a:pPr indent="0" marL="0">
+              <a:buNone/>
+            </a:pPr>
+            <a:r>
+              <a:rPr lang="en-US" sz="1500" dirty="0">
+                <a:solidFill>
+                  <a:srgbClr val="D9CFD1"/>
+                </a:solidFill>
+                <a:latin typeface="Arial" pitchFamily="34" charset="0"/>
+                <a:ea typeface="Arial" pitchFamily="34" charset="-122"/>
+                <a:cs typeface="Arial" pitchFamily="34" charset="-120"/>
+              </a:rPr>
+              <a:t>2 · Quem está sumindo? → recência comparada ao ritmo dele · noite 3</a:t>
+            </a:r>
+            <a:endParaRPr lang="en-US" sz="1500" dirty="0"/>
+          </a:p>
+        </p:txBody>
+      </p:sp>
+      <p:sp>
+        <p:nvSpPr>
+          <p:cNvPr id="8" name="Shape 6"/>
+          <p:cNvSpPr/>
+          <p:nvPr/>
+        </p:nvSpPr>
+        <p:spPr>
+          <a:xfrm>
+            <a:off x="457200" y="2999232"/>
+            <a:ext cx="91440" cy="91440"/>
+          </a:xfrm>
+          <a:prstGeom prst="ellipse">
+            <a:avLst/>
+          </a:prstGeom>
+          <a:solidFill>
+            <a:srgbClr val="3B9DF5"/>
+          </a:solidFill>
+          <a:ln w="12700">
+            <a:solidFill>
+              <a:srgbClr val="333333"/>
+            </a:solidFill>
+            <a:prstDash val="solid"/>
+          </a:ln>
+        </p:spPr>
+        <p:txBody>
+          <a:bodyPr/>
+          <a:p/>
+        </p:txBody>
+      </p:sp>
+      <p:sp>
+        <p:nvSpPr>
+          <p:cNvPr id="9" name="Text 7"/>
+          <p:cNvSpPr/>
+          <p:nvPr/>
+        </p:nvSpPr>
+        <p:spPr>
+          <a:xfrm>
+            <a:off x="713232" y="2898648"/>
+            <a:ext cx="7955280" cy="347472"/>
+          </a:xfrm>
+          <a:prstGeom prst="rect">
+            <a:avLst/>
+          </a:prstGeom>
+          <a:noFill/>
+          <a:ln/>
+        </p:spPr>
+        <p:txBody>
+          <a:bodyPr wrap="square" lIns="0" tIns="0" rIns="0" bIns="0" rtlCol="0" anchor="ctr"/>
+          <a:lstStyle/>
+          <a:p>
+            <a:pPr indent="0" marL="0">
+              <a:buNone/>
+            </a:pPr>
+            <a:r>
+              <a:rPr lang="en-US" sz="1500" dirty="0">
+                <a:solidFill>
+                  <a:srgbClr val="D9CFD1"/>
+                </a:solidFill>
+                <a:latin typeface="Arial" pitchFamily="34" charset="0"/>
+                <a:ea typeface="Arial" pitchFamily="34" charset="-122"/>
+                <a:cs typeface="Arial" pitchFamily="34" charset="-120"/>
+              </a:rPr>
+              <a:t>3 · Evitar a visita perdida? → é a mesma lista, priorizada · noite 3</a:t>
+            </a:r>
+            <a:endParaRPr lang="en-US" sz="1500" dirty="0"/>
+          </a:p>
+        </p:txBody>
+      </p:sp>
+      <p:sp>
+        <p:nvSpPr>
+          <p:cNvPr id="10" name="Shape 8"/>
+          <p:cNvSpPr/>
+          <p:nvPr/>
+        </p:nvSpPr>
+        <p:spPr>
+          <a:xfrm>
+            <a:off x="457200" y="3419856"/>
+            <a:ext cx="91440" cy="91440"/>
+          </a:xfrm>
+          <a:prstGeom prst="ellipse">
+            <a:avLst/>
+          </a:prstGeom>
+          <a:solidFill>
+            <a:srgbClr val="3B9DF5"/>
+          </a:solidFill>
+          <a:ln w="12700">
+            <a:solidFill>
+              <a:srgbClr val="333333"/>
+            </a:solidFill>
+            <a:prstDash val="solid"/>
+          </a:ln>
+        </p:spPr>
+        <p:txBody>
+          <a:bodyPr/>
+          <a:p/>
+        </p:txBody>
+      </p:sp>
+      <p:sp>
+        <p:nvSpPr>
+          <p:cNvPr id="11" name="Text 9"/>
+          <p:cNvSpPr/>
+          <p:nvPr/>
+        </p:nvSpPr>
+        <p:spPr>
+          <a:xfrm>
+            <a:off x="713232" y="3319272"/>
+            <a:ext cx="7955280" cy="347472"/>
+          </a:xfrm>
+          <a:prstGeom prst="rect">
+            <a:avLst/>
+          </a:prstGeom>
+          <a:noFill/>
+          <a:ln/>
+        </p:spPr>
+        <p:txBody>
+          <a:bodyPr wrap="square" lIns="0" tIns="0" rIns="0" bIns="0" rtlCol="0" anchor="ctr"/>
+          <a:lstStyle/>
+          <a:p>
+            <a:pPr indent="0" marL="0">
+              <a:buNone/>
+            </a:pPr>
+            <a:r>
+              <a:rPr lang="en-US" sz="1500" dirty="0">
+                <a:solidFill>
+                  <a:srgbClr val="D9CFD1"/>
+                </a:solidFill>
+                <a:latin typeface="Arial" pitchFamily="34" charset="0"/>
+                <a:ea typeface="Arial" pitchFamily="34" charset="-122"/>
+                <a:cs typeface="Arial" pitchFamily="34" charset="-120"/>
+              </a:rPr>
+              <a:t>4 · Quanto vamos vender? → índice sazonal por mês do ano · noite 3</a:t>
+            </a:r>
+            <a:endParaRPr lang="en-US" sz="1500" dirty="0"/>
+          </a:p>
+        </p:txBody>
+      </p:sp>
+      <p:sp>
+        <p:nvSpPr>
+          <p:cNvPr id="12" name="Shape 10"/>
+          <p:cNvSpPr/>
+          <p:nvPr/>
+        </p:nvSpPr>
+        <p:spPr>
+          <a:xfrm>
+            <a:off x="457200" y="3840480"/>
+            <a:ext cx="91440" cy="91440"/>
+          </a:xfrm>
+          <a:prstGeom prst="ellipse">
+            <a:avLst/>
+          </a:prstGeom>
+          <a:solidFill>
+            <a:srgbClr val="3B9DF5"/>
+          </a:solidFill>
+          <a:ln w="12700">
+            <a:solidFill>
+              <a:srgbClr val="333333"/>
+            </a:solidFill>
+            <a:prstDash val="solid"/>
+          </a:ln>
+        </p:spPr>
+        <p:txBody>
+          <a:bodyPr/>
+          <a:p/>
+        </p:txBody>
+      </p:sp>
+      <p:sp>
+        <p:nvSpPr>
+          <p:cNvPr id="13" name="Text 11"/>
+          <p:cNvSpPr/>
+          <p:nvPr/>
+        </p:nvSpPr>
+        <p:spPr>
+          <a:xfrm>
+            <a:off x="713232" y="3739896"/>
+            <a:ext cx="7955280" cy="347472"/>
+          </a:xfrm>
+          <a:prstGeom prst="rect">
+            <a:avLst/>
+          </a:prstGeom>
+          <a:noFill/>
+          <a:ln/>
+        </p:spPr>
+        <p:txBody>
+          <a:bodyPr wrap="square" lIns="0" tIns="0" rIns="0" bIns="0" rtlCol="0" anchor="ctr"/>
+          <a:lstStyle/>
+          <a:p>
+            <a:pPr indent="0" marL="0">
+              <a:buNone/>
+            </a:pPr>
+            <a:r>
+              <a:rPr lang="en-US" sz="1500" dirty="0">
+                <a:solidFill>
+                  <a:srgbClr val="D9CFD1"/>
+                </a:solidFill>
+                <a:latin typeface="Arial" pitchFamily="34" charset="0"/>
+                <a:ea typeface="Arial" pitchFamily="34" charset="-122"/>
+                <a:cs typeface="Arial" pitchFamily="34" charset="-120"/>
+              </a:rPr>
+              <a:t>5 · Vender mais dá lucro? → margem por categoria · HOJE, exemplo 06</a:t>
+            </a:r>
+            <a:endParaRPr lang="en-US" sz="1500" dirty="0"/>
+          </a:p>
+        </p:txBody>
+      </p:sp>
+      <p:sp>
+        <p:nvSpPr>
+          <p:cNvPr id="14" name="Text 12"/>
+          <p:cNvSpPr/>
+          <p:nvPr/>
+        </p:nvSpPr>
+        <p:spPr>
+          <a:xfrm>
+            <a:off x="411480" y="4297680"/>
+            <a:ext cx="8229600" cy="365760"/>
+          </a:xfrm>
+          <a:prstGeom prst="rect">
+            <a:avLst/>
+          </a:prstGeom>
+          <a:noFill/>
+          <a:ln/>
+        </p:spPr>
+        <p:txBody>
+          <a:bodyPr wrap="square" lIns="0" tIns="0" rIns="0" bIns="0" rtlCol="0" anchor="ctr"/>
+          <a:lstStyle/>
+          <a:p>
+            <a:pPr indent="0" marL="0">
+              <a:buNone/>
+            </a:pPr>
+            <a:r>
+              <a:rPr lang="en-US" sz="1300" dirty="0">
+                <a:solidFill>
+                  <a:srgbClr val="7CC8FF"/>
+                </a:solidFill>
+                <a:latin typeface="Arial" pitchFamily="34" charset="0"/>
+                <a:ea typeface="Arial" pitchFamily="34" charset="-122"/>
+                <a:cs typeface="Arial" pitchFamily="34" charset="-120"/>
+              </a:rPr>
+              <a:t>Das cinco que vocês perguntaram, hoje eu respondo UMA. As outras quatro dependem de dado limpo — e é exatamente por isso que existe a noite 2.</a:t>
+            </a:r>
+            <a:endParaRPr lang="en-US" sz="1300" dirty="0"/>
+          </a:p>
+        </p:txBody>
+      </p:sp>
+      <p:sp>
+        <p:nvSpPr>
+          <p:cNvPr id="15" name="Text 13"/>
+          <p:cNvSpPr/>
+          <p:nvPr/>
+        </p:nvSpPr>
+        <p:spPr>
+          <a:xfrm>
+            <a:off x="411480" y="4681728"/>
+            <a:ext cx="2743200" cy="228600"/>
+          </a:xfrm>
+          <a:prstGeom prst="rect">
+            <a:avLst/>
+          </a:prstGeom>
+          <a:noFill/>
+          <a:ln/>
+        </p:spPr>
+        <p:txBody>
+          <a:bodyPr wrap="square" lIns="0" tIns="0" rIns="0" bIns="0" rtlCol="0" anchor="ctr"/>
+          <a:lstStyle/>
+          <a:p>
+            <a:pPr indent="0" marL="0">
+              <a:buNone/>
+            </a:pPr>
+            <a:r>
+              <a:rPr lang="en-US" sz="800" b="1" spc="200" kern="0" dirty="0">
+                <a:solidFill>
+                  <a:srgbClr val="566A85"/>
+                </a:solidFill>
+                <a:latin typeface="Arial" pitchFamily="34" charset="0"/>
+                <a:ea typeface="Arial" pitchFamily="34" charset="-122"/>
+                <a:cs typeface="Arial" pitchFamily="34" charset="-120"/>
+              </a:rPr>
+              <a:t>JORNADA DE DADOS</a:t>
+            </a:r>
+            <a:endParaRPr lang="en-US" sz="800" dirty="0"/>
+          </a:p>
+        </p:txBody>
+      </p:sp>
+    </p:spTree>
+  </p:cSld>
+  <p:clrMapOvr>
+    <a:masterClrMapping/>
+  </p:clrMapOvr>
+</p:sld>
+</file>
+
+<file path=ppt/slides/slide27.xml><?xml version="1.0" encoding="utf-8"?>
 <p:sld xmlns:a="http://schemas.openxmlformats.org/drawingml/2006/main" xmlns:r="http://schemas.openxmlformats.org/officeDocument/2006/relationships" xmlns:p="http://schemas.openxmlformats.org/presentationml/2006/main">
   <p:cSld name="Slide 14">
     <p:bg>
@@ -14229,7 +14746,7 @@
 </p:sld>
 </file>
 
-<file path=ppt/slides/slide27.xml><?xml version="1.0" encoding="utf-8"?>
+<file path=ppt/slides/slide28.xml><?xml version="1.0" encoding="utf-8"?>
 <p:sld xmlns:a="http://schemas.openxmlformats.org/drawingml/2006/main" xmlns:r="http://schemas.openxmlformats.org/officeDocument/2006/relationships" xmlns:p="http://schemas.openxmlformats.org/presentationml/2006/main">
   <p:cSld name="Slide 15">
     <p:bg>
@@ -14922,7 +15439,7 @@
 </p:sld>
 </file>
 
-<file path=ppt/slides/slide28.xml><?xml version="1.0" encoding="utf-8"?>
+<file path=ppt/slides/slide29.xml><?xml version="1.0" encoding="utf-8"?>
 <p:sld xmlns:a="http://schemas.openxmlformats.org/drawingml/2006/main" xmlns:r="http://schemas.openxmlformats.org/officeDocument/2006/relationships" xmlns:p="http://schemas.openxmlformats.org/presentationml/2006/main">
   <p:cSld name="Slide 16">
     <p:bg>
@@ -15571,488 +16088,6 @@
       <p:sp>
         <p:nvSpPr>
           <p:cNvPr id="18" name="Text 16"/>
-          <p:cNvSpPr/>
-          <p:nvPr/>
-        </p:nvSpPr>
-        <p:spPr>
-          <a:xfrm>
-            <a:off x="411480" y="4681728"/>
-            <a:ext cx="2743200" cy="228600"/>
-          </a:xfrm>
-          <a:prstGeom prst="rect">
-            <a:avLst/>
-          </a:prstGeom>
-          <a:noFill/>
-          <a:ln/>
-        </p:spPr>
-        <p:txBody>
-          <a:bodyPr wrap="square" lIns="0" tIns="0" rIns="0" bIns="0" rtlCol="0" anchor="ctr"/>
-          <a:lstStyle/>
-          <a:p>
-            <a:pPr indent="0" marL="0">
-              <a:buNone/>
-            </a:pPr>
-            <a:r>
-              <a:rPr lang="en-US" sz="800" b="1" spc="200" kern="0" dirty="0">
-                <a:solidFill>
-                  <a:srgbClr val="566A85"/>
-                </a:solidFill>
-                <a:latin typeface="Arial" pitchFamily="34" charset="0"/>
-                <a:ea typeface="Arial" pitchFamily="34" charset="-122"/>
-                <a:cs typeface="Arial" pitchFamily="34" charset="-120"/>
-              </a:rPr>
-              <a:t>JORNADA DE DADOS</a:t>
-            </a:r>
-            <a:endParaRPr lang="en-US" sz="800" dirty="0"/>
-          </a:p>
-        </p:txBody>
-      </p:sp>
-    </p:spTree>
-  </p:cSld>
-  <p:clrMapOvr>
-    <a:masterClrMapping/>
-  </p:clrMapOvr>
-</p:sld>
-</file>
-
-<file path=ppt/slides/slide29.xml><?xml version="1.0" encoding="utf-8"?>
-<p:sld xmlns:a="http://schemas.openxmlformats.org/drawingml/2006/main" xmlns:r="http://schemas.openxmlformats.org/officeDocument/2006/relationships" xmlns:p="http://schemas.openxmlformats.org/presentationml/2006/main">
-  <p:cSld name="Slide 17">
-    <p:bg>
-      <p:bgPr>
-        <a:solidFill>
-          <a:srgbClr val="070C16"/>
-        </a:solidFill>
-      </p:bgPr>
-    </p:bg>
-    <p:spTree>
-      <p:nvGrpSpPr>
-        <p:cNvPr id="1" name=""/>
-        <p:cNvGrpSpPr/>
-        <p:nvPr/>
-      </p:nvGrpSpPr>
-      <p:grpSpPr>
-        <a:xfrm>
-          <a:off x="0" y="0"/>
-          <a:ext cx="0" cy="0"/>
-          <a:chOff x="0" y="0"/>
-          <a:chExt cx="0" cy="0"/>
-        </a:xfrm>
-      </p:grpSpPr>
-      <p:sp>
-        <p:nvSpPr>
-          <p:cNvPr id="2" name="Text 0"/>
-          <p:cNvSpPr/>
-          <p:nvPr/>
-        </p:nvSpPr>
-        <p:spPr>
-          <a:xfrm>
-            <a:off x="411480" y="411480"/>
-            <a:ext cx="7315200" cy="256032"/>
-          </a:xfrm>
-          <a:prstGeom prst="rect">
-            <a:avLst/>
-          </a:prstGeom>
-          <a:noFill/>
-          <a:ln/>
-        </p:spPr>
-        <p:txBody>
-          <a:bodyPr wrap="square" lIns="0" tIns="0" rIns="0" bIns="0" rtlCol="0" anchor="ctr"/>
-          <a:lstStyle/>
-          <a:p>
-            <a:pPr indent="0" marL="0">
-              <a:buNone/>
-            </a:pPr>
-            <a:r>
-              <a:rPr lang="en-US" sz="1100" b="1" spc="160" kern="0" dirty="0">
-                <a:solidFill>
-                  <a:srgbClr val="3B9DF5"/>
-                </a:solidFill>
-                <a:latin typeface="Arial" pitchFamily="34" charset="0"/>
-                <a:ea typeface="Arial" pitchFamily="34" charset="-122"/>
-                <a:cs typeface="Arial" pitchFamily="34" charset="-120"/>
-              </a:rPr>
-              <a:t>O PROBLEMA</a:t>
-            </a:r>
-            <a:endParaRPr lang="en-US" sz="1100" dirty="0"/>
-          </a:p>
-        </p:txBody>
-      </p:sp>
-      <p:sp>
-        <p:nvSpPr>
-          <p:cNvPr id="3" name="Text 1"/>
-          <p:cNvSpPr/>
-          <p:nvPr/>
-        </p:nvSpPr>
-        <p:spPr>
-          <a:xfrm>
-            <a:off x="411480" y="822960"/>
-            <a:ext cx="8321040" cy="1005840"/>
-          </a:xfrm>
-          <a:prstGeom prst="rect">
-            <a:avLst/>
-          </a:prstGeom>
-          <a:noFill/>
-          <a:ln/>
-        </p:spPr>
-        <p:txBody>
-          <a:bodyPr wrap="square" lIns="0" tIns="0" rIns="0" bIns="0" rtlCol="0" anchor="ctr"/>
-          <a:lstStyle/>
-          <a:p>
-            <a:pPr indent="0" marL="0">
-              <a:lnSpc>
-                <a:spcPts val="4000"/>
-              </a:lnSpc>
-              <a:buNone/>
-            </a:pPr>
-            <a:r>
-              <a:rPr lang="en-US" sz="3100" b="1" dirty="0">
-                <a:solidFill>
-                  <a:srgbClr val="FFFFFF"/>
-                </a:solidFill>
-                <a:latin typeface="Arial" pitchFamily="34" charset="0"/>
-                <a:ea typeface="Arial" pitchFamily="34" charset="-122"/>
-                <a:cs typeface="Arial" pitchFamily="34" charset="-120"/>
-              </a:rPr>
-              <a:t>E eles quase nunca conversam</a:t>
-            </a:r>
-            <a:endParaRPr lang="en-US" sz="3100" dirty="0"/>
-          </a:p>
-        </p:txBody>
-      </p:sp>
-      <p:sp>
-        <p:nvSpPr>
-          <p:cNvPr id="4" name="Shape 2"/>
-          <p:cNvSpPr/>
-          <p:nvPr/>
-        </p:nvSpPr>
-        <p:spPr>
-          <a:xfrm>
-            <a:off x="411480" y="2103120"/>
-            <a:ext cx="3566160" cy="1371600"/>
-          </a:xfrm>
-          <a:prstGeom prst="roundRect">
-            <a:avLst>
-              <a:gd name="adj" fmla="val 4000"/>
-            </a:avLst>
-          </a:prstGeom>
-          <a:solidFill>
-            <a:srgbClr val="0D1522"/>
-          </a:solidFill>
-          <a:ln w="16510">
-            <a:solidFill>
-              <a:srgbClr val="1F3A5A"/>
-            </a:solidFill>
-            <a:prstDash val="solid"/>
-          </a:ln>
-        </p:spPr>
-        <p:txBody>
-          <a:bodyPr/>
-          <a:p/>
-        </p:txBody>
-      </p:sp>
-      <p:sp>
-        <p:nvSpPr>
-          <p:cNvPr id="5" name="Text 3"/>
-          <p:cNvSpPr/>
-          <p:nvPr/>
-        </p:nvSpPr>
-        <p:spPr>
-          <a:xfrm>
-            <a:off x="640080" y="2304288"/>
-            <a:ext cx="3108960" cy="365760"/>
-          </a:xfrm>
-          <a:prstGeom prst="rect">
-            <a:avLst/>
-          </a:prstGeom>
-          <a:noFill/>
-          <a:ln/>
-        </p:spPr>
-        <p:txBody>
-          <a:bodyPr wrap="square" lIns="0" tIns="0" rIns="0" bIns="0" rtlCol="0" anchor="ctr"/>
-          <a:lstStyle/>
-          <a:p>
-            <a:pPr indent="0" marL="0">
-              <a:buNone/>
-            </a:pPr>
-            <a:r>
-              <a:rPr lang="en-US" sz="2000" b="1" dirty="0">
-                <a:solidFill>
-                  <a:srgbClr val="FFFFFF"/>
-                </a:solidFill>
-                <a:latin typeface="Arial" pitchFamily="34" charset="0"/>
-                <a:ea typeface="Arial" pitchFamily="34" charset="-122"/>
-                <a:cs typeface="Arial" pitchFamily="34" charset="-120"/>
-              </a:rPr>
-              <a:t>ERP</a:t>
-            </a:r>
-            <a:endParaRPr lang="en-US" sz="2000" dirty="0"/>
-          </a:p>
-        </p:txBody>
-      </p:sp>
-      <p:sp>
-        <p:nvSpPr>
-          <p:cNvPr id="6" name="Text 4"/>
-          <p:cNvSpPr/>
-          <p:nvPr/>
-        </p:nvSpPr>
-        <p:spPr>
-          <a:xfrm>
-            <a:off x="640080" y="2724912"/>
-            <a:ext cx="3108960" cy="320040"/>
-          </a:xfrm>
-          <a:prstGeom prst="rect">
-            <a:avLst/>
-          </a:prstGeom>
-          <a:noFill/>
-          <a:ln/>
-        </p:spPr>
-        <p:txBody>
-          <a:bodyPr wrap="square" lIns="0" tIns="0" rIns="0" bIns="0" rtlCol="0" anchor="ctr"/>
-          <a:lstStyle/>
-          <a:p>
-            <a:pPr indent="0" marL="0">
-              <a:buNone/>
-            </a:pPr>
-            <a:r>
-              <a:rPr lang="en-US" sz="1300" dirty="0">
-                <a:solidFill>
-                  <a:srgbClr val="9BAAC0"/>
-                </a:solidFill>
-                <a:latin typeface="Arial" pitchFamily="34" charset="0"/>
-                <a:ea typeface="Arial" pitchFamily="34" charset="-122"/>
-                <a:cs typeface="Arial" pitchFamily="34" charset="-120"/>
-              </a:rPr>
-              <a:t>sabe o que foi vendido</a:t>
-            </a:r>
-            <a:endParaRPr lang="en-US" sz="1300" dirty="0"/>
-          </a:p>
-        </p:txBody>
-      </p:sp>
-      <p:sp>
-        <p:nvSpPr>
-          <p:cNvPr id="7" name="Shape 5"/>
-          <p:cNvSpPr/>
-          <p:nvPr/>
-        </p:nvSpPr>
-        <p:spPr>
-          <a:xfrm>
-            <a:off x="5166360" y="2103120"/>
-            <a:ext cx="3566160" cy="1371600"/>
-          </a:xfrm>
-          <a:prstGeom prst="roundRect">
-            <a:avLst>
-              <a:gd name="adj" fmla="val 4000"/>
-            </a:avLst>
-          </a:prstGeom>
-          <a:solidFill>
-            <a:srgbClr val="0D1522"/>
-          </a:solidFill>
-          <a:ln w="16510">
-            <a:solidFill>
-              <a:srgbClr val="1F3A5A"/>
-            </a:solidFill>
-            <a:prstDash val="solid"/>
-          </a:ln>
-        </p:spPr>
-        <p:txBody>
-          <a:bodyPr/>
-          <a:p/>
-        </p:txBody>
-      </p:sp>
-      <p:sp>
-        <p:nvSpPr>
-          <p:cNvPr id="8" name="Text 6"/>
-          <p:cNvSpPr/>
-          <p:nvPr/>
-        </p:nvSpPr>
-        <p:spPr>
-          <a:xfrm>
-            <a:off x="5394960" y="2304288"/>
-            <a:ext cx="3108960" cy="365760"/>
-          </a:xfrm>
-          <a:prstGeom prst="rect">
-            <a:avLst/>
-          </a:prstGeom>
-          <a:noFill/>
-          <a:ln/>
-        </p:spPr>
-        <p:txBody>
-          <a:bodyPr wrap="square" lIns="0" tIns="0" rIns="0" bIns="0" rtlCol="0" anchor="ctr"/>
-          <a:lstStyle/>
-          <a:p>
-            <a:pPr indent="0" marL="0">
-              <a:buNone/>
-            </a:pPr>
-            <a:r>
-              <a:rPr lang="en-US" sz="2000" b="1" dirty="0">
-                <a:solidFill>
-                  <a:srgbClr val="FFFFFF"/>
-                </a:solidFill>
-                <a:latin typeface="Arial" pitchFamily="34" charset="0"/>
-                <a:ea typeface="Arial" pitchFamily="34" charset="-122"/>
-                <a:cs typeface="Arial" pitchFamily="34" charset="-120"/>
-              </a:rPr>
-              <a:t>CRM</a:t>
-            </a:r>
-            <a:endParaRPr lang="en-US" sz="2000" dirty="0"/>
-          </a:p>
-        </p:txBody>
-      </p:sp>
-      <p:sp>
-        <p:nvSpPr>
-          <p:cNvPr id="9" name="Text 7"/>
-          <p:cNvSpPr/>
-          <p:nvPr/>
-        </p:nvSpPr>
-        <p:spPr>
-          <a:xfrm>
-            <a:off x="5394960" y="2724912"/>
-            <a:ext cx="3108960" cy="320040"/>
-          </a:xfrm>
-          <a:prstGeom prst="rect">
-            <a:avLst/>
-          </a:prstGeom>
-          <a:noFill/>
-          <a:ln/>
-        </p:spPr>
-        <p:txBody>
-          <a:bodyPr wrap="square" lIns="0" tIns="0" rIns="0" bIns="0" rtlCol="0" anchor="ctr"/>
-          <a:lstStyle/>
-          <a:p>
-            <a:pPr indent="0" marL="0">
-              <a:buNone/>
-            </a:pPr>
-            <a:r>
-              <a:rPr lang="en-US" sz="1300" dirty="0">
-                <a:solidFill>
-                  <a:srgbClr val="9BAAC0"/>
-                </a:solidFill>
-                <a:latin typeface="Arial" pitchFamily="34" charset="0"/>
-                <a:ea typeface="Arial" pitchFamily="34" charset="-122"/>
-                <a:cs typeface="Arial" pitchFamily="34" charset="-120"/>
-              </a:rPr>
-              <a:t>sabe para quem</a:t>
-            </a:r>
-            <a:endParaRPr lang="en-US" sz="1300" dirty="0"/>
-          </a:p>
-        </p:txBody>
-      </p:sp>
-      <p:sp>
-        <p:nvSpPr>
-          <p:cNvPr id="10" name="Shape 8"/>
-          <p:cNvSpPr/>
-          <p:nvPr/>
-        </p:nvSpPr>
-        <p:spPr>
-          <a:xfrm>
-            <a:off x="4114800" y="2487168"/>
-            <a:ext cx="914400" cy="603504"/>
-          </a:xfrm>
-          <a:prstGeom prst="roundRect">
-            <a:avLst>
-              <a:gd name="adj" fmla="val 50000"/>
-            </a:avLst>
-          </a:prstGeom>
-          <a:solidFill>
-            <a:srgbClr val="3B9DF5"/>
-          </a:solidFill>
-          <a:ln w="12700">
-            <a:solidFill>
-              <a:srgbClr val="333333"/>
-            </a:solidFill>
-            <a:prstDash val="solid"/>
-          </a:ln>
-        </p:spPr>
-        <p:txBody>
-          <a:bodyPr/>
-          <a:p/>
-        </p:txBody>
-      </p:sp>
-      <p:sp>
-        <p:nvSpPr>
-          <p:cNvPr id="11" name="Text 9"/>
-          <p:cNvSpPr/>
-          <p:nvPr/>
-        </p:nvSpPr>
-        <p:spPr>
-          <a:xfrm>
-            <a:off x="4114800" y="2487168"/>
-            <a:ext cx="914400" cy="603504"/>
-          </a:xfrm>
-          <a:prstGeom prst="rect">
-            <a:avLst/>
-          </a:prstGeom>
-          <a:noFill/>
-          <a:ln/>
-        </p:spPr>
-        <p:txBody>
-          <a:bodyPr wrap="square" lIns="0" tIns="0" rIns="0" bIns="0" rtlCol="0" anchor="ctr"/>
-          <a:lstStyle/>
-          <a:p>
-            <a:pPr algn="ctr" indent="0" marL="0">
-              <a:buNone/>
-            </a:pPr>
-            <a:r>
-              <a:rPr lang="en-US" sz="2000" b="1" dirty="0">
-                <a:solidFill>
-                  <a:srgbClr val="FFFFFF"/>
-                </a:solidFill>
-                <a:latin typeface="Arial" pitchFamily="34" charset="0"/>
-                <a:ea typeface="Arial" pitchFamily="34" charset="-122"/>
-                <a:cs typeface="Arial" pitchFamily="34" charset="-120"/>
-              </a:rPr>
-              <a:t>✕</a:t>
-            </a:r>
-            <a:endParaRPr lang="en-US" sz="2000" dirty="0"/>
-          </a:p>
-        </p:txBody>
-      </p:sp>
-      <p:sp>
-        <p:nvSpPr>
-          <p:cNvPr id="12" name="Text 10"/>
-          <p:cNvSpPr/>
-          <p:nvPr/>
-        </p:nvSpPr>
-        <p:spPr>
-          <a:xfrm>
-            <a:off x="411480" y="3794760"/>
-            <a:ext cx="8229600" cy="640080"/>
-          </a:xfrm>
-          <a:prstGeom prst="rect">
-            <a:avLst/>
-          </a:prstGeom>
-          <a:noFill/>
-          <a:ln/>
-        </p:spPr>
-        <p:txBody>
-          <a:bodyPr wrap="square" lIns="0" tIns="0" rIns="0" bIns="0" rtlCol="0" anchor="ctr"/>
-          <a:lstStyle/>
-          <a:p>
-            <a:pPr indent="0" marL="0">
-              <a:lnSpc>
-                <a:spcPts val="2000"/>
-              </a:lnSpc>
-              <a:buNone/>
-            </a:pPr>
-            <a:r>
-              <a:rPr lang="en-US" sz="1400" dirty="0">
-                <a:solidFill>
-                  <a:srgbClr val="9BAAC0"/>
-                </a:solidFill>
-                <a:latin typeface="Arial" pitchFamily="34" charset="0"/>
-                <a:ea typeface="Arial" pitchFamily="34" charset="-122"/>
-                <a:cs typeface="Arial" pitchFamily="34" charset="-120"/>
-              </a:rPr>
-              <a:t>É por isso que a empresa não sabe responder as três perguntas. O dado existe — só não está no mesmo lugar. Juntar os dois é o trabalho da quarta-feira.</a:t>
-            </a:r>
-            <a:endParaRPr lang="en-US" sz="1400" dirty="0"/>
-          </a:p>
-        </p:txBody>
-      </p:sp>
-      <p:sp>
-        <p:nvSpPr>
-          <p:cNvPr id="13" name="Text 11"/>
           <p:cNvSpPr/>
           <p:nvPr/>
         </p:nvSpPr>
@@ -16906,6 +16941,488 @@
 
 <file path=ppt/slides/slide30.xml><?xml version="1.0" encoding="utf-8"?>
 <p:sld xmlns:a="http://schemas.openxmlformats.org/drawingml/2006/main" xmlns:r="http://schemas.openxmlformats.org/officeDocument/2006/relationships" xmlns:p="http://schemas.openxmlformats.org/presentationml/2006/main">
+  <p:cSld name="Slide 17">
+    <p:bg>
+      <p:bgPr>
+        <a:solidFill>
+          <a:srgbClr val="070C16"/>
+        </a:solidFill>
+      </p:bgPr>
+    </p:bg>
+    <p:spTree>
+      <p:nvGrpSpPr>
+        <p:cNvPr id="1" name=""/>
+        <p:cNvGrpSpPr/>
+        <p:nvPr/>
+      </p:nvGrpSpPr>
+      <p:grpSpPr>
+        <a:xfrm>
+          <a:off x="0" y="0"/>
+          <a:ext cx="0" cy="0"/>
+          <a:chOff x="0" y="0"/>
+          <a:chExt cx="0" cy="0"/>
+        </a:xfrm>
+      </p:grpSpPr>
+      <p:sp>
+        <p:nvSpPr>
+          <p:cNvPr id="2" name="Text 0"/>
+          <p:cNvSpPr/>
+          <p:nvPr/>
+        </p:nvSpPr>
+        <p:spPr>
+          <a:xfrm>
+            <a:off x="411480" y="411480"/>
+            <a:ext cx="7315200" cy="256032"/>
+          </a:xfrm>
+          <a:prstGeom prst="rect">
+            <a:avLst/>
+          </a:prstGeom>
+          <a:noFill/>
+          <a:ln/>
+        </p:spPr>
+        <p:txBody>
+          <a:bodyPr wrap="square" lIns="0" tIns="0" rIns="0" bIns="0" rtlCol="0" anchor="ctr"/>
+          <a:lstStyle/>
+          <a:p>
+            <a:pPr indent="0" marL="0">
+              <a:buNone/>
+            </a:pPr>
+            <a:r>
+              <a:rPr lang="en-US" sz="1100" b="1" spc="160" kern="0" dirty="0">
+                <a:solidFill>
+                  <a:srgbClr val="3B9DF5"/>
+                </a:solidFill>
+                <a:latin typeface="Arial" pitchFamily="34" charset="0"/>
+                <a:ea typeface="Arial" pitchFamily="34" charset="-122"/>
+                <a:cs typeface="Arial" pitchFamily="34" charset="-120"/>
+              </a:rPr>
+              <a:t>O PROBLEMA</a:t>
+            </a:r>
+            <a:endParaRPr lang="en-US" sz="1100" dirty="0"/>
+          </a:p>
+        </p:txBody>
+      </p:sp>
+      <p:sp>
+        <p:nvSpPr>
+          <p:cNvPr id="3" name="Text 1"/>
+          <p:cNvSpPr/>
+          <p:nvPr/>
+        </p:nvSpPr>
+        <p:spPr>
+          <a:xfrm>
+            <a:off x="411480" y="822960"/>
+            <a:ext cx="8321040" cy="1005840"/>
+          </a:xfrm>
+          <a:prstGeom prst="rect">
+            <a:avLst/>
+          </a:prstGeom>
+          <a:noFill/>
+          <a:ln/>
+        </p:spPr>
+        <p:txBody>
+          <a:bodyPr wrap="square" lIns="0" tIns="0" rIns="0" bIns="0" rtlCol="0" anchor="ctr"/>
+          <a:lstStyle/>
+          <a:p>
+            <a:pPr indent="0" marL="0">
+              <a:lnSpc>
+                <a:spcPts val="4000"/>
+              </a:lnSpc>
+              <a:buNone/>
+            </a:pPr>
+            <a:r>
+              <a:rPr lang="en-US" sz="3100" b="1" dirty="0">
+                <a:solidFill>
+                  <a:srgbClr val="FFFFFF"/>
+                </a:solidFill>
+                <a:latin typeface="Arial" pitchFamily="34" charset="0"/>
+                <a:ea typeface="Arial" pitchFamily="34" charset="-122"/>
+                <a:cs typeface="Arial" pitchFamily="34" charset="-120"/>
+              </a:rPr>
+              <a:t>E eles quase nunca conversam</a:t>
+            </a:r>
+            <a:endParaRPr lang="en-US" sz="3100" dirty="0"/>
+          </a:p>
+        </p:txBody>
+      </p:sp>
+      <p:sp>
+        <p:nvSpPr>
+          <p:cNvPr id="4" name="Shape 2"/>
+          <p:cNvSpPr/>
+          <p:nvPr/>
+        </p:nvSpPr>
+        <p:spPr>
+          <a:xfrm>
+            <a:off x="411480" y="2103120"/>
+            <a:ext cx="3566160" cy="1371600"/>
+          </a:xfrm>
+          <a:prstGeom prst="roundRect">
+            <a:avLst>
+              <a:gd name="adj" fmla="val 4000"/>
+            </a:avLst>
+          </a:prstGeom>
+          <a:solidFill>
+            <a:srgbClr val="0D1522"/>
+          </a:solidFill>
+          <a:ln w="16510">
+            <a:solidFill>
+              <a:srgbClr val="1F3A5A"/>
+            </a:solidFill>
+            <a:prstDash val="solid"/>
+          </a:ln>
+        </p:spPr>
+        <p:txBody>
+          <a:bodyPr/>
+          <a:p/>
+        </p:txBody>
+      </p:sp>
+      <p:sp>
+        <p:nvSpPr>
+          <p:cNvPr id="5" name="Text 3"/>
+          <p:cNvSpPr/>
+          <p:nvPr/>
+        </p:nvSpPr>
+        <p:spPr>
+          <a:xfrm>
+            <a:off x="640080" y="2304288"/>
+            <a:ext cx="3108960" cy="365760"/>
+          </a:xfrm>
+          <a:prstGeom prst="rect">
+            <a:avLst/>
+          </a:prstGeom>
+          <a:noFill/>
+          <a:ln/>
+        </p:spPr>
+        <p:txBody>
+          <a:bodyPr wrap="square" lIns="0" tIns="0" rIns="0" bIns="0" rtlCol="0" anchor="ctr"/>
+          <a:lstStyle/>
+          <a:p>
+            <a:pPr indent="0" marL="0">
+              <a:buNone/>
+            </a:pPr>
+            <a:r>
+              <a:rPr lang="en-US" sz="2000" b="1" dirty="0">
+                <a:solidFill>
+                  <a:srgbClr val="FFFFFF"/>
+                </a:solidFill>
+                <a:latin typeface="Arial" pitchFamily="34" charset="0"/>
+                <a:ea typeface="Arial" pitchFamily="34" charset="-122"/>
+                <a:cs typeface="Arial" pitchFamily="34" charset="-120"/>
+              </a:rPr>
+              <a:t>ERP</a:t>
+            </a:r>
+            <a:endParaRPr lang="en-US" sz="2000" dirty="0"/>
+          </a:p>
+        </p:txBody>
+      </p:sp>
+      <p:sp>
+        <p:nvSpPr>
+          <p:cNvPr id="6" name="Text 4"/>
+          <p:cNvSpPr/>
+          <p:nvPr/>
+        </p:nvSpPr>
+        <p:spPr>
+          <a:xfrm>
+            <a:off x="640080" y="2724912"/>
+            <a:ext cx="3108960" cy="320040"/>
+          </a:xfrm>
+          <a:prstGeom prst="rect">
+            <a:avLst/>
+          </a:prstGeom>
+          <a:noFill/>
+          <a:ln/>
+        </p:spPr>
+        <p:txBody>
+          <a:bodyPr wrap="square" lIns="0" tIns="0" rIns="0" bIns="0" rtlCol="0" anchor="ctr"/>
+          <a:lstStyle/>
+          <a:p>
+            <a:pPr indent="0" marL="0">
+              <a:buNone/>
+            </a:pPr>
+            <a:r>
+              <a:rPr lang="en-US" sz="1300" dirty="0">
+                <a:solidFill>
+                  <a:srgbClr val="9BAAC0"/>
+                </a:solidFill>
+                <a:latin typeface="Arial" pitchFamily="34" charset="0"/>
+                <a:ea typeface="Arial" pitchFamily="34" charset="-122"/>
+                <a:cs typeface="Arial" pitchFamily="34" charset="-120"/>
+              </a:rPr>
+              <a:t>sabe o que foi vendido</a:t>
+            </a:r>
+            <a:endParaRPr lang="en-US" sz="1300" dirty="0"/>
+          </a:p>
+        </p:txBody>
+      </p:sp>
+      <p:sp>
+        <p:nvSpPr>
+          <p:cNvPr id="7" name="Shape 5"/>
+          <p:cNvSpPr/>
+          <p:nvPr/>
+        </p:nvSpPr>
+        <p:spPr>
+          <a:xfrm>
+            <a:off x="5166360" y="2103120"/>
+            <a:ext cx="3566160" cy="1371600"/>
+          </a:xfrm>
+          <a:prstGeom prst="roundRect">
+            <a:avLst>
+              <a:gd name="adj" fmla="val 4000"/>
+            </a:avLst>
+          </a:prstGeom>
+          <a:solidFill>
+            <a:srgbClr val="0D1522"/>
+          </a:solidFill>
+          <a:ln w="16510">
+            <a:solidFill>
+              <a:srgbClr val="1F3A5A"/>
+            </a:solidFill>
+            <a:prstDash val="solid"/>
+          </a:ln>
+        </p:spPr>
+        <p:txBody>
+          <a:bodyPr/>
+          <a:p/>
+        </p:txBody>
+      </p:sp>
+      <p:sp>
+        <p:nvSpPr>
+          <p:cNvPr id="8" name="Text 6"/>
+          <p:cNvSpPr/>
+          <p:nvPr/>
+        </p:nvSpPr>
+        <p:spPr>
+          <a:xfrm>
+            <a:off x="5394960" y="2304288"/>
+            <a:ext cx="3108960" cy="365760"/>
+          </a:xfrm>
+          <a:prstGeom prst="rect">
+            <a:avLst/>
+          </a:prstGeom>
+          <a:noFill/>
+          <a:ln/>
+        </p:spPr>
+        <p:txBody>
+          <a:bodyPr wrap="square" lIns="0" tIns="0" rIns="0" bIns="0" rtlCol="0" anchor="ctr"/>
+          <a:lstStyle/>
+          <a:p>
+            <a:pPr indent="0" marL="0">
+              <a:buNone/>
+            </a:pPr>
+            <a:r>
+              <a:rPr lang="en-US" sz="2000" b="1" dirty="0">
+                <a:solidFill>
+                  <a:srgbClr val="FFFFFF"/>
+                </a:solidFill>
+                <a:latin typeface="Arial" pitchFamily="34" charset="0"/>
+                <a:ea typeface="Arial" pitchFamily="34" charset="-122"/>
+                <a:cs typeface="Arial" pitchFamily="34" charset="-120"/>
+              </a:rPr>
+              <a:t>CRM</a:t>
+            </a:r>
+            <a:endParaRPr lang="en-US" sz="2000" dirty="0"/>
+          </a:p>
+        </p:txBody>
+      </p:sp>
+      <p:sp>
+        <p:nvSpPr>
+          <p:cNvPr id="9" name="Text 7"/>
+          <p:cNvSpPr/>
+          <p:nvPr/>
+        </p:nvSpPr>
+        <p:spPr>
+          <a:xfrm>
+            <a:off x="5394960" y="2724912"/>
+            <a:ext cx="3108960" cy="320040"/>
+          </a:xfrm>
+          <a:prstGeom prst="rect">
+            <a:avLst/>
+          </a:prstGeom>
+          <a:noFill/>
+          <a:ln/>
+        </p:spPr>
+        <p:txBody>
+          <a:bodyPr wrap="square" lIns="0" tIns="0" rIns="0" bIns="0" rtlCol="0" anchor="ctr"/>
+          <a:lstStyle/>
+          <a:p>
+            <a:pPr indent="0" marL="0">
+              <a:buNone/>
+            </a:pPr>
+            <a:r>
+              <a:rPr lang="en-US" sz="1300" dirty="0">
+                <a:solidFill>
+                  <a:srgbClr val="9BAAC0"/>
+                </a:solidFill>
+                <a:latin typeface="Arial" pitchFamily="34" charset="0"/>
+                <a:ea typeface="Arial" pitchFamily="34" charset="-122"/>
+                <a:cs typeface="Arial" pitchFamily="34" charset="-120"/>
+              </a:rPr>
+              <a:t>sabe para quem</a:t>
+            </a:r>
+            <a:endParaRPr lang="en-US" sz="1300" dirty="0"/>
+          </a:p>
+        </p:txBody>
+      </p:sp>
+      <p:sp>
+        <p:nvSpPr>
+          <p:cNvPr id="10" name="Shape 8"/>
+          <p:cNvSpPr/>
+          <p:nvPr/>
+        </p:nvSpPr>
+        <p:spPr>
+          <a:xfrm>
+            <a:off x="4114800" y="2487168"/>
+            <a:ext cx="914400" cy="603504"/>
+          </a:xfrm>
+          <a:prstGeom prst="roundRect">
+            <a:avLst>
+              <a:gd name="adj" fmla="val 50000"/>
+            </a:avLst>
+          </a:prstGeom>
+          <a:solidFill>
+            <a:srgbClr val="3B9DF5"/>
+          </a:solidFill>
+          <a:ln w="12700">
+            <a:solidFill>
+              <a:srgbClr val="333333"/>
+            </a:solidFill>
+            <a:prstDash val="solid"/>
+          </a:ln>
+        </p:spPr>
+        <p:txBody>
+          <a:bodyPr/>
+          <a:p/>
+        </p:txBody>
+      </p:sp>
+      <p:sp>
+        <p:nvSpPr>
+          <p:cNvPr id="11" name="Text 9"/>
+          <p:cNvSpPr/>
+          <p:nvPr/>
+        </p:nvSpPr>
+        <p:spPr>
+          <a:xfrm>
+            <a:off x="4114800" y="2487168"/>
+            <a:ext cx="914400" cy="603504"/>
+          </a:xfrm>
+          <a:prstGeom prst="rect">
+            <a:avLst/>
+          </a:prstGeom>
+          <a:noFill/>
+          <a:ln/>
+        </p:spPr>
+        <p:txBody>
+          <a:bodyPr wrap="square" lIns="0" tIns="0" rIns="0" bIns="0" rtlCol="0" anchor="ctr"/>
+          <a:lstStyle/>
+          <a:p>
+            <a:pPr algn="ctr" indent="0" marL="0">
+              <a:buNone/>
+            </a:pPr>
+            <a:r>
+              <a:rPr lang="en-US" sz="2000" b="1" dirty="0">
+                <a:solidFill>
+                  <a:srgbClr val="FFFFFF"/>
+                </a:solidFill>
+                <a:latin typeface="Arial" pitchFamily="34" charset="0"/>
+                <a:ea typeface="Arial" pitchFamily="34" charset="-122"/>
+                <a:cs typeface="Arial" pitchFamily="34" charset="-120"/>
+              </a:rPr>
+              <a:t>✕</a:t>
+            </a:r>
+            <a:endParaRPr lang="en-US" sz="2000" dirty="0"/>
+          </a:p>
+        </p:txBody>
+      </p:sp>
+      <p:sp>
+        <p:nvSpPr>
+          <p:cNvPr id="12" name="Text 10"/>
+          <p:cNvSpPr/>
+          <p:nvPr/>
+        </p:nvSpPr>
+        <p:spPr>
+          <a:xfrm>
+            <a:off x="411480" y="3794760"/>
+            <a:ext cx="8229600" cy="640080"/>
+          </a:xfrm>
+          <a:prstGeom prst="rect">
+            <a:avLst/>
+          </a:prstGeom>
+          <a:noFill/>
+          <a:ln/>
+        </p:spPr>
+        <p:txBody>
+          <a:bodyPr wrap="square" lIns="0" tIns="0" rIns="0" bIns="0" rtlCol="0" anchor="ctr"/>
+          <a:lstStyle/>
+          <a:p>
+            <a:pPr indent="0" marL="0">
+              <a:lnSpc>
+                <a:spcPts val="2000"/>
+              </a:lnSpc>
+              <a:buNone/>
+            </a:pPr>
+            <a:r>
+              <a:rPr lang="en-US" sz="1400" dirty="0">
+                <a:solidFill>
+                  <a:srgbClr val="9BAAC0"/>
+                </a:solidFill>
+                <a:latin typeface="Arial" pitchFamily="34" charset="0"/>
+                <a:ea typeface="Arial" pitchFamily="34" charset="-122"/>
+                <a:cs typeface="Arial" pitchFamily="34" charset="-120"/>
+              </a:rPr>
+              <a:t>É por isso que a empresa não sabe responder as três perguntas. O dado existe — só não está no mesmo lugar. Juntar os dois é o trabalho da quarta-feira.</a:t>
+            </a:r>
+            <a:endParaRPr lang="en-US" sz="1400" dirty="0"/>
+          </a:p>
+        </p:txBody>
+      </p:sp>
+      <p:sp>
+        <p:nvSpPr>
+          <p:cNvPr id="13" name="Text 11"/>
+          <p:cNvSpPr/>
+          <p:nvPr/>
+        </p:nvSpPr>
+        <p:spPr>
+          <a:xfrm>
+            <a:off x="411480" y="4681728"/>
+            <a:ext cx="2743200" cy="228600"/>
+          </a:xfrm>
+          <a:prstGeom prst="rect">
+            <a:avLst/>
+          </a:prstGeom>
+          <a:noFill/>
+          <a:ln/>
+        </p:spPr>
+        <p:txBody>
+          <a:bodyPr wrap="square" lIns="0" tIns="0" rIns="0" bIns="0" rtlCol="0" anchor="ctr"/>
+          <a:lstStyle/>
+          <a:p>
+            <a:pPr indent="0" marL="0">
+              <a:buNone/>
+            </a:pPr>
+            <a:r>
+              <a:rPr lang="en-US" sz="800" b="1" spc="200" kern="0" dirty="0">
+                <a:solidFill>
+                  <a:srgbClr val="566A85"/>
+                </a:solidFill>
+                <a:latin typeface="Arial" pitchFamily="34" charset="0"/>
+                <a:ea typeface="Arial" pitchFamily="34" charset="-122"/>
+                <a:cs typeface="Arial" pitchFamily="34" charset="-120"/>
+              </a:rPr>
+              <a:t>JORNADA DE DADOS</a:t>
+            </a:r>
+            <a:endParaRPr lang="en-US" sz="800" dirty="0"/>
+          </a:p>
+        </p:txBody>
+      </p:sp>
+    </p:spTree>
+  </p:cSld>
+  <p:clrMapOvr>
+    <a:masterClrMapping/>
+  </p:clrMapOvr>
+</p:sld>
+</file>
+
+<file path=ppt/slides/slide31.xml><?xml version="1.0" encoding="utf-8"?>
+<p:sld xmlns:a="http://schemas.openxmlformats.org/drawingml/2006/main" xmlns:r="http://schemas.openxmlformats.org/officeDocument/2006/relationships" xmlns:p="http://schemas.openxmlformats.org/presentationml/2006/main">
   <p:cSld name="Slide 18">
     <p:bg>
       <p:bgPr>
@@ -17516,7 +18033,7 @@
 </p:sld>
 </file>
 
-<file path=ppt/slides/slide31.xml><?xml version="1.0" encoding="utf-8"?>
+<file path=ppt/slides/slide32.xml><?xml version="1.0" encoding="utf-8"?>
 <p:sld xmlns:a="http://schemas.openxmlformats.org/drawingml/2006/main" xmlns:r="http://schemas.openxmlformats.org/officeDocument/2006/relationships" xmlns:p="http://schemas.openxmlformats.org/presentationml/2006/main">
   <p:cSld name="Slide 19">
     <p:bg>
@@ -18579,7 +19096,7 @@
 </p:sld>
 </file>
 
-<file path=ppt/slides/slide32.xml><?xml version="1.0" encoding="utf-8"?>
+<file path=ppt/slides/slide33.xml><?xml version="1.0" encoding="utf-8"?>
 <p:sld xmlns:a="http://schemas.openxmlformats.org/drawingml/2006/main" xmlns:r="http://schemas.openxmlformats.org/officeDocument/2006/relationships" xmlns:p="http://schemas.openxmlformats.org/presentationml/2006/main">
   <p:cSld name="Slide 20">
     <p:bg>
@@ -18760,7 +19277,7 @@
 </p:sld>
 </file>
 
-<file path=ppt/slides/slide33.xml><?xml version="1.0" encoding="utf-8"?>
+<file path=ppt/slides/slide34.xml><?xml version="1.0" encoding="utf-8"?>
 <p:sld xmlns:a="http://schemas.openxmlformats.org/drawingml/2006/main" xmlns:r="http://schemas.openxmlformats.org/officeDocument/2006/relationships" xmlns:p="http://schemas.openxmlformats.org/presentationml/2006/main">
   <p:cSld name="Slide 21">
     <p:bg>
@@ -19582,7 +20099,7 @@
 </p:sld>
 </file>
 
-<file path=ppt/slides/slide34.xml><?xml version="1.0" encoding="utf-8"?>
+<file path=ppt/slides/slide35.xml><?xml version="1.0" encoding="utf-8"?>
 <p:sld xmlns:a="http://schemas.openxmlformats.org/drawingml/2006/main" xmlns:r="http://schemas.openxmlformats.org/officeDocument/2006/relationships" xmlns:p="http://schemas.openxmlformats.org/presentationml/2006/main">
   <p:cSld name="Slide 22">
     <p:bg>
@@ -20100,7 +20617,7 @@
 </p:sld>
 </file>
 
-<file path=ppt/slides/slide35.xml><?xml version="1.0" encoding="utf-8"?>
+<file path=ppt/slides/slide36.xml><?xml version="1.0" encoding="utf-8"?>
 <p:sld xmlns:a="http://schemas.openxmlformats.org/drawingml/2006/main" xmlns:r="http://schemas.openxmlformats.org/officeDocument/2006/relationships" xmlns:p="http://schemas.openxmlformats.org/presentationml/2006/main">
   <p:cSld name="Slide 23">
     <p:bg>
@@ -20678,7 +21195,7 @@
 </p:sld>
 </file>
 
-<file path=ppt/slides/slide36.xml><?xml version="1.0" encoding="utf-8"?>
+<file path=ppt/slides/slide37.xml><?xml version="1.0" encoding="utf-8"?>
 <p:sld xmlns:a="http://schemas.openxmlformats.org/drawingml/2006/main" xmlns:r="http://schemas.openxmlformats.org/officeDocument/2006/relationships" xmlns:p="http://schemas.openxmlformats.org/presentationml/2006/main">
   <p:cSld name="Slide 24">
     <p:bg>
@@ -21503,7 +22020,7 @@
 </p:sld>
 </file>
 
-<file path=ppt/slides/slide37.xml><?xml version="1.0" encoding="utf-8"?>
+<file path=ppt/slides/slide38.xml><?xml version="1.0" encoding="utf-8"?>
 <p:sld xmlns:a="http://schemas.openxmlformats.org/drawingml/2006/main" xmlns:r="http://schemas.openxmlformats.org/officeDocument/2006/relationships" xmlns:p="http://schemas.openxmlformats.org/presentationml/2006/main">
   <p:cSld name="Slide 25">
     <p:bg>
@@ -22083,523 +22600,6 @@
 </p:sld>
 </file>
 
-<file path=ppt/slides/slide38.xml><?xml version="1.0" encoding="utf-8"?>
-<p:sld xmlns:a="http://schemas.openxmlformats.org/drawingml/2006/main" xmlns:p="http://schemas.openxmlformats.org/presentationml/2006/main" xmlns:r="http://schemas.openxmlformats.org/officeDocument/2006/relationships">
-  <p:cSld>
-    <p:spTree>
-      <p:nvGrpSpPr>
-        <p:cNvPr id="1" name=""/>
-        <p:cNvGrpSpPr/>
-        <p:nvPr/>
-      </p:nvGrpSpPr>
-      <p:grpSpPr/>
-      <p:sp>
-        <p:nvSpPr>
-          <p:cNvPr id="2" name="Text 0"/>
-          <p:cNvSpPr/>
-          <p:nvPr/>
-        </p:nvSpPr>
-        <p:spPr>
-          <a:xfrm>
-            <a:off x="411480" y="411480"/>
-            <a:ext cx="7315200" cy="256032"/>
-          </a:xfrm>
-          <a:prstGeom prst="rect">
-            <a:avLst/>
-          </a:prstGeom>
-          <a:noFill/>
-          <a:ln/>
-        </p:spPr>
-        <p:txBody>
-          <a:bodyPr wrap="square" lIns="0" tIns="0" rIns="0" bIns="0" rtlCol="0" anchor="ctr"/>
-          <a:lstStyle/>
-          <a:p>
-            <a:pPr indent="0" marL="0">
-              <a:buNone/>
-            </a:pPr>
-            <a:r>
-              <a:rPr lang="en-US" sz="1100" b="1" spc="160" kern="0" dirty="0">
-                <a:solidFill>
-                  <a:srgbClr val="3B9DF5"/>
-                </a:solidFill>
-                <a:latin typeface="Arial" pitchFamily="34" charset="0"/>
-                <a:ea typeface="Arial" pitchFamily="34" charset="-122"/>
-                <a:cs typeface="Arial" pitchFamily="34" charset="-120"/>
-              </a:rPr>
-              <a:t>PASSO 1 · NA INTERFACE</a:t>
-            </a:r>
-            <a:endParaRPr lang="en-US" sz="1100" dirty="0"/>
-          </a:p>
-        </p:txBody>
-      </p:sp>
-      <p:sp>
-        <p:nvSpPr>
-          <p:cNvPr id="3" name="Text 1"/>
-          <p:cNvSpPr/>
-          <p:nvPr/>
-        </p:nvSpPr>
-        <p:spPr>
-          <a:xfrm>
-            <a:off x="411480" y="822960"/>
-            <a:ext cx="8321040" cy="1005840"/>
-          </a:xfrm>
-          <a:prstGeom prst="rect">
-            <a:avLst/>
-          </a:prstGeom>
-          <a:noFill/>
-          <a:ln/>
-        </p:spPr>
-        <p:txBody>
-          <a:bodyPr wrap="square" lIns="0" tIns="0" rIns="0" bIns="0" rtlCol="0" anchor="ctr"/>
-          <a:lstStyle/>
-          <a:p>
-            <a:pPr indent="0" marL="0">
-              <a:lnSpc>
-                <a:spcPts val="4000"/>
-              </a:lnSpc>
-              <a:buNone/>
-            </a:pPr>
-            <a:r>
-              <a:rPr lang="en-US" sz="3100" b="1" dirty="0">
-                <a:solidFill>
-                  <a:srgbClr val="FFFFFF"/>
-                </a:solidFill>
-                <a:latin typeface="Arial" pitchFamily="34" charset="0"/>
-                <a:ea typeface="Arial" pitchFamily="34" charset="-122"/>
-                <a:cs typeface="Arial" pitchFamily="34" charset="-120"/>
-              </a:rPr>
-              <a:t>Criar o catálogo</a:t>
-            </a:r>
-            <a:endParaRPr lang="en-US" sz="3100" dirty="0"/>
-          </a:p>
-        </p:txBody>
-      </p:sp>
-      <p:sp>
-        <p:nvSpPr>
-          <p:cNvPr id="4" name="Shape 2"/>
-          <p:cNvSpPr/>
-          <p:nvPr/>
-        </p:nvSpPr>
-        <p:spPr>
-          <a:xfrm>
-            <a:off x="457200" y="2157984"/>
-            <a:ext cx="91440" cy="91440"/>
-          </a:xfrm>
-          <a:prstGeom prst="ellipse">
-            <a:avLst/>
-          </a:prstGeom>
-          <a:solidFill>
-            <a:srgbClr val="3B9DF5"/>
-          </a:solidFill>
-          <a:ln w="12700">
-            <a:solidFill>
-              <a:srgbClr val="333333"/>
-            </a:solidFill>
-            <a:prstDash val="solid"/>
-          </a:ln>
-        </p:spPr>
-        <p:txBody>
-          <a:bodyPr/>
-          <a:p/>
-        </p:txBody>
-      </p:sp>
-      <p:sp>
-        <p:nvSpPr>
-          <p:cNvPr id="5" name="Text 3"/>
-          <p:cNvSpPr/>
-          <p:nvPr/>
-        </p:nvSpPr>
-        <p:spPr>
-          <a:xfrm>
-            <a:off x="713232" y="2057400"/>
-            <a:ext cx="7955280" cy="347472"/>
-          </a:xfrm>
-          <a:prstGeom prst="rect">
-            <a:avLst/>
-          </a:prstGeom>
-          <a:noFill/>
-          <a:ln/>
-        </p:spPr>
-        <p:txBody>
-          <a:bodyPr wrap="square" lIns="0" tIns="0" rIns="0" bIns="0" rtlCol="0" anchor="ctr"/>
-          <a:lstStyle/>
-          <a:p>
-            <a:pPr indent="0" marL="0">
-              <a:buNone/>
-            </a:pPr>
-            <a:r>
-              <a:rPr lang="en-US" sz="1500" dirty="0">
-                <a:solidFill>
-                  <a:srgbClr val="D9CFD1"/>
-                </a:solidFill>
-                <a:latin typeface="Arial" pitchFamily="34" charset="0"/>
-                <a:ea typeface="Arial" pitchFamily="34" charset="-122"/>
-                <a:cs typeface="Arial" pitchFamily="34" charset="-120"/>
-              </a:rPr>
-              <a:t>No menu lateral: Catalog → botão Create catalog, no canto superior</a:t>
-            </a:r>
-            <a:endParaRPr lang="en-US" sz="1500" dirty="0"/>
-          </a:p>
-        </p:txBody>
-      </p:sp>
-      <p:sp>
-        <p:nvSpPr>
-          <p:cNvPr id="6" name="Shape 4"/>
-          <p:cNvSpPr/>
-          <p:nvPr/>
-        </p:nvSpPr>
-        <p:spPr>
-          <a:xfrm>
-            <a:off x="457200" y="2578608"/>
-            <a:ext cx="91440" cy="91440"/>
-          </a:xfrm>
-          <a:prstGeom prst="ellipse">
-            <a:avLst/>
-          </a:prstGeom>
-          <a:solidFill>
-            <a:srgbClr val="3B9DF5"/>
-          </a:solidFill>
-          <a:ln w="12700">
-            <a:solidFill>
-              <a:srgbClr val="333333"/>
-            </a:solidFill>
-            <a:prstDash val="solid"/>
-          </a:ln>
-        </p:spPr>
-        <p:txBody>
-          <a:bodyPr/>
-          <a:p/>
-        </p:txBody>
-      </p:sp>
-      <p:sp>
-        <p:nvSpPr>
-          <p:cNvPr id="7" name="Text 5"/>
-          <p:cNvSpPr/>
-          <p:nvPr/>
-        </p:nvSpPr>
-        <p:spPr>
-          <a:xfrm>
-            <a:off x="713232" y="2478024"/>
-            <a:ext cx="7955280" cy="347472"/>
-          </a:xfrm>
-          <a:prstGeom prst="rect">
-            <a:avLst/>
-          </a:prstGeom>
-          <a:noFill/>
-          <a:ln/>
-        </p:spPr>
-        <p:txBody>
-          <a:bodyPr wrap="square" lIns="0" tIns="0" rIns="0" bIns="0" rtlCol="0" anchor="ctr"/>
-          <a:lstStyle/>
-          <a:p>
-            <a:pPr indent="0" marL="0">
-              <a:buNone/>
-            </a:pPr>
-            <a:r>
-              <a:rPr lang="en-US" sz="1500" dirty="0">
-                <a:solidFill>
-                  <a:srgbClr val="D9CFD1"/>
-                </a:solidFill>
-                <a:latin typeface="Arial" pitchFamily="34" charset="0"/>
-                <a:ea typeface="Arial" pitchFamily="34" charset="-122"/>
-                <a:cs typeface="Arial" pitchFamily="34" charset="-120"/>
-              </a:rPr>
-              <a:t>Catalog name: lakehouse_rotaperfume — minúsculo, sem espaço e sem acento</a:t>
-            </a:r>
-            <a:endParaRPr lang="en-US" sz="1500" dirty="0"/>
-          </a:p>
-        </p:txBody>
-      </p:sp>
-      <p:sp>
-        <p:nvSpPr>
-          <p:cNvPr id="8" name="Shape 6"/>
-          <p:cNvSpPr/>
-          <p:nvPr/>
-        </p:nvSpPr>
-        <p:spPr>
-          <a:xfrm>
-            <a:off x="457200" y="2999232"/>
-            <a:ext cx="91440" cy="91440"/>
-          </a:xfrm>
-          <a:prstGeom prst="ellipse">
-            <a:avLst/>
-          </a:prstGeom>
-          <a:solidFill>
-            <a:srgbClr val="3B9DF5"/>
-          </a:solidFill>
-          <a:ln w="12700">
-            <a:solidFill>
-              <a:srgbClr val="333333"/>
-            </a:solidFill>
-            <a:prstDash val="solid"/>
-          </a:ln>
-        </p:spPr>
-        <p:txBody>
-          <a:bodyPr/>
-          <a:p/>
-        </p:txBody>
-      </p:sp>
-      <p:sp>
-        <p:nvSpPr>
-          <p:cNvPr id="9" name="Text 7"/>
-          <p:cNvSpPr/>
-          <p:nvPr/>
-        </p:nvSpPr>
-        <p:spPr>
-          <a:xfrm>
-            <a:off x="713232" y="2898648"/>
-            <a:ext cx="7955280" cy="347472"/>
-          </a:xfrm>
-          <a:prstGeom prst="rect">
-            <a:avLst/>
-          </a:prstGeom>
-          <a:noFill/>
-          <a:ln/>
-        </p:spPr>
-        <p:txBody>
-          <a:bodyPr wrap="square" lIns="0" tIns="0" rIns="0" bIns="0" rtlCol="0" anchor="ctr"/>
-          <a:lstStyle/>
-          <a:p>
-            <a:pPr indent="0" marL="0">
-              <a:buNone/>
-            </a:pPr>
-            <a:r>
-              <a:rPr lang="en-US" sz="1500" dirty="0">
-                <a:solidFill>
-                  <a:srgbClr val="D9CFD1"/>
-                </a:solidFill>
-                <a:latin typeface="Arial" pitchFamily="34" charset="0"/>
-                <a:ea typeface="Arial" pitchFamily="34" charset="-122"/>
-                <a:cs typeface="Arial" pitchFamily="34" charset="-120"/>
-              </a:rPr>
-              <a:t>Type: Standard. É o managed — o Databricks decide onde guardar o arquivo</a:t>
-            </a:r>
-            <a:endParaRPr lang="en-US" sz="1500" dirty="0"/>
-          </a:p>
-        </p:txBody>
-      </p:sp>
-      <p:sp>
-        <p:nvSpPr>
-          <p:cNvPr id="10" name="Shape 8"/>
-          <p:cNvSpPr/>
-          <p:nvPr/>
-        </p:nvSpPr>
-        <p:spPr>
-          <a:xfrm>
-            <a:off x="457200" y="3419856"/>
-            <a:ext cx="91440" cy="91440"/>
-          </a:xfrm>
-          <a:prstGeom prst="ellipse">
-            <a:avLst/>
-          </a:prstGeom>
-          <a:solidFill>
-            <a:srgbClr val="3B9DF5"/>
-          </a:solidFill>
-          <a:ln w="12700">
-            <a:solidFill>
-              <a:srgbClr val="333333"/>
-            </a:solidFill>
-            <a:prstDash val="solid"/>
-          </a:ln>
-        </p:spPr>
-        <p:txBody>
-          <a:bodyPr/>
-          <a:p/>
-        </p:txBody>
-      </p:sp>
-      <p:sp>
-        <p:nvSpPr>
-          <p:cNvPr id="11" name="Text 9"/>
-          <p:cNvSpPr/>
-          <p:nvPr/>
-        </p:nvSpPr>
-        <p:spPr>
-          <a:xfrm>
-            <a:off x="713232" y="3319272"/>
-            <a:ext cx="7955280" cy="347472"/>
-          </a:xfrm>
-          <a:prstGeom prst="rect">
-            <a:avLst/>
-          </a:prstGeom>
-          <a:noFill/>
-          <a:ln/>
-        </p:spPr>
-        <p:txBody>
-          <a:bodyPr wrap="square" lIns="0" tIns="0" rIns="0" bIns="0" rtlCol="0" anchor="ctr"/>
-          <a:lstStyle/>
-          <a:p>
-            <a:pPr indent="0" marL="0">
-              <a:buNone/>
-            </a:pPr>
-            <a:r>
-              <a:rPr lang="en-US" sz="1500" dirty="0">
-                <a:solidFill>
-                  <a:srgbClr val="D9CFD1"/>
-                </a:solidFill>
-                <a:latin typeface="Arial" pitchFamily="34" charset="0"/>
-                <a:ea typeface="Arial" pitchFamily="34" charset="-122"/>
-                <a:cs typeface="Arial" pitchFamily="34" charset="-120"/>
-              </a:rPr>
-              <a:t>Create. Ele nasce vazio, com um schema default que a gente não vai usar</a:t>
-            </a:r>
-            <a:endParaRPr lang="en-US" sz="1500" dirty="0"/>
-          </a:p>
-        </p:txBody>
-      </p:sp>
-      <p:sp>
-        <p:nvSpPr>
-          <p:cNvPr id="12" name="Shape 10"/>
-          <p:cNvSpPr/>
-          <p:nvPr/>
-        </p:nvSpPr>
-        <p:spPr>
-          <a:xfrm>
-            <a:off x="457200" y="3840480"/>
-            <a:ext cx="91440" cy="91440"/>
-          </a:xfrm>
-          <a:prstGeom prst="ellipse">
-            <a:avLst/>
-          </a:prstGeom>
-          <a:solidFill>
-            <a:srgbClr val="3B9DF5"/>
-          </a:solidFill>
-          <a:ln w="12700">
-            <a:solidFill>
-              <a:srgbClr val="333333"/>
-            </a:solidFill>
-            <a:prstDash val="solid"/>
-          </a:ln>
-        </p:spPr>
-        <p:txBody>
-          <a:bodyPr/>
-          <a:p/>
-        </p:txBody>
-      </p:sp>
-      <p:sp>
-        <p:nvSpPr>
-          <p:cNvPr id="13" name="Text 11"/>
-          <p:cNvSpPr/>
-          <p:nvPr/>
-        </p:nvSpPr>
-        <p:spPr>
-          <a:xfrm>
-            <a:off x="713232" y="3739896"/>
-            <a:ext cx="7955280" cy="347472"/>
-          </a:xfrm>
-          <a:prstGeom prst="rect">
-            <a:avLst/>
-          </a:prstGeom>
-          <a:noFill/>
-          <a:ln/>
-        </p:spPr>
-        <p:txBody>
-          <a:bodyPr wrap="square" lIns="0" tIns="0" rIns="0" bIns="0" rtlCol="0" anchor="ctr"/>
-          <a:lstStyle/>
-          <a:p>
-            <a:pPr indent="0" marL="0">
-              <a:buNone/>
-            </a:pPr>
-            <a:r>
-              <a:rPr lang="en-US" sz="1500" dirty="0">
-                <a:solidFill>
-                  <a:srgbClr val="D9CFD1"/>
-                </a:solidFill>
-                <a:latin typeface="Arial" pitchFamily="34" charset="0"/>
-                <a:ea typeface="Arial" pitchFamily="34" charset="-122"/>
-                <a:cs typeface="Arial" pitchFamily="34" charset="-120"/>
-              </a:rPr>
-              <a:t>Grant access: deixe em All workspaces por enquanto</a:t>
-            </a:r>
-            <a:endParaRPr lang="en-US" sz="1500" dirty="0"/>
-          </a:p>
-        </p:txBody>
-      </p:sp>
-      <p:sp>
-        <p:nvSpPr>
-          <p:cNvPr id="14" name="Text 12"/>
-          <p:cNvSpPr/>
-          <p:nvPr/>
-        </p:nvSpPr>
-        <p:spPr>
-          <a:xfrm>
-            <a:off x="411480" y="4297680"/>
-            <a:ext cx="8229600" cy="365760"/>
-          </a:xfrm>
-          <a:prstGeom prst="rect">
-            <a:avLst/>
-          </a:prstGeom>
-          <a:noFill/>
-          <a:ln/>
-        </p:spPr>
-        <p:txBody>
-          <a:bodyPr wrap="square" lIns="0" tIns="0" rIns="0" bIns="0" rtlCol="0" anchor="ctr"/>
-          <a:lstStyle/>
-          <a:p>
-            <a:pPr indent="0" marL="0">
-              <a:buNone/>
-            </a:pPr>
-            <a:r>
-              <a:rPr lang="en-US" sz="1300" dirty="0">
-                <a:solidFill>
-                  <a:srgbClr val="7CC8FF"/>
-                </a:solidFill>
-                <a:latin typeface="Arial" pitchFamily="34" charset="0"/>
-                <a:ea typeface="Arial" pitchFamily="34" charset="-122"/>
-                <a:cs typeface="Arial" pitchFamily="34" charset="-120"/>
-              </a:rPr>
-              <a:t>A própria tela explica: 'a catalog is the first layer of Unity Catalog's three-level namespace'. É o primeiro dos três níveis do nome.</a:t>
-            </a:r>
-            <a:endParaRPr lang="en-US" sz="1300" dirty="0"/>
-          </a:p>
-        </p:txBody>
-      </p:sp>
-      <p:sp>
-        <p:nvSpPr>
-          <p:cNvPr id="15" name="Text 13"/>
-          <p:cNvSpPr/>
-          <p:nvPr/>
-        </p:nvSpPr>
-        <p:spPr>
-          <a:xfrm>
-            <a:off x="411480" y="4681728"/>
-            <a:ext cx="2743200" cy="228600"/>
-          </a:xfrm>
-          <a:prstGeom prst="rect">
-            <a:avLst/>
-          </a:prstGeom>
-          <a:noFill/>
-          <a:ln/>
-        </p:spPr>
-        <p:txBody>
-          <a:bodyPr wrap="square" lIns="0" tIns="0" rIns="0" bIns="0" rtlCol="0" anchor="ctr"/>
-          <a:lstStyle/>
-          <a:p>
-            <a:pPr indent="0" marL="0">
-              <a:buNone/>
-            </a:pPr>
-            <a:r>
-              <a:rPr lang="en-US" sz="800" b="1" spc="200" kern="0" dirty="0">
-                <a:solidFill>
-                  <a:srgbClr val="566A85"/>
-                </a:solidFill>
-                <a:latin typeface="Arial" pitchFamily="34" charset="0"/>
-                <a:ea typeface="Arial" pitchFamily="34" charset="-122"/>
-                <a:cs typeface="Arial" pitchFamily="34" charset="-120"/>
-              </a:rPr>
-              <a:t>JORNADA DE DADOS</a:t>
-            </a:r>
-            <a:endParaRPr lang="en-US" sz="800" dirty="0"/>
-          </a:p>
-        </p:txBody>
-      </p:sp>
-    </p:spTree>
-  </p:cSld>
-  <p:clrMapOvr>
-    <a:masterClrMapping/>
-  </p:clrMapOvr>
-</p:sld>
-</file>
-
 <file path=ppt/slides/slide39.xml><?xml version="1.0" encoding="utf-8"?>
 <p:sld xmlns:a="http://schemas.openxmlformats.org/drawingml/2006/main" xmlns:p="http://schemas.openxmlformats.org/presentationml/2006/main" xmlns:r="http://schemas.openxmlformats.org/officeDocument/2006/relationships">
   <p:cSld>
@@ -22643,7 +22643,7 @@
                 <a:ea typeface="Arial" pitchFamily="34" charset="-122"/>
                 <a:cs typeface="Arial" pitchFamily="34" charset="-120"/>
               </a:rPr>
-              <a:t>PASSO 2 · DENTRO DO CATÁLOGO</a:t>
+              <a:t>PASSO 1 · NA INTERFACE</a:t>
             </a:r>
             <a:endParaRPr lang="en-US" sz="1100" dirty="0"/>
           </a:p>
@@ -22677,7 +22677,7 @@
               <a:buNone/>
             </a:pPr>
             <a:r>
-              <a:rPr lang="en-US" sz="3200" b="1" dirty="0">
+              <a:rPr lang="en-US" sz="3100" b="1" dirty="0">
                 <a:solidFill>
                   <a:srgbClr val="FFFFFF"/>
                 </a:solidFill>
@@ -22685,9 +22685,9 @@
                 <a:ea typeface="Arial" pitchFamily="34" charset="-122"/>
                 <a:cs typeface="Arial" pitchFamily="34" charset="-120"/>
               </a:rPr>
-              <a:t>Criar os dois schemas</a:t>
-            </a:r>
-            <a:endParaRPr lang="en-US" sz="3200" dirty="0"/>
+              <a:t>Criar o catálogo</a:t>
+            </a:r>
+            <a:endParaRPr lang="en-US" sz="3100" dirty="0"/>
           </a:p>
         </p:txBody>
       </p:sp>
@@ -22699,20 +22699,18 @@
         </p:nvSpPr>
         <p:spPr>
           <a:xfrm>
-            <a:off x="411480" y="2194560"/>
-            <a:ext cx="1956816" cy="1737360"/>
-          </a:xfrm>
-          <a:prstGeom prst="roundRect">
-            <a:avLst>
-              <a:gd name="adj" fmla="val 2632"/>
-            </a:avLst>
+            <a:off x="457200" y="2157984"/>
+            <a:ext cx="91440" cy="91440"/>
+          </a:xfrm>
+          <a:prstGeom prst="ellipse">
+            <a:avLst/>
           </a:prstGeom>
           <a:solidFill>
-            <a:srgbClr val="0D1522"/>
+            <a:srgbClr val="3B9DF5"/>
           </a:solidFill>
           <a:ln w="12700">
             <a:solidFill>
-              <a:srgbClr val="1F3A5A"/>
+              <a:srgbClr val="333333"/>
             </a:solidFill>
             <a:prstDash val="solid"/>
           </a:ln>
@@ -22730,143 +22728,57 @@
         </p:nvSpPr>
         <p:spPr>
           <a:xfrm>
-            <a:off x="612648" y="2359152"/>
-            <a:ext cx="1554480" cy="274320"/>
-          </a:xfrm>
-          <a:prstGeom prst="rect">
-            <a:avLst/>
-          </a:prstGeom>
-          <a:noFill/>
-          <a:ln/>
-        </p:spPr>
-        <p:txBody>
-          <a:bodyPr wrap="square" lIns="0" tIns="0" rIns="0" bIns="0" rtlCol="0" anchor="ctr"/>
-          <a:lstStyle/>
-          <a:p>
-            <a:pPr indent="0" marL="0">
-              <a:buNone/>
-            </a:pPr>
-            <a:r>
-              <a:rPr lang="en-US" sz="1100" b="1" dirty="0">
-                <a:solidFill>
-                  <a:srgbClr val="3B9DF5"/>
-                </a:solidFill>
-                <a:latin typeface="Arial" pitchFamily="34" charset="0"/>
-                <a:ea typeface="Arial" pitchFamily="34" charset="-122"/>
-                <a:cs typeface="Arial" pitchFamily="34" charset="-120"/>
-              </a:rPr>
-              <a:t>01</a:t>
-            </a:r>
-            <a:endParaRPr lang="en-US" sz="1100" dirty="0"/>
-          </a:p>
-        </p:txBody>
-      </p:sp>
-      <p:sp>
-        <p:nvSpPr>
-          <p:cNvPr id="6" name="Text 4"/>
-          <p:cNvSpPr/>
-          <p:nvPr/>
-        </p:nvSpPr>
-        <p:spPr>
-          <a:xfrm>
-            <a:off x="612648" y="2633472"/>
-            <a:ext cx="1554480" cy="512064"/>
-          </a:xfrm>
-          <a:prstGeom prst="rect">
-            <a:avLst/>
-          </a:prstGeom>
-          <a:noFill/>
-          <a:ln/>
-        </p:spPr>
-        <p:txBody>
-          <a:bodyPr wrap="square" lIns="0" tIns="0" rIns="0" bIns="0" rtlCol="0" anchor="t"/>
-          <a:lstStyle/>
-          <a:p>
-            <a:pPr indent="0" marL="0">
-              <a:lnSpc>
-                <a:spcPts val="1800"/>
-              </a:lnSpc>
-              <a:buNone/>
-            </a:pPr>
-            <a:r>
-              <a:rPr lang="en-US" sz="1450" b="1" dirty="0">
-                <a:solidFill>
-                  <a:srgbClr val="FFFFFF"/>
-                </a:solidFill>
-                <a:latin typeface="Arial" pitchFamily="34" charset="0"/>
-                <a:ea typeface="Arial" pitchFamily="34" charset="-122"/>
-                <a:cs typeface="Arial" pitchFamily="34" charset="-120"/>
-              </a:rPr>
-              <a:t>lakehouse_rotaperfume</a:t>
-            </a:r>
-            <a:endParaRPr lang="en-US" sz="1450" dirty="0"/>
-          </a:p>
-        </p:txBody>
-      </p:sp>
-      <p:sp>
-        <p:nvSpPr>
-          <p:cNvPr id="7" name="Text 5"/>
-          <p:cNvSpPr/>
-          <p:nvPr/>
-        </p:nvSpPr>
-        <p:spPr>
-          <a:xfrm>
-            <a:off x="612648" y="3163824"/>
-            <a:ext cx="1554480" cy="621792"/>
-          </a:xfrm>
-          <a:prstGeom prst="rect">
-            <a:avLst/>
-          </a:prstGeom>
-          <a:noFill/>
-          <a:ln/>
-        </p:spPr>
-        <p:txBody>
-          <a:bodyPr wrap="square" lIns="0" tIns="0" rIns="0" bIns="0" rtlCol="0" anchor="ctr"/>
-          <a:lstStyle/>
-          <a:p>
-            <a:pPr indent="0" marL="0">
-              <a:lnSpc>
-                <a:spcPts val="1400"/>
-              </a:lnSpc>
-              <a:buNone/>
-            </a:pPr>
-            <a:r>
-              <a:rPr lang="en-US" sz="1050" dirty="0">
-                <a:solidFill>
-                  <a:srgbClr val="9BAAC0"/>
-                </a:solidFill>
-                <a:latin typeface="Arial" pitchFamily="34" charset="0"/>
-                <a:ea typeface="Arial" pitchFamily="34" charset="-122"/>
-                <a:cs typeface="Arial" pitchFamily="34" charset="-120"/>
-              </a:rPr>
-              <a:t>O catálogo que você acabou de criar</a:t>
-            </a:r>
-            <a:endParaRPr lang="en-US" sz="1050" dirty="0"/>
-          </a:p>
-        </p:txBody>
-      </p:sp>
-      <p:sp>
-        <p:nvSpPr>
-          <p:cNvPr id="8" name="Shape 6"/>
-          <p:cNvSpPr/>
-          <p:nvPr/>
-        </p:nvSpPr>
-        <p:spPr>
-          <a:xfrm>
-            <a:off x="2532888" y="2194560"/>
-            <a:ext cx="1956816" cy="1737360"/>
-          </a:xfrm>
-          <a:prstGeom prst="roundRect">
-            <a:avLst>
-              <a:gd name="adj" fmla="val 2632"/>
-            </a:avLst>
+            <a:off x="713232" y="2057400"/>
+            <a:ext cx="7955280" cy="347472"/>
+          </a:xfrm>
+          <a:prstGeom prst="rect">
+            <a:avLst/>
+          </a:prstGeom>
+          <a:noFill/>
+          <a:ln/>
+        </p:spPr>
+        <p:txBody>
+          <a:bodyPr wrap="square" lIns="0" tIns="0" rIns="0" bIns="0" rtlCol="0" anchor="ctr"/>
+          <a:lstStyle/>
+          <a:p>
+            <a:pPr indent="0" marL="0">
+              <a:buNone/>
+            </a:pPr>
+            <a:r>
+              <a:rPr lang="en-US" sz="1500" dirty="0">
+                <a:solidFill>
+                  <a:srgbClr val="D9CFD1"/>
+                </a:solidFill>
+                <a:latin typeface="Arial" pitchFamily="34" charset="0"/>
+                <a:ea typeface="Arial" pitchFamily="34" charset="-122"/>
+                <a:cs typeface="Arial" pitchFamily="34" charset="-120"/>
+              </a:rPr>
+              <a:t>No menu lateral: Catalog → botão Create catalog, no canto superior</a:t>
+            </a:r>
+            <a:endParaRPr lang="en-US" sz="1500" dirty="0"/>
+          </a:p>
+        </p:txBody>
+      </p:sp>
+      <p:sp>
+        <p:nvSpPr>
+          <p:cNvPr id="6" name="Shape 4"/>
+          <p:cNvSpPr/>
+          <p:nvPr/>
+        </p:nvSpPr>
+        <p:spPr>
+          <a:xfrm>
+            <a:off x="457200" y="2578608"/>
+            <a:ext cx="91440" cy="91440"/>
+          </a:xfrm>
+          <a:prstGeom prst="ellipse">
+            <a:avLst/>
           </a:prstGeom>
           <a:solidFill>
-            <a:srgbClr val="0D1522"/>
+            <a:srgbClr val="3B9DF5"/>
           </a:solidFill>
           <a:ln w="12700">
             <a:solidFill>
-              <a:srgbClr val="1F3A5A"/>
+              <a:srgbClr val="333333"/>
             </a:solidFill>
             <a:prstDash val="solid"/>
           </a:ln>
@@ -22878,149 +22790,63 @@
       </p:sp>
       <p:sp>
         <p:nvSpPr>
-          <p:cNvPr id="9" name="Text 7"/>
-          <p:cNvSpPr/>
-          <p:nvPr/>
-        </p:nvSpPr>
-        <p:spPr>
-          <a:xfrm>
-            <a:off x="2734056" y="2359152"/>
-            <a:ext cx="1554480" cy="274320"/>
-          </a:xfrm>
-          <a:prstGeom prst="rect">
-            <a:avLst/>
-          </a:prstGeom>
-          <a:noFill/>
-          <a:ln/>
-        </p:spPr>
-        <p:txBody>
-          <a:bodyPr wrap="square" lIns="0" tIns="0" rIns="0" bIns="0" rtlCol="0" anchor="ctr"/>
-          <a:lstStyle/>
-          <a:p>
-            <a:pPr indent="0" marL="0">
-              <a:buNone/>
-            </a:pPr>
-            <a:r>
-              <a:rPr lang="en-US" sz="1100" b="1" dirty="0">
-                <a:solidFill>
-                  <a:srgbClr val="3B9DF5"/>
-                </a:solidFill>
-                <a:latin typeface="Arial" pitchFamily="34" charset="0"/>
-                <a:ea typeface="Arial" pitchFamily="34" charset="-122"/>
-                <a:cs typeface="Arial" pitchFamily="34" charset="-120"/>
-              </a:rPr>
-              <a:t>02</a:t>
-            </a:r>
-            <a:endParaRPr lang="en-US" sz="1100" dirty="0"/>
-          </a:p>
-        </p:txBody>
-      </p:sp>
-      <p:sp>
-        <p:nvSpPr>
-          <p:cNvPr id="10" name="Text 8"/>
-          <p:cNvSpPr/>
-          <p:nvPr/>
-        </p:nvSpPr>
-        <p:spPr>
-          <a:xfrm>
-            <a:off x="2734056" y="2633472"/>
-            <a:ext cx="1554480" cy="512064"/>
-          </a:xfrm>
-          <a:prstGeom prst="rect">
-            <a:avLst/>
-          </a:prstGeom>
-          <a:noFill/>
-          <a:ln/>
-        </p:spPr>
-        <p:txBody>
-          <a:bodyPr wrap="square" lIns="0" tIns="0" rIns="0" bIns="0" rtlCol="0" anchor="t"/>
-          <a:lstStyle/>
-          <a:p>
-            <a:pPr indent="0" marL="0">
-              <a:lnSpc>
-                <a:spcPts val="1800"/>
-              </a:lnSpc>
-              <a:buNone/>
-            </a:pPr>
-            <a:r>
-              <a:rPr lang="en-US" sz="1450" b="1" dirty="0">
-                <a:solidFill>
-                  <a:srgbClr val="FFFFFF"/>
-                </a:solidFill>
-                <a:latin typeface="Arial" pitchFamily="34" charset="0"/>
-                <a:ea typeface="Arial" pitchFamily="34" charset="-122"/>
-                <a:cs typeface="Arial" pitchFamily="34" charset="-120"/>
-              </a:rPr>
-              <a:t>bronze</a:t>
-            </a:r>
-            <a:endParaRPr lang="en-US" sz="1450" dirty="0"/>
-          </a:p>
-        </p:txBody>
-      </p:sp>
-      <p:sp>
-        <p:nvSpPr>
-          <p:cNvPr id="11" name="Text 9"/>
-          <p:cNvSpPr/>
-          <p:nvPr/>
-        </p:nvSpPr>
-        <p:spPr>
-          <a:xfrm>
-            <a:off x="2734056" y="3163824"/>
-            <a:ext cx="1554480" cy="621792"/>
-          </a:xfrm>
-          <a:prstGeom prst="rect">
-            <a:avLst/>
-          </a:prstGeom>
-          <a:noFill/>
-          <a:ln/>
-        </p:spPr>
-        <p:txBody>
-          <a:bodyPr wrap="square" lIns="0" tIns="0" rIns="0" bIns="0" rtlCol="0" anchor="ctr"/>
-          <a:lstStyle/>
-          <a:p>
-            <a:pPr indent="0" marL="0">
-              <a:lnSpc>
-                <a:spcPts val="1400"/>
-              </a:lnSpc>
-              <a:buNone/>
-            </a:pPr>
-            <a:r>
-              <a:rPr lang="en-US" sz="1050" dirty="0">
-                <a:solidFill>
-                  <a:srgbClr val="9BAAC0"/>
-                </a:solidFill>
-                <a:latin typeface="Arial" pitchFamily="34" charset="0"/>
-                <a:ea typeface="Arial" pitchFamily="34" charset="-122"/>
-                <a:cs typeface="Arial" pitchFamily="34" charset="-120"/>
-              </a:rPr>
-              <a:t>Create schema. Aqui o dado entra cru, como veio da origem</a:t>
-            </a:r>
-            <a:endParaRPr lang="en-US" sz="1050" dirty="0"/>
-          </a:p>
-        </p:txBody>
-      </p:sp>
-      <p:sp>
-        <p:nvSpPr>
-          <p:cNvPr id="12" name="Shape 10"/>
-          <p:cNvSpPr/>
-          <p:nvPr/>
-        </p:nvSpPr>
-        <p:spPr>
-          <a:xfrm>
-            <a:off x="4654296" y="2194560"/>
-            <a:ext cx="1956816" cy="1737360"/>
-          </a:xfrm>
-          <a:prstGeom prst="roundRect">
-            <a:avLst>
-              <a:gd name="adj" fmla="val 2632"/>
-            </a:avLst>
+          <p:cNvPr id="7" name="Text 5"/>
+          <p:cNvSpPr/>
+          <p:nvPr/>
+        </p:nvSpPr>
+        <p:spPr>
+          <a:xfrm>
+            <a:off x="713232" y="2478024"/>
+            <a:ext cx="7955280" cy="347472"/>
+          </a:xfrm>
+          <a:prstGeom prst="rect">
+            <a:avLst/>
+          </a:prstGeom>
+          <a:noFill/>
+          <a:ln/>
+        </p:spPr>
+        <p:txBody>
+          <a:bodyPr wrap="square" lIns="0" tIns="0" rIns="0" bIns="0" rtlCol="0" anchor="ctr"/>
+          <a:lstStyle/>
+          <a:p>
+            <a:pPr indent="0" marL="0">
+              <a:buNone/>
+            </a:pPr>
+            <a:r>
+              <a:rPr lang="en-US" sz="1500" dirty="0">
+                <a:solidFill>
+                  <a:srgbClr val="D9CFD1"/>
+                </a:solidFill>
+                <a:latin typeface="Arial" pitchFamily="34" charset="0"/>
+                <a:ea typeface="Arial" pitchFamily="34" charset="-122"/>
+                <a:cs typeface="Arial" pitchFamily="34" charset="-120"/>
+              </a:rPr>
+              <a:t>Catalog name: lakehouse_rotaperfume — minúsculo, sem espaço e sem acento</a:t>
+            </a:r>
+            <a:endParaRPr lang="en-US" sz="1500" dirty="0"/>
+          </a:p>
+        </p:txBody>
+      </p:sp>
+      <p:sp>
+        <p:nvSpPr>
+          <p:cNvPr id="8" name="Shape 6"/>
+          <p:cNvSpPr/>
+          <p:nvPr/>
+        </p:nvSpPr>
+        <p:spPr>
+          <a:xfrm>
+            <a:off x="457200" y="2999232"/>
+            <a:ext cx="91440" cy="91440"/>
+          </a:xfrm>
+          <a:prstGeom prst="ellipse">
+            <a:avLst/>
           </a:prstGeom>
           <a:solidFill>
-            <a:srgbClr val="0D1522"/>
+            <a:srgbClr val="3B9DF5"/>
           </a:solidFill>
           <a:ln w="12700">
             <a:solidFill>
-              <a:srgbClr val="1F3A5A"/>
+              <a:srgbClr val="333333"/>
             </a:solidFill>
             <a:prstDash val="solid"/>
           </a:ln>
@@ -23032,149 +22858,63 @@
       </p:sp>
       <p:sp>
         <p:nvSpPr>
-          <p:cNvPr id="13" name="Text 11"/>
-          <p:cNvSpPr/>
-          <p:nvPr/>
-        </p:nvSpPr>
-        <p:spPr>
-          <a:xfrm>
-            <a:off x="4855464" y="2359152"/>
-            <a:ext cx="1554480" cy="274320"/>
-          </a:xfrm>
-          <a:prstGeom prst="rect">
-            <a:avLst/>
-          </a:prstGeom>
-          <a:noFill/>
-          <a:ln/>
-        </p:spPr>
-        <p:txBody>
-          <a:bodyPr wrap="square" lIns="0" tIns="0" rIns="0" bIns="0" rtlCol="0" anchor="ctr"/>
-          <a:lstStyle/>
-          <a:p>
-            <a:pPr indent="0" marL="0">
-              <a:buNone/>
-            </a:pPr>
-            <a:r>
-              <a:rPr lang="en-US" sz="1100" b="1" dirty="0">
-                <a:solidFill>
-                  <a:srgbClr val="3B9DF5"/>
-                </a:solidFill>
-                <a:latin typeface="Arial" pitchFamily="34" charset="0"/>
-                <a:ea typeface="Arial" pitchFamily="34" charset="-122"/>
-                <a:cs typeface="Arial" pitchFamily="34" charset="-120"/>
-              </a:rPr>
-              <a:t>03</a:t>
-            </a:r>
-            <a:endParaRPr lang="en-US" sz="1100" dirty="0"/>
-          </a:p>
-        </p:txBody>
-      </p:sp>
-      <p:sp>
-        <p:nvSpPr>
-          <p:cNvPr id="14" name="Text 12"/>
-          <p:cNvSpPr/>
-          <p:nvPr/>
-        </p:nvSpPr>
-        <p:spPr>
-          <a:xfrm>
-            <a:off x="4855464" y="2633472"/>
-            <a:ext cx="1554480" cy="512064"/>
-          </a:xfrm>
-          <a:prstGeom prst="rect">
-            <a:avLst/>
-          </a:prstGeom>
-          <a:noFill/>
-          <a:ln/>
-        </p:spPr>
-        <p:txBody>
-          <a:bodyPr wrap="square" lIns="0" tIns="0" rIns="0" bIns="0" rtlCol="0" anchor="t"/>
-          <a:lstStyle/>
-          <a:p>
-            <a:pPr indent="0" marL="0">
-              <a:lnSpc>
-                <a:spcPts val="1800"/>
-              </a:lnSpc>
-              <a:buNone/>
-            </a:pPr>
-            <a:r>
-              <a:rPr lang="en-US" sz="1450" b="1" dirty="0">
-                <a:solidFill>
-                  <a:srgbClr val="FFFFFF"/>
-                </a:solidFill>
-                <a:latin typeface="Arial" pitchFamily="34" charset="0"/>
-                <a:ea typeface="Arial" pitchFamily="34" charset="-122"/>
-                <a:cs typeface="Arial" pitchFamily="34" charset="-120"/>
-              </a:rPr>
-              <a:t>silver</a:t>
-            </a:r>
-            <a:endParaRPr lang="en-US" sz="1450" dirty="0"/>
-          </a:p>
-        </p:txBody>
-      </p:sp>
-      <p:sp>
-        <p:nvSpPr>
-          <p:cNvPr id="15" name="Text 13"/>
-          <p:cNvSpPr/>
-          <p:nvPr/>
-        </p:nvSpPr>
-        <p:spPr>
-          <a:xfrm>
-            <a:off x="4855464" y="3163824"/>
-            <a:ext cx="1554480" cy="621792"/>
-          </a:xfrm>
-          <a:prstGeom prst="rect">
-            <a:avLst/>
-          </a:prstGeom>
-          <a:noFill/>
-          <a:ln/>
-        </p:spPr>
-        <p:txBody>
-          <a:bodyPr wrap="square" lIns="0" tIns="0" rIns="0" bIns="0" rtlCol="0" anchor="ctr"/>
-          <a:lstStyle/>
-          <a:p>
-            <a:pPr indent="0" marL="0">
-              <a:lnSpc>
-                <a:spcPts val="1400"/>
-              </a:lnSpc>
-              <a:buNone/>
-            </a:pPr>
-            <a:r>
-              <a:rPr lang="en-US" sz="1050" dirty="0">
-                <a:solidFill>
-                  <a:srgbClr val="9BAAC0"/>
-                </a:solidFill>
-                <a:latin typeface="Arial" pitchFamily="34" charset="0"/>
-                <a:ea typeface="Arial" pitchFamily="34" charset="-122"/>
-                <a:cs typeface="Arial" pitchFamily="34" charset="-120"/>
-              </a:rPr>
-              <a:t>Create schema. Aqui ele entra limpo — é a noite 2</a:t>
-            </a:r>
-            <a:endParaRPr lang="en-US" sz="1050" dirty="0"/>
-          </a:p>
-        </p:txBody>
-      </p:sp>
-      <p:sp>
-        <p:nvSpPr>
-          <p:cNvPr id="16" name="Shape 14"/>
-          <p:cNvSpPr/>
-          <p:nvPr/>
-        </p:nvSpPr>
-        <p:spPr>
-          <a:xfrm>
-            <a:off x="6775704" y="2194560"/>
-            <a:ext cx="1956816" cy="1737360"/>
-          </a:xfrm>
-          <a:prstGeom prst="roundRect">
-            <a:avLst>
-              <a:gd name="adj" fmla="val 2632"/>
-            </a:avLst>
+          <p:cNvPr id="9" name="Text 7"/>
+          <p:cNvSpPr/>
+          <p:nvPr/>
+        </p:nvSpPr>
+        <p:spPr>
+          <a:xfrm>
+            <a:off x="713232" y="2898648"/>
+            <a:ext cx="7955280" cy="347472"/>
+          </a:xfrm>
+          <a:prstGeom prst="rect">
+            <a:avLst/>
+          </a:prstGeom>
+          <a:noFill/>
+          <a:ln/>
+        </p:spPr>
+        <p:txBody>
+          <a:bodyPr wrap="square" lIns="0" tIns="0" rIns="0" bIns="0" rtlCol="0" anchor="ctr"/>
+          <a:lstStyle/>
+          <a:p>
+            <a:pPr indent="0" marL="0">
+              <a:buNone/>
+            </a:pPr>
+            <a:r>
+              <a:rPr lang="en-US" sz="1500" dirty="0">
+                <a:solidFill>
+                  <a:srgbClr val="D9CFD1"/>
+                </a:solidFill>
+                <a:latin typeface="Arial" pitchFamily="34" charset="0"/>
+                <a:ea typeface="Arial" pitchFamily="34" charset="-122"/>
+                <a:cs typeface="Arial" pitchFamily="34" charset="-120"/>
+              </a:rPr>
+              <a:t>Type: Standard. É o managed — o Databricks decide onde guardar o arquivo</a:t>
+            </a:r>
+            <a:endParaRPr lang="en-US" sz="1500" dirty="0"/>
+          </a:p>
+        </p:txBody>
+      </p:sp>
+      <p:sp>
+        <p:nvSpPr>
+          <p:cNvPr id="10" name="Shape 8"/>
+          <p:cNvSpPr/>
+          <p:nvPr/>
+        </p:nvSpPr>
+        <p:spPr>
+          <a:xfrm>
+            <a:off x="457200" y="3419856"/>
+            <a:ext cx="91440" cy="91440"/>
+          </a:xfrm>
+          <a:prstGeom prst="ellipse">
+            <a:avLst/>
           </a:prstGeom>
           <a:solidFill>
-            <a:srgbClr val="0D1522"/>
+            <a:srgbClr val="3B9DF5"/>
           </a:solidFill>
           <a:ln w="12700">
             <a:solidFill>
-              <a:srgbClr val="1F3A5A"/>
+              <a:srgbClr val="333333"/>
             </a:solidFill>
             <a:prstDash val="solid"/>
           </a:ln>
@@ -23186,130 +22926,153 @@
       </p:sp>
       <p:sp>
         <p:nvSpPr>
-          <p:cNvPr id="17" name="Text 15"/>
-          <p:cNvSpPr/>
-          <p:nvPr/>
-        </p:nvSpPr>
-        <p:spPr>
-          <a:xfrm>
-            <a:off x="6976872" y="2359152"/>
-            <a:ext cx="1554480" cy="274320"/>
-          </a:xfrm>
-          <a:prstGeom prst="rect">
-            <a:avLst/>
-          </a:prstGeom>
-          <a:noFill/>
-          <a:ln/>
-        </p:spPr>
-        <p:txBody>
-          <a:bodyPr wrap="square" lIns="0" tIns="0" rIns="0" bIns="0" rtlCol="0" anchor="ctr"/>
-          <a:lstStyle/>
-          <a:p>
-            <a:pPr indent="0" marL="0">
-              <a:buNone/>
-            </a:pPr>
-            <a:r>
-              <a:rPr lang="en-US" sz="1100" b="1" dirty="0">
-                <a:solidFill>
-                  <a:srgbClr val="3B9DF5"/>
-                </a:solidFill>
-                <a:latin typeface="Arial" pitchFamily="34" charset="0"/>
-                <a:ea typeface="Arial" pitchFamily="34" charset="-122"/>
-                <a:cs typeface="Arial" pitchFamily="34" charset="-120"/>
-              </a:rPr>
-              <a:t>→</a:t>
-            </a:r>
-            <a:endParaRPr lang="en-US" sz="1100" dirty="0"/>
-          </a:p>
-        </p:txBody>
-      </p:sp>
-      <p:sp>
-        <p:nvSpPr>
-          <p:cNvPr id="18" name="Text 16"/>
-          <p:cNvSpPr/>
-          <p:nvPr/>
-        </p:nvSpPr>
-        <p:spPr>
-          <a:xfrm>
-            <a:off x="6976872" y="2633472"/>
-            <a:ext cx="1554480" cy="512064"/>
-          </a:xfrm>
-          <a:prstGeom prst="rect">
-            <a:avLst/>
-          </a:prstGeom>
-          <a:noFill/>
-          <a:ln/>
-        </p:spPr>
-        <p:txBody>
-          <a:bodyPr wrap="square" lIns="0" tIns="0" rIns="0" bIns="0" rtlCol="0" anchor="t"/>
-          <a:lstStyle/>
-          <a:p>
-            <a:pPr indent="0" marL="0">
-              <a:lnSpc>
-                <a:spcPts val="1800"/>
-              </a:lnSpc>
-              <a:buNone/>
-            </a:pPr>
-            <a:r>
-              <a:rPr lang="en-US" sz="1450" b="1" dirty="0">
-                <a:solidFill>
-                  <a:srgbClr val="FFFFFF"/>
-                </a:solidFill>
-                <a:latin typeface="Arial" pitchFamily="34" charset="0"/>
-                <a:ea typeface="Arial" pitchFamily="34" charset="-122"/>
-                <a:cs typeface="Arial" pitchFamily="34" charset="-120"/>
-              </a:rPr>
-              <a:t>e a gold?</a:t>
-            </a:r>
-            <a:endParaRPr lang="en-US" sz="1450" dirty="0"/>
-          </a:p>
-        </p:txBody>
-      </p:sp>
-      <p:sp>
-        <p:nvSpPr>
-          <p:cNvPr id="19" name="Text 17"/>
-          <p:cNvSpPr/>
-          <p:nvPr/>
-        </p:nvSpPr>
-        <p:spPr>
-          <a:xfrm>
-            <a:off x="6976872" y="3163824"/>
-            <a:ext cx="1554480" cy="621792"/>
-          </a:xfrm>
-          <a:prstGeom prst="rect">
-            <a:avLst/>
-          </a:prstGeom>
-          <a:noFill/>
-          <a:ln/>
-        </p:spPr>
-        <p:txBody>
-          <a:bodyPr wrap="square" lIns="0" tIns="0" rIns="0" bIns="0" rtlCol="0" anchor="ctr"/>
-          <a:lstStyle/>
-          <a:p>
-            <a:pPr indent="0" marL="0">
-              <a:lnSpc>
-                <a:spcPts val="1400"/>
-              </a:lnSpc>
-              <a:buNone/>
-            </a:pPr>
-            <a:r>
-              <a:rPr lang="en-US" sz="1050" dirty="0">
-                <a:solidFill>
-                  <a:srgbClr val="9BAAC0"/>
-                </a:solidFill>
-                <a:latin typeface="Arial" pitchFamily="34" charset="0"/>
-                <a:ea typeface="Arial" pitchFamily="34" charset="-122"/>
-                <a:cs typeface="Arial" pitchFamily="34" charset="-120"/>
-              </a:rPr>
-              <a:t>Vem depois, quando existir fato e dimensão para guardar</a:t>
-            </a:r>
-            <a:endParaRPr lang="en-US" sz="1050" dirty="0"/>
-          </a:p>
-        </p:txBody>
-      </p:sp>
-      <p:sp>
-        <p:nvSpPr>
-          <p:cNvPr id="20" name="Text 18"/>
+          <p:cNvPr id="11" name="Text 9"/>
+          <p:cNvSpPr/>
+          <p:nvPr/>
+        </p:nvSpPr>
+        <p:spPr>
+          <a:xfrm>
+            <a:off x="713232" y="3319272"/>
+            <a:ext cx="7955280" cy="347472"/>
+          </a:xfrm>
+          <a:prstGeom prst="rect">
+            <a:avLst/>
+          </a:prstGeom>
+          <a:noFill/>
+          <a:ln/>
+        </p:spPr>
+        <p:txBody>
+          <a:bodyPr wrap="square" lIns="0" tIns="0" rIns="0" bIns="0" rtlCol="0" anchor="ctr"/>
+          <a:lstStyle/>
+          <a:p>
+            <a:pPr indent="0" marL="0">
+              <a:buNone/>
+            </a:pPr>
+            <a:r>
+              <a:rPr lang="en-US" sz="1500" dirty="0">
+                <a:solidFill>
+                  <a:srgbClr val="D9CFD1"/>
+                </a:solidFill>
+                <a:latin typeface="Arial" pitchFamily="34" charset="0"/>
+                <a:ea typeface="Arial" pitchFamily="34" charset="-122"/>
+                <a:cs typeface="Arial" pitchFamily="34" charset="-120"/>
+              </a:rPr>
+              <a:t>Create. Ele nasce vazio, com um schema default que a gente não vai usar</a:t>
+            </a:r>
+            <a:endParaRPr lang="en-US" sz="1500" dirty="0"/>
+          </a:p>
+        </p:txBody>
+      </p:sp>
+      <p:sp>
+        <p:nvSpPr>
+          <p:cNvPr id="12" name="Shape 10"/>
+          <p:cNvSpPr/>
+          <p:nvPr/>
+        </p:nvSpPr>
+        <p:spPr>
+          <a:xfrm>
+            <a:off x="457200" y="3840480"/>
+            <a:ext cx="91440" cy="91440"/>
+          </a:xfrm>
+          <a:prstGeom prst="ellipse">
+            <a:avLst/>
+          </a:prstGeom>
+          <a:solidFill>
+            <a:srgbClr val="3B9DF5"/>
+          </a:solidFill>
+          <a:ln w="12700">
+            <a:solidFill>
+              <a:srgbClr val="333333"/>
+            </a:solidFill>
+            <a:prstDash val="solid"/>
+          </a:ln>
+        </p:spPr>
+        <p:txBody>
+          <a:bodyPr/>
+          <a:p/>
+        </p:txBody>
+      </p:sp>
+      <p:sp>
+        <p:nvSpPr>
+          <p:cNvPr id="13" name="Text 11"/>
+          <p:cNvSpPr/>
+          <p:nvPr/>
+        </p:nvSpPr>
+        <p:spPr>
+          <a:xfrm>
+            <a:off x="713232" y="3739896"/>
+            <a:ext cx="7955280" cy="347472"/>
+          </a:xfrm>
+          <a:prstGeom prst="rect">
+            <a:avLst/>
+          </a:prstGeom>
+          <a:noFill/>
+          <a:ln/>
+        </p:spPr>
+        <p:txBody>
+          <a:bodyPr wrap="square" lIns="0" tIns="0" rIns="0" bIns="0" rtlCol="0" anchor="ctr"/>
+          <a:lstStyle/>
+          <a:p>
+            <a:pPr indent="0" marL="0">
+              <a:buNone/>
+            </a:pPr>
+            <a:r>
+              <a:rPr lang="en-US" sz="1500" dirty="0">
+                <a:solidFill>
+                  <a:srgbClr val="D9CFD1"/>
+                </a:solidFill>
+                <a:latin typeface="Arial" pitchFamily="34" charset="0"/>
+                <a:ea typeface="Arial" pitchFamily="34" charset="-122"/>
+                <a:cs typeface="Arial" pitchFamily="34" charset="-120"/>
+              </a:rPr>
+              <a:t>Grant access: deixe em All workspaces por enquanto</a:t>
+            </a:r>
+            <a:endParaRPr lang="en-US" sz="1500" dirty="0"/>
+          </a:p>
+        </p:txBody>
+      </p:sp>
+      <p:sp>
+        <p:nvSpPr>
+          <p:cNvPr id="14" name="Text 12"/>
+          <p:cNvSpPr/>
+          <p:nvPr/>
+        </p:nvSpPr>
+        <p:spPr>
+          <a:xfrm>
+            <a:off x="411480" y="4297680"/>
+            <a:ext cx="8229600" cy="365760"/>
+          </a:xfrm>
+          <a:prstGeom prst="rect">
+            <a:avLst/>
+          </a:prstGeom>
+          <a:noFill/>
+          <a:ln/>
+        </p:spPr>
+        <p:txBody>
+          <a:bodyPr wrap="square" lIns="0" tIns="0" rIns="0" bIns="0" rtlCol="0" anchor="ctr"/>
+          <a:lstStyle/>
+          <a:p>
+            <a:pPr indent="0" marL="0">
+              <a:buNone/>
+            </a:pPr>
+            <a:r>
+              <a:rPr lang="en-US" sz="1300" dirty="0">
+                <a:solidFill>
+                  <a:srgbClr val="7CC8FF"/>
+                </a:solidFill>
+                <a:latin typeface="Arial" pitchFamily="34" charset="0"/>
+                <a:ea typeface="Arial" pitchFamily="34" charset="-122"/>
+                <a:cs typeface="Arial" pitchFamily="34" charset="-120"/>
+              </a:rPr>
+              <a:t>A própria tela explica: 'a catalog is the first layer of Unity Catalog's three-level namespace'. É o primeiro dos três níveis do nome.</a:t>
+            </a:r>
+            <a:endParaRPr lang="en-US" sz="1300" dirty="0"/>
+          </a:p>
+        </p:txBody>
+      </p:sp>
+      <p:sp>
+        <p:nvSpPr>
+          <p:cNvPr id="15" name="Text 13"/>
           <p:cNvSpPr/>
           <p:nvPr/>
         </p:nvSpPr>
@@ -23598,7 +23361,7 @@
                 <a:ea typeface="Arial" pitchFamily="34" charset="-122"/>
                 <a:cs typeface="Arial" pitchFamily="34" charset="-120"/>
               </a:rPr>
-              <a:t>A DÚVIDA DE TODO MUNDO</a:t>
+              <a:t>PASSO 2 · DENTRO DO CATÁLOGO</a:t>
             </a:r>
             <a:endParaRPr lang="en-US" sz="1100" dirty="0"/>
           </a:p>
@@ -23640,7 +23403,7 @@
                 <a:ea typeface="Arial" pitchFamily="34" charset="-122"/>
                 <a:cs typeface="Arial" pitchFamily="34" charset="-120"/>
               </a:rPr>
-              <a:t>Schema não é tabela</a:t>
+              <a:t>Criar os dois schemas</a:t>
             </a:r>
             <a:endParaRPr lang="en-US" sz="3200" dirty="0"/>
           </a:p>
@@ -23648,259 +23411,24 @@
       </p:sp>
       <p:sp>
         <p:nvSpPr>
-          <p:cNvPr id="4" name="Text 2"/>
-          <p:cNvSpPr/>
-          <p:nvPr/>
-        </p:nvSpPr>
-        <p:spPr>
-          <a:xfrm>
-            <a:off x="411480" y="1828800"/>
-            <a:ext cx="7863840" cy="365760"/>
-          </a:xfrm>
-          <a:prstGeom prst="rect">
-            <a:avLst/>
-          </a:prstGeom>
-          <a:noFill/>
-          <a:ln/>
-        </p:spPr>
-        <p:txBody>
-          <a:bodyPr wrap="square" lIns="0" tIns="0" rIns="0" bIns="0" rtlCol="0" anchor="ctr"/>
-          <a:lstStyle/>
-          <a:p>
-            <a:pPr indent="0" marL="0">
-              <a:lnSpc>
-                <a:spcPts val="2200"/>
-              </a:lnSpc>
-              <a:buNone/>
-            </a:pPr>
-            <a:r>
-              <a:rPr lang="en-US" sz="1400" dirty="0">
-                <a:solidFill>
-                  <a:srgbClr val="9BAAC0"/>
-                </a:solidFill>
-                <a:latin typeface="Arial" pitchFamily="34" charset="0"/>
-                <a:ea typeface="Arial" pitchFamily="34" charset="-122"/>
-                <a:cs typeface="Arial" pitchFamily="34" charset="-120"/>
-              </a:rPr>
-              <a:t>Os dois aparecem embaixo do catálogo na tela. Mas fazem coisas diferentes.</a:t>
-            </a:r>
-            <a:endParaRPr lang="en-US" sz="1400" dirty="0"/>
-          </a:p>
-        </p:txBody>
-      </p:sp>
-      <p:sp>
-        <p:nvSpPr>
-          <p:cNvPr id="5" name="Shape 3"/>
-          <p:cNvSpPr/>
-          <p:nvPr/>
-        </p:nvSpPr>
-        <p:spPr>
-          <a:xfrm>
-            <a:off x="411480" y="2377440"/>
-            <a:ext cx="4023360" cy="2057400"/>
+          <p:cNvPr id="4" name="Shape 2"/>
+          <p:cNvSpPr/>
+          <p:nvPr/>
+        </p:nvSpPr>
+        <p:spPr>
+          <a:xfrm>
+            <a:off x="411480" y="2194560"/>
+            <a:ext cx="1956816" cy="1737360"/>
           </a:xfrm>
           <a:prstGeom prst="roundRect">
             <a:avLst>
-              <a:gd name="adj" fmla="val 2667"/>
-            </a:avLst>
-          </a:prstGeom>
-          <a:solidFill>
-            <a:srgbClr val="142337"/>
-          </a:solidFill>
-          <a:ln w="20320">
-            <a:solidFill>
-              <a:srgbClr val="3B9DF5"/>
-            </a:solidFill>
-            <a:prstDash val="solid"/>
-          </a:ln>
-        </p:spPr>
-        <p:txBody>
-          <a:bodyPr/>
-          <a:p/>
-        </p:txBody>
-      </p:sp>
-      <p:sp>
-        <p:nvSpPr>
-          <p:cNvPr id="6" name="Text 4"/>
-          <p:cNvSpPr/>
-          <p:nvPr/>
-        </p:nvSpPr>
-        <p:spPr>
-          <a:xfrm>
-            <a:off x="667512" y="2560320"/>
-            <a:ext cx="3511296" cy="292608"/>
-          </a:xfrm>
-          <a:prstGeom prst="rect">
-            <a:avLst/>
-          </a:prstGeom>
-          <a:noFill/>
-          <a:ln/>
-        </p:spPr>
-        <p:txBody>
-          <a:bodyPr wrap="square" lIns="0" tIns="0" rIns="0" bIns="0" rtlCol="0" anchor="ctr"/>
-          <a:lstStyle/>
-          <a:p>
-            <a:pPr indent="0" marL="0">
-              <a:buNone/>
-            </a:pPr>
-            <a:r>
-              <a:rPr lang="en-US" sz="1200" b="1" dirty="0">
-                <a:solidFill>
-                  <a:srgbClr val="3B9DF5"/>
-                </a:solidFill>
-                <a:latin typeface="Consolas" pitchFamily="34" charset="0"/>
-                <a:ea typeface="Consolas" pitchFamily="34" charset="-122"/>
-                <a:cs typeface="Consolas" pitchFamily="34" charset="-120"/>
-              </a:rPr>
-              <a:t>SCHEMA</a:t>
-            </a:r>
-            <a:endParaRPr lang="en-US" sz="1200" dirty="0"/>
-          </a:p>
-        </p:txBody>
-      </p:sp>
-      <p:sp>
-        <p:nvSpPr>
-          <p:cNvPr id="7" name="Text 5"/>
-          <p:cNvSpPr/>
-          <p:nvPr/>
-        </p:nvSpPr>
-        <p:spPr>
-          <a:xfrm>
-            <a:off x="667512" y="2871216"/>
-            <a:ext cx="3511296" cy="310896"/>
-          </a:xfrm>
-          <a:prstGeom prst="rect">
-            <a:avLst/>
-          </a:prstGeom>
-          <a:noFill/>
-          <a:ln/>
-        </p:spPr>
-        <p:txBody>
-          <a:bodyPr wrap="square" lIns="0" tIns="0" rIns="0" bIns="0" rtlCol="0" anchor="ctr"/>
-          <a:lstStyle/>
-          <a:p>
-            <a:pPr indent="0" marL="0">
-              <a:buNone/>
-            </a:pPr>
-            <a:r>
-              <a:rPr lang="en-US" sz="1500" b="1" dirty="0">
-                <a:solidFill>
-                  <a:srgbClr val="FFFFFF"/>
-                </a:solidFill>
-                <a:latin typeface="Arial" pitchFamily="34" charset="0"/>
-                <a:ea typeface="Arial" pitchFamily="34" charset="-122"/>
-                <a:cs typeface="Arial" pitchFamily="34" charset="-120"/>
-              </a:rPr>
-              <a:t>É uma gaveta</a:t>
-            </a:r>
-            <a:endParaRPr lang="en-US" sz="1500" dirty="0"/>
-          </a:p>
-        </p:txBody>
-      </p:sp>
-      <p:sp>
-        <p:nvSpPr>
-          <p:cNvPr id="8" name="Text 6"/>
-          <p:cNvSpPr/>
-          <p:nvPr/>
-        </p:nvSpPr>
-        <p:spPr>
-          <a:xfrm>
-            <a:off x="667512" y="3218688"/>
-            <a:ext cx="3511296" cy="640080"/>
-          </a:xfrm>
-          <a:prstGeom prst="rect">
-            <a:avLst/>
-          </a:prstGeom>
-          <a:noFill/>
-          <a:ln/>
-        </p:spPr>
-        <p:txBody>
-          <a:bodyPr wrap="square" lIns="0" tIns="0" rIns="0" bIns="0" rtlCol="0" anchor="ctr"/>
-          <a:lstStyle/>
-          <a:p>
-            <a:pPr indent="0" marL="0">
-              <a:lnSpc>
-                <a:spcPts val="1500"/>
-              </a:lnSpc>
-              <a:buNone/>
-            </a:pPr>
-            <a:r>
-              <a:rPr lang="en-US" sz="1150" dirty="0">
-                <a:solidFill>
-                  <a:srgbClr val="9BAAC0"/>
-                </a:solidFill>
-                <a:latin typeface="Arial" pitchFamily="34" charset="0"/>
-                <a:ea typeface="Arial" pitchFamily="34" charset="-122"/>
-                <a:cs typeface="Arial" pitchFamily="34" charset="-120"/>
-              </a:rPr>
-              <a:t>Não guarda linha nenhuma. Ele organiza, separa e é onde a permissão é dada.</a:t>
-            </a:r>
-            <a:endParaRPr lang="en-US" sz="1150" dirty="0"/>
-          </a:p>
-        </p:txBody>
-      </p:sp>
-      <p:sp>
-        <p:nvSpPr>
-          <p:cNvPr id="9" name="Text 7"/>
-          <p:cNvSpPr/>
-          <p:nvPr/>
-        </p:nvSpPr>
-        <p:spPr>
-          <a:xfrm>
-            <a:off x="667512" y="3877056"/>
-            <a:ext cx="3511296" cy="457200"/>
-          </a:xfrm>
-          <a:prstGeom prst="rect">
-            <a:avLst/>
-          </a:prstGeom>
-          <a:noFill/>
-          <a:ln/>
-        </p:spPr>
-        <p:txBody>
-          <a:bodyPr wrap="square" lIns="0" tIns="0" rIns="0" bIns="0" rtlCol="0" anchor="ctr"/>
-          <a:lstStyle/>
-          <a:p>
-            <a:pPr indent="0" marL="0">
-              <a:lnSpc>
-                <a:spcPts val="1400"/>
-              </a:lnSpc>
-              <a:buNone/>
-            </a:pPr>
-            <a:r>
-              <a:rPr lang="en-US" sz="1100" dirty="0">
-                <a:solidFill>
-                  <a:srgbClr val="7CC8FF"/>
-                </a:solidFill>
-                <a:latin typeface="Arial" pitchFamily="34" charset="0"/>
-                <a:ea typeface="Arial" pitchFamily="34" charset="-122"/>
-                <a:cs typeface="Arial" pitchFamily="34" charset="-120"/>
-              </a:rPr>
-              <a:t>Você cria dois ou três, no começo do projeto, e quase nunca mexe de novo.</a:t>
-            </a:r>
-            <a:endParaRPr lang="en-US" sz="1100" dirty="0"/>
-          </a:p>
-        </p:txBody>
-      </p:sp>
-      <p:sp>
-        <p:nvSpPr>
-          <p:cNvPr id="10" name="Shape 8"/>
-          <p:cNvSpPr/>
-          <p:nvPr/>
-        </p:nvSpPr>
-        <p:spPr>
-          <a:xfrm>
-            <a:off x="4709160" y="2377440"/>
-            <a:ext cx="4023360" cy="2057400"/>
-          </a:xfrm>
-          <a:prstGeom prst="roundRect">
-            <a:avLst>
-              <a:gd name="adj" fmla="val 2667"/>
+              <a:gd name="adj" fmla="val 2632"/>
             </a:avLst>
           </a:prstGeom>
           <a:solidFill>
             <a:srgbClr val="0D1522"/>
           </a:solidFill>
-          <a:ln w="13970">
+          <a:ln w="12700">
             <a:solidFill>
               <a:srgbClr val="1F3A5A"/>
             </a:solidFill>
@@ -23914,69 +23442,72 @@
       </p:sp>
       <p:sp>
         <p:nvSpPr>
-          <p:cNvPr id="11" name="Text 9"/>
-          <p:cNvSpPr/>
-          <p:nvPr/>
-        </p:nvSpPr>
-        <p:spPr>
-          <a:xfrm>
-            <a:off x="4965192" y="2560320"/>
-            <a:ext cx="3511296" cy="292608"/>
-          </a:xfrm>
-          <a:prstGeom prst="rect">
-            <a:avLst/>
-          </a:prstGeom>
-          <a:noFill/>
-          <a:ln/>
-        </p:spPr>
-        <p:txBody>
-          <a:bodyPr wrap="square" lIns="0" tIns="0" rIns="0" bIns="0" rtlCol="0" anchor="ctr"/>
-          <a:lstStyle/>
-          <a:p>
-            <a:pPr indent="0" marL="0">
-              <a:buNone/>
-            </a:pPr>
-            <a:r>
-              <a:rPr lang="en-US" sz="1200" b="1" dirty="0">
+          <p:cNvPr id="5" name="Text 3"/>
+          <p:cNvSpPr/>
+          <p:nvPr/>
+        </p:nvSpPr>
+        <p:spPr>
+          <a:xfrm>
+            <a:off x="612648" y="2359152"/>
+            <a:ext cx="1554480" cy="274320"/>
+          </a:xfrm>
+          <a:prstGeom prst="rect">
+            <a:avLst/>
+          </a:prstGeom>
+          <a:noFill/>
+          <a:ln/>
+        </p:spPr>
+        <p:txBody>
+          <a:bodyPr wrap="square" lIns="0" tIns="0" rIns="0" bIns="0" rtlCol="0" anchor="ctr"/>
+          <a:lstStyle/>
+          <a:p>
+            <a:pPr indent="0" marL="0">
+              <a:buNone/>
+            </a:pPr>
+            <a:r>
+              <a:rPr lang="en-US" sz="1100" b="1" dirty="0">
                 <a:solidFill>
                   <a:srgbClr val="3B9DF5"/>
                 </a:solidFill>
-                <a:latin typeface="Consolas" pitchFamily="34" charset="0"/>
-                <a:ea typeface="Consolas" pitchFamily="34" charset="-122"/>
-                <a:cs typeface="Consolas" pitchFamily="34" charset="-120"/>
-              </a:rPr>
-              <a:t>TABELA</a:t>
-            </a:r>
-            <a:endParaRPr lang="en-US" sz="1200" dirty="0"/>
-          </a:p>
-        </p:txBody>
-      </p:sp>
-      <p:sp>
-        <p:nvSpPr>
-          <p:cNvPr id="12" name="Text 10"/>
-          <p:cNvSpPr/>
-          <p:nvPr/>
-        </p:nvSpPr>
-        <p:spPr>
-          <a:xfrm>
-            <a:off x="4965192" y="2871216"/>
-            <a:ext cx="3511296" cy="310896"/>
-          </a:xfrm>
-          <a:prstGeom prst="rect">
-            <a:avLst/>
-          </a:prstGeom>
-          <a:noFill/>
-          <a:ln/>
-        </p:spPr>
-        <p:txBody>
-          <a:bodyPr wrap="square" lIns="0" tIns="0" rIns="0" bIns="0" rtlCol="0" anchor="ctr"/>
-          <a:lstStyle/>
-          <a:p>
-            <a:pPr indent="0" marL="0">
-              <a:buNone/>
-            </a:pPr>
-            <a:r>
-              <a:rPr lang="en-US" sz="1500" b="1" dirty="0">
+                <a:latin typeface="Arial" pitchFamily="34" charset="0"/>
+                <a:ea typeface="Arial" pitchFamily="34" charset="-122"/>
+                <a:cs typeface="Arial" pitchFamily="34" charset="-120"/>
+              </a:rPr>
+              <a:t>01</a:t>
+            </a:r>
+            <a:endParaRPr lang="en-US" sz="1100" dirty="0"/>
+          </a:p>
+        </p:txBody>
+      </p:sp>
+      <p:sp>
+        <p:nvSpPr>
+          <p:cNvPr id="6" name="Text 4"/>
+          <p:cNvSpPr/>
+          <p:nvPr/>
+        </p:nvSpPr>
+        <p:spPr>
+          <a:xfrm>
+            <a:off x="612648" y="2633472"/>
+            <a:ext cx="1554480" cy="512064"/>
+          </a:xfrm>
+          <a:prstGeom prst="rect">
+            <a:avLst/>
+          </a:prstGeom>
+          <a:noFill/>
+          <a:ln/>
+        </p:spPr>
+        <p:txBody>
+          <a:bodyPr wrap="square" lIns="0" tIns="0" rIns="0" bIns="0" rtlCol="0" anchor="t"/>
+          <a:lstStyle/>
+          <a:p>
+            <a:pPr indent="0" marL="0">
+              <a:lnSpc>
+                <a:spcPts val="1800"/>
+              </a:lnSpc>
+              <a:buNone/>
+            </a:pPr>
+            <a:r>
+              <a:rPr lang="en-US" sz="1450" b="1" dirty="0">
                 <a:solidFill>
                   <a:srgbClr val="FFFFFF"/>
                 </a:solidFill>
@@ -23984,64 +23515,22 @@
                 <a:ea typeface="Arial" pitchFamily="34" charset="-122"/>
                 <a:cs typeface="Arial" pitchFamily="34" charset="-120"/>
               </a:rPr>
-              <a:t>É o dado</a:t>
-            </a:r>
-            <a:endParaRPr lang="en-US" sz="1500" dirty="0"/>
-          </a:p>
-        </p:txBody>
-      </p:sp>
-      <p:sp>
-        <p:nvSpPr>
-          <p:cNvPr id="13" name="Text 11"/>
-          <p:cNvSpPr/>
-          <p:nvPr/>
-        </p:nvSpPr>
-        <p:spPr>
-          <a:xfrm>
-            <a:off x="4965192" y="3218688"/>
-            <a:ext cx="3511296" cy="640080"/>
-          </a:xfrm>
-          <a:prstGeom prst="rect">
-            <a:avLst/>
-          </a:prstGeom>
-          <a:noFill/>
-          <a:ln/>
-        </p:spPr>
-        <p:txBody>
-          <a:bodyPr wrap="square" lIns="0" tIns="0" rIns="0" bIns="0" rtlCol="0" anchor="ctr"/>
-          <a:lstStyle/>
-          <a:p>
-            <a:pPr indent="0" marL="0">
-              <a:lnSpc>
-                <a:spcPts val="1500"/>
-              </a:lnSpc>
-              <a:buNone/>
-            </a:pPr>
-            <a:r>
-              <a:rPr lang="en-US" sz="1150" dirty="0">
-                <a:solidFill>
-                  <a:srgbClr val="9BAAC0"/>
-                </a:solidFill>
-                <a:latin typeface="Arial" pitchFamily="34" charset="0"/>
-                <a:ea typeface="Arial" pitchFamily="34" charset="-122"/>
-                <a:cs typeface="Arial" pitchFamily="34" charset="-120"/>
-              </a:rPr>
-              <a:t>Tem colunas, tipos e linhas. É o que a query lê e o que ocupa espaço em disco.</a:t>
-            </a:r>
-            <a:endParaRPr lang="en-US" sz="1150" dirty="0"/>
-          </a:p>
-        </p:txBody>
-      </p:sp>
-      <p:sp>
-        <p:nvSpPr>
-          <p:cNvPr id="14" name="Text 12"/>
-          <p:cNvSpPr/>
-          <p:nvPr/>
-        </p:nvSpPr>
-        <p:spPr>
-          <a:xfrm>
-            <a:off x="4965192" y="3877056"/>
-            <a:ext cx="3511296" cy="457200"/>
+              <a:t>lakehouse_rotaperfume</a:t>
+            </a:r>
+            <a:endParaRPr lang="en-US" sz="1450" dirty="0"/>
+          </a:p>
+        </p:txBody>
+      </p:sp>
+      <p:sp>
+        <p:nvSpPr>
+          <p:cNvPr id="7" name="Text 5"/>
+          <p:cNvSpPr/>
+          <p:nvPr/>
+        </p:nvSpPr>
+        <p:spPr>
+          <a:xfrm>
+            <a:off x="612648" y="3163824"/>
+            <a:ext cx="1554480" cy="621792"/>
           </a:xfrm>
           <a:prstGeom prst="rect">
             <a:avLst/>
@@ -24060,15 +23549,85 @@
               <a:buNone/>
             </a:pPr>
             <a:r>
-              <a:rPr lang="en-US" sz="1100" dirty="0">
-                <a:solidFill>
-                  <a:srgbClr val="7CC8FF"/>
-                </a:solidFill>
-                <a:latin typeface="Arial" pitchFamily="34" charset="0"/>
-                <a:ea typeface="Arial" pitchFamily="34" charset="-122"/>
-                <a:cs typeface="Arial" pitchFamily="34" charset="-120"/>
-              </a:rPr>
-              <a:t>Você cria dezenas, e elas mudam toda semana conforme o projeto anda.</a:t>
+              <a:rPr lang="en-US" sz="1050" dirty="0">
+                <a:solidFill>
+                  <a:srgbClr val="9BAAC0"/>
+                </a:solidFill>
+                <a:latin typeface="Arial" pitchFamily="34" charset="0"/>
+                <a:ea typeface="Arial" pitchFamily="34" charset="-122"/>
+                <a:cs typeface="Arial" pitchFamily="34" charset="-120"/>
+              </a:rPr>
+              <a:t>O catálogo que você acabou de criar</a:t>
+            </a:r>
+            <a:endParaRPr lang="en-US" sz="1050" dirty="0"/>
+          </a:p>
+        </p:txBody>
+      </p:sp>
+      <p:sp>
+        <p:nvSpPr>
+          <p:cNvPr id="8" name="Shape 6"/>
+          <p:cNvSpPr/>
+          <p:nvPr/>
+        </p:nvSpPr>
+        <p:spPr>
+          <a:xfrm>
+            <a:off x="2532888" y="2194560"/>
+            <a:ext cx="1956816" cy="1737360"/>
+          </a:xfrm>
+          <a:prstGeom prst="roundRect">
+            <a:avLst>
+              <a:gd name="adj" fmla="val 2632"/>
+            </a:avLst>
+          </a:prstGeom>
+          <a:solidFill>
+            <a:srgbClr val="0D1522"/>
+          </a:solidFill>
+          <a:ln w="12700">
+            <a:solidFill>
+              <a:srgbClr val="1F3A5A"/>
+            </a:solidFill>
+            <a:prstDash val="solid"/>
+          </a:ln>
+        </p:spPr>
+        <p:txBody>
+          <a:bodyPr/>
+          <a:p/>
+        </p:txBody>
+      </p:sp>
+      <p:sp>
+        <p:nvSpPr>
+          <p:cNvPr id="9" name="Text 7"/>
+          <p:cNvSpPr/>
+          <p:nvPr/>
+        </p:nvSpPr>
+        <p:spPr>
+          <a:xfrm>
+            <a:off x="2734056" y="2359152"/>
+            <a:ext cx="1554480" cy="274320"/>
+          </a:xfrm>
+          <a:prstGeom prst="rect">
+            <a:avLst/>
+          </a:prstGeom>
+          <a:noFill/>
+          <a:ln/>
+        </p:spPr>
+        <p:txBody>
+          <a:bodyPr wrap="square" lIns="0" tIns="0" rIns="0" bIns="0" rtlCol="0" anchor="ctr"/>
+          <a:lstStyle/>
+          <a:p>
+            <a:pPr indent="0" marL="0">
+              <a:buNone/>
+            </a:pPr>
+            <a:r>
+              <a:rPr lang="en-US" sz="1100" b="1" dirty="0">
+                <a:solidFill>
+                  <a:srgbClr val="3B9DF5"/>
+                </a:solidFill>
+                <a:latin typeface="Arial" pitchFamily="34" charset="0"/>
+                <a:ea typeface="Arial" pitchFamily="34" charset="-122"/>
+                <a:cs typeface="Arial" pitchFamily="34" charset="-120"/>
+              </a:rPr>
+              <a:t>02</a:t>
             </a:r>
             <a:endParaRPr lang="en-US" sz="1100" dirty="0"/>
           </a:p>
@@ -24076,7 +23635,399 @@
       </p:sp>
       <p:sp>
         <p:nvSpPr>
+          <p:cNvPr id="10" name="Text 8"/>
+          <p:cNvSpPr/>
+          <p:nvPr/>
+        </p:nvSpPr>
+        <p:spPr>
+          <a:xfrm>
+            <a:off x="2734056" y="2633472"/>
+            <a:ext cx="1554480" cy="512064"/>
+          </a:xfrm>
+          <a:prstGeom prst="rect">
+            <a:avLst/>
+          </a:prstGeom>
+          <a:noFill/>
+          <a:ln/>
+        </p:spPr>
+        <p:txBody>
+          <a:bodyPr wrap="square" lIns="0" tIns="0" rIns="0" bIns="0" rtlCol="0" anchor="t"/>
+          <a:lstStyle/>
+          <a:p>
+            <a:pPr indent="0" marL="0">
+              <a:lnSpc>
+                <a:spcPts val="1800"/>
+              </a:lnSpc>
+              <a:buNone/>
+            </a:pPr>
+            <a:r>
+              <a:rPr lang="en-US" sz="1450" b="1" dirty="0">
+                <a:solidFill>
+                  <a:srgbClr val="FFFFFF"/>
+                </a:solidFill>
+                <a:latin typeface="Arial" pitchFamily="34" charset="0"/>
+                <a:ea typeface="Arial" pitchFamily="34" charset="-122"/>
+                <a:cs typeface="Arial" pitchFamily="34" charset="-120"/>
+              </a:rPr>
+              <a:t>bronze</a:t>
+            </a:r>
+            <a:endParaRPr lang="en-US" sz="1450" dirty="0"/>
+          </a:p>
+        </p:txBody>
+      </p:sp>
+      <p:sp>
+        <p:nvSpPr>
+          <p:cNvPr id="11" name="Text 9"/>
+          <p:cNvSpPr/>
+          <p:nvPr/>
+        </p:nvSpPr>
+        <p:spPr>
+          <a:xfrm>
+            <a:off x="2734056" y="3163824"/>
+            <a:ext cx="1554480" cy="621792"/>
+          </a:xfrm>
+          <a:prstGeom prst="rect">
+            <a:avLst/>
+          </a:prstGeom>
+          <a:noFill/>
+          <a:ln/>
+        </p:spPr>
+        <p:txBody>
+          <a:bodyPr wrap="square" lIns="0" tIns="0" rIns="0" bIns="0" rtlCol="0" anchor="ctr"/>
+          <a:lstStyle/>
+          <a:p>
+            <a:pPr indent="0" marL="0">
+              <a:lnSpc>
+                <a:spcPts val="1400"/>
+              </a:lnSpc>
+              <a:buNone/>
+            </a:pPr>
+            <a:r>
+              <a:rPr lang="en-US" sz="1050" dirty="0">
+                <a:solidFill>
+                  <a:srgbClr val="9BAAC0"/>
+                </a:solidFill>
+                <a:latin typeface="Arial" pitchFamily="34" charset="0"/>
+                <a:ea typeface="Arial" pitchFamily="34" charset="-122"/>
+                <a:cs typeface="Arial" pitchFamily="34" charset="-120"/>
+              </a:rPr>
+              <a:t>Create schema. Aqui o dado entra cru, como veio da origem</a:t>
+            </a:r>
+            <a:endParaRPr lang="en-US" sz="1050" dirty="0"/>
+          </a:p>
+        </p:txBody>
+      </p:sp>
+      <p:sp>
+        <p:nvSpPr>
+          <p:cNvPr id="12" name="Shape 10"/>
+          <p:cNvSpPr/>
+          <p:nvPr/>
+        </p:nvSpPr>
+        <p:spPr>
+          <a:xfrm>
+            <a:off x="4654296" y="2194560"/>
+            <a:ext cx="1956816" cy="1737360"/>
+          </a:xfrm>
+          <a:prstGeom prst="roundRect">
+            <a:avLst>
+              <a:gd name="adj" fmla="val 2632"/>
+            </a:avLst>
+          </a:prstGeom>
+          <a:solidFill>
+            <a:srgbClr val="0D1522"/>
+          </a:solidFill>
+          <a:ln w="12700">
+            <a:solidFill>
+              <a:srgbClr val="1F3A5A"/>
+            </a:solidFill>
+            <a:prstDash val="solid"/>
+          </a:ln>
+        </p:spPr>
+        <p:txBody>
+          <a:bodyPr/>
+          <a:p/>
+        </p:txBody>
+      </p:sp>
+      <p:sp>
+        <p:nvSpPr>
+          <p:cNvPr id="13" name="Text 11"/>
+          <p:cNvSpPr/>
+          <p:nvPr/>
+        </p:nvSpPr>
+        <p:spPr>
+          <a:xfrm>
+            <a:off x="4855464" y="2359152"/>
+            <a:ext cx="1554480" cy="274320"/>
+          </a:xfrm>
+          <a:prstGeom prst="rect">
+            <a:avLst/>
+          </a:prstGeom>
+          <a:noFill/>
+          <a:ln/>
+        </p:spPr>
+        <p:txBody>
+          <a:bodyPr wrap="square" lIns="0" tIns="0" rIns="0" bIns="0" rtlCol="0" anchor="ctr"/>
+          <a:lstStyle/>
+          <a:p>
+            <a:pPr indent="0" marL="0">
+              <a:buNone/>
+            </a:pPr>
+            <a:r>
+              <a:rPr lang="en-US" sz="1100" b="1" dirty="0">
+                <a:solidFill>
+                  <a:srgbClr val="3B9DF5"/>
+                </a:solidFill>
+                <a:latin typeface="Arial" pitchFamily="34" charset="0"/>
+                <a:ea typeface="Arial" pitchFamily="34" charset="-122"/>
+                <a:cs typeface="Arial" pitchFamily="34" charset="-120"/>
+              </a:rPr>
+              <a:t>03</a:t>
+            </a:r>
+            <a:endParaRPr lang="en-US" sz="1100" dirty="0"/>
+          </a:p>
+        </p:txBody>
+      </p:sp>
+      <p:sp>
+        <p:nvSpPr>
+          <p:cNvPr id="14" name="Text 12"/>
+          <p:cNvSpPr/>
+          <p:nvPr/>
+        </p:nvSpPr>
+        <p:spPr>
+          <a:xfrm>
+            <a:off x="4855464" y="2633472"/>
+            <a:ext cx="1554480" cy="512064"/>
+          </a:xfrm>
+          <a:prstGeom prst="rect">
+            <a:avLst/>
+          </a:prstGeom>
+          <a:noFill/>
+          <a:ln/>
+        </p:spPr>
+        <p:txBody>
+          <a:bodyPr wrap="square" lIns="0" tIns="0" rIns="0" bIns="0" rtlCol="0" anchor="t"/>
+          <a:lstStyle/>
+          <a:p>
+            <a:pPr indent="0" marL="0">
+              <a:lnSpc>
+                <a:spcPts val="1800"/>
+              </a:lnSpc>
+              <a:buNone/>
+            </a:pPr>
+            <a:r>
+              <a:rPr lang="en-US" sz="1450" b="1" dirty="0">
+                <a:solidFill>
+                  <a:srgbClr val="FFFFFF"/>
+                </a:solidFill>
+                <a:latin typeface="Arial" pitchFamily="34" charset="0"/>
+                <a:ea typeface="Arial" pitchFamily="34" charset="-122"/>
+                <a:cs typeface="Arial" pitchFamily="34" charset="-120"/>
+              </a:rPr>
+              <a:t>silver</a:t>
+            </a:r>
+            <a:endParaRPr lang="en-US" sz="1450" dirty="0"/>
+          </a:p>
+        </p:txBody>
+      </p:sp>
+      <p:sp>
+        <p:nvSpPr>
           <p:cNvPr id="15" name="Text 13"/>
+          <p:cNvSpPr/>
+          <p:nvPr/>
+        </p:nvSpPr>
+        <p:spPr>
+          <a:xfrm>
+            <a:off x="4855464" y="3163824"/>
+            <a:ext cx="1554480" cy="621792"/>
+          </a:xfrm>
+          <a:prstGeom prst="rect">
+            <a:avLst/>
+          </a:prstGeom>
+          <a:noFill/>
+          <a:ln/>
+        </p:spPr>
+        <p:txBody>
+          <a:bodyPr wrap="square" lIns="0" tIns="0" rIns="0" bIns="0" rtlCol="0" anchor="ctr"/>
+          <a:lstStyle/>
+          <a:p>
+            <a:pPr indent="0" marL="0">
+              <a:lnSpc>
+                <a:spcPts val="1400"/>
+              </a:lnSpc>
+              <a:buNone/>
+            </a:pPr>
+            <a:r>
+              <a:rPr lang="en-US" sz="1050" dirty="0">
+                <a:solidFill>
+                  <a:srgbClr val="9BAAC0"/>
+                </a:solidFill>
+                <a:latin typeface="Arial" pitchFamily="34" charset="0"/>
+                <a:ea typeface="Arial" pitchFamily="34" charset="-122"/>
+                <a:cs typeface="Arial" pitchFamily="34" charset="-120"/>
+              </a:rPr>
+              <a:t>Create schema. Aqui ele entra limpo — é a noite 2</a:t>
+            </a:r>
+            <a:endParaRPr lang="en-US" sz="1050" dirty="0"/>
+          </a:p>
+        </p:txBody>
+      </p:sp>
+      <p:sp>
+        <p:nvSpPr>
+          <p:cNvPr id="16" name="Shape 14"/>
+          <p:cNvSpPr/>
+          <p:nvPr/>
+        </p:nvSpPr>
+        <p:spPr>
+          <a:xfrm>
+            <a:off x="6775704" y="2194560"/>
+            <a:ext cx="1956816" cy="1737360"/>
+          </a:xfrm>
+          <a:prstGeom prst="roundRect">
+            <a:avLst>
+              <a:gd name="adj" fmla="val 2632"/>
+            </a:avLst>
+          </a:prstGeom>
+          <a:solidFill>
+            <a:srgbClr val="0D1522"/>
+          </a:solidFill>
+          <a:ln w="12700">
+            <a:solidFill>
+              <a:srgbClr val="1F3A5A"/>
+            </a:solidFill>
+            <a:prstDash val="solid"/>
+          </a:ln>
+        </p:spPr>
+        <p:txBody>
+          <a:bodyPr/>
+          <a:p/>
+        </p:txBody>
+      </p:sp>
+      <p:sp>
+        <p:nvSpPr>
+          <p:cNvPr id="17" name="Text 15"/>
+          <p:cNvSpPr/>
+          <p:nvPr/>
+        </p:nvSpPr>
+        <p:spPr>
+          <a:xfrm>
+            <a:off x="6976872" y="2359152"/>
+            <a:ext cx="1554480" cy="274320"/>
+          </a:xfrm>
+          <a:prstGeom prst="rect">
+            <a:avLst/>
+          </a:prstGeom>
+          <a:noFill/>
+          <a:ln/>
+        </p:spPr>
+        <p:txBody>
+          <a:bodyPr wrap="square" lIns="0" tIns="0" rIns="0" bIns="0" rtlCol="0" anchor="ctr"/>
+          <a:lstStyle/>
+          <a:p>
+            <a:pPr indent="0" marL="0">
+              <a:buNone/>
+            </a:pPr>
+            <a:r>
+              <a:rPr lang="en-US" sz="1100" b="1" dirty="0">
+                <a:solidFill>
+                  <a:srgbClr val="3B9DF5"/>
+                </a:solidFill>
+                <a:latin typeface="Arial" pitchFamily="34" charset="0"/>
+                <a:ea typeface="Arial" pitchFamily="34" charset="-122"/>
+                <a:cs typeface="Arial" pitchFamily="34" charset="-120"/>
+              </a:rPr>
+              <a:t>→</a:t>
+            </a:r>
+            <a:endParaRPr lang="en-US" sz="1100" dirty="0"/>
+          </a:p>
+        </p:txBody>
+      </p:sp>
+      <p:sp>
+        <p:nvSpPr>
+          <p:cNvPr id="18" name="Text 16"/>
+          <p:cNvSpPr/>
+          <p:nvPr/>
+        </p:nvSpPr>
+        <p:spPr>
+          <a:xfrm>
+            <a:off x="6976872" y="2633472"/>
+            <a:ext cx="1554480" cy="512064"/>
+          </a:xfrm>
+          <a:prstGeom prst="rect">
+            <a:avLst/>
+          </a:prstGeom>
+          <a:noFill/>
+          <a:ln/>
+        </p:spPr>
+        <p:txBody>
+          <a:bodyPr wrap="square" lIns="0" tIns="0" rIns="0" bIns="0" rtlCol="0" anchor="t"/>
+          <a:lstStyle/>
+          <a:p>
+            <a:pPr indent="0" marL="0">
+              <a:lnSpc>
+                <a:spcPts val="1800"/>
+              </a:lnSpc>
+              <a:buNone/>
+            </a:pPr>
+            <a:r>
+              <a:rPr lang="en-US" sz="1450" b="1" dirty="0">
+                <a:solidFill>
+                  <a:srgbClr val="FFFFFF"/>
+                </a:solidFill>
+                <a:latin typeface="Arial" pitchFamily="34" charset="0"/>
+                <a:ea typeface="Arial" pitchFamily="34" charset="-122"/>
+                <a:cs typeface="Arial" pitchFamily="34" charset="-120"/>
+              </a:rPr>
+              <a:t>e a gold?</a:t>
+            </a:r>
+            <a:endParaRPr lang="en-US" sz="1450" dirty="0"/>
+          </a:p>
+        </p:txBody>
+      </p:sp>
+      <p:sp>
+        <p:nvSpPr>
+          <p:cNvPr id="19" name="Text 17"/>
+          <p:cNvSpPr/>
+          <p:nvPr/>
+        </p:nvSpPr>
+        <p:spPr>
+          <a:xfrm>
+            <a:off x="6976872" y="3163824"/>
+            <a:ext cx="1554480" cy="621792"/>
+          </a:xfrm>
+          <a:prstGeom prst="rect">
+            <a:avLst/>
+          </a:prstGeom>
+          <a:noFill/>
+          <a:ln/>
+        </p:spPr>
+        <p:txBody>
+          <a:bodyPr wrap="square" lIns="0" tIns="0" rIns="0" bIns="0" rtlCol="0" anchor="ctr"/>
+          <a:lstStyle/>
+          <a:p>
+            <a:pPr indent="0" marL="0">
+              <a:lnSpc>
+                <a:spcPts val="1400"/>
+              </a:lnSpc>
+              <a:buNone/>
+            </a:pPr>
+            <a:r>
+              <a:rPr lang="en-US" sz="1050" dirty="0">
+                <a:solidFill>
+                  <a:srgbClr val="9BAAC0"/>
+                </a:solidFill>
+                <a:latin typeface="Arial" pitchFamily="34" charset="0"/>
+                <a:ea typeface="Arial" pitchFamily="34" charset="-122"/>
+                <a:cs typeface="Arial" pitchFamily="34" charset="-120"/>
+              </a:rPr>
+              <a:t>Vem depois, quando existir fato e dimensão para guardar</a:t>
+            </a:r>
+            <a:endParaRPr lang="en-US" sz="1050" dirty="0"/>
+          </a:p>
+        </p:txBody>
+      </p:sp>
+      <p:sp>
+        <p:nvSpPr>
+          <p:cNvPr id="20" name="Text 18"/>
           <p:cNvSpPr/>
           <p:nvPr/>
         </p:nvSpPr>
@@ -24164,6 +24115,572 @@
                 <a:ea typeface="Arial" pitchFamily="34" charset="-122"/>
                 <a:cs typeface="Arial" pitchFamily="34" charset="-120"/>
               </a:rPr>
+              <a:t>A DÚVIDA DE TODO MUNDO</a:t>
+            </a:r>
+            <a:endParaRPr lang="en-US" sz="1100" dirty="0"/>
+          </a:p>
+        </p:txBody>
+      </p:sp>
+      <p:sp>
+        <p:nvSpPr>
+          <p:cNvPr id="3" name="Text 1"/>
+          <p:cNvSpPr/>
+          <p:nvPr/>
+        </p:nvSpPr>
+        <p:spPr>
+          <a:xfrm>
+            <a:off x="411480" y="822960"/>
+            <a:ext cx="8321040" cy="1005840"/>
+          </a:xfrm>
+          <a:prstGeom prst="rect">
+            <a:avLst/>
+          </a:prstGeom>
+          <a:noFill/>
+          <a:ln/>
+        </p:spPr>
+        <p:txBody>
+          <a:bodyPr wrap="square" lIns="0" tIns="0" rIns="0" bIns="0" rtlCol="0" anchor="ctr"/>
+          <a:lstStyle/>
+          <a:p>
+            <a:pPr indent="0" marL="0">
+              <a:lnSpc>
+                <a:spcPts val="4000"/>
+              </a:lnSpc>
+              <a:buNone/>
+            </a:pPr>
+            <a:r>
+              <a:rPr lang="en-US" sz="3200" b="1" dirty="0">
+                <a:solidFill>
+                  <a:srgbClr val="FFFFFF"/>
+                </a:solidFill>
+                <a:latin typeface="Arial" pitchFamily="34" charset="0"/>
+                <a:ea typeface="Arial" pitchFamily="34" charset="-122"/>
+                <a:cs typeface="Arial" pitchFamily="34" charset="-120"/>
+              </a:rPr>
+              <a:t>Schema não é tabela</a:t>
+            </a:r>
+            <a:endParaRPr lang="en-US" sz="3200" dirty="0"/>
+          </a:p>
+        </p:txBody>
+      </p:sp>
+      <p:sp>
+        <p:nvSpPr>
+          <p:cNvPr id="4" name="Text 2"/>
+          <p:cNvSpPr/>
+          <p:nvPr/>
+        </p:nvSpPr>
+        <p:spPr>
+          <a:xfrm>
+            <a:off x="411480" y="1828800"/>
+            <a:ext cx="7863840" cy="365760"/>
+          </a:xfrm>
+          <a:prstGeom prst="rect">
+            <a:avLst/>
+          </a:prstGeom>
+          <a:noFill/>
+          <a:ln/>
+        </p:spPr>
+        <p:txBody>
+          <a:bodyPr wrap="square" lIns="0" tIns="0" rIns="0" bIns="0" rtlCol="0" anchor="ctr"/>
+          <a:lstStyle/>
+          <a:p>
+            <a:pPr indent="0" marL="0">
+              <a:lnSpc>
+                <a:spcPts val="2200"/>
+              </a:lnSpc>
+              <a:buNone/>
+            </a:pPr>
+            <a:r>
+              <a:rPr lang="en-US" sz="1400" dirty="0">
+                <a:solidFill>
+                  <a:srgbClr val="9BAAC0"/>
+                </a:solidFill>
+                <a:latin typeface="Arial" pitchFamily="34" charset="0"/>
+                <a:ea typeface="Arial" pitchFamily="34" charset="-122"/>
+                <a:cs typeface="Arial" pitchFamily="34" charset="-120"/>
+              </a:rPr>
+              <a:t>Os dois aparecem embaixo do catálogo na tela. Mas fazem coisas diferentes.</a:t>
+            </a:r>
+            <a:endParaRPr lang="en-US" sz="1400" dirty="0"/>
+          </a:p>
+        </p:txBody>
+      </p:sp>
+      <p:sp>
+        <p:nvSpPr>
+          <p:cNvPr id="5" name="Shape 3"/>
+          <p:cNvSpPr/>
+          <p:nvPr/>
+        </p:nvSpPr>
+        <p:spPr>
+          <a:xfrm>
+            <a:off x="411480" y="2377440"/>
+            <a:ext cx="4023360" cy="2057400"/>
+          </a:xfrm>
+          <a:prstGeom prst="roundRect">
+            <a:avLst>
+              <a:gd name="adj" fmla="val 2667"/>
+            </a:avLst>
+          </a:prstGeom>
+          <a:solidFill>
+            <a:srgbClr val="142337"/>
+          </a:solidFill>
+          <a:ln w="20320">
+            <a:solidFill>
+              <a:srgbClr val="3B9DF5"/>
+            </a:solidFill>
+            <a:prstDash val="solid"/>
+          </a:ln>
+        </p:spPr>
+        <p:txBody>
+          <a:bodyPr/>
+          <a:p/>
+        </p:txBody>
+      </p:sp>
+      <p:sp>
+        <p:nvSpPr>
+          <p:cNvPr id="6" name="Text 4"/>
+          <p:cNvSpPr/>
+          <p:nvPr/>
+        </p:nvSpPr>
+        <p:spPr>
+          <a:xfrm>
+            <a:off x="667512" y="2560320"/>
+            <a:ext cx="3511296" cy="292608"/>
+          </a:xfrm>
+          <a:prstGeom prst="rect">
+            <a:avLst/>
+          </a:prstGeom>
+          <a:noFill/>
+          <a:ln/>
+        </p:spPr>
+        <p:txBody>
+          <a:bodyPr wrap="square" lIns="0" tIns="0" rIns="0" bIns="0" rtlCol="0" anchor="ctr"/>
+          <a:lstStyle/>
+          <a:p>
+            <a:pPr indent="0" marL="0">
+              <a:buNone/>
+            </a:pPr>
+            <a:r>
+              <a:rPr lang="en-US" sz="1200" b="1" dirty="0">
+                <a:solidFill>
+                  <a:srgbClr val="3B9DF5"/>
+                </a:solidFill>
+                <a:latin typeface="Consolas" pitchFamily="34" charset="0"/>
+                <a:ea typeface="Consolas" pitchFamily="34" charset="-122"/>
+                <a:cs typeface="Consolas" pitchFamily="34" charset="-120"/>
+              </a:rPr>
+              <a:t>SCHEMA</a:t>
+            </a:r>
+            <a:endParaRPr lang="en-US" sz="1200" dirty="0"/>
+          </a:p>
+        </p:txBody>
+      </p:sp>
+      <p:sp>
+        <p:nvSpPr>
+          <p:cNvPr id="7" name="Text 5"/>
+          <p:cNvSpPr/>
+          <p:nvPr/>
+        </p:nvSpPr>
+        <p:spPr>
+          <a:xfrm>
+            <a:off x="667512" y="2871216"/>
+            <a:ext cx="3511296" cy="310896"/>
+          </a:xfrm>
+          <a:prstGeom prst="rect">
+            <a:avLst/>
+          </a:prstGeom>
+          <a:noFill/>
+          <a:ln/>
+        </p:spPr>
+        <p:txBody>
+          <a:bodyPr wrap="square" lIns="0" tIns="0" rIns="0" bIns="0" rtlCol="0" anchor="ctr"/>
+          <a:lstStyle/>
+          <a:p>
+            <a:pPr indent="0" marL="0">
+              <a:buNone/>
+            </a:pPr>
+            <a:r>
+              <a:rPr lang="en-US" sz="1500" b="1" dirty="0">
+                <a:solidFill>
+                  <a:srgbClr val="FFFFFF"/>
+                </a:solidFill>
+                <a:latin typeface="Arial" pitchFamily="34" charset="0"/>
+                <a:ea typeface="Arial" pitchFamily="34" charset="-122"/>
+                <a:cs typeface="Arial" pitchFamily="34" charset="-120"/>
+              </a:rPr>
+              <a:t>É uma gaveta</a:t>
+            </a:r>
+            <a:endParaRPr lang="en-US" sz="1500" dirty="0"/>
+          </a:p>
+        </p:txBody>
+      </p:sp>
+      <p:sp>
+        <p:nvSpPr>
+          <p:cNvPr id="8" name="Text 6"/>
+          <p:cNvSpPr/>
+          <p:nvPr/>
+        </p:nvSpPr>
+        <p:spPr>
+          <a:xfrm>
+            <a:off x="667512" y="3218688"/>
+            <a:ext cx="3511296" cy="640080"/>
+          </a:xfrm>
+          <a:prstGeom prst="rect">
+            <a:avLst/>
+          </a:prstGeom>
+          <a:noFill/>
+          <a:ln/>
+        </p:spPr>
+        <p:txBody>
+          <a:bodyPr wrap="square" lIns="0" tIns="0" rIns="0" bIns="0" rtlCol="0" anchor="ctr"/>
+          <a:lstStyle/>
+          <a:p>
+            <a:pPr indent="0" marL="0">
+              <a:lnSpc>
+                <a:spcPts val="1500"/>
+              </a:lnSpc>
+              <a:buNone/>
+            </a:pPr>
+            <a:r>
+              <a:rPr lang="en-US" sz="1150" dirty="0">
+                <a:solidFill>
+                  <a:srgbClr val="9BAAC0"/>
+                </a:solidFill>
+                <a:latin typeface="Arial" pitchFamily="34" charset="0"/>
+                <a:ea typeface="Arial" pitchFamily="34" charset="-122"/>
+                <a:cs typeface="Arial" pitchFamily="34" charset="-120"/>
+              </a:rPr>
+              <a:t>Não guarda linha nenhuma. Ele organiza, separa e é onde a permissão é dada.</a:t>
+            </a:r>
+            <a:endParaRPr lang="en-US" sz="1150" dirty="0"/>
+          </a:p>
+        </p:txBody>
+      </p:sp>
+      <p:sp>
+        <p:nvSpPr>
+          <p:cNvPr id="9" name="Text 7"/>
+          <p:cNvSpPr/>
+          <p:nvPr/>
+        </p:nvSpPr>
+        <p:spPr>
+          <a:xfrm>
+            <a:off x="667512" y="3877056"/>
+            <a:ext cx="3511296" cy="457200"/>
+          </a:xfrm>
+          <a:prstGeom prst="rect">
+            <a:avLst/>
+          </a:prstGeom>
+          <a:noFill/>
+          <a:ln/>
+        </p:spPr>
+        <p:txBody>
+          <a:bodyPr wrap="square" lIns="0" tIns="0" rIns="0" bIns="0" rtlCol="0" anchor="ctr"/>
+          <a:lstStyle/>
+          <a:p>
+            <a:pPr indent="0" marL="0">
+              <a:lnSpc>
+                <a:spcPts val="1400"/>
+              </a:lnSpc>
+              <a:buNone/>
+            </a:pPr>
+            <a:r>
+              <a:rPr lang="en-US" sz="1100" dirty="0">
+                <a:solidFill>
+                  <a:srgbClr val="7CC8FF"/>
+                </a:solidFill>
+                <a:latin typeface="Arial" pitchFamily="34" charset="0"/>
+                <a:ea typeface="Arial" pitchFamily="34" charset="-122"/>
+                <a:cs typeface="Arial" pitchFamily="34" charset="-120"/>
+              </a:rPr>
+              <a:t>Você cria dois ou três, no começo do projeto, e quase nunca mexe de novo.</a:t>
+            </a:r>
+            <a:endParaRPr lang="en-US" sz="1100" dirty="0"/>
+          </a:p>
+        </p:txBody>
+      </p:sp>
+      <p:sp>
+        <p:nvSpPr>
+          <p:cNvPr id="10" name="Shape 8"/>
+          <p:cNvSpPr/>
+          <p:nvPr/>
+        </p:nvSpPr>
+        <p:spPr>
+          <a:xfrm>
+            <a:off x="4709160" y="2377440"/>
+            <a:ext cx="4023360" cy="2057400"/>
+          </a:xfrm>
+          <a:prstGeom prst="roundRect">
+            <a:avLst>
+              <a:gd name="adj" fmla="val 2667"/>
+            </a:avLst>
+          </a:prstGeom>
+          <a:solidFill>
+            <a:srgbClr val="0D1522"/>
+          </a:solidFill>
+          <a:ln w="13970">
+            <a:solidFill>
+              <a:srgbClr val="1F3A5A"/>
+            </a:solidFill>
+            <a:prstDash val="solid"/>
+          </a:ln>
+        </p:spPr>
+        <p:txBody>
+          <a:bodyPr/>
+          <a:p/>
+        </p:txBody>
+      </p:sp>
+      <p:sp>
+        <p:nvSpPr>
+          <p:cNvPr id="11" name="Text 9"/>
+          <p:cNvSpPr/>
+          <p:nvPr/>
+        </p:nvSpPr>
+        <p:spPr>
+          <a:xfrm>
+            <a:off x="4965192" y="2560320"/>
+            <a:ext cx="3511296" cy="292608"/>
+          </a:xfrm>
+          <a:prstGeom prst="rect">
+            <a:avLst/>
+          </a:prstGeom>
+          <a:noFill/>
+          <a:ln/>
+        </p:spPr>
+        <p:txBody>
+          <a:bodyPr wrap="square" lIns="0" tIns="0" rIns="0" bIns="0" rtlCol="0" anchor="ctr"/>
+          <a:lstStyle/>
+          <a:p>
+            <a:pPr indent="0" marL="0">
+              <a:buNone/>
+            </a:pPr>
+            <a:r>
+              <a:rPr lang="en-US" sz="1200" b="1" dirty="0">
+                <a:solidFill>
+                  <a:srgbClr val="3B9DF5"/>
+                </a:solidFill>
+                <a:latin typeface="Consolas" pitchFamily="34" charset="0"/>
+                <a:ea typeface="Consolas" pitchFamily="34" charset="-122"/>
+                <a:cs typeface="Consolas" pitchFamily="34" charset="-120"/>
+              </a:rPr>
+              <a:t>TABELA</a:t>
+            </a:r>
+            <a:endParaRPr lang="en-US" sz="1200" dirty="0"/>
+          </a:p>
+        </p:txBody>
+      </p:sp>
+      <p:sp>
+        <p:nvSpPr>
+          <p:cNvPr id="12" name="Text 10"/>
+          <p:cNvSpPr/>
+          <p:nvPr/>
+        </p:nvSpPr>
+        <p:spPr>
+          <a:xfrm>
+            <a:off x="4965192" y="2871216"/>
+            <a:ext cx="3511296" cy="310896"/>
+          </a:xfrm>
+          <a:prstGeom prst="rect">
+            <a:avLst/>
+          </a:prstGeom>
+          <a:noFill/>
+          <a:ln/>
+        </p:spPr>
+        <p:txBody>
+          <a:bodyPr wrap="square" lIns="0" tIns="0" rIns="0" bIns="0" rtlCol="0" anchor="ctr"/>
+          <a:lstStyle/>
+          <a:p>
+            <a:pPr indent="0" marL="0">
+              <a:buNone/>
+            </a:pPr>
+            <a:r>
+              <a:rPr lang="en-US" sz="1500" b="1" dirty="0">
+                <a:solidFill>
+                  <a:srgbClr val="FFFFFF"/>
+                </a:solidFill>
+                <a:latin typeface="Arial" pitchFamily="34" charset="0"/>
+                <a:ea typeface="Arial" pitchFamily="34" charset="-122"/>
+                <a:cs typeface="Arial" pitchFamily="34" charset="-120"/>
+              </a:rPr>
+              <a:t>É o dado</a:t>
+            </a:r>
+            <a:endParaRPr lang="en-US" sz="1500" dirty="0"/>
+          </a:p>
+        </p:txBody>
+      </p:sp>
+      <p:sp>
+        <p:nvSpPr>
+          <p:cNvPr id="13" name="Text 11"/>
+          <p:cNvSpPr/>
+          <p:nvPr/>
+        </p:nvSpPr>
+        <p:spPr>
+          <a:xfrm>
+            <a:off x="4965192" y="3218688"/>
+            <a:ext cx="3511296" cy="640080"/>
+          </a:xfrm>
+          <a:prstGeom prst="rect">
+            <a:avLst/>
+          </a:prstGeom>
+          <a:noFill/>
+          <a:ln/>
+        </p:spPr>
+        <p:txBody>
+          <a:bodyPr wrap="square" lIns="0" tIns="0" rIns="0" bIns="0" rtlCol="0" anchor="ctr"/>
+          <a:lstStyle/>
+          <a:p>
+            <a:pPr indent="0" marL="0">
+              <a:lnSpc>
+                <a:spcPts val="1500"/>
+              </a:lnSpc>
+              <a:buNone/>
+            </a:pPr>
+            <a:r>
+              <a:rPr lang="en-US" sz="1150" dirty="0">
+                <a:solidFill>
+                  <a:srgbClr val="9BAAC0"/>
+                </a:solidFill>
+                <a:latin typeface="Arial" pitchFamily="34" charset="0"/>
+                <a:ea typeface="Arial" pitchFamily="34" charset="-122"/>
+                <a:cs typeface="Arial" pitchFamily="34" charset="-120"/>
+              </a:rPr>
+              <a:t>Tem colunas, tipos e linhas. É o que a query lê e o que ocupa espaço em disco.</a:t>
+            </a:r>
+            <a:endParaRPr lang="en-US" sz="1150" dirty="0"/>
+          </a:p>
+        </p:txBody>
+      </p:sp>
+      <p:sp>
+        <p:nvSpPr>
+          <p:cNvPr id="14" name="Text 12"/>
+          <p:cNvSpPr/>
+          <p:nvPr/>
+        </p:nvSpPr>
+        <p:spPr>
+          <a:xfrm>
+            <a:off x="4965192" y="3877056"/>
+            <a:ext cx="3511296" cy="457200"/>
+          </a:xfrm>
+          <a:prstGeom prst="rect">
+            <a:avLst/>
+          </a:prstGeom>
+          <a:noFill/>
+          <a:ln/>
+        </p:spPr>
+        <p:txBody>
+          <a:bodyPr wrap="square" lIns="0" tIns="0" rIns="0" bIns="0" rtlCol="0" anchor="ctr"/>
+          <a:lstStyle/>
+          <a:p>
+            <a:pPr indent="0" marL="0">
+              <a:lnSpc>
+                <a:spcPts val="1400"/>
+              </a:lnSpc>
+              <a:buNone/>
+            </a:pPr>
+            <a:r>
+              <a:rPr lang="en-US" sz="1100" dirty="0">
+                <a:solidFill>
+                  <a:srgbClr val="7CC8FF"/>
+                </a:solidFill>
+                <a:latin typeface="Arial" pitchFamily="34" charset="0"/>
+                <a:ea typeface="Arial" pitchFamily="34" charset="-122"/>
+                <a:cs typeface="Arial" pitchFamily="34" charset="-120"/>
+              </a:rPr>
+              <a:t>Você cria dezenas, e elas mudam toda semana conforme o projeto anda.</a:t>
+            </a:r>
+            <a:endParaRPr lang="en-US" sz="1100" dirty="0"/>
+          </a:p>
+        </p:txBody>
+      </p:sp>
+      <p:sp>
+        <p:nvSpPr>
+          <p:cNvPr id="15" name="Text 13"/>
+          <p:cNvSpPr/>
+          <p:nvPr/>
+        </p:nvSpPr>
+        <p:spPr>
+          <a:xfrm>
+            <a:off x="411480" y="4681728"/>
+            <a:ext cx="2743200" cy="228600"/>
+          </a:xfrm>
+          <a:prstGeom prst="rect">
+            <a:avLst/>
+          </a:prstGeom>
+          <a:noFill/>
+          <a:ln/>
+        </p:spPr>
+        <p:txBody>
+          <a:bodyPr wrap="square" lIns="0" tIns="0" rIns="0" bIns="0" rtlCol="0" anchor="ctr"/>
+          <a:lstStyle/>
+          <a:p>
+            <a:pPr indent="0" marL="0">
+              <a:buNone/>
+            </a:pPr>
+            <a:r>
+              <a:rPr lang="en-US" sz="800" b="1" spc="200" kern="0" dirty="0">
+                <a:solidFill>
+                  <a:srgbClr val="566A85"/>
+                </a:solidFill>
+                <a:latin typeface="Arial" pitchFamily="34" charset="0"/>
+                <a:ea typeface="Arial" pitchFamily="34" charset="-122"/>
+                <a:cs typeface="Arial" pitchFamily="34" charset="-120"/>
+              </a:rPr>
+              <a:t>JORNADA DE DADOS</a:t>
+            </a:r>
+            <a:endParaRPr lang="en-US" sz="800" dirty="0"/>
+          </a:p>
+        </p:txBody>
+      </p:sp>
+    </p:spTree>
+  </p:cSld>
+  <p:clrMapOvr>
+    <a:masterClrMapping/>
+  </p:clrMapOvr>
+</p:sld>
+</file>
+
+<file path=ppt/slides/slide42.xml><?xml version="1.0" encoding="utf-8"?>
+<p:sld xmlns:a="http://schemas.openxmlformats.org/drawingml/2006/main" xmlns:p="http://schemas.openxmlformats.org/presentationml/2006/main" xmlns:r="http://schemas.openxmlformats.org/officeDocument/2006/relationships">
+  <p:cSld>
+    <p:spTree>
+      <p:nvGrpSpPr>
+        <p:cNvPr id="1" name=""/>
+        <p:cNvGrpSpPr/>
+        <p:nvPr/>
+      </p:nvGrpSpPr>
+      <p:grpSpPr/>
+      <p:sp>
+        <p:nvSpPr>
+          <p:cNvPr id="2" name="Text 0"/>
+          <p:cNvSpPr/>
+          <p:nvPr/>
+        </p:nvSpPr>
+        <p:spPr>
+          <a:xfrm>
+            <a:off x="411480" y="411480"/>
+            <a:ext cx="7315200" cy="256032"/>
+          </a:xfrm>
+          <a:prstGeom prst="rect">
+            <a:avLst/>
+          </a:prstGeom>
+          <a:noFill/>
+          <a:ln/>
+        </p:spPr>
+        <p:txBody>
+          <a:bodyPr wrap="square" lIns="0" tIns="0" rIns="0" bIns="0" rtlCol="0" anchor="ctr"/>
+          <a:lstStyle/>
+          <a:p>
+            <a:pPr indent="0" marL="0">
+              <a:buNone/>
+            </a:pPr>
+            <a:r>
+              <a:rPr lang="en-US" sz="1100" b="1" spc="160" kern="0" dirty="0">
+                <a:solidFill>
+                  <a:srgbClr val="3B9DF5"/>
+                </a:solidFill>
+                <a:latin typeface="Arial" pitchFamily="34" charset="0"/>
+                <a:ea typeface="Arial" pitchFamily="34" charset="-122"/>
+                <a:cs typeface="Arial" pitchFamily="34" charset="-120"/>
+              </a:rPr>
               <a:t>O MESMO RESULTADO, SEM CLICAR</a:t>
             </a:r>
             <a:endParaRPr lang="en-US" sz="1100" dirty="0"/>
@@ -24638,7 +25155,7 @@
 </p:sld>
 </file>
 
-<file path=ppt/slides/slide42.xml><?xml version="1.0" encoding="utf-8"?>
+<file path=ppt/slides/slide43.xml><?xml version="1.0" encoding="utf-8"?>
 <p:sld xmlns:a="http://schemas.openxmlformats.org/drawingml/2006/main" xmlns:r="http://schemas.openxmlformats.org/officeDocument/2006/relationships" xmlns:p="http://schemas.openxmlformats.org/presentationml/2006/main">
   <p:cSld name="Slide 26">
     <p:bg>
@@ -25620,7 +26137,7 @@
 </p:sld>
 </file>
 
-<file path=ppt/slides/slide43.xml><?xml version="1.0" encoding="utf-8"?>
+<file path=ppt/slides/slide44.xml><?xml version="1.0" encoding="utf-8"?>
 <p:sld xmlns:a="http://schemas.openxmlformats.org/drawingml/2006/main" xmlns:r="http://schemas.openxmlformats.org/officeDocument/2006/relationships" xmlns:p="http://schemas.openxmlformats.org/presentationml/2006/main">
   <p:cSld name="Slide 27">
     <p:bg>
@@ -26535,7 +27052,7 @@
 </p:sld>
 </file>
 
-<file path=ppt/slides/slide44.xml><?xml version="1.0" encoding="utf-8"?>
+<file path=ppt/slides/slide45.xml><?xml version="1.0" encoding="utf-8"?>
 <p:sld xmlns:a="http://schemas.openxmlformats.org/drawingml/2006/main" xmlns:r="http://schemas.openxmlformats.org/officeDocument/2006/relationships" xmlns:p="http://schemas.openxmlformats.org/presentationml/2006/main">
   <p:cSld name="Slide 28">
     <p:bg>
@@ -26736,7 +27253,7 @@
 </p:sld>
 </file>
 
-<file path=ppt/slides/slide45.xml><?xml version="1.0" encoding="utf-8"?>
+<file path=ppt/slides/slide46.xml><?xml version="1.0" encoding="utf-8"?>
 <p:sld xmlns:a="http://schemas.openxmlformats.org/drawingml/2006/main" xmlns:r="http://schemas.openxmlformats.org/officeDocument/2006/relationships" xmlns:p="http://schemas.openxmlformats.org/presentationml/2006/main">
   <p:cSld name="Slide 29">
     <p:bg>
@@ -26917,7 +27434,7 @@
 </p:sld>
 </file>
 
-<file path=ppt/slides/slide46.xml><?xml version="1.0" encoding="utf-8"?>
+<file path=ppt/slides/slide47.xml><?xml version="1.0" encoding="utf-8"?>
 <p:sld xmlns:a="http://schemas.openxmlformats.org/drawingml/2006/main" xmlns:r="http://schemas.openxmlformats.org/officeDocument/2006/relationships" xmlns:p="http://schemas.openxmlformats.org/presentationml/2006/main">
   <p:cSld name="Slide 30">
     <p:bg>
@@ -27448,7 +27965,7 @@
 </p:sld>
 </file>
 
-<file path=ppt/slides/slide47.xml><?xml version="1.0" encoding="utf-8"?>
+<file path=ppt/slides/slide48.xml><?xml version="1.0" encoding="utf-8"?>
 <p:sld xmlns:a="http://schemas.openxmlformats.org/drawingml/2006/main" xmlns:r="http://schemas.openxmlformats.org/officeDocument/2006/relationships" xmlns:p="http://schemas.openxmlformats.org/presentationml/2006/main">
   <p:cSld name="Slide 31">
     <p:bg>
@@ -28075,7 +28592,7 @@
 </p:sld>
 </file>
 
-<file path=ppt/slides/slide48.xml><?xml version="1.0" encoding="utf-8"?>
+<file path=ppt/slides/slide49.xml><?xml version="1.0" encoding="utf-8"?>
 <p:sld xmlns:a="http://schemas.openxmlformats.org/drawingml/2006/main" xmlns:r="http://schemas.openxmlformats.org/officeDocument/2006/relationships" xmlns:p="http://schemas.openxmlformats.org/presentationml/2006/main">
   <p:cSld name="Slide 32">
     <p:bg>
@@ -28601,584 +29118,6 @@
                 <a:cs typeface="Arial" pitchFamily="34" charset="-120"/>
               </a:rPr>
               <a:t>Ótimo para explorar. Ruim para operar.</a:t>
-            </a:r>
-            <a:endParaRPr lang="en-US" sz="1400" dirty="0"/>
-          </a:p>
-        </p:txBody>
-      </p:sp>
-      <p:sp>
-        <p:nvSpPr>
-          <p:cNvPr id="15" name="Text 13"/>
-          <p:cNvSpPr/>
-          <p:nvPr/>
-        </p:nvSpPr>
-        <p:spPr>
-          <a:xfrm>
-            <a:off x="411480" y="4681728"/>
-            <a:ext cx="2743200" cy="228600"/>
-          </a:xfrm>
-          <a:prstGeom prst="rect">
-            <a:avLst/>
-          </a:prstGeom>
-          <a:noFill/>
-          <a:ln/>
-        </p:spPr>
-        <p:txBody>
-          <a:bodyPr wrap="square" lIns="0" tIns="0" rIns="0" bIns="0" rtlCol="0" anchor="ctr"/>
-          <a:lstStyle/>
-          <a:p>
-            <a:pPr indent="0" marL="0">
-              <a:buNone/>
-            </a:pPr>
-            <a:r>
-              <a:rPr lang="en-US" sz="800" b="1" spc="200" kern="0" dirty="0">
-                <a:solidFill>
-                  <a:srgbClr val="566A85"/>
-                </a:solidFill>
-                <a:latin typeface="Arial" pitchFamily="34" charset="0"/>
-                <a:ea typeface="Arial" pitchFamily="34" charset="-122"/>
-                <a:cs typeface="Arial" pitchFamily="34" charset="-120"/>
-              </a:rPr>
-              <a:t>JORNADA DE DADOS</a:t>
-            </a:r>
-            <a:endParaRPr lang="en-US" sz="800" dirty="0"/>
-          </a:p>
-        </p:txBody>
-      </p:sp>
-    </p:spTree>
-  </p:cSld>
-  <p:clrMapOvr>
-    <a:masterClrMapping/>
-  </p:clrMapOvr>
-</p:sld>
-</file>
-
-<file path=ppt/slides/slide49.xml><?xml version="1.0" encoding="utf-8"?>
-<p:sld xmlns:a="http://schemas.openxmlformats.org/drawingml/2006/main" xmlns:r="http://schemas.openxmlformats.org/officeDocument/2006/relationships" xmlns:p="http://schemas.openxmlformats.org/presentationml/2006/main">
-  <p:cSld name="Slide 33">
-    <p:bg>
-      <p:bgPr>
-        <a:solidFill>
-          <a:srgbClr val="070C16"/>
-        </a:solidFill>
-      </p:bgPr>
-    </p:bg>
-    <p:spTree>
-      <p:nvGrpSpPr>
-        <p:cNvPr id="1" name=""/>
-        <p:cNvGrpSpPr/>
-        <p:nvPr/>
-      </p:nvGrpSpPr>
-      <p:grpSpPr>
-        <a:xfrm>
-          <a:off x="0" y="0"/>
-          <a:ext cx="0" cy="0"/>
-          <a:chOff x="0" y="0"/>
-          <a:chExt cx="0" cy="0"/>
-        </a:xfrm>
-      </p:grpSpPr>
-      <p:sp>
-        <p:nvSpPr>
-          <p:cNvPr id="2" name="Text 0"/>
-          <p:cNvSpPr/>
-          <p:nvPr/>
-        </p:nvSpPr>
-        <p:spPr>
-          <a:xfrm>
-            <a:off x="411480" y="411480"/>
-            <a:ext cx="7315200" cy="256032"/>
-          </a:xfrm>
-          <a:prstGeom prst="rect">
-            <a:avLst/>
-          </a:prstGeom>
-          <a:noFill/>
-          <a:ln/>
-        </p:spPr>
-        <p:txBody>
-          <a:bodyPr wrap="square" lIns="0" tIns="0" rIns="0" bIns="0" rtlCol="0" anchor="ctr"/>
-          <a:lstStyle/>
-          <a:p>
-            <a:pPr indent="0" marL="0">
-              <a:buNone/>
-            </a:pPr>
-            <a:r>
-              <a:rPr lang="en-US" sz="1100" b="1" spc="160" kern="0" dirty="0">
-                <a:solidFill>
-                  <a:srgbClr val="3B9DF5"/>
-                </a:solidFill>
-                <a:latin typeface="Arial" pitchFamily="34" charset="0"/>
-                <a:ea typeface="Arial" pitchFamily="34" charset="-122"/>
-                <a:cs typeface="Arial" pitchFamily="34" charset="-120"/>
-              </a:rPr>
-              <a:t>AMBIENTE 02</a:t>
-            </a:r>
-            <a:endParaRPr lang="en-US" sz="1100" dirty="0"/>
-          </a:p>
-        </p:txBody>
-      </p:sp>
-      <p:sp>
-        <p:nvSpPr>
-          <p:cNvPr id="3" name="Text 1"/>
-          <p:cNvSpPr/>
-          <p:nvPr/>
-        </p:nvSpPr>
-        <p:spPr>
-          <a:xfrm>
-            <a:off x="411480" y="822960"/>
-            <a:ext cx="8321040" cy="1005840"/>
-          </a:xfrm>
-          <a:prstGeom prst="rect">
-            <a:avLst/>
-          </a:prstGeom>
-          <a:noFill/>
-          <a:ln/>
-        </p:spPr>
-        <p:txBody>
-          <a:bodyPr wrap="square" lIns="0" tIns="0" rIns="0" bIns="0" rtlCol="0" anchor="ctr"/>
-          <a:lstStyle/>
-          <a:p>
-            <a:pPr indent="0" marL="0">
-              <a:lnSpc>
-                <a:spcPts val="4000"/>
-              </a:lnSpc>
-              <a:buNone/>
-            </a:pPr>
-            <a:r>
-              <a:rPr lang="en-US" sz="3400" b="1" dirty="0">
-                <a:solidFill>
-                  <a:srgbClr val="FFFFFF"/>
-                </a:solidFill>
-                <a:latin typeface="Arial" pitchFamily="34" charset="0"/>
-                <a:ea typeface="Arial" pitchFamily="34" charset="-122"/>
-                <a:cs typeface="Arial" pitchFamily="34" charset="-120"/>
-              </a:rPr>
-              <a:t>SQL no Databricks</a:t>
-            </a:r>
-            <a:endParaRPr lang="en-US" sz="3400" dirty="0"/>
-          </a:p>
-        </p:txBody>
-      </p:sp>
-      <p:sp>
-        <p:nvSpPr>
-          <p:cNvPr id="4" name="Text 2"/>
-          <p:cNvSpPr/>
-          <p:nvPr/>
-        </p:nvSpPr>
-        <p:spPr>
-          <a:xfrm>
-            <a:off x="411480" y="1874520"/>
-            <a:ext cx="7863840" cy="411480"/>
-          </a:xfrm>
-          <a:prstGeom prst="rect">
-            <a:avLst/>
-          </a:prstGeom>
-          <a:noFill/>
-          <a:ln/>
-        </p:spPr>
-        <p:txBody>
-          <a:bodyPr wrap="square" lIns="0" tIns="0" rIns="0" bIns="0" rtlCol="0" anchor="ctr"/>
-          <a:lstStyle/>
-          <a:p>
-            <a:pPr indent="0" marL="0">
-              <a:lnSpc>
-                <a:spcPts val="2200"/>
-              </a:lnSpc>
-              <a:buNone/>
-            </a:pPr>
-            <a:r>
-              <a:rPr lang="en-US" sz="1400" dirty="0">
-                <a:solidFill>
-                  <a:srgbClr val="9BAAC0"/>
-                </a:solidFill>
-                <a:latin typeface="Arial" pitchFamily="34" charset="0"/>
-                <a:ea typeface="Arial" pitchFamily="34" charset="-122"/>
-                <a:cs typeface="Arial" pitchFamily="34" charset="-120"/>
-              </a:rPr>
-              <a:t>A mesma pergunta, agora na base inteira. Preciso, reproduzível e auditável.</a:t>
-            </a:r>
-            <a:endParaRPr lang="en-US" sz="1400" dirty="0"/>
-          </a:p>
-        </p:txBody>
-      </p:sp>
-      <p:sp>
-        <p:nvSpPr>
-          <p:cNvPr id="5" name="Shape 3"/>
-          <p:cNvSpPr/>
-          <p:nvPr/>
-        </p:nvSpPr>
-        <p:spPr>
-          <a:xfrm>
-            <a:off x="411480" y="2514600"/>
-            <a:ext cx="2663952" cy="1600200"/>
-          </a:xfrm>
-          <a:prstGeom prst="roundRect">
-            <a:avLst>
-              <a:gd name="adj" fmla="val 2857"/>
-            </a:avLst>
-          </a:prstGeom>
-          <a:solidFill>
-            <a:srgbClr val="0D1522"/>
-          </a:solidFill>
-          <a:ln w="12700">
-            <a:solidFill>
-              <a:srgbClr val="1F3A5A"/>
-            </a:solidFill>
-            <a:prstDash val="solid"/>
-          </a:ln>
-        </p:spPr>
-        <p:txBody>
-          <a:bodyPr/>
-          <a:p/>
-        </p:txBody>
-      </p:sp>
-      <p:sp>
-        <p:nvSpPr>
-          <p:cNvPr id="6" name="Text 4"/>
-          <p:cNvSpPr/>
-          <p:nvPr/>
-        </p:nvSpPr>
-        <p:spPr>
-          <a:xfrm>
-            <a:off x="612648" y="2715768"/>
-            <a:ext cx="2261616" cy="512064"/>
-          </a:xfrm>
-          <a:prstGeom prst="rect">
-            <a:avLst/>
-          </a:prstGeom>
-          <a:noFill/>
-          <a:ln/>
-        </p:spPr>
-        <p:txBody>
-          <a:bodyPr wrap="square" lIns="0" tIns="0" rIns="0" bIns="0" rtlCol="0" anchor="t"/>
-          <a:lstStyle/>
-          <a:p>
-            <a:pPr indent="0" marL="0">
-              <a:lnSpc>
-                <a:spcPts val="1800"/>
-              </a:lnSpc>
-              <a:buNone/>
-            </a:pPr>
-            <a:r>
-              <a:rPr lang="en-US" sz="1450" b="1" dirty="0">
-                <a:solidFill>
-                  <a:srgbClr val="FFFFFF"/>
-                </a:solidFill>
-                <a:latin typeface="Arial" pitchFamily="34" charset="0"/>
-                <a:ea typeface="Arial" pitchFamily="34" charset="-122"/>
-                <a:cs typeface="Arial" pitchFamily="34" charset="-120"/>
-              </a:rPr>
-              <a:t>Onde ganha</a:t>
-            </a:r>
-            <a:endParaRPr lang="en-US" sz="1450" dirty="0"/>
-          </a:p>
-        </p:txBody>
-      </p:sp>
-      <p:sp>
-        <p:nvSpPr>
-          <p:cNvPr id="7" name="Text 5"/>
-          <p:cNvSpPr/>
-          <p:nvPr/>
-        </p:nvSpPr>
-        <p:spPr>
-          <a:xfrm>
-            <a:off x="612648" y="3264408"/>
-            <a:ext cx="2261616" cy="685800"/>
-          </a:xfrm>
-          <a:prstGeom prst="rect">
-            <a:avLst/>
-          </a:prstGeom>
-          <a:noFill/>
-          <a:ln/>
-        </p:spPr>
-        <p:txBody>
-          <a:bodyPr wrap="square" lIns="0" tIns="0" rIns="0" bIns="0" rtlCol="0" anchor="ctr"/>
-          <a:lstStyle/>
-          <a:p>
-            <a:pPr indent="0" marL="0">
-              <a:lnSpc>
-                <a:spcPts val="1400"/>
-              </a:lnSpc>
-              <a:buNone/>
-            </a:pPr>
-            <a:r>
-              <a:rPr lang="en-US" sz="1050" dirty="0">
-                <a:solidFill>
-                  <a:srgbClr val="9BAAC0"/>
-                </a:solidFill>
-                <a:latin typeface="Arial" pitchFamily="34" charset="0"/>
-                <a:ea typeface="Arial" pitchFamily="34" charset="-122"/>
-                <a:cs typeface="Arial" pitchFamily="34" charset="-120"/>
-              </a:rPr>
-              <a:t>Escala, precisão e o resultado é sempre o mesmo</a:t>
-            </a:r>
-            <a:endParaRPr lang="en-US" sz="1050" dirty="0"/>
-          </a:p>
-        </p:txBody>
-      </p:sp>
-      <p:sp>
-        <p:nvSpPr>
-          <p:cNvPr id="8" name="Shape 6"/>
-          <p:cNvSpPr/>
-          <p:nvPr/>
-        </p:nvSpPr>
-        <p:spPr>
-          <a:xfrm>
-            <a:off x="3240024" y="2514600"/>
-            <a:ext cx="2663952" cy="1600200"/>
-          </a:xfrm>
-          <a:prstGeom prst="roundRect">
-            <a:avLst>
-              <a:gd name="adj" fmla="val 2857"/>
-            </a:avLst>
-          </a:prstGeom>
-          <a:solidFill>
-            <a:srgbClr val="0D1522"/>
-          </a:solidFill>
-          <a:ln w="12700">
-            <a:solidFill>
-              <a:srgbClr val="1F3A5A"/>
-            </a:solidFill>
-            <a:prstDash val="solid"/>
-          </a:ln>
-        </p:spPr>
-        <p:txBody>
-          <a:bodyPr/>
-          <a:p/>
-        </p:txBody>
-      </p:sp>
-      <p:sp>
-        <p:nvSpPr>
-          <p:cNvPr id="9" name="Text 7"/>
-          <p:cNvSpPr/>
-          <p:nvPr/>
-        </p:nvSpPr>
-        <p:spPr>
-          <a:xfrm>
-            <a:off x="3441192" y="2715768"/>
-            <a:ext cx="2261616" cy="512064"/>
-          </a:xfrm>
-          <a:prstGeom prst="rect">
-            <a:avLst/>
-          </a:prstGeom>
-          <a:noFill/>
-          <a:ln/>
-        </p:spPr>
-        <p:txBody>
-          <a:bodyPr wrap="square" lIns="0" tIns="0" rIns="0" bIns="0" rtlCol="0" anchor="t"/>
-          <a:lstStyle/>
-          <a:p>
-            <a:pPr indent="0" marL="0">
-              <a:lnSpc>
-                <a:spcPts val="1800"/>
-              </a:lnSpc>
-              <a:buNone/>
-            </a:pPr>
-            <a:r>
-              <a:rPr lang="en-US" sz="1450" b="1" dirty="0">
-                <a:solidFill>
-                  <a:srgbClr val="FFFFFF"/>
-                </a:solidFill>
-                <a:latin typeface="Arial" pitchFamily="34" charset="0"/>
-                <a:ea typeface="Arial" pitchFamily="34" charset="-122"/>
-                <a:cs typeface="Arial" pitchFamily="34" charset="-120"/>
-              </a:rPr>
-              <a:t>Onde perde</a:t>
-            </a:r>
-            <a:endParaRPr lang="en-US" sz="1450" dirty="0"/>
-          </a:p>
-        </p:txBody>
-      </p:sp>
-      <p:sp>
-        <p:nvSpPr>
-          <p:cNvPr id="10" name="Text 8"/>
-          <p:cNvSpPr/>
-          <p:nvPr/>
-        </p:nvSpPr>
-        <p:spPr>
-          <a:xfrm>
-            <a:off x="3441192" y="3264408"/>
-            <a:ext cx="2261616" cy="685800"/>
-          </a:xfrm>
-          <a:prstGeom prst="rect">
-            <a:avLst/>
-          </a:prstGeom>
-          <a:noFill/>
-          <a:ln/>
-        </p:spPr>
-        <p:txBody>
-          <a:bodyPr wrap="square" lIns="0" tIns="0" rIns="0" bIns="0" rtlCol="0" anchor="ctr"/>
-          <a:lstStyle/>
-          <a:p>
-            <a:pPr indent="0" marL="0">
-              <a:lnSpc>
-                <a:spcPts val="1400"/>
-              </a:lnSpc>
-              <a:buNone/>
-            </a:pPr>
-            <a:r>
-              <a:rPr lang="en-US" sz="1050" dirty="0">
-                <a:solidFill>
-                  <a:srgbClr val="9BAAC0"/>
-                </a:solidFill>
-                <a:latin typeface="Arial" pitchFamily="34" charset="0"/>
-                <a:ea typeface="Arial" pitchFamily="34" charset="-122"/>
-                <a:cs typeface="Arial" pitchFamily="34" charset="-120"/>
-              </a:rPr>
-              <a:t>Você precisa saber SQL e conhecer o modelo de dados</a:t>
-            </a:r>
-            <a:endParaRPr lang="en-US" sz="1050" dirty="0"/>
-          </a:p>
-        </p:txBody>
-      </p:sp>
-      <p:sp>
-        <p:nvSpPr>
-          <p:cNvPr id="11" name="Shape 9"/>
-          <p:cNvSpPr/>
-          <p:nvPr/>
-        </p:nvSpPr>
-        <p:spPr>
-          <a:xfrm>
-            <a:off x="6068568" y="2514600"/>
-            <a:ext cx="2663952" cy="1600200"/>
-          </a:xfrm>
-          <a:prstGeom prst="roundRect">
-            <a:avLst>
-              <a:gd name="adj" fmla="val 2857"/>
-            </a:avLst>
-          </a:prstGeom>
-          <a:solidFill>
-            <a:srgbClr val="0D1522"/>
-          </a:solidFill>
-          <a:ln w="12700">
-            <a:solidFill>
-              <a:srgbClr val="1F3A5A"/>
-            </a:solidFill>
-            <a:prstDash val="solid"/>
-          </a:ln>
-        </p:spPr>
-        <p:txBody>
-          <a:bodyPr/>
-          <a:p/>
-        </p:txBody>
-      </p:sp>
-      <p:sp>
-        <p:nvSpPr>
-          <p:cNvPr id="12" name="Text 10"/>
-          <p:cNvSpPr/>
-          <p:nvPr/>
-        </p:nvSpPr>
-        <p:spPr>
-          <a:xfrm>
-            <a:off x="6269736" y="2715768"/>
-            <a:ext cx="2261616" cy="512064"/>
-          </a:xfrm>
-          <a:prstGeom prst="rect">
-            <a:avLst/>
-          </a:prstGeom>
-          <a:noFill/>
-          <a:ln/>
-        </p:spPr>
-        <p:txBody>
-          <a:bodyPr wrap="square" lIns="0" tIns="0" rIns="0" bIns="0" rtlCol="0" anchor="t"/>
-          <a:lstStyle/>
-          <a:p>
-            <a:pPr indent="0" marL="0">
-              <a:lnSpc>
-                <a:spcPts val="1800"/>
-              </a:lnSpc>
-              <a:buNone/>
-            </a:pPr>
-            <a:r>
-              <a:rPr lang="en-US" sz="1450" b="1" dirty="0">
-                <a:solidFill>
-                  <a:srgbClr val="FFFFFF"/>
-                </a:solidFill>
-                <a:latin typeface="Arial" pitchFamily="34" charset="0"/>
-                <a:ea typeface="Arial" pitchFamily="34" charset="-122"/>
-                <a:cs typeface="Arial" pitchFamily="34" charset="-120"/>
-              </a:rPr>
-              <a:t>Quando usar</a:t>
-            </a:r>
-            <a:endParaRPr lang="en-US" sz="1450" dirty="0"/>
-          </a:p>
-        </p:txBody>
-      </p:sp>
-      <p:sp>
-        <p:nvSpPr>
-          <p:cNvPr id="13" name="Text 11"/>
-          <p:cNvSpPr/>
-          <p:nvPr/>
-        </p:nvSpPr>
-        <p:spPr>
-          <a:xfrm>
-            <a:off x="6269736" y="3264408"/>
-            <a:ext cx="2261616" cy="685800"/>
-          </a:xfrm>
-          <a:prstGeom prst="rect">
-            <a:avLst/>
-          </a:prstGeom>
-          <a:noFill/>
-          <a:ln/>
-        </p:spPr>
-        <p:txBody>
-          <a:bodyPr wrap="square" lIns="0" tIns="0" rIns="0" bIns="0" rtlCol="0" anchor="ctr"/>
-          <a:lstStyle/>
-          <a:p>
-            <a:pPr indent="0" marL="0">
-              <a:lnSpc>
-                <a:spcPts val="1400"/>
-              </a:lnSpc>
-              <a:buNone/>
-            </a:pPr>
-            <a:r>
-              <a:rPr lang="en-US" sz="1050" dirty="0">
-                <a:solidFill>
-                  <a:srgbClr val="9BAAC0"/>
-                </a:solidFill>
-                <a:latin typeface="Arial" pitchFamily="34" charset="0"/>
-                <a:ea typeface="Arial" pitchFamily="34" charset="-122"/>
-                <a:cs typeface="Arial" pitchFamily="34" charset="-120"/>
-              </a:rPr>
-              <a:t>Sempre que o número for para alguém tomar decisão</a:t>
-            </a:r>
-            <a:endParaRPr lang="en-US" sz="1050" dirty="0"/>
-          </a:p>
-        </p:txBody>
-      </p:sp>
-      <p:sp>
-        <p:nvSpPr>
-          <p:cNvPr id="14" name="Text 12"/>
-          <p:cNvSpPr/>
-          <p:nvPr/>
-        </p:nvSpPr>
-        <p:spPr>
-          <a:xfrm>
-            <a:off x="411480" y="4251960"/>
-            <a:ext cx="8229600" cy="365760"/>
-          </a:xfrm>
-          <a:prstGeom prst="rect">
-            <a:avLst/>
-          </a:prstGeom>
-          <a:noFill/>
-          <a:ln/>
-        </p:spPr>
-        <p:txBody>
-          <a:bodyPr wrap="square" lIns="0" tIns="0" rIns="0" bIns="0" rtlCol="0" anchor="ctr"/>
-          <a:lstStyle/>
-          <a:p>
-            <a:pPr indent="0" marL="0">
-              <a:buNone/>
-            </a:pPr>
-            <a:r>
-              <a:rPr lang="en-US" sz="1400" dirty="0">
-                <a:solidFill>
-                  <a:srgbClr val="7CC8FF"/>
-                </a:solidFill>
-                <a:latin typeface="Arial" pitchFamily="34" charset="0"/>
-                <a:ea typeface="Arial" pitchFamily="34" charset="-122"/>
-                <a:cs typeface="Arial" pitchFamily="34" charset="-120"/>
-              </a:rPr>
-              <a:t>É por isso que SQL não morreu — e não vai morrer tão cedo.</a:t>
             </a:r>
             <a:endParaRPr lang="en-US" sz="1400" dirty="0"/>
           </a:p>
@@ -29821,6 +29760,584 @@
 
 <file path=ppt/slides/slide50.xml><?xml version="1.0" encoding="utf-8"?>
 <p:sld xmlns:a="http://schemas.openxmlformats.org/drawingml/2006/main" xmlns:r="http://schemas.openxmlformats.org/officeDocument/2006/relationships" xmlns:p="http://schemas.openxmlformats.org/presentationml/2006/main">
+  <p:cSld name="Slide 33">
+    <p:bg>
+      <p:bgPr>
+        <a:solidFill>
+          <a:srgbClr val="070C16"/>
+        </a:solidFill>
+      </p:bgPr>
+    </p:bg>
+    <p:spTree>
+      <p:nvGrpSpPr>
+        <p:cNvPr id="1" name=""/>
+        <p:cNvGrpSpPr/>
+        <p:nvPr/>
+      </p:nvGrpSpPr>
+      <p:grpSpPr>
+        <a:xfrm>
+          <a:off x="0" y="0"/>
+          <a:ext cx="0" cy="0"/>
+          <a:chOff x="0" y="0"/>
+          <a:chExt cx="0" cy="0"/>
+        </a:xfrm>
+      </p:grpSpPr>
+      <p:sp>
+        <p:nvSpPr>
+          <p:cNvPr id="2" name="Text 0"/>
+          <p:cNvSpPr/>
+          <p:nvPr/>
+        </p:nvSpPr>
+        <p:spPr>
+          <a:xfrm>
+            <a:off x="411480" y="411480"/>
+            <a:ext cx="7315200" cy="256032"/>
+          </a:xfrm>
+          <a:prstGeom prst="rect">
+            <a:avLst/>
+          </a:prstGeom>
+          <a:noFill/>
+          <a:ln/>
+        </p:spPr>
+        <p:txBody>
+          <a:bodyPr wrap="square" lIns="0" tIns="0" rIns="0" bIns="0" rtlCol="0" anchor="ctr"/>
+          <a:lstStyle/>
+          <a:p>
+            <a:pPr indent="0" marL="0">
+              <a:buNone/>
+            </a:pPr>
+            <a:r>
+              <a:rPr lang="en-US" sz="1100" b="1" spc="160" kern="0" dirty="0">
+                <a:solidFill>
+                  <a:srgbClr val="3B9DF5"/>
+                </a:solidFill>
+                <a:latin typeface="Arial" pitchFamily="34" charset="0"/>
+                <a:ea typeface="Arial" pitchFamily="34" charset="-122"/>
+                <a:cs typeface="Arial" pitchFamily="34" charset="-120"/>
+              </a:rPr>
+              <a:t>AMBIENTE 02</a:t>
+            </a:r>
+            <a:endParaRPr lang="en-US" sz="1100" dirty="0"/>
+          </a:p>
+        </p:txBody>
+      </p:sp>
+      <p:sp>
+        <p:nvSpPr>
+          <p:cNvPr id="3" name="Text 1"/>
+          <p:cNvSpPr/>
+          <p:nvPr/>
+        </p:nvSpPr>
+        <p:spPr>
+          <a:xfrm>
+            <a:off x="411480" y="822960"/>
+            <a:ext cx="8321040" cy="1005840"/>
+          </a:xfrm>
+          <a:prstGeom prst="rect">
+            <a:avLst/>
+          </a:prstGeom>
+          <a:noFill/>
+          <a:ln/>
+        </p:spPr>
+        <p:txBody>
+          <a:bodyPr wrap="square" lIns="0" tIns="0" rIns="0" bIns="0" rtlCol="0" anchor="ctr"/>
+          <a:lstStyle/>
+          <a:p>
+            <a:pPr indent="0" marL="0">
+              <a:lnSpc>
+                <a:spcPts val="4000"/>
+              </a:lnSpc>
+              <a:buNone/>
+            </a:pPr>
+            <a:r>
+              <a:rPr lang="en-US" sz="3400" b="1" dirty="0">
+                <a:solidFill>
+                  <a:srgbClr val="FFFFFF"/>
+                </a:solidFill>
+                <a:latin typeface="Arial" pitchFamily="34" charset="0"/>
+                <a:ea typeface="Arial" pitchFamily="34" charset="-122"/>
+                <a:cs typeface="Arial" pitchFamily="34" charset="-120"/>
+              </a:rPr>
+              <a:t>SQL no Databricks</a:t>
+            </a:r>
+            <a:endParaRPr lang="en-US" sz="3400" dirty="0"/>
+          </a:p>
+        </p:txBody>
+      </p:sp>
+      <p:sp>
+        <p:nvSpPr>
+          <p:cNvPr id="4" name="Text 2"/>
+          <p:cNvSpPr/>
+          <p:nvPr/>
+        </p:nvSpPr>
+        <p:spPr>
+          <a:xfrm>
+            <a:off x="411480" y="1874520"/>
+            <a:ext cx="7863840" cy="411480"/>
+          </a:xfrm>
+          <a:prstGeom prst="rect">
+            <a:avLst/>
+          </a:prstGeom>
+          <a:noFill/>
+          <a:ln/>
+        </p:spPr>
+        <p:txBody>
+          <a:bodyPr wrap="square" lIns="0" tIns="0" rIns="0" bIns="0" rtlCol="0" anchor="ctr"/>
+          <a:lstStyle/>
+          <a:p>
+            <a:pPr indent="0" marL="0">
+              <a:lnSpc>
+                <a:spcPts val="2200"/>
+              </a:lnSpc>
+              <a:buNone/>
+            </a:pPr>
+            <a:r>
+              <a:rPr lang="en-US" sz="1400" dirty="0">
+                <a:solidFill>
+                  <a:srgbClr val="9BAAC0"/>
+                </a:solidFill>
+                <a:latin typeface="Arial" pitchFamily="34" charset="0"/>
+                <a:ea typeface="Arial" pitchFamily="34" charset="-122"/>
+                <a:cs typeface="Arial" pitchFamily="34" charset="-120"/>
+              </a:rPr>
+              <a:t>A mesma pergunta, agora na base inteira. Preciso, reproduzível e auditável.</a:t>
+            </a:r>
+            <a:endParaRPr lang="en-US" sz="1400" dirty="0"/>
+          </a:p>
+        </p:txBody>
+      </p:sp>
+      <p:sp>
+        <p:nvSpPr>
+          <p:cNvPr id="5" name="Shape 3"/>
+          <p:cNvSpPr/>
+          <p:nvPr/>
+        </p:nvSpPr>
+        <p:spPr>
+          <a:xfrm>
+            <a:off x="411480" y="2514600"/>
+            <a:ext cx="2663952" cy="1600200"/>
+          </a:xfrm>
+          <a:prstGeom prst="roundRect">
+            <a:avLst>
+              <a:gd name="adj" fmla="val 2857"/>
+            </a:avLst>
+          </a:prstGeom>
+          <a:solidFill>
+            <a:srgbClr val="0D1522"/>
+          </a:solidFill>
+          <a:ln w="12700">
+            <a:solidFill>
+              <a:srgbClr val="1F3A5A"/>
+            </a:solidFill>
+            <a:prstDash val="solid"/>
+          </a:ln>
+        </p:spPr>
+        <p:txBody>
+          <a:bodyPr/>
+          <a:p/>
+        </p:txBody>
+      </p:sp>
+      <p:sp>
+        <p:nvSpPr>
+          <p:cNvPr id="6" name="Text 4"/>
+          <p:cNvSpPr/>
+          <p:nvPr/>
+        </p:nvSpPr>
+        <p:spPr>
+          <a:xfrm>
+            <a:off x="612648" y="2715768"/>
+            <a:ext cx="2261616" cy="512064"/>
+          </a:xfrm>
+          <a:prstGeom prst="rect">
+            <a:avLst/>
+          </a:prstGeom>
+          <a:noFill/>
+          <a:ln/>
+        </p:spPr>
+        <p:txBody>
+          <a:bodyPr wrap="square" lIns="0" tIns="0" rIns="0" bIns="0" rtlCol="0" anchor="t"/>
+          <a:lstStyle/>
+          <a:p>
+            <a:pPr indent="0" marL="0">
+              <a:lnSpc>
+                <a:spcPts val="1800"/>
+              </a:lnSpc>
+              <a:buNone/>
+            </a:pPr>
+            <a:r>
+              <a:rPr lang="en-US" sz="1450" b="1" dirty="0">
+                <a:solidFill>
+                  <a:srgbClr val="FFFFFF"/>
+                </a:solidFill>
+                <a:latin typeface="Arial" pitchFamily="34" charset="0"/>
+                <a:ea typeface="Arial" pitchFamily="34" charset="-122"/>
+                <a:cs typeface="Arial" pitchFamily="34" charset="-120"/>
+              </a:rPr>
+              <a:t>Onde ganha</a:t>
+            </a:r>
+            <a:endParaRPr lang="en-US" sz="1450" dirty="0"/>
+          </a:p>
+        </p:txBody>
+      </p:sp>
+      <p:sp>
+        <p:nvSpPr>
+          <p:cNvPr id="7" name="Text 5"/>
+          <p:cNvSpPr/>
+          <p:nvPr/>
+        </p:nvSpPr>
+        <p:spPr>
+          <a:xfrm>
+            <a:off x="612648" y="3264408"/>
+            <a:ext cx="2261616" cy="685800"/>
+          </a:xfrm>
+          <a:prstGeom prst="rect">
+            <a:avLst/>
+          </a:prstGeom>
+          <a:noFill/>
+          <a:ln/>
+        </p:spPr>
+        <p:txBody>
+          <a:bodyPr wrap="square" lIns="0" tIns="0" rIns="0" bIns="0" rtlCol="0" anchor="ctr"/>
+          <a:lstStyle/>
+          <a:p>
+            <a:pPr indent="0" marL="0">
+              <a:lnSpc>
+                <a:spcPts val="1400"/>
+              </a:lnSpc>
+              <a:buNone/>
+            </a:pPr>
+            <a:r>
+              <a:rPr lang="en-US" sz="1050" dirty="0">
+                <a:solidFill>
+                  <a:srgbClr val="9BAAC0"/>
+                </a:solidFill>
+                <a:latin typeface="Arial" pitchFamily="34" charset="0"/>
+                <a:ea typeface="Arial" pitchFamily="34" charset="-122"/>
+                <a:cs typeface="Arial" pitchFamily="34" charset="-120"/>
+              </a:rPr>
+              <a:t>Escala, precisão e o resultado é sempre o mesmo</a:t>
+            </a:r>
+            <a:endParaRPr lang="en-US" sz="1050" dirty="0"/>
+          </a:p>
+        </p:txBody>
+      </p:sp>
+      <p:sp>
+        <p:nvSpPr>
+          <p:cNvPr id="8" name="Shape 6"/>
+          <p:cNvSpPr/>
+          <p:nvPr/>
+        </p:nvSpPr>
+        <p:spPr>
+          <a:xfrm>
+            <a:off x="3240024" y="2514600"/>
+            <a:ext cx="2663952" cy="1600200"/>
+          </a:xfrm>
+          <a:prstGeom prst="roundRect">
+            <a:avLst>
+              <a:gd name="adj" fmla="val 2857"/>
+            </a:avLst>
+          </a:prstGeom>
+          <a:solidFill>
+            <a:srgbClr val="0D1522"/>
+          </a:solidFill>
+          <a:ln w="12700">
+            <a:solidFill>
+              <a:srgbClr val="1F3A5A"/>
+            </a:solidFill>
+            <a:prstDash val="solid"/>
+          </a:ln>
+        </p:spPr>
+        <p:txBody>
+          <a:bodyPr/>
+          <a:p/>
+        </p:txBody>
+      </p:sp>
+      <p:sp>
+        <p:nvSpPr>
+          <p:cNvPr id="9" name="Text 7"/>
+          <p:cNvSpPr/>
+          <p:nvPr/>
+        </p:nvSpPr>
+        <p:spPr>
+          <a:xfrm>
+            <a:off x="3441192" y="2715768"/>
+            <a:ext cx="2261616" cy="512064"/>
+          </a:xfrm>
+          <a:prstGeom prst="rect">
+            <a:avLst/>
+          </a:prstGeom>
+          <a:noFill/>
+          <a:ln/>
+        </p:spPr>
+        <p:txBody>
+          <a:bodyPr wrap="square" lIns="0" tIns="0" rIns="0" bIns="0" rtlCol="0" anchor="t"/>
+          <a:lstStyle/>
+          <a:p>
+            <a:pPr indent="0" marL="0">
+              <a:lnSpc>
+                <a:spcPts val="1800"/>
+              </a:lnSpc>
+              <a:buNone/>
+            </a:pPr>
+            <a:r>
+              <a:rPr lang="en-US" sz="1450" b="1" dirty="0">
+                <a:solidFill>
+                  <a:srgbClr val="FFFFFF"/>
+                </a:solidFill>
+                <a:latin typeface="Arial" pitchFamily="34" charset="0"/>
+                <a:ea typeface="Arial" pitchFamily="34" charset="-122"/>
+                <a:cs typeface="Arial" pitchFamily="34" charset="-120"/>
+              </a:rPr>
+              <a:t>Onde perde</a:t>
+            </a:r>
+            <a:endParaRPr lang="en-US" sz="1450" dirty="0"/>
+          </a:p>
+        </p:txBody>
+      </p:sp>
+      <p:sp>
+        <p:nvSpPr>
+          <p:cNvPr id="10" name="Text 8"/>
+          <p:cNvSpPr/>
+          <p:nvPr/>
+        </p:nvSpPr>
+        <p:spPr>
+          <a:xfrm>
+            <a:off x="3441192" y="3264408"/>
+            <a:ext cx="2261616" cy="685800"/>
+          </a:xfrm>
+          <a:prstGeom prst="rect">
+            <a:avLst/>
+          </a:prstGeom>
+          <a:noFill/>
+          <a:ln/>
+        </p:spPr>
+        <p:txBody>
+          <a:bodyPr wrap="square" lIns="0" tIns="0" rIns="0" bIns="0" rtlCol="0" anchor="ctr"/>
+          <a:lstStyle/>
+          <a:p>
+            <a:pPr indent="0" marL="0">
+              <a:lnSpc>
+                <a:spcPts val="1400"/>
+              </a:lnSpc>
+              <a:buNone/>
+            </a:pPr>
+            <a:r>
+              <a:rPr lang="en-US" sz="1050" dirty="0">
+                <a:solidFill>
+                  <a:srgbClr val="9BAAC0"/>
+                </a:solidFill>
+                <a:latin typeface="Arial" pitchFamily="34" charset="0"/>
+                <a:ea typeface="Arial" pitchFamily="34" charset="-122"/>
+                <a:cs typeface="Arial" pitchFamily="34" charset="-120"/>
+              </a:rPr>
+              <a:t>Você precisa saber SQL e conhecer o modelo de dados</a:t>
+            </a:r>
+            <a:endParaRPr lang="en-US" sz="1050" dirty="0"/>
+          </a:p>
+        </p:txBody>
+      </p:sp>
+      <p:sp>
+        <p:nvSpPr>
+          <p:cNvPr id="11" name="Shape 9"/>
+          <p:cNvSpPr/>
+          <p:nvPr/>
+        </p:nvSpPr>
+        <p:spPr>
+          <a:xfrm>
+            <a:off x="6068568" y="2514600"/>
+            <a:ext cx="2663952" cy="1600200"/>
+          </a:xfrm>
+          <a:prstGeom prst="roundRect">
+            <a:avLst>
+              <a:gd name="adj" fmla="val 2857"/>
+            </a:avLst>
+          </a:prstGeom>
+          <a:solidFill>
+            <a:srgbClr val="0D1522"/>
+          </a:solidFill>
+          <a:ln w="12700">
+            <a:solidFill>
+              <a:srgbClr val="1F3A5A"/>
+            </a:solidFill>
+            <a:prstDash val="solid"/>
+          </a:ln>
+        </p:spPr>
+        <p:txBody>
+          <a:bodyPr/>
+          <a:p/>
+        </p:txBody>
+      </p:sp>
+      <p:sp>
+        <p:nvSpPr>
+          <p:cNvPr id="12" name="Text 10"/>
+          <p:cNvSpPr/>
+          <p:nvPr/>
+        </p:nvSpPr>
+        <p:spPr>
+          <a:xfrm>
+            <a:off x="6269736" y="2715768"/>
+            <a:ext cx="2261616" cy="512064"/>
+          </a:xfrm>
+          <a:prstGeom prst="rect">
+            <a:avLst/>
+          </a:prstGeom>
+          <a:noFill/>
+          <a:ln/>
+        </p:spPr>
+        <p:txBody>
+          <a:bodyPr wrap="square" lIns="0" tIns="0" rIns="0" bIns="0" rtlCol="0" anchor="t"/>
+          <a:lstStyle/>
+          <a:p>
+            <a:pPr indent="0" marL="0">
+              <a:lnSpc>
+                <a:spcPts val="1800"/>
+              </a:lnSpc>
+              <a:buNone/>
+            </a:pPr>
+            <a:r>
+              <a:rPr lang="en-US" sz="1450" b="1" dirty="0">
+                <a:solidFill>
+                  <a:srgbClr val="FFFFFF"/>
+                </a:solidFill>
+                <a:latin typeface="Arial" pitchFamily="34" charset="0"/>
+                <a:ea typeface="Arial" pitchFamily="34" charset="-122"/>
+                <a:cs typeface="Arial" pitchFamily="34" charset="-120"/>
+              </a:rPr>
+              <a:t>Quando usar</a:t>
+            </a:r>
+            <a:endParaRPr lang="en-US" sz="1450" dirty="0"/>
+          </a:p>
+        </p:txBody>
+      </p:sp>
+      <p:sp>
+        <p:nvSpPr>
+          <p:cNvPr id="13" name="Text 11"/>
+          <p:cNvSpPr/>
+          <p:nvPr/>
+        </p:nvSpPr>
+        <p:spPr>
+          <a:xfrm>
+            <a:off x="6269736" y="3264408"/>
+            <a:ext cx="2261616" cy="685800"/>
+          </a:xfrm>
+          <a:prstGeom prst="rect">
+            <a:avLst/>
+          </a:prstGeom>
+          <a:noFill/>
+          <a:ln/>
+        </p:spPr>
+        <p:txBody>
+          <a:bodyPr wrap="square" lIns="0" tIns="0" rIns="0" bIns="0" rtlCol="0" anchor="ctr"/>
+          <a:lstStyle/>
+          <a:p>
+            <a:pPr indent="0" marL="0">
+              <a:lnSpc>
+                <a:spcPts val="1400"/>
+              </a:lnSpc>
+              <a:buNone/>
+            </a:pPr>
+            <a:r>
+              <a:rPr lang="en-US" sz="1050" dirty="0">
+                <a:solidFill>
+                  <a:srgbClr val="9BAAC0"/>
+                </a:solidFill>
+                <a:latin typeface="Arial" pitchFamily="34" charset="0"/>
+                <a:ea typeface="Arial" pitchFamily="34" charset="-122"/>
+                <a:cs typeface="Arial" pitchFamily="34" charset="-120"/>
+              </a:rPr>
+              <a:t>Sempre que o número for para alguém tomar decisão</a:t>
+            </a:r>
+            <a:endParaRPr lang="en-US" sz="1050" dirty="0"/>
+          </a:p>
+        </p:txBody>
+      </p:sp>
+      <p:sp>
+        <p:nvSpPr>
+          <p:cNvPr id="14" name="Text 12"/>
+          <p:cNvSpPr/>
+          <p:nvPr/>
+        </p:nvSpPr>
+        <p:spPr>
+          <a:xfrm>
+            <a:off x="411480" y="4251960"/>
+            <a:ext cx="8229600" cy="365760"/>
+          </a:xfrm>
+          <a:prstGeom prst="rect">
+            <a:avLst/>
+          </a:prstGeom>
+          <a:noFill/>
+          <a:ln/>
+        </p:spPr>
+        <p:txBody>
+          <a:bodyPr wrap="square" lIns="0" tIns="0" rIns="0" bIns="0" rtlCol="0" anchor="ctr"/>
+          <a:lstStyle/>
+          <a:p>
+            <a:pPr indent="0" marL="0">
+              <a:buNone/>
+            </a:pPr>
+            <a:r>
+              <a:rPr lang="en-US" sz="1400" dirty="0">
+                <a:solidFill>
+                  <a:srgbClr val="7CC8FF"/>
+                </a:solidFill>
+                <a:latin typeface="Arial" pitchFamily="34" charset="0"/>
+                <a:ea typeface="Arial" pitchFamily="34" charset="-122"/>
+                <a:cs typeface="Arial" pitchFamily="34" charset="-120"/>
+              </a:rPr>
+              <a:t>É por isso que SQL não morreu — e não vai morrer tão cedo.</a:t>
+            </a:r>
+            <a:endParaRPr lang="en-US" sz="1400" dirty="0"/>
+          </a:p>
+        </p:txBody>
+      </p:sp>
+      <p:sp>
+        <p:nvSpPr>
+          <p:cNvPr id="15" name="Text 13"/>
+          <p:cNvSpPr/>
+          <p:nvPr/>
+        </p:nvSpPr>
+        <p:spPr>
+          <a:xfrm>
+            <a:off x="411480" y="4681728"/>
+            <a:ext cx="2743200" cy="228600"/>
+          </a:xfrm>
+          <a:prstGeom prst="rect">
+            <a:avLst/>
+          </a:prstGeom>
+          <a:noFill/>
+          <a:ln/>
+        </p:spPr>
+        <p:txBody>
+          <a:bodyPr wrap="square" lIns="0" tIns="0" rIns="0" bIns="0" rtlCol="0" anchor="ctr"/>
+          <a:lstStyle/>
+          <a:p>
+            <a:pPr indent="0" marL="0">
+              <a:buNone/>
+            </a:pPr>
+            <a:r>
+              <a:rPr lang="en-US" sz="800" b="1" spc="200" kern="0" dirty="0">
+                <a:solidFill>
+                  <a:srgbClr val="566A85"/>
+                </a:solidFill>
+                <a:latin typeface="Arial" pitchFamily="34" charset="0"/>
+                <a:ea typeface="Arial" pitchFamily="34" charset="-122"/>
+                <a:cs typeface="Arial" pitchFamily="34" charset="-120"/>
+              </a:rPr>
+              <a:t>JORNADA DE DADOS</a:t>
+            </a:r>
+            <a:endParaRPr lang="en-US" sz="800" dirty="0"/>
+          </a:p>
+        </p:txBody>
+      </p:sp>
+    </p:spTree>
+  </p:cSld>
+  <p:clrMapOvr>
+    <a:masterClrMapping/>
+  </p:clrMapOvr>
+</p:sld>
+</file>
+
+<file path=ppt/slides/slide51.xml><?xml version="1.0" encoding="utf-8"?>
+<p:sld xmlns:a="http://schemas.openxmlformats.org/drawingml/2006/main" xmlns:r="http://schemas.openxmlformats.org/officeDocument/2006/relationships" xmlns:p="http://schemas.openxmlformats.org/presentationml/2006/main">
   <p:cSld name="Slide 34">
     <p:bg>
       <p:bgPr>
@@ -30397,7 +30914,7 @@
 </p:sld>
 </file>
 
-<file path=ppt/slides/slide51.xml><?xml version="1.0" encoding="utf-8"?>
+<file path=ppt/slides/slide52.xml><?xml version="1.0" encoding="utf-8"?>
 <p:sld xmlns:a="http://schemas.openxmlformats.org/drawingml/2006/main" xmlns:r="http://schemas.openxmlformats.org/officeDocument/2006/relationships" xmlns:p="http://schemas.openxmlformats.org/presentationml/2006/main">
   <p:cSld name="Slide 36">
     <p:bg>
@@ -30948,7 +31465,7 @@
 </p:sld>
 </file>
 
-<file path=ppt/slides/slide52.xml><?xml version="1.0" encoding="utf-8"?>
+<file path=ppt/slides/slide53.xml><?xml version="1.0" encoding="utf-8"?>
 <p:sld xmlns:a="http://schemas.openxmlformats.org/drawingml/2006/main" xmlns:r="http://schemas.openxmlformats.org/officeDocument/2006/relationships" xmlns:p="http://schemas.openxmlformats.org/presentationml/2006/main">
   <p:cSld name="Slide 37">
     <p:bg>
@@ -31126,7 +31643,7 @@
 </p:sld>
 </file>
 
-<file path=ppt/slides/slide53.xml><?xml version="1.0" encoding="utf-8"?>
+<file path=ppt/slides/slide54.xml><?xml version="1.0" encoding="utf-8"?>
 <p:sld xmlns:a="http://schemas.openxmlformats.org/drawingml/2006/main" xmlns:r="http://schemas.openxmlformats.org/officeDocument/2006/relationships" xmlns:p="http://schemas.openxmlformats.org/presentationml/2006/main">
   <p:cSld name="Slide 38">
     <p:bg>
@@ -32523,7 +33040,7 @@
 </p:sld>
 </file>
 
-<file path=ppt/slides/slide54.xml><?xml version="1.0" encoding="utf-8"?>
+<file path=ppt/slides/slide55.xml><?xml version="1.0" encoding="utf-8"?>
 <p:sld xmlns:a="http://schemas.openxmlformats.org/drawingml/2006/main" xmlns:r="http://schemas.openxmlformats.org/officeDocument/2006/relationships" xmlns:p="http://schemas.openxmlformats.org/presentationml/2006/main">
   <p:cSld name="Slide 39">
     <p:bg>
@@ -34943,7 +35460,7 @@
 </p:sld>
 </file>
 
-<file path=ppt/slides/slide55.xml><?xml version="1.0" encoding="utf-8"?>
+<file path=ppt/slides/slide56.xml><?xml version="1.0" encoding="utf-8"?>
 <p:sld xmlns:a="http://schemas.openxmlformats.org/drawingml/2006/main" xmlns:r="http://schemas.openxmlformats.org/officeDocument/2006/relationships" xmlns:p="http://schemas.openxmlformats.org/presentationml/2006/main">
   <p:cSld name="Slide 40">
     <p:bg>
@@ -35705,7 +36222,7 @@
 </p:sld>
 </file>
 
-<file path=ppt/slides/slide56.xml><?xml version="1.0" encoding="utf-8"?>
+<file path=ppt/slides/slide57.xml><?xml version="1.0" encoding="utf-8"?>
 <p:sld xmlns:a="http://schemas.openxmlformats.org/drawingml/2006/main" xmlns:r="http://schemas.openxmlformats.org/officeDocument/2006/relationships" xmlns:p="http://schemas.openxmlformats.org/presentationml/2006/main">
   <p:cSld name="Slide 41">
     <p:bg>
@@ -36719,760 +37236,6 @@
 </p:sld>
 </file>
 
-<file path=ppt/slides/slide57.xml><?xml version="1.0" encoding="utf-8"?>
-<p:sld xmlns:a="http://schemas.openxmlformats.org/drawingml/2006/main" xmlns:p="http://schemas.openxmlformats.org/presentationml/2006/main" xmlns:r="http://schemas.openxmlformats.org/officeDocument/2006/relationships">
-  <p:cSld>
-    <p:spTree>
-      <p:nvGrpSpPr>
-        <p:cNvPr id="1" name=""/>
-        <p:cNvGrpSpPr/>
-        <p:nvPr/>
-      </p:nvGrpSpPr>
-      <p:grpSpPr/>
-      <p:sp>
-        <p:nvSpPr>
-          <p:cNvPr id="2" name="Text 0"/>
-          <p:cNvSpPr/>
-          <p:nvPr/>
-        </p:nvSpPr>
-        <p:spPr>
-          <a:xfrm>
-            <a:off x="411480" y="411480"/>
-            <a:ext cx="7315200" cy="256032"/>
-          </a:xfrm>
-          <a:prstGeom prst="rect">
-            <a:avLst/>
-          </a:prstGeom>
-          <a:noFill/>
-          <a:ln/>
-        </p:spPr>
-        <p:txBody>
-          <a:bodyPr wrap="square" lIns="0" tIns="0" rIns="0" bIns="0" rtlCol="0" anchor="ctr"/>
-          <a:lstStyle/>
-          <a:p>
-            <a:pPr indent="0" marL="0">
-              <a:buNone/>
-            </a:pPr>
-            <a:r>
-              <a:rPr lang="en-US" sz="1100" b="1" spc="160" kern="0" dirty="0">
-                <a:solidFill>
-                  <a:srgbClr val="3B9DF5"/>
-                </a:solidFill>
-                <a:latin typeface="Arial" pitchFamily="34" charset="0"/>
-                <a:ea typeface="Arial" pitchFamily="34" charset="-122"/>
-                <a:cs typeface="Arial" pitchFamily="34" charset="-120"/>
-              </a:rPr>
-              <a:t>O NÚMERO QUE A GENTE PROCURAVA</a:t>
-            </a:r>
-            <a:endParaRPr lang="en-US" sz="1100" dirty="0"/>
-          </a:p>
-        </p:txBody>
-      </p:sp>
-      <p:sp>
-        <p:nvSpPr>
-          <p:cNvPr id="3" name="Text 1"/>
-          <p:cNvSpPr/>
-          <p:nvPr/>
-        </p:nvSpPr>
-        <p:spPr>
-          <a:xfrm>
-            <a:off x="411480" y="822960"/>
-            <a:ext cx="8321040" cy="1005840"/>
-          </a:xfrm>
-          <a:prstGeom prst="rect">
-            <a:avLst/>
-          </a:prstGeom>
-          <a:noFill/>
-          <a:ln/>
-        </p:spPr>
-        <p:txBody>
-          <a:bodyPr wrap="square" lIns="0" tIns="0" rIns="0" bIns="0" rtlCol="0" anchor="ctr"/>
-          <a:lstStyle/>
-          <a:p>
-            <a:pPr indent="0" marL="0">
-              <a:lnSpc>
-                <a:spcPts val="4000"/>
-              </a:lnSpc>
-              <a:buNone/>
-            </a:pPr>
-            <a:r>
-              <a:rPr lang="en-US" sz="3200" b="1" dirty="0">
-                <a:solidFill>
-                  <a:srgbClr val="FFFFFF"/>
-                </a:solidFill>
-                <a:latin typeface="Arial" pitchFamily="34" charset="0"/>
-                <a:ea typeface="Arial" pitchFamily="34" charset="-122"/>
-                <a:cs typeface="Arial" pitchFamily="34" charset="-120"/>
-              </a:rPr>
-              <a:t>A resposta da noite</a:t>
-            </a:r>
-            <a:endParaRPr lang="en-US" sz="3200" dirty="0"/>
-          </a:p>
-        </p:txBody>
-      </p:sp>
-      <p:sp>
-        <p:nvSpPr>
-          <p:cNvPr id="4" name="Shape 2"/>
-          <p:cNvSpPr/>
-          <p:nvPr/>
-        </p:nvSpPr>
-        <p:spPr>
-          <a:xfrm>
-            <a:off x="411480" y="2194560"/>
-            <a:ext cx="1956816" cy="1737360"/>
-          </a:xfrm>
-          <a:prstGeom prst="roundRect">
-            <a:avLst>
-              <a:gd name="adj" fmla="val 2632"/>
-            </a:avLst>
-          </a:prstGeom>
-          <a:solidFill>
-            <a:srgbClr val="0D1522"/>
-          </a:solidFill>
-          <a:ln w="12700">
-            <a:solidFill>
-              <a:srgbClr val="1F3A5A"/>
-            </a:solidFill>
-            <a:prstDash val="solid"/>
-          </a:ln>
-        </p:spPr>
-        <p:txBody>
-          <a:bodyPr/>
-          <a:p/>
-        </p:txBody>
-      </p:sp>
-      <p:sp>
-        <p:nvSpPr>
-          <p:cNvPr id="5" name="Text 3"/>
-          <p:cNvSpPr/>
-          <p:nvPr/>
-        </p:nvSpPr>
-        <p:spPr>
-          <a:xfrm>
-            <a:off x="612648" y="2359152"/>
-            <a:ext cx="1554480" cy="274320"/>
-          </a:xfrm>
-          <a:prstGeom prst="rect">
-            <a:avLst/>
-          </a:prstGeom>
-          <a:noFill/>
-          <a:ln/>
-        </p:spPr>
-        <p:txBody>
-          <a:bodyPr wrap="square" lIns="0" tIns="0" rIns="0" bIns="0" rtlCol="0" anchor="ctr"/>
-          <a:lstStyle/>
-          <a:p>
-            <a:pPr indent="0" marL="0">
-              <a:buNone/>
-            </a:pPr>
-            <a:r>
-              <a:rPr lang="en-US" sz="1100" b="1" dirty="0">
-                <a:solidFill>
-                  <a:srgbClr val="3B9DF5"/>
-                </a:solidFill>
-                <a:latin typeface="Arial" pitchFamily="34" charset="0"/>
-                <a:ea typeface="Arial" pitchFamily="34" charset="-122"/>
-                <a:cs typeface="Arial" pitchFamily="34" charset="-120"/>
-              </a:rPr>
-              <a:t>R$</a:t>
-            </a:r>
-            <a:endParaRPr lang="en-US" sz="1100" dirty="0"/>
-          </a:p>
-        </p:txBody>
-      </p:sp>
-      <p:sp>
-        <p:nvSpPr>
-          <p:cNvPr id="6" name="Text 4"/>
-          <p:cNvSpPr/>
-          <p:nvPr/>
-        </p:nvSpPr>
-        <p:spPr>
-          <a:xfrm>
-            <a:off x="612648" y="2633472"/>
-            <a:ext cx="1554480" cy="512064"/>
-          </a:xfrm>
-          <a:prstGeom prst="rect">
-            <a:avLst/>
-          </a:prstGeom>
-          <a:noFill/>
-          <a:ln/>
-        </p:spPr>
-        <p:txBody>
-          <a:bodyPr wrap="square" lIns="0" tIns="0" rIns="0" bIns="0" rtlCol="0" anchor="t"/>
-          <a:lstStyle/>
-          <a:p>
-            <a:pPr indent="0" marL="0">
-              <a:lnSpc>
-                <a:spcPts val="1800"/>
-              </a:lnSpc>
-              <a:buNone/>
-            </a:pPr>
-            <a:r>
-              <a:rPr lang="en-US" sz="1450" b="1" dirty="0">
-                <a:solidFill>
-                  <a:srgbClr val="FFFFFF"/>
-                </a:solidFill>
-                <a:latin typeface="Arial" pitchFamily="34" charset="0"/>
-                <a:ea typeface="Arial" pitchFamily="34" charset="-122"/>
-                <a:cs typeface="Arial" pitchFamily="34" charset="-120"/>
-              </a:rPr>
-              <a:t>102,3 milhões</a:t>
-            </a:r>
-            <a:endParaRPr lang="en-US" sz="1450" dirty="0"/>
-          </a:p>
-        </p:txBody>
-      </p:sp>
-      <p:sp>
-        <p:nvSpPr>
-          <p:cNvPr id="7" name="Text 5"/>
-          <p:cNvSpPr/>
-          <p:nvPr/>
-        </p:nvSpPr>
-        <p:spPr>
-          <a:xfrm>
-            <a:off x="612648" y="3163824"/>
-            <a:ext cx="1554480" cy="621792"/>
-          </a:xfrm>
-          <a:prstGeom prst="rect">
-            <a:avLst/>
-          </a:prstGeom>
-          <a:noFill/>
-          <a:ln/>
-        </p:spPr>
-        <p:txBody>
-          <a:bodyPr wrap="square" lIns="0" tIns="0" rIns="0" bIns="0" rtlCol="0" anchor="ctr"/>
-          <a:lstStyle/>
-          <a:p>
-            <a:pPr indent="0" marL="0">
-              <a:lnSpc>
-                <a:spcPts val="1400"/>
-              </a:lnSpc>
-              <a:buNone/>
-            </a:pPr>
-            <a:r>
-              <a:rPr lang="en-US" sz="1050" dirty="0">
-                <a:solidFill>
-                  <a:srgbClr val="9BAAC0"/>
-                </a:solidFill>
-                <a:latin typeface="Arial" pitchFamily="34" charset="0"/>
-                <a:ea typeface="Arial" pitchFamily="34" charset="-122"/>
-                <a:cs typeface="Arial" pitchFamily="34" charset="-120"/>
-              </a:rPr>
-              <a:t>Receita dos 24 meses, 27.772 pedidos faturados</a:t>
-            </a:r>
-            <a:endParaRPr lang="en-US" sz="1050" dirty="0"/>
-          </a:p>
-        </p:txBody>
-      </p:sp>
-      <p:sp>
-        <p:nvSpPr>
-          <p:cNvPr id="8" name="Shape 6"/>
-          <p:cNvSpPr/>
-          <p:nvPr/>
-        </p:nvSpPr>
-        <p:spPr>
-          <a:xfrm>
-            <a:off x="2532888" y="2194560"/>
-            <a:ext cx="1956816" cy="1737360"/>
-          </a:xfrm>
-          <a:prstGeom prst="roundRect">
-            <a:avLst>
-              <a:gd name="adj" fmla="val 2632"/>
-            </a:avLst>
-          </a:prstGeom>
-          <a:solidFill>
-            <a:srgbClr val="0D1522"/>
-          </a:solidFill>
-          <a:ln w="12700">
-            <a:solidFill>
-              <a:srgbClr val="1F3A5A"/>
-            </a:solidFill>
-            <a:prstDash val="solid"/>
-          </a:ln>
-        </p:spPr>
-        <p:txBody>
-          <a:bodyPr/>
-          <a:p/>
-        </p:txBody>
-      </p:sp>
-      <p:sp>
-        <p:nvSpPr>
-          <p:cNvPr id="9" name="Text 7"/>
-          <p:cNvSpPr/>
-          <p:nvPr/>
-        </p:nvSpPr>
-        <p:spPr>
-          <a:xfrm>
-            <a:off x="2734056" y="2359152"/>
-            <a:ext cx="1554480" cy="274320"/>
-          </a:xfrm>
-          <a:prstGeom prst="rect">
-            <a:avLst/>
-          </a:prstGeom>
-          <a:noFill/>
-          <a:ln/>
-        </p:spPr>
-        <p:txBody>
-          <a:bodyPr wrap="square" lIns="0" tIns="0" rIns="0" bIns="0" rtlCol="0" anchor="ctr"/>
-          <a:lstStyle/>
-          <a:p>
-            <a:pPr indent="0" marL="0">
-              <a:buNone/>
-            </a:pPr>
-            <a:r>
-              <a:rPr lang="en-US" sz="1100" b="1" dirty="0">
-                <a:solidFill>
-                  <a:srgbClr val="3B9DF5"/>
-                </a:solidFill>
-                <a:latin typeface="Arial" pitchFamily="34" charset="0"/>
-                <a:ea typeface="Arial" pitchFamily="34" charset="-122"/>
-                <a:cs typeface="Arial" pitchFamily="34" charset="-120"/>
-              </a:rPr>
-              <a:t>R$</a:t>
-            </a:r>
-            <a:endParaRPr lang="en-US" sz="1100" dirty="0"/>
-          </a:p>
-        </p:txBody>
-      </p:sp>
-      <p:sp>
-        <p:nvSpPr>
-          <p:cNvPr id="10" name="Text 8"/>
-          <p:cNvSpPr/>
-          <p:nvPr/>
-        </p:nvSpPr>
-        <p:spPr>
-          <a:xfrm>
-            <a:off x="2734056" y="2633472"/>
-            <a:ext cx="1554480" cy="512064"/>
-          </a:xfrm>
-          <a:prstGeom prst="rect">
-            <a:avLst/>
-          </a:prstGeom>
-          <a:noFill/>
-          <a:ln/>
-        </p:spPr>
-        <p:txBody>
-          <a:bodyPr wrap="square" lIns="0" tIns="0" rIns="0" bIns="0" rtlCol="0" anchor="t"/>
-          <a:lstStyle/>
-          <a:p>
-            <a:pPr indent="0" marL="0">
-              <a:lnSpc>
-                <a:spcPts val="1800"/>
-              </a:lnSpc>
-              <a:buNone/>
-            </a:pPr>
-            <a:r>
-              <a:rPr lang="en-US" sz="1450" b="1" dirty="0">
-                <a:solidFill>
-                  <a:srgbClr val="FFFFFF"/>
-                </a:solidFill>
-                <a:latin typeface="Arial" pitchFamily="34" charset="0"/>
-                <a:ea typeface="Arial" pitchFamily="34" charset="-122"/>
-                <a:cs typeface="Arial" pitchFamily="34" charset="-120"/>
-              </a:rPr>
-              <a:t>3.683,70</a:t>
-            </a:r>
-            <a:endParaRPr lang="en-US" sz="1450" dirty="0"/>
-          </a:p>
-        </p:txBody>
-      </p:sp>
-      <p:sp>
-        <p:nvSpPr>
-          <p:cNvPr id="11" name="Text 9"/>
-          <p:cNvSpPr/>
-          <p:nvPr/>
-        </p:nvSpPr>
-        <p:spPr>
-          <a:xfrm>
-            <a:off x="2734056" y="3163824"/>
-            <a:ext cx="1554480" cy="621792"/>
-          </a:xfrm>
-          <a:prstGeom prst="rect">
-            <a:avLst/>
-          </a:prstGeom>
-          <a:noFill/>
-          <a:ln/>
-        </p:spPr>
-        <p:txBody>
-          <a:bodyPr wrap="square" lIns="0" tIns="0" rIns="0" bIns="0" rtlCol="0" anchor="ctr"/>
-          <a:lstStyle/>
-          <a:p>
-            <a:pPr indent="0" marL="0">
-              <a:lnSpc>
-                <a:spcPts val="1400"/>
-              </a:lnSpc>
-              <a:buNone/>
-            </a:pPr>
-            <a:r>
-              <a:rPr lang="en-US" sz="1050" dirty="0">
-                <a:solidFill>
-                  <a:srgbClr val="9BAAC0"/>
-                </a:solidFill>
-                <a:latin typeface="Arial" pitchFamily="34" charset="0"/>
-                <a:ea typeface="Arial" pitchFamily="34" charset="-122"/>
-                <a:cs typeface="Arial" pitchFamily="34" charset="-120"/>
-              </a:rPr>
-              <a:t>Ticket médio por pedido</a:t>
-            </a:r>
-            <a:endParaRPr lang="en-US" sz="1050" dirty="0"/>
-          </a:p>
-        </p:txBody>
-      </p:sp>
-      <p:sp>
-        <p:nvSpPr>
-          <p:cNvPr id="12" name="Shape 10"/>
-          <p:cNvSpPr/>
-          <p:nvPr/>
-        </p:nvSpPr>
-        <p:spPr>
-          <a:xfrm>
-            <a:off x="4654296" y="2194560"/>
-            <a:ext cx="1956816" cy="1737360"/>
-          </a:xfrm>
-          <a:prstGeom prst="roundRect">
-            <a:avLst>
-              <a:gd name="adj" fmla="val 2632"/>
-            </a:avLst>
-          </a:prstGeom>
-          <a:solidFill>
-            <a:srgbClr val="0D1522"/>
-          </a:solidFill>
-          <a:ln w="12700">
-            <a:solidFill>
-              <a:srgbClr val="1F3A5A"/>
-            </a:solidFill>
-            <a:prstDash val="solid"/>
-          </a:ln>
-        </p:spPr>
-        <p:txBody>
-          <a:bodyPr/>
-          <a:p/>
-        </p:txBody>
-      </p:sp>
-      <p:sp>
-        <p:nvSpPr>
-          <p:cNvPr id="13" name="Text 11"/>
-          <p:cNvSpPr/>
-          <p:nvPr/>
-        </p:nvSpPr>
-        <p:spPr>
-          <a:xfrm>
-            <a:off x="4855464" y="2359152"/>
-            <a:ext cx="1554480" cy="274320"/>
-          </a:xfrm>
-          <a:prstGeom prst="rect">
-            <a:avLst/>
-          </a:prstGeom>
-          <a:noFill/>
-          <a:ln/>
-        </p:spPr>
-        <p:txBody>
-          <a:bodyPr wrap="square" lIns="0" tIns="0" rIns="0" bIns="0" rtlCol="0" anchor="ctr"/>
-          <a:lstStyle/>
-          <a:p>
-            <a:pPr indent="0" marL="0">
-              <a:buNone/>
-            </a:pPr>
-            <a:r>
-              <a:rPr lang="en-US" sz="1100" b="1" dirty="0">
-                <a:solidFill>
-                  <a:srgbClr val="3B9DF5"/>
-                </a:solidFill>
-                <a:latin typeface="Arial" pitchFamily="34" charset="0"/>
-                <a:ea typeface="Arial" pitchFamily="34" charset="-122"/>
-                <a:cs typeface="Arial" pitchFamily="34" charset="-120"/>
-              </a:rPr>
-              <a:t>↑</a:t>
-            </a:r>
-            <a:endParaRPr lang="en-US" sz="1100" dirty="0"/>
-          </a:p>
-        </p:txBody>
-      </p:sp>
-      <p:sp>
-        <p:nvSpPr>
-          <p:cNvPr id="14" name="Text 12"/>
-          <p:cNvSpPr/>
-          <p:nvPr/>
-        </p:nvSpPr>
-        <p:spPr>
-          <a:xfrm>
-            <a:off x="4855464" y="2633472"/>
-            <a:ext cx="1554480" cy="512064"/>
-          </a:xfrm>
-          <a:prstGeom prst="rect">
-            <a:avLst/>
-          </a:prstGeom>
-          <a:noFill/>
-          <a:ln/>
-        </p:spPr>
-        <p:txBody>
-          <a:bodyPr wrap="square" lIns="0" tIns="0" rIns="0" bIns="0" rtlCol="0" anchor="t"/>
-          <a:lstStyle/>
-          <a:p>
-            <a:pPr indent="0" marL="0">
-              <a:lnSpc>
-                <a:spcPts val="1800"/>
-              </a:lnSpc>
-              <a:buNone/>
-            </a:pPr>
-            <a:r>
-              <a:rPr lang="en-US" sz="1450" b="1" dirty="0">
-                <a:solidFill>
-                  <a:srgbClr val="FFFFFF"/>
-                </a:solidFill>
-                <a:latin typeface="Arial" pitchFamily="34" charset="0"/>
-                <a:ea typeface="Arial" pitchFamily="34" charset="-122"/>
-                <a:cs typeface="Arial" pitchFamily="34" charset="-120"/>
-              </a:rPr>
-              <a:t>Outubro/2025</a:t>
-            </a:r>
-            <a:endParaRPr lang="en-US" sz="1450" dirty="0"/>
-          </a:p>
-        </p:txBody>
-      </p:sp>
-      <p:sp>
-        <p:nvSpPr>
-          <p:cNvPr id="15" name="Text 13"/>
-          <p:cNvSpPr/>
-          <p:nvPr/>
-        </p:nvSpPr>
-        <p:spPr>
-          <a:xfrm>
-            <a:off x="4855464" y="3163824"/>
-            <a:ext cx="1554480" cy="621792"/>
-          </a:xfrm>
-          <a:prstGeom prst="rect">
-            <a:avLst/>
-          </a:prstGeom>
-          <a:noFill/>
-          <a:ln/>
-        </p:spPr>
-        <p:txBody>
-          <a:bodyPr wrap="square" lIns="0" tIns="0" rIns="0" bIns="0" rtlCol="0" anchor="ctr"/>
-          <a:lstStyle/>
-          <a:p>
-            <a:pPr indent="0" marL="0">
-              <a:lnSpc>
-                <a:spcPts val="1400"/>
-              </a:lnSpc>
-              <a:buNone/>
-            </a:pPr>
-            <a:r>
-              <a:rPr lang="en-US" sz="1050" dirty="0">
-                <a:solidFill>
-                  <a:srgbClr val="9BAAC0"/>
-                </a:solidFill>
-                <a:latin typeface="Arial" pitchFamily="34" charset="0"/>
-                <a:ea typeface="Arial" pitchFamily="34" charset="-122"/>
-                <a:cs typeface="Arial" pitchFamily="34" charset="-120"/>
-              </a:rPr>
-              <a:t>O pico: R$ 7,0 milhões em um mês</a:t>
-            </a:r>
-            <a:endParaRPr lang="en-US" sz="1050" dirty="0"/>
-          </a:p>
-        </p:txBody>
-      </p:sp>
-      <p:sp>
-        <p:nvSpPr>
-          <p:cNvPr id="16" name="Shape 14"/>
-          <p:cNvSpPr/>
-          <p:nvPr/>
-        </p:nvSpPr>
-        <p:spPr>
-          <a:xfrm>
-            <a:off x="6775704" y="2194560"/>
-            <a:ext cx="1956816" cy="1737360"/>
-          </a:xfrm>
-          <a:prstGeom prst="roundRect">
-            <a:avLst>
-              <a:gd name="adj" fmla="val 2632"/>
-            </a:avLst>
-          </a:prstGeom>
-          <a:solidFill>
-            <a:srgbClr val="0D1522"/>
-          </a:solidFill>
-          <a:ln w="12700">
-            <a:solidFill>
-              <a:srgbClr val="1F3A5A"/>
-            </a:solidFill>
-            <a:prstDash val="solid"/>
-          </a:ln>
-        </p:spPr>
-        <p:txBody>
-          <a:bodyPr/>
-          <a:p/>
-        </p:txBody>
-      </p:sp>
-      <p:sp>
-        <p:nvSpPr>
-          <p:cNvPr id="17" name="Text 15"/>
-          <p:cNvSpPr/>
-          <p:nvPr/>
-        </p:nvSpPr>
-        <p:spPr>
-          <a:xfrm>
-            <a:off x="6976872" y="2359152"/>
-            <a:ext cx="1554480" cy="274320"/>
-          </a:xfrm>
-          <a:prstGeom prst="rect">
-            <a:avLst/>
-          </a:prstGeom>
-          <a:noFill/>
-          <a:ln/>
-        </p:spPr>
-        <p:txBody>
-          <a:bodyPr wrap="square" lIns="0" tIns="0" rIns="0" bIns="0" rtlCol="0" anchor="ctr"/>
-          <a:lstStyle/>
-          <a:p>
-            <a:pPr indent="0" marL="0">
-              <a:buNone/>
-            </a:pPr>
-            <a:r>
-              <a:rPr lang="en-US" sz="1100" b="1" dirty="0">
-                <a:solidFill>
-                  <a:srgbClr val="3B9DF5"/>
-                </a:solidFill>
-                <a:latin typeface="Arial" pitchFamily="34" charset="0"/>
-                <a:ea typeface="Arial" pitchFamily="34" charset="-122"/>
-                <a:cs typeface="Arial" pitchFamily="34" charset="-120"/>
-              </a:rPr>
-              <a:t>↓</a:t>
-            </a:r>
-            <a:endParaRPr lang="en-US" sz="1100" dirty="0"/>
-          </a:p>
-        </p:txBody>
-      </p:sp>
-      <p:sp>
-        <p:nvSpPr>
-          <p:cNvPr id="18" name="Text 16"/>
-          <p:cNvSpPr/>
-          <p:nvPr/>
-        </p:nvSpPr>
-        <p:spPr>
-          <a:xfrm>
-            <a:off x="6976872" y="2633472"/>
-            <a:ext cx="1554480" cy="512064"/>
-          </a:xfrm>
-          <a:prstGeom prst="rect">
-            <a:avLst/>
-          </a:prstGeom>
-          <a:noFill/>
-          <a:ln/>
-        </p:spPr>
-        <p:txBody>
-          <a:bodyPr wrap="square" lIns="0" tIns="0" rIns="0" bIns="0" rtlCol="0" anchor="t"/>
-          <a:lstStyle/>
-          <a:p>
-            <a:pPr indent="0" marL="0">
-              <a:lnSpc>
-                <a:spcPts val="1800"/>
-              </a:lnSpc>
-              <a:buNone/>
-            </a:pPr>
-            <a:r>
-              <a:rPr lang="en-US" sz="1450" b="1" dirty="0">
-                <a:solidFill>
-                  <a:srgbClr val="FFFFFF"/>
-                </a:solidFill>
-                <a:latin typeface="Arial" pitchFamily="34" charset="0"/>
-                <a:ea typeface="Arial" pitchFamily="34" charset="-122"/>
-                <a:cs typeface="Arial" pitchFamily="34" charset="-120"/>
-              </a:rPr>
-              <a:t>Janeiro/2026</a:t>
-            </a:r>
-            <a:endParaRPr lang="en-US" sz="1450" dirty="0"/>
-          </a:p>
-        </p:txBody>
-      </p:sp>
-      <p:sp>
-        <p:nvSpPr>
-          <p:cNvPr id="19" name="Text 17"/>
-          <p:cNvSpPr/>
-          <p:nvPr/>
-        </p:nvSpPr>
-        <p:spPr>
-          <a:xfrm>
-            <a:off x="6976872" y="3163824"/>
-            <a:ext cx="1554480" cy="621792"/>
-          </a:xfrm>
-          <a:prstGeom prst="rect">
-            <a:avLst/>
-          </a:prstGeom>
-          <a:noFill/>
-          <a:ln/>
-        </p:spPr>
-        <p:txBody>
-          <a:bodyPr wrap="square" lIns="0" tIns="0" rIns="0" bIns="0" rtlCol="0" anchor="ctr"/>
-          <a:lstStyle/>
-          <a:p>
-            <a:pPr indent="0" marL="0">
-              <a:lnSpc>
-                <a:spcPts val="1400"/>
-              </a:lnSpc>
-              <a:buNone/>
-            </a:pPr>
-            <a:r>
-              <a:rPr lang="en-US" sz="1050" dirty="0">
-                <a:solidFill>
-                  <a:srgbClr val="9BAAC0"/>
-                </a:solidFill>
-                <a:latin typeface="Arial" pitchFamily="34" charset="0"/>
-                <a:ea typeface="Arial" pitchFamily="34" charset="-122"/>
-                <a:cs typeface="Arial" pitchFamily="34" charset="-120"/>
-              </a:rPr>
-              <a:t>O vale: R$ 2,5 milhões — o varejo já abasteceu</a:t>
-            </a:r>
-            <a:endParaRPr lang="en-US" sz="1050" dirty="0"/>
-          </a:p>
-        </p:txBody>
-      </p:sp>
-      <p:sp>
-        <p:nvSpPr>
-          <p:cNvPr id="20" name="Text 18"/>
-          <p:cNvSpPr/>
-          <p:nvPr/>
-        </p:nvSpPr>
-        <p:spPr>
-          <a:xfrm>
-            <a:off x="411480" y="4681728"/>
-            <a:ext cx="2743200" cy="228600"/>
-          </a:xfrm>
-          <a:prstGeom prst="rect">
-            <a:avLst/>
-          </a:prstGeom>
-          <a:noFill/>
-          <a:ln/>
-        </p:spPr>
-        <p:txBody>
-          <a:bodyPr wrap="square" lIns="0" tIns="0" rIns="0" bIns="0" rtlCol="0" anchor="ctr"/>
-          <a:lstStyle/>
-          <a:p>
-            <a:pPr indent="0" marL="0">
-              <a:buNone/>
-            </a:pPr>
-            <a:r>
-              <a:rPr lang="en-US" sz="800" b="1" spc="200" kern="0" dirty="0">
-                <a:solidFill>
-                  <a:srgbClr val="566A85"/>
-                </a:solidFill>
-                <a:latin typeface="Arial" pitchFamily="34" charset="0"/>
-                <a:ea typeface="Arial" pitchFamily="34" charset="-122"/>
-                <a:cs typeface="Arial" pitchFamily="34" charset="-120"/>
-              </a:rPr>
-              <a:t>JORNADA DE DADOS</a:t>
-            </a:r>
-            <a:endParaRPr lang="en-US" sz="800" dirty="0"/>
-          </a:p>
-        </p:txBody>
-      </p:sp>
-    </p:spTree>
-  </p:cSld>
-  <p:clrMapOvr>
-    <a:masterClrMapping/>
-  </p:clrMapOvr>
-</p:sld>
-</file>
-
 <file path=ppt/slides/slide58.xml><?xml version="1.0" encoding="utf-8"?>
 <p:sld xmlns:a="http://schemas.openxmlformats.org/drawingml/2006/main" xmlns:p="http://schemas.openxmlformats.org/presentationml/2006/main" xmlns:r="http://schemas.openxmlformats.org/officeDocument/2006/relationships">
   <p:cSld>
@@ -37516,7 +37279,7 @@
                 <a:ea typeface="Arial" pitchFamily="34" charset="-122"/>
                 <a:cs typeface="Arial" pitchFamily="34" charset="-120"/>
               </a:rPr>
-              <a:t>O MOMENTO DA VERDADE</a:t>
+              <a:t>O NÚMERO QUE A GENTE PROCURAVA</a:t>
             </a:r>
             <a:endParaRPr lang="en-US" sz="1100" dirty="0"/>
           </a:p>
@@ -37550,7 +37313,7 @@
               <a:buNone/>
             </a:pPr>
             <a:r>
-              <a:rPr lang="en-US" sz="3100" b="1" dirty="0">
+              <a:rPr lang="en-US" sz="3200" b="1" dirty="0">
                 <a:solidFill>
                   <a:srgbClr val="FFFFFF"/>
                 </a:solidFill>
@@ -37558,9 +37321,9 @@
                 <a:ea typeface="Arial" pitchFamily="34" charset="-122"/>
                 <a:cs typeface="Arial" pitchFamily="34" charset="-120"/>
               </a:rPr>
-              <a:t>A query que não roda</a:t>
-            </a:r>
-            <a:endParaRPr lang="en-US" sz="3100" dirty="0"/>
+              <a:t>A resposta da noite</a:t>
+            </a:r>
+            <a:endParaRPr lang="en-US" sz="3200" dirty="0"/>
           </a:p>
         </p:txBody>
       </p:sp>
@@ -37572,18 +37335,20 @@
         </p:nvSpPr>
         <p:spPr>
           <a:xfrm>
-            <a:off x="457200" y="2157984"/>
-            <a:ext cx="91440" cy="91440"/>
-          </a:xfrm>
-          <a:prstGeom prst="ellipse">
-            <a:avLst/>
+            <a:off x="411480" y="2194560"/>
+            <a:ext cx="1956816" cy="1737360"/>
+          </a:xfrm>
+          <a:prstGeom prst="roundRect">
+            <a:avLst>
+              <a:gd name="adj" fmla="val 2632"/>
+            </a:avLst>
           </a:prstGeom>
           <a:solidFill>
-            <a:srgbClr val="3B9DF5"/>
+            <a:srgbClr val="0D1522"/>
           </a:solidFill>
           <a:ln w="12700">
             <a:solidFill>
-              <a:srgbClr val="333333"/>
+              <a:srgbClr val="1F3A5A"/>
             </a:solidFill>
             <a:prstDash val="solid"/>
           </a:ln>
@@ -37601,57 +37366,143 @@
         </p:nvSpPr>
         <p:spPr>
           <a:xfrm>
-            <a:off x="713232" y="2057400"/>
-            <a:ext cx="7955280" cy="347472"/>
-          </a:xfrm>
-          <a:prstGeom prst="rect">
-            <a:avLst/>
-          </a:prstGeom>
-          <a:noFill/>
-          <a:ln/>
-        </p:spPr>
-        <p:txBody>
-          <a:bodyPr wrap="square" lIns="0" tIns="0" rIns="0" bIns="0" rtlCol="0" anchor="ctr"/>
-          <a:lstStyle/>
-          <a:p>
-            <a:pPr indent="0" marL="0">
-              <a:buNone/>
-            </a:pPr>
-            <a:r>
-              <a:rPr lang="en-US" sz="1500" dirty="0">
-                <a:solidFill>
-                  <a:srgbClr val="D9CFD1"/>
-                </a:solidFill>
-                <a:latin typeface="Arial" pitchFamily="34" charset="0"/>
-                <a:ea typeface="Arial" pitchFamily="34" charset="-122"/>
-                <a:cs typeface="Arial" pitchFamily="34" charset="-120"/>
-              </a:rPr>
-              <a:t>3.443 pedidos (12%) têm a data escrita como 15/10/2025 em vez de 2025-10-15</a:t>
-            </a:r>
-            <a:endParaRPr lang="en-US" sz="1500" dirty="0"/>
-          </a:p>
-        </p:txBody>
-      </p:sp>
-      <p:sp>
-        <p:nvSpPr>
-          <p:cNvPr id="6" name="Shape 4"/>
-          <p:cNvSpPr/>
-          <p:nvPr/>
-        </p:nvSpPr>
-        <p:spPr>
-          <a:xfrm>
-            <a:off x="457200" y="2578608"/>
-            <a:ext cx="91440" cy="91440"/>
-          </a:xfrm>
-          <a:prstGeom prst="ellipse">
-            <a:avLst/>
+            <a:off x="612648" y="2359152"/>
+            <a:ext cx="1554480" cy="274320"/>
+          </a:xfrm>
+          <a:prstGeom prst="rect">
+            <a:avLst/>
+          </a:prstGeom>
+          <a:noFill/>
+          <a:ln/>
+        </p:spPr>
+        <p:txBody>
+          <a:bodyPr wrap="square" lIns="0" tIns="0" rIns="0" bIns="0" rtlCol="0" anchor="ctr"/>
+          <a:lstStyle/>
+          <a:p>
+            <a:pPr indent="0" marL="0">
+              <a:buNone/>
+            </a:pPr>
+            <a:r>
+              <a:rPr lang="en-US" sz="1100" b="1" dirty="0">
+                <a:solidFill>
+                  <a:srgbClr val="3B9DF5"/>
+                </a:solidFill>
+                <a:latin typeface="Arial" pitchFamily="34" charset="0"/>
+                <a:ea typeface="Arial" pitchFamily="34" charset="-122"/>
+                <a:cs typeface="Arial" pitchFamily="34" charset="-120"/>
+              </a:rPr>
+              <a:t>R$</a:t>
+            </a:r>
+            <a:endParaRPr lang="en-US" sz="1100" dirty="0"/>
+          </a:p>
+        </p:txBody>
+      </p:sp>
+      <p:sp>
+        <p:nvSpPr>
+          <p:cNvPr id="6" name="Text 4"/>
+          <p:cNvSpPr/>
+          <p:nvPr/>
+        </p:nvSpPr>
+        <p:spPr>
+          <a:xfrm>
+            <a:off x="612648" y="2633472"/>
+            <a:ext cx="1554480" cy="512064"/>
+          </a:xfrm>
+          <a:prstGeom prst="rect">
+            <a:avLst/>
+          </a:prstGeom>
+          <a:noFill/>
+          <a:ln/>
+        </p:spPr>
+        <p:txBody>
+          <a:bodyPr wrap="square" lIns="0" tIns="0" rIns="0" bIns="0" rtlCol="0" anchor="t"/>
+          <a:lstStyle/>
+          <a:p>
+            <a:pPr indent="0" marL="0">
+              <a:lnSpc>
+                <a:spcPts val="1800"/>
+              </a:lnSpc>
+              <a:buNone/>
+            </a:pPr>
+            <a:r>
+              <a:rPr lang="en-US" sz="1450" b="1" dirty="0">
+                <a:solidFill>
+                  <a:srgbClr val="FFFFFF"/>
+                </a:solidFill>
+                <a:latin typeface="Arial" pitchFamily="34" charset="0"/>
+                <a:ea typeface="Arial" pitchFamily="34" charset="-122"/>
+                <a:cs typeface="Arial" pitchFamily="34" charset="-120"/>
+              </a:rPr>
+              <a:t>102,3 milhões</a:t>
+            </a:r>
+            <a:endParaRPr lang="en-US" sz="1450" dirty="0"/>
+          </a:p>
+        </p:txBody>
+      </p:sp>
+      <p:sp>
+        <p:nvSpPr>
+          <p:cNvPr id="7" name="Text 5"/>
+          <p:cNvSpPr/>
+          <p:nvPr/>
+        </p:nvSpPr>
+        <p:spPr>
+          <a:xfrm>
+            <a:off x="612648" y="3163824"/>
+            <a:ext cx="1554480" cy="621792"/>
+          </a:xfrm>
+          <a:prstGeom prst="rect">
+            <a:avLst/>
+          </a:prstGeom>
+          <a:noFill/>
+          <a:ln/>
+        </p:spPr>
+        <p:txBody>
+          <a:bodyPr wrap="square" lIns="0" tIns="0" rIns="0" bIns="0" rtlCol="0" anchor="ctr"/>
+          <a:lstStyle/>
+          <a:p>
+            <a:pPr indent="0" marL="0">
+              <a:lnSpc>
+                <a:spcPts val="1400"/>
+              </a:lnSpc>
+              <a:buNone/>
+            </a:pPr>
+            <a:r>
+              <a:rPr lang="en-US" sz="1050" dirty="0">
+                <a:solidFill>
+                  <a:srgbClr val="9BAAC0"/>
+                </a:solidFill>
+                <a:latin typeface="Arial" pitchFamily="34" charset="0"/>
+                <a:ea typeface="Arial" pitchFamily="34" charset="-122"/>
+                <a:cs typeface="Arial" pitchFamily="34" charset="-120"/>
+              </a:rPr>
+              <a:t>Receita dos 24 meses, 27.772 pedidos faturados</a:t>
+            </a:r>
+            <a:endParaRPr lang="en-US" sz="1050" dirty="0"/>
+          </a:p>
+        </p:txBody>
+      </p:sp>
+      <p:sp>
+        <p:nvSpPr>
+          <p:cNvPr id="8" name="Shape 6"/>
+          <p:cNvSpPr/>
+          <p:nvPr/>
+        </p:nvSpPr>
+        <p:spPr>
+          <a:xfrm>
+            <a:off x="2532888" y="2194560"/>
+            <a:ext cx="1956816" cy="1737360"/>
+          </a:xfrm>
+          <a:prstGeom prst="roundRect">
+            <a:avLst>
+              <a:gd name="adj" fmla="val 2632"/>
+            </a:avLst>
           </a:prstGeom>
           <a:solidFill>
-            <a:srgbClr val="3B9DF5"/>
+            <a:srgbClr val="0D1522"/>
           </a:solidFill>
           <a:ln w="12700">
             <a:solidFill>
-              <a:srgbClr val="333333"/>
+              <a:srgbClr val="1F3A5A"/>
             </a:solidFill>
             <a:prstDash val="solid"/>
           </a:ln>
@@ -37663,63 +37514,149 @@
       </p:sp>
       <p:sp>
         <p:nvSpPr>
-          <p:cNvPr id="7" name="Text 5"/>
-          <p:cNvSpPr/>
-          <p:nvPr/>
-        </p:nvSpPr>
-        <p:spPr>
-          <a:xfrm>
-            <a:off x="713232" y="2478024"/>
-            <a:ext cx="7955280" cy="347472"/>
-          </a:xfrm>
-          <a:prstGeom prst="rect">
-            <a:avLst/>
-          </a:prstGeom>
-          <a:noFill/>
-          <a:ln/>
-        </p:spPr>
-        <p:txBody>
-          <a:bodyPr wrap="square" lIns="0" tIns="0" rIns="0" bIns="0" rtlCol="0" anchor="ctr"/>
-          <a:lstStyle/>
-          <a:p>
-            <a:pPr indent="0" marL="0">
-              <a:buNone/>
-            </a:pPr>
-            <a:r>
-              <a:rPr lang="en-US" sz="1500" dirty="0">
-                <a:solidFill>
-                  <a:srgbClr val="D9CFD1"/>
-                </a:solidFill>
-                <a:latin typeface="Arial" pitchFamily="34" charset="0"/>
-                <a:ea typeface="Arial" pitchFamily="34" charset="-122"/>
-                <a:cs typeface="Arial" pitchFamily="34" charset="-120"/>
-              </a:rPr>
-              <a:t>date_trunc('month', data_pedido) tenta converter, não consegue e derruba a query</a:t>
-            </a:r>
-            <a:endParaRPr lang="en-US" sz="1500" dirty="0"/>
-          </a:p>
-        </p:txBody>
-      </p:sp>
-      <p:sp>
-        <p:nvSpPr>
-          <p:cNvPr id="8" name="Shape 6"/>
-          <p:cNvSpPr/>
-          <p:nvPr/>
-        </p:nvSpPr>
-        <p:spPr>
-          <a:xfrm>
-            <a:off x="457200" y="2999232"/>
-            <a:ext cx="91440" cy="91440"/>
-          </a:xfrm>
-          <a:prstGeom prst="ellipse">
-            <a:avLst/>
+          <p:cNvPr id="9" name="Text 7"/>
+          <p:cNvSpPr/>
+          <p:nvPr/>
+        </p:nvSpPr>
+        <p:spPr>
+          <a:xfrm>
+            <a:off x="2734056" y="2359152"/>
+            <a:ext cx="1554480" cy="274320"/>
+          </a:xfrm>
+          <a:prstGeom prst="rect">
+            <a:avLst/>
+          </a:prstGeom>
+          <a:noFill/>
+          <a:ln/>
+        </p:spPr>
+        <p:txBody>
+          <a:bodyPr wrap="square" lIns="0" tIns="0" rIns="0" bIns="0" rtlCol="0" anchor="ctr"/>
+          <a:lstStyle/>
+          <a:p>
+            <a:pPr indent="0" marL="0">
+              <a:buNone/>
+            </a:pPr>
+            <a:r>
+              <a:rPr lang="en-US" sz="1100" b="1" dirty="0">
+                <a:solidFill>
+                  <a:srgbClr val="3B9DF5"/>
+                </a:solidFill>
+                <a:latin typeface="Arial" pitchFamily="34" charset="0"/>
+                <a:ea typeface="Arial" pitchFamily="34" charset="-122"/>
+                <a:cs typeface="Arial" pitchFamily="34" charset="-120"/>
+              </a:rPr>
+              <a:t>R$</a:t>
+            </a:r>
+            <a:endParaRPr lang="en-US" sz="1100" dirty="0"/>
+          </a:p>
+        </p:txBody>
+      </p:sp>
+      <p:sp>
+        <p:nvSpPr>
+          <p:cNvPr id="10" name="Text 8"/>
+          <p:cNvSpPr/>
+          <p:nvPr/>
+        </p:nvSpPr>
+        <p:spPr>
+          <a:xfrm>
+            <a:off x="2734056" y="2633472"/>
+            <a:ext cx="1554480" cy="512064"/>
+          </a:xfrm>
+          <a:prstGeom prst="rect">
+            <a:avLst/>
+          </a:prstGeom>
+          <a:noFill/>
+          <a:ln/>
+        </p:spPr>
+        <p:txBody>
+          <a:bodyPr wrap="square" lIns="0" tIns="0" rIns="0" bIns="0" rtlCol="0" anchor="t"/>
+          <a:lstStyle/>
+          <a:p>
+            <a:pPr indent="0" marL="0">
+              <a:lnSpc>
+                <a:spcPts val="1800"/>
+              </a:lnSpc>
+              <a:buNone/>
+            </a:pPr>
+            <a:r>
+              <a:rPr lang="en-US" sz="1450" b="1" dirty="0">
+                <a:solidFill>
+                  <a:srgbClr val="FFFFFF"/>
+                </a:solidFill>
+                <a:latin typeface="Arial" pitchFamily="34" charset="0"/>
+                <a:ea typeface="Arial" pitchFamily="34" charset="-122"/>
+                <a:cs typeface="Arial" pitchFamily="34" charset="-120"/>
+              </a:rPr>
+              <a:t>3.683,70</a:t>
+            </a:r>
+            <a:endParaRPr lang="en-US" sz="1450" dirty="0"/>
+          </a:p>
+        </p:txBody>
+      </p:sp>
+      <p:sp>
+        <p:nvSpPr>
+          <p:cNvPr id="11" name="Text 9"/>
+          <p:cNvSpPr/>
+          <p:nvPr/>
+        </p:nvSpPr>
+        <p:spPr>
+          <a:xfrm>
+            <a:off x="2734056" y="3163824"/>
+            <a:ext cx="1554480" cy="621792"/>
+          </a:xfrm>
+          <a:prstGeom prst="rect">
+            <a:avLst/>
+          </a:prstGeom>
+          <a:noFill/>
+          <a:ln/>
+        </p:spPr>
+        <p:txBody>
+          <a:bodyPr wrap="square" lIns="0" tIns="0" rIns="0" bIns="0" rtlCol="0" anchor="ctr"/>
+          <a:lstStyle/>
+          <a:p>
+            <a:pPr indent="0" marL="0">
+              <a:lnSpc>
+                <a:spcPts val="1400"/>
+              </a:lnSpc>
+              <a:buNone/>
+            </a:pPr>
+            <a:r>
+              <a:rPr lang="en-US" sz="1050" dirty="0">
+                <a:solidFill>
+                  <a:srgbClr val="9BAAC0"/>
+                </a:solidFill>
+                <a:latin typeface="Arial" pitchFamily="34" charset="0"/>
+                <a:ea typeface="Arial" pitchFamily="34" charset="-122"/>
+                <a:cs typeface="Arial" pitchFamily="34" charset="-120"/>
+              </a:rPr>
+              <a:t>Ticket médio por pedido</a:t>
+            </a:r>
+            <a:endParaRPr lang="en-US" sz="1050" dirty="0"/>
+          </a:p>
+        </p:txBody>
+      </p:sp>
+      <p:sp>
+        <p:nvSpPr>
+          <p:cNvPr id="12" name="Shape 10"/>
+          <p:cNvSpPr/>
+          <p:nvPr/>
+        </p:nvSpPr>
+        <p:spPr>
+          <a:xfrm>
+            <a:off x="4654296" y="2194560"/>
+            <a:ext cx="1956816" cy="1737360"/>
+          </a:xfrm>
+          <a:prstGeom prst="roundRect">
+            <a:avLst>
+              <a:gd name="adj" fmla="val 2632"/>
+            </a:avLst>
           </a:prstGeom>
           <a:solidFill>
-            <a:srgbClr val="3B9DF5"/>
+            <a:srgbClr val="0D1522"/>
           </a:solidFill>
           <a:ln w="12700">
             <a:solidFill>
-              <a:srgbClr val="333333"/>
+              <a:srgbClr val="1F3A5A"/>
             </a:solidFill>
             <a:prstDash val="solid"/>
           </a:ln>
@@ -37731,63 +37668,149 @@
       </p:sp>
       <p:sp>
         <p:nvSpPr>
-          <p:cNvPr id="9" name="Text 7"/>
-          <p:cNvSpPr/>
-          <p:nvPr/>
-        </p:nvSpPr>
-        <p:spPr>
-          <a:xfrm>
-            <a:off x="713232" y="2898648"/>
-            <a:ext cx="7955280" cy="347472"/>
-          </a:xfrm>
-          <a:prstGeom prst="rect">
-            <a:avLst/>
-          </a:prstGeom>
-          <a:noFill/>
-          <a:ln/>
-        </p:spPr>
-        <p:txBody>
-          <a:bodyPr wrap="square" lIns="0" tIns="0" rIns="0" bIns="0" rtlCol="0" anchor="ctr"/>
-          <a:lstStyle/>
-          <a:p>
-            <a:pPr indent="0" marL="0">
-              <a:buNone/>
-            </a:pPr>
-            <a:r>
-              <a:rPr lang="en-US" sz="1500" dirty="0">
-                <a:solidFill>
-                  <a:srgbClr val="D9CFD1"/>
-                </a:solidFill>
-                <a:latin typeface="Arial" pitchFamily="34" charset="0"/>
-                <a:ea typeface="Arial" pitchFamily="34" charset="-122"/>
-                <a:cs typeface="Arial" pitchFamily="34" charset="-120"/>
-              </a:rPr>
-              <a:t>Não é resposta errada em silêncio: é erro na cara, e isso é melhor</a:t>
-            </a:r>
-            <a:endParaRPr lang="en-US" sz="1500" dirty="0"/>
-          </a:p>
-        </p:txBody>
-      </p:sp>
-      <p:sp>
-        <p:nvSpPr>
-          <p:cNvPr id="10" name="Shape 8"/>
-          <p:cNvSpPr/>
-          <p:nvPr/>
-        </p:nvSpPr>
-        <p:spPr>
-          <a:xfrm>
-            <a:off x="457200" y="3419856"/>
-            <a:ext cx="91440" cy="91440"/>
-          </a:xfrm>
-          <a:prstGeom prst="ellipse">
-            <a:avLst/>
+          <p:cNvPr id="13" name="Text 11"/>
+          <p:cNvSpPr/>
+          <p:nvPr/>
+        </p:nvSpPr>
+        <p:spPr>
+          <a:xfrm>
+            <a:off x="4855464" y="2359152"/>
+            <a:ext cx="1554480" cy="274320"/>
+          </a:xfrm>
+          <a:prstGeom prst="rect">
+            <a:avLst/>
+          </a:prstGeom>
+          <a:noFill/>
+          <a:ln/>
+        </p:spPr>
+        <p:txBody>
+          <a:bodyPr wrap="square" lIns="0" tIns="0" rIns="0" bIns="0" rtlCol="0" anchor="ctr"/>
+          <a:lstStyle/>
+          <a:p>
+            <a:pPr indent="0" marL="0">
+              <a:buNone/>
+            </a:pPr>
+            <a:r>
+              <a:rPr lang="en-US" sz="1100" b="1" dirty="0">
+                <a:solidFill>
+                  <a:srgbClr val="3B9DF5"/>
+                </a:solidFill>
+                <a:latin typeface="Arial" pitchFamily="34" charset="0"/>
+                <a:ea typeface="Arial" pitchFamily="34" charset="-122"/>
+                <a:cs typeface="Arial" pitchFamily="34" charset="-120"/>
+              </a:rPr>
+              <a:t>↑</a:t>
+            </a:r>
+            <a:endParaRPr lang="en-US" sz="1100" dirty="0"/>
+          </a:p>
+        </p:txBody>
+      </p:sp>
+      <p:sp>
+        <p:nvSpPr>
+          <p:cNvPr id="14" name="Text 12"/>
+          <p:cNvSpPr/>
+          <p:nvPr/>
+        </p:nvSpPr>
+        <p:spPr>
+          <a:xfrm>
+            <a:off x="4855464" y="2633472"/>
+            <a:ext cx="1554480" cy="512064"/>
+          </a:xfrm>
+          <a:prstGeom prst="rect">
+            <a:avLst/>
+          </a:prstGeom>
+          <a:noFill/>
+          <a:ln/>
+        </p:spPr>
+        <p:txBody>
+          <a:bodyPr wrap="square" lIns="0" tIns="0" rIns="0" bIns="0" rtlCol="0" anchor="t"/>
+          <a:lstStyle/>
+          <a:p>
+            <a:pPr indent="0" marL="0">
+              <a:lnSpc>
+                <a:spcPts val="1800"/>
+              </a:lnSpc>
+              <a:buNone/>
+            </a:pPr>
+            <a:r>
+              <a:rPr lang="en-US" sz="1450" b="1" dirty="0">
+                <a:solidFill>
+                  <a:srgbClr val="FFFFFF"/>
+                </a:solidFill>
+                <a:latin typeface="Arial" pitchFamily="34" charset="0"/>
+                <a:ea typeface="Arial" pitchFamily="34" charset="-122"/>
+                <a:cs typeface="Arial" pitchFamily="34" charset="-120"/>
+              </a:rPr>
+              <a:t>Outubro/2025</a:t>
+            </a:r>
+            <a:endParaRPr lang="en-US" sz="1450" dirty="0"/>
+          </a:p>
+        </p:txBody>
+      </p:sp>
+      <p:sp>
+        <p:nvSpPr>
+          <p:cNvPr id="15" name="Text 13"/>
+          <p:cNvSpPr/>
+          <p:nvPr/>
+        </p:nvSpPr>
+        <p:spPr>
+          <a:xfrm>
+            <a:off x="4855464" y="3163824"/>
+            <a:ext cx="1554480" cy="621792"/>
+          </a:xfrm>
+          <a:prstGeom prst="rect">
+            <a:avLst/>
+          </a:prstGeom>
+          <a:noFill/>
+          <a:ln/>
+        </p:spPr>
+        <p:txBody>
+          <a:bodyPr wrap="square" lIns="0" tIns="0" rIns="0" bIns="0" rtlCol="0" anchor="ctr"/>
+          <a:lstStyle/>
+          <a:p>
+            <a:pPr indent="0" marL="0">
+              <a:lnSpc>
+                <a:spcPts val="1400"/>
+              </a:lnSpc>
+              <a:buNone/>
+            </a:pPr>
+            <a:r>
+              <a:rPr lang="en-US" sz="1050" dirty="0">
+                <a:solidFill>
+                  <a:srgbClr val="9BAAC0"/>
+                </a:solidFill>
+                <a:latin typeface="Arial" pitchFamily="34" charset="0"/>
+                <a:ea typeface="Arial" pitchFamily="34" charset="-122"/>
+                <a:cs typeface="Arial" pitchFamily="34" charset="-120"/>
+              </a:rPr>
+              <a:t>O pico: R$ 7,0 milhões em um mês</a:t>
+            </a:r>
+            <a:endParaRPr lang="en-US" sz="1050" dirty="0"/>
+          </a:p>
+        </p:txBody>
+      </p:sp>
+      <p:sp>
+        <p:nvSpPr>
+          <p:cNvPr id="16" name="Shape 14"/>
+          <p:cNvSpPr/>
+          <p:nvPr/>
+        </p:nvSpPr>
+        <p:spPr>
+          <a:xfrm>
+            <a:off x="6775704" y="2194560"/>
+            <a:ext cx="1956816" cy="1737360"/>
+          </a:xfrm>
+          <a:prstGeom prst="roundRect">
+            <a:avLst>
+              <a:gd name="adj" fmla="val 2632"/>
+            </a:avLst>
           </a:prstGeom>
           <a:solidFill>
-            <a:srgbClr val="3B9DF5"/>
+            <a:srgbClr val="0D1522"/>
           </a:solidFill>
           <a:ln w="12700">
             <a:solidFill>
-              <a:srgbClr val="333333"/>
+              <a:srgbClr val="1F3A5A"/>
             </a:solidFill>
             <a:prstDash val="solid"/>
           </a:ln>
@@ -37799,153 +37822,130 @@
       </p:sp>
       <p:sp>
         <p:nvSpPr>
-          <p:cNvPr id="11" name="Text 9"/>
-          <p:cNvSpPr/>
-          <p:nvPr/>
-        </p:nvSpPr>
-        <p:spPr>
-          <a:xfrm>
-            <a:off x="713232" y="3319272"/>
-            <a:ext cx="7955280" cy="347472"/>
-          </a:xfrm>
-          <a:prstGeom prst="rect">
-            <a:avLst/>
-          </a:prstGeom>
-          <a:noFill/>
-          <a:ln/>
-        </p:spPr>
-        <p:txBody>
-          <a:bodyPr wrap="square" lIns="0" tIns="0" rIns="0" bIns="0" rtlCol="0" anchor="ctr"/>
-          <a:lstStyle/>
-          <a:p>
-            <a:pPr indent="0" marL="0">
-              <a:buNone/>
-            </a:pPr>
-            <a:r>
-              <a:rPr lang="en-US" sz="1500" dirty="0">
-                <a:solidFill>
-                  <a:srgbClr val="D9CFD1"/>
-                </a:solidFill>
-                <a:latin typeface="Arial" pitchFamily="34" charset="0"/>
-                <a:ea typeface="Arial" pitchFamily="34" charset="-122"/>
-                <a:cs typeface="Arial" pitchFamily="34" charset="-120"/>
-              </a:rPr>
-              <a:t>try_to_date devolve NULL em vez de quebrar — aí o coalesce tenta os dois formatos</a:t>
-            </a:r>
-            <a:endParaRPr lang="en-US" sz="1500" dirty="0"/>
-          </a:p>
-        </p:txBody>
-      </p:sp>
-      <p:sp>
-        <p:nvSpPr>
-          <p:cNvPr id="12" name="Shape 10"/>
-          <p:cNvSpPr/>
-          <p:nvPr/>
-        </p:nvSpPr>
-        <p:spPr>
-          <a:xfrm>
-            <a:off x="457200" y="3840480"/>
-            <a:ext cx="91440" cy="91440"/>
-          </a:xfrm>
-          <a:prstGeom prst="ellipse">
-            <a:avLst/>
-          </a:prstGeom>
-          <a:solidFill>
-            <a:srgbClr val="3B9DF5"/>
-          </a:solidFill>
-          <a:ln w="12700">
-            <a:solidFill>
-              <a:srgbClr val="333333"/>
-            </a:solidFill>
-            <a:prstDash val="solid"/>
-          </a:ln>
-        </p:spPr>
-        <p:txBody>
-          <a:bodyPr/>
-          <a:p/>
-        </p:txBody>
-      </p:sp>
-      <p:sp>
-        <p:nvSpPr>
-          <p:cNvPr id="13" name="Text 11"/>
-          <p:cNvSpPr/>
-          <p:nvPr/>
-        </p:nvSpPr>
-        <p:spPr>
-          <a:xfrm>
-            <a:off x="713232" y="3739896"/>
-            <a:ext cx="7955280" cy="347472"/>
-          </a:xfrm>
-          <a:prstGeom prst="rect">
-            <a:avLst/>
-          </a:prstGeom>
-          <a:noFill/>
-          <a:ln/>
-        </p:spPr>
-        <p:txBody>
-          <a:bodyPr wrap="square" lIns="0" tIns="0" rIns="0" bIns="0" rtlCol="0" anchor="ctr"/>
-          <a:lstStyle/>
-          <a:p>
-            <a:pPr indent="0" marL="0">
-              <a:buNone/>
-            </a:pPr>
-            <a:r>
-              <a:rPr lang="en-US" sz="1500" dirty="0">
-                <a:solidFill>
-                  <a:srgbClr val="D9CFD1"/>
-                </a:solidFill>
-                <a:latin typeface="Arial" pitchFamily="34" charset="0"/>
-                <a:ea typeface="Arial" pitchFamily="34" charset="-122"/>
-                <a:cs typeface="Arial" pitchFamily="34" charset="-120"/>
-              </a:rPr>
-              <a:t>Esse coalesce é um rascunho da camada silver. Amanhã ele vira pipeline</a:t>
-            </a:r>
-            <a:endParaRPr lang="en-US" sz="1500" dirty="0"/>
-          </a:p>
-        </p:txBody>
-      </p:sp>
-      <p:sp>
-        <p:nvSpPr>
-          <p:cNvPr id="14" name="Text 12"/>
-          <p:cNvSpPr/>
-          <p:nvPr/>
-        </p:nvSpPr>
-        <p:spPr>
-          <a:xfrm>
-            <a:off x="411480" y="4297680"/>
-            <a:ext cx="8229600" cy="365760"/>
-          </a:xfrm>
-          <a:prstGeom prst="rect">
-            <a:avLst/>
-          </a:prstGeom>
-          <a:noFill/>
-          <a:ln/>
-        </p:spPr>
-        <p:txBody>
-          <a:bodyPr wrap="square" lIns="0" tIns="0" rIns="0" bIns="0" rtlCol="0" anchor="ctr"/>
-          <a:lstStyle/>
-          <a:p>
-            <a:pPr indent="0" marL="0">
-              <a:buNone/>
-            </a:pPr>
-            <a:r>
-              <a:rPr lang="en-US" sz="1300" dirty="0">
-                <a:solidFill>
-                  <a:srgbClr val="7CC8FF"/>
-                </a:solidFill>
-                <a:latin typeface="Arial" pitchFamily="34" charset="0"/>
-                <a:ea typeface="Arial" pitchFamily="34" charset="-122"/>
-                <a:cs typeface="Arial" pitchFamily="34" charset="-120"/>
-              </a:rPr>
-              <a:t>Repara na ordem: eu rodo a query errada primeiro, de propósito. O erro é que explica por que a noite 2 existe.</a:t>
-            </a:r>
-            <a:endParaRPr lang="en-US" sz="1300" dirty="0"/>
-          </a:p>
-        </p:txBody>
-      </p:sp>
-      <p:sp>
-        <p:nvSpPr>
-          <p:cNvPr id="15" name="Text 13"/>
+          <p:cNvPr id="17" name="Text 15"/>
+          <p:cNvSpPr/>
+          <p:nvPr/>
+        </p:nvSpPr>
+        <p:spPr>
+          <a:xfrm>
+            <a:off x="6976872" y="2359152"/>
+            <a:ext cx="1554480" cy="274320"/>
+          </a:xfrm>
+          <a:prstGeom prst="rect">
+            <a:avLst/>
+          </a:prstGeom>
+          <a:noFill/>
+          <a:ln/>
+        </p:spPr>
+        <p:txBody>
+          <a:bodyPr wrap="square" lIns="0" tIns="0" rIns="0" bIns="0" rtlCol="0" anchor="ctr"/>
+          <a:lstStyle/>
+          <a:p>
+            <a:pPr indent="0" marL="0">
+              <a:buNone/>
+            </a:pPr>
+            <a:r>
+              <a:rPr lang="en-US" sz="1100" b="1" dirty="0">
+                <a:solidFill>
+                  <a:srgbClr val="3B9DF5"/>
+                </a:solidFill>
+                <a:latin typeface="Arial" pitchFamily="34" charset="0"/>
+                <a:ea typeface="Arial" pitchFamily="34" charset="-122"/>
+                <a:cs typeface="Arial" pitchFamily="34" charset="-120"/>
+              </a:rPr>
+              <a:t>↓</a:t>
+            </a:r>
+            <a:endParaRPr lang="en-US" sz="1100" dirty="0"/>
+          </a:p>
+        </p:txBody>
+      </p:sp>
+      <p:sp>
+        <p:nvSpPr>
+          <p:cNvPr id="18" name="Text 16"/>
+          <p:cNvSpPr/>
+          <p:nvPr/>
+        </p:nvSpPr>
+        <p:spPr>
+          <a:xfrm>
+            <a:off x="6976872" y="2633472"/>
+            <a:ext cx="1554480" cy="512064"/>
+          </a:xfrm>
+          <a:prstGeom prst="rect">
+            <a:avLst/>
+          </a:prstGeom>
+          <a:noFill/>
+          <a:ln/>
+        </p:spPr>
+        <p:txBody>
+          <a:bodyPr wrap="square" lIns="0" tIns="0" rIns="0" bIns="0" rtlCol="0" anchor="t"/>
+          <a:lstStyle/>
+          <a:p>
+            <a:pPr indent="0" marL="0">
+              <a:lnSpc>
+                <a:spcPts val="1800"/>
+              </a:lnSpc>
+              <a:buNone/>
+            </a:pPr>
+            <a:r>
+              <a:rPr lang="en-US" sz="1450" b="1" dirty="0">
+                <a:solidFill>
+                  <a:srgbClr val="FFFFFF"/>
+                </a:solidFill>
+                <a:latin typeface="Arial" pitchFamily="34" charset="0"/>
+                <a:ea typeface="Arial" pitchFamily="34" charset="-122"/>
+                <a:cs typeface="Arial" pitchFamily="34" charset="-120"/>
+              </a:rPr>
+              <a:t>Janeiro/2026</a:t>
+            </a:r>
+            <a:endParaRPr lang="en-US" sz="1450" dirty="0"/>
+          </a:p>
+        </p:txBody>
+      </p:sp>
+      <p:sp>
+        <p:nvSpPr>
+          <p:cNvPr id="19" name="Text 17"/>
+          <p:cNvSpPr/>
+          <p:nvPr/>
+        </p:nvSpPr>
+        <p:spPr>
+          <a:xfrm>
+            <a:off x="6976872" y="3163824"/>
+            <a:ext cx="1554480" cy="621792"/>
+          </a:xfrm>
+          <a:prstGeom prst="rect">
+            <a:avLst/>
+          </a:prstGeom>
+          <a:noFill/>
+          <a:ln/>
+        </p:spPr>
+        <p:txBody>
+          <a:bodyPr wrap="square" lIns="0" tIns="0" rIns="0" bIns="0" rtlCol="0" anchor="ctr"/>
+          <a:lstStyle/>
+          <a:p>
+            <a:pPr indent="0" marL="0">
+              <a:lnSpc>
+                <a:spcPts val="1400"/>
+              </a:lnSpc>
+              <a:buNone/>
+            </a:pPr>
+            <a:r>
+              <a:rPr lang="en-US" sz="1050" dirty="0">
+                <a:solidFill>
+                  <a:srgbClr val="9BAAC0"/>
+                </a:solidFill>
+                <a:latin typeface="Arial" pitchFamily="34" charset="0"/>
+                <a:ea typeface="Arial" pitchFamily="34" charset="-122"/>
+                <a:cs typeface="Arial" pitchFamily="34" charset="-120"/>
+              </a:rPr>
+              <a:t>O vale: R$ 2,5 milhões — o varejo já abasteceu</a:t>
+            </a:r>
+            <a:endParaRPr lang="en-US" sz="1050" dirty="0"/>
+          </a:p>
+        </p:txBody>
+      </p:sp>
+      <p:sp>
+        <p:nvSpPr>
+          <p:cNvPr id="20" name="Text 18"/>
           <p:cNvSpPr/>
           <p:nvPr/>
         </p:nvSpPr>
@@ -38033,7 +38033,7 @@
                 <a:ea typeface="Arial" pitchFamily="34" charset="-122"/>
                 <a:cs typeface="Arial" pitchFamily="34" charset="-120"/>
               </a:rPr>
-              <a:t>ARQUITETURA MEDALLION</a:t>
+              <a:t>O MOMENTO DA VERDADE</a:t>
             </a:r>
             <a:endParaRPr lang="en-US" sz="1100" dirty="0"/>
           </a:p>
@@ -38067,7 +38067,7 @@
               <a:buNone/>
             </a:pPr>
             <a:r>
-              <a:rPr lang="en-US" sz="3200" b="1" dirty="0">
+              <a:rPr lang="en-US" sz="3100" b="1" dirty="0">
                 <a:solidFill>
                   <a:srgbClr val="FFFFFF"/>
                 </a:solidFill>
@@ -38075,9 +38075,9 @@
                 <a:ea typeface="Arial" pitchFamily="34" charset="-122"/>
                 <a:cs typeface="Arial" pitchFamily="34" charset="-120"/>
               </a:rPr>
-              <a:t>O que ficou de pé no catálogo</a:t>
-            </a:r>
-            <a:endParaRPr lang="en-US" sz="3200" dirty="0"/>
+              <a:t>A query que não roda</a:t>
+            </a:r>
+            <a:endParaRPr lang="en-US" sz="3100" dirty="0"/>
           </a:p>
         </p:txBody>
       </p:sp>
@@ -38089,24 +38089,26 @@
         </p:nvSpPr>
         <p:spPr>
           <a:xfrm>
-            <a:off x="411480" y="2194560"/>
-            <a:ext cx="1956816" cy="1737360"/>
-          </a:xfrm>
-          <a:prstGeom prst="roundRect">
-            <a:avLst>
-              <a:gd name="adj" fmla="val 2632"/>
-            </a:avLst>
+            <a:off x="457200" y="2157984"/>
+            <a:ext cx="91440" cy="91440"/>
+          </a:xfrm>
+          <a:prstGeom prst="ellipse">
+            <a:avLst/>
           </a:prstGeom>
           <a:solidFill>
-            <a:srgbClr val="0D1522"/>
+            <a:srgbClr val="3B9DF5"/>
           </a:solidFill>
           <a:ln w="12700">
             <a:solidFill>
-              <a:srgbClr val="1F3A5A"/>
+              <a:srgbClr val="333333"/>
             </a:solidFill>
             <a:prstDash val="solid"/>
           </a:ln>
         </p:spPr>
+        <p:txBody>
+          <a:bodyPr/>
+          <a:p/>
+        </p:txBody>
       </p:sp>
       <p:sp>
         <p:nvSpPr>
@@ -38116,574 +38118,351 @@
         </p:nvSpPr>
         <p:spPr>
           <a:xfrm>
-            <a:off x="612648" y="2359152"/>
-            <a:ext cx="1554480" cy="274320"/>
-          </a:xfrm>
-          <a:prstGeom prst="rect">
-            <a:avLst/>
-          </a:prstGeom>
-          <a:noFill/>
-          <a:ln/>
-        </p:spPr>
-        <p:txBody>
-          <a:bodyPr wrap="square" lIns="0" tIns="0" rIns="0" bIns="0" rtlCol="0" anchor="ctr"/>
-          <a:lstStyle/>
-          <a:p>
-            <a:pPr indent="0" marL="0">
-              <a:buNone/>
-            </a:pPr>
-            <a:r>
-              <a:rPr lang="en-US" sz="1100" b="1" dirty="0">
-                <a:solidFill>
-                  <a:srgbClr val="3B9DF5"/>
-                </a:solidFill>
-                <a:latin typeface="Arial" pitchFamily="34" charset="0"/>
-                <a:ea typeface="Arial" pitchFamily="34" charset="-122"/>
-                <a:cs typeface="Arial" pitchFamily="34" charset="-120"/>
-              </a:rPr>
-              <a:t>01</a:t>
-            </a:r>
-            <a:endParaRPr lang="en-US" sz="1100" dirty="0"/>
-          </a:p>
-        </p:txBody>
-      </p:sp>
-      <p:sp>
-        <p:nvSpPr>
-          <p:cNvPr id="6" name="Text 4"/>
-          <p:cNvSpPr/>
-          <p:nvPr/>
-        </p:nvSpPr>
-        <p:spPr>
-          <a:xfrm>
-            <a:off x="612648" y="2633472"/>
-            <a:ext cx="1554480" cy="512064"/>
-          </a:xfrm>
-          <a:prstGeom prst="rect">
-            <a:avLst/>
-          </a:prstGeom>
-          <a:noFill/>
-          <a:ln/>
-        </p:spPr>
-        <p:txBody>
-          <a:bodyPr wrap="square" lIns="0" tIns="0" rIns="0" bIns="0" rtlCol="0" anchor="t"/>
-          <a:lstStyle/>
-          <a:p>
-            <a:pPr indent="0" marL="0">
-              <a:lnSpc>
-                <a:spcPts val="1800"/>
-              </a:lnSpc>
-              <a:buNone/>
-            </a:pPr>
-            <a:r>
-              <a:rPr lang="en-US" sz="1450" b="1" dirty="0">
-                <a:solidFill>
-                  <a:srgbClr val="FFFFFF"/>
-                </a:solidFill>
-                <a:latin typeface="Arial" pitchFamily="34" charset="0"/>
-                <a:ea typeface="Arial" pitchFamily="34" charset="-122"/>
-                <a:cs typeface="Arial" pitchFamily="34" charset="-120"/>
-              </a:rPr>
-              <a:t>bronze</a:t>
-            </a:r>
-            <a:endParaRPr lang="en-US" sz="1450" dirty="0"/>
-          </a:p>
-        </p:txBody>
-      </p:sp>
-      <p:sp>
-        <p:nvSpPr>
-          <p:cNvPr id="7" name="Text 5"/>
-          <p:cNvSpPr/>
-          <p:nvPr/>
-        </p:nvSpPr>
-        <p:spPr>
-          <a:xfrm>
-            <a:off x="612648" y="3163824"/>
-            <a:ext cx="1554480" cy="621792"/>
-          </a:xfrm>
-          <a:prstGeom prst="rect">
-            <a:avLst/>
-          </a:prstGeom>
-          <a:noFill/>
-          <a:ln/>
-        </p:spPr>
-        <p:txBody>
-          <a:bodyPr wrap="square" lIns="0" tIns="0" rIns="0" bIns="0" rtlCol="0" anchor="ctr"/>
-          <a:lstStyle/>
-          <a:p>
-            <a:pPr indent="0" marL="0">
-              <a:lnSpc>
-                <a:spcPts val="1400"/>
-              </a:lnSpc>
-              <a:buNone/>
-            </a:pPr>
-            <a:r>
-              <a:rPr lang="en-US" sz="1050" dirty="0">
-                <a:solidFill>
-                  <a:srgbClr val="9BAAC0"/>
-                </a:solidFill>
-                <a:latin typeface="Arial" pitchFamily="34" charset="0"/>
-                <a:ea typeface="Arial" pitchFamily="34" charset="-122"/>
-                <a:cs typeface="Arial" pitchFamily="34" charset="-120"/>
-              </a:rPr>
-              <a:t>10 tabelas, 313.551 linhas. Tudo texto, sujeira preservada</a:t>
-            </a:r>
-            <a:endParaRPr lang="en-US" sz="1050" dirty="0"/>
-          </a:p>
-        </p:txBody>
-      </p:sp>
-      <p:sp>
-        <p:nvSpPr>
-          <p:cNvPr id="8" name="Shape 6"/>
-          <p:cNvSpPr/>
-          <p:nvPr/>
-        </p:nvSpPr>
-        <p:spPr>
-          <a:xfrm>
-            <a:off x="2532888" y="2194560"/>
-            <a:ext cx="1956816" cy="1737360"/>
-          </a:xfrm>
-          <a:prstGeom prst="roundRect">
-            <a:avLst>
-              <a:gd name="adj" fmla="val 2632"/>
-            </a:avLst>
+            <a:off x="713232" y="2057400"/>
+            <a:ext cx="7955280" cy="347472"/>
+          </a:xfrm>
+          <a:prstGeom prst="rect">
+            <a:avLst/>
+          </a:prstGeom>
+          <a:noFill/>
+          <a:ln/>
+        </p:spPr>
+        <p:txBody>
+          <a:bodyPr wrap="square" lIns="0" tIns="0" rIns="0" bIns="0" rtlCol="0" anchor="ctr"/>
+          <a:lstStyle/>
+          <a:p>
+            <a:pPr indent="0" marL="0">
+              <a:buNone/>
+            </a:pPr>
+            <a:r>
+              <a:rPr lang="en-US" sz="1500" dirty="0">
+                <a:solidFill>
+                  <a:srgbClr val="D9CFD1"/>
+                </a:solidFill>
+                <a:latin typeface="Arial" pitchFamily="34" charset="0"/>
+                <a:ea typeface="Arial" pitchFamily="34" charset="-122"/>
+                <a:cs typeface="Arial" pitchFamily="34" charset="-120"/>
+              </a:rPr>
+              <a:t>3.443 pedidos (12%) têm a data escrita como 15/10/2025 em vez de 2025-10-15</a:t>
+            </a:r>
+            <a:endParaRPr lang="en-US" sz="1500" dirty="0"/>
+          </a:p>
+        </p:txBody>
+      </p:sp>
+      <p:sp>
+        <p:nvSpPr>
+          <p:cNvPr id="6" name="Shape 4"/>
+          <p:cNvSpPr/>
+          <p:nvPr/>
+        </p:nvSpPr>
+        <p:spPr>
+          <a:xfrm>
+            <a:off x="457200" y="2578608"/>
+            <a:ext cx="91440" cy="91440"/>
+          </a:xfrm>
+          <a:prstGeom prst="ellipse">
+            <a:avLst/>
           </a:prstGeom>
           <a:solidFill>
-            <a:srgbClr val="0D1522"/>
+            <a:srgbClr val="3B9DF5"/>
           </a:solidFill>
           <a:ln w="12700">
             <a:solidFill>
-              <a:srgbClr val="1F3A5A"/>
+              <a:srgbClr val="333333"/>
             </a:solidFill>
             <a:prstDash val="solid"/>
           </a:ln>
         </p:spPr>
-      </p:sp>
-      <p:sp>
-        <p:nvSpPr>
-          <p:cNvPr id="9" name="Text 7"/>
-          <p:cNvSpPr/>
-          <p:nvPr/>
-        </p:nvSpPr>
-        <p:spPr>
-          <a:xfrm>
-            <a:off x="2734056" y="2359152"/>
-            <a:ext cx="1554480" cy="274320"/>
-          </a:xfrm>
-          <a:prstGeom prst="rect">
-            <a:avLst/>
-          </a:prstGeom>
-          <a:noFill/>
-          <a:ln/>
-        </p:spPr>
-        <p:txBody>
-          <a:bodyPr wrap="square" lIns="0" tIns="0" rIns="0" bIns="0" rtlCol="0" anchor="ctr"/>
-          <a:lstStyle/>
-          <a:p>
-            <a:pPr indent="0" marL="0">
-              <a:buNone/>
-            </a:pPr>
-            <a:r>
-              <a:rPr lang="en-US" sz="1100" b="1" dirty="0">
-                <a:solidFill>
-                  <a:srgbClr val="3B9DF5"/>
-                </a:solidFill>
-                <a:latin typeface="Arial" pitchFamily="34" charset="0"/>
-                <a:ea typeface="Arial" pitchFamily="34" charset="-122"/>
-                <a:cs typeface="Arial" pitchFamily="34" charset="-120"/>
-              </a:rPr>
-              <a:t>02</a:t>
-            </a:r>
-            <a:endParaRPr lang="en-US" sz="1100" dirty="0"/>
-          </a:p>
-        </p:txBody>
-      </p:sp>
-      <p:sp>
-        <p:nvSpPr>
-          <p:cNvPr id="10" name="Text 8"/>
-          <p:cNvSpPr/>
-          <p:nvPr/>
-        </p:nvSpPr>
-        <p:spPr>
-          <a:xfrm>
-            <a:off x="2734056" y="2633472"/>
-            <a:ext cx="1554480" cy="512064"/>
-          </a:xfrm>
-          <a:prstGeom prst="rect">
-            <a:avLst/>
-          </a:prstGeom>
-          <a:noFill/>
-          <a:ln/>
-        </p:spPr>
-        <p:txBody>
-          <a:bodyPr wrap="square" lIns="0" tIns="0" rIns="0" bIns="0" rtlCol="0" anchor="t"/>
-          <a:lstStyle/>
-          <a:p>
-            <a:pPr indent="0" marL="0">
-              <a:lnSpc>
-                <a:spcPts val="1800"/>
-              </a:lnSpc>
-              <a:buNone/>
-            </a:pPr>
-            <a:r>
-              <a:rPr lang="en-US" sz="1450" b="1" dirty="0">
-                <a:solidFill>
-                  <a:srgbClr val="FFFFFF"/>
-                </a:solidFill>
-                <a:latin typeface="Arial" pitchFamily="34" charset="0"/>
-                <a:ea typeface="Arial" pitchFamily="34" charset="-122"/>
-                <a:cs typeface="Arial" pitchFamily="34" charset="-120"/>
-              </a:rPr>
-              <a:t>silver</a:t>
-            </a:r>
-            <a:endParaRPr lang="en-US" sz="1450" dirty="0"/>
-          </a:p>
-        </p:txBody>
-      </p:sp>
-      <p:sp>
-        <p:nvSpPr>
-          <p:cNvPr id="11" name="Text 9"/>
-          <p:cNvSpPr/>
-          <p:nvPr/>
-        </p:nvSpPr>
-        <p:spPr>
-          <a:xfrm>
-            <a:off x="2734056" y="3163824"/>
-            <a:ext cx="1554480" cy="621792"/>
-          </a:xfrm>
-          <a:prstGeom prst="rect">
-            <a:avLst/>
-          </a:prstGeom>
-          <a:noFill/>
-          <a:ln/>
-        </p:spPr>
-        <p:txBody>
-          <a:bodyPr wrap="square" lIns="0" tIns="0" rIns="0" bIns="0" rtlCol="0" anchor="ctr"/>
-          <a:lstStyle/>
-          <a:p>
-            <a:pPr indent="0" marL="0">
-              <a:lnSpc>
-                <a:spcPts val="1400"/>
-              </a:lnSpc>
-              <a:buNone/>
-            </a:pPr>
-            <a:r>
-              <a:rPr lang="en-US" sz="1050" dirty="0">
-                <a:solidFill>
-                  <a:srgbClr val="9BAAC0"/>
-                </a:solidFill>
-                <a:latin typeface="Arial" pitchFamily="34" charset="0"/>
-                <a:ea typeface="Arial" pitchFamily="34" charset="-122"/>
-                <a:cs typeface="Arial" pitchFamily="34" charset="-120"/>
-              </a:rPr>
-              <a:t>Criada e vazia. É o trabalho de amanhã</a:t>
-            </a:r>
-            <a:endParaRPr lang="en-US" sz="1050" dirty="0"/>
-          </a:p>
-        </p:txBody>
-      </p:sp>
-      <p:sp>
-        <p:nvSpPr>
-          <p:cNvPr id="12" name="Shape 10"/>
-          <p:cNvSpPr/>
-          <p:nvPr/>
-        </p:nvSpPr>
-        <p:spPr>
-          <a:xfrm>
-            <a:off x="4654296" y="2194560"/>
-            <a:ext cx="1956816" cy="1737360"/>
-          </a:xfrm>
-          <a:prstGeom prst="roundRect">
-            <a:avLst>
-              <a:gd name="adj" fmla="val 2632"/>
-            </a:avLst>
+        <p:txBody>
+          <a:bodyPr/>
+          <a:p/>
+        </p:txBody>
+      </p:sp>
+      <p:sp>
+        <p:nvSpPr>
+          <p:cNvPr id="7" name="Text 5"/>
+          <p:cNvSpPr/>
+          <p:nvPr/>
+        </p:nvSpPr>
+        <p:spPr>
+          <a:xfrm>
+            <a:off x="713232" y="2478024"/>
+            <a:ext cx="7955280" cy="347472"/>
+          </a:xfrm>
+          <a:prstGeom prst="rect">
+            <a:avLst/>
+          </a:prstGeom>
+          <a:noFill/>
+          <a:ln/>
+        </p:spPr>
+        <p:txBody>
+          <a:bodyPr wrap="square" lIns="0" tIns="0" rIns="0" bIns="0" rtlCol="0" anchor="ctr"/>
+          <a:lstStyle/>
+          <a:p>
+            <a:pPr indent="0" marL="0">
+              <a:buNone/>
+            </a:pPr>
+            <a:r>
+              <a:rPr lang="en-US" sz="1500" dirty="0">
+                <a:solidFill>
+                  <a:srgbClr val="D9CFD1"/>
+                </a:solidFill>
+                <a:latin typeface="Arial" pitchFamily="34" charset="0"/>
+                <a:ea typeface="Arial" pitchFamily="34" charset="-122"/>
+                <a:cs typeface="Arial" pitchFamily="34" charset="-120"/>
+              </a:rPr>
+              <a:t>date_trunc('month', data_pedido) tenta converter, não consegue e derruba a query</a:t>
+            </a:r>
+            <a:endParaRPr lang="en-US" sz="1500" dirty="0"/>
+          </a:p>
+        </p:txBody>
+      </p:sp>
+      <p:sp>
+        <p:nvSpPr>
+          <p:cNvPr id="8" name="Shape 6"/>
+          <p:cNvSpPr/>
+          <p:nvPr/>
+        </p:nvSpPr>
+        <p:spPr>
+          <a:xfrm>
+            <a:off x="457200" y="2999232"/>
+            <a:ext cx="91440" cy="91440"/>
+          </a:xfrm>
+          <a:prstGeom prst="ellipse">
+            <a:avLst/>
           </a:prstGeom>
           <a:solidFill>
-            <a:srgbClr val="0D1522"/>
+            <a:srgbClr val="3B9DF5"/>
           </a:solidFill>
           <a:ln w="12700">
             <a:solidFill>
-              <a:srgbClr val="1F3A5A"/>
+              <a:srgbClr val="333333"/>
             </a:solidFill>
             <a:prstDash val="solid"/>
           </a:ln>
         </p:spPr>
-      </p:sp>
-      <p:sp>
-        <p:nvSpPr>
-          <p:cNvPr id="13" name="Text 11"/>
-          <p:cNvSpPr/>
-          <p:nvPr/>
-        </p:nvSpPr>
-        <p:spPr>
-          <a:xfrm>
-            <a:off x="4855464" y="2359152"/>
-            <a:ext cx="1554480" cy="274320"/>
-          </a:xfrm>
-          <a:prstGeom prst="rect">
-            <a:avLst/>
-          </a:prstGeom>
-          <a:noFill/>
-          <a:ln/>
-        </p:spPr>
-        <p:txBody>
-          <a:bodyPr wrap="square" lIns="0" tIns="0" rIns="0" bIns="0" rtlCol="0" anchor="ctr"/>
-          <a:lstStyle/>
-          <a:p>
-            <a:pPr indent="0" marL="0">
-              <a:buNone/>
-            </a:pPr>
-            <a:r>
-              <a:rPr lang="en-US" sz="1100" b="1" dirty="0">
-                <a:solidFill>
-                  <a:srgbClr val="3B9DF5"/>
-                </a:solidFill>
-                <a:latin typeface="Arial" pitchFamily="34" charset="0"/>
-                <a:ea typeface="Arial" pitchFamily="34" charset="-122"/>
-                <a:cs typeface="Arial" pitchFamily="34" charset="-120"/>
-              </a:rPr>
-              <a:t>03</a:t>
-            </a:r>
-            <a:endParaRPr lang="en-US" sz="1100" dirty="0"/>
-          </a:p>
-        </p:txBody>
-      </p:sp>
-      <p:sp>
-        <p:nvSpPr>
-          <p:cNvPr id="14" name="Text 12"/>
-          <p:cNvSpPr/>
-          <p:nvPr/>
-        </p:nvSpPr>
-        <p:spPr>
-          <a:xfrm>
-            <a:off x="4855464" y="2633472"/>
-            <a:ext cx="1554480" cy="512064"/>
-          </a:xfrm>
-          <a:prstGeom prst="rect">
-            <a:avLst/>
-          </a:prstGeom>
-          <a:noFill/>
-          <a:ln/>
-        </p:spPr>
-        <p:txBody>
-          <a:bodyPr wrap="square" lIns="0" tIns="0" rIns="0" bIns="0" rtlCol="0" anchor="t"/>
-          <a:lstStyle/>
-          <a:p>
-            <a:pPr indent="0" marL="0">
-              <a:lnSpc>
-                <a:spcPts val="1800"/>
-              </a:lnSpc>
-              <a:buNone/>
-            </a:pPr>
-            <a:r>
-              <a:rPr lang="en-US" sz="1450" b="1" dirty="0">
-                <a:solidFill>
-                  <a:srgbClr val="FFFFFF"/>
-                </a:solidFill>
-                <a:latin typeface="Arial" pitchFamily="34" charset="0"/>
-                <a:ea typeface="Arial" pitchFamily="34" charset="-122"/>
-                <a:cs typeface="Arial" pitchFamily="34" charset="-120"/>
-              </a:rPr>
-              <a:t>gold</a:t>
-            </a:r>
-            <a:endParaRPr lang="en-US" sz="1450" dirty="0"/>
-          </a:p>
-        </p:txBody>
-      </p:sp>
-      <p:sp>
-        <p:nvSpPr>
-          <p:cNvPr id="15" name="Text 13"/>
-          <p:cNvSpPr/>
-          <p:nvPr/>
-        </p:nvSpPr>
-        <p:spPr>
-          <a:xfrm>
-            <a:off x="4855464" y="3163824"/>
-            <a:ext cx="1554480" cy="621792"/>
-          </a:xfrm>
-          <a:prstGeom prst="rect">
-            <a:avLst/>
-          </a:prstGeom>
-          <a:noFill/>
-          <a:ln/>
-        </p:spPr>
-        <p:txBody>
-          <a:bodyPr wrap="square" lIns="0" tIns="0" rIns="0" bIns="0" rtlCol="0" anchor="ctr"/>
-          <a:lstStyle/>
-          <a:p>
-            <a:pPr indent="0" marL="0">
-              <a:lnSpc>
-                <a:spcPts val="1400"/>
-              </a:lnSpc>
-              <a:buNone/>
-            </a:pPr>
-            <a:r>
-              <a:rPr lang="en-US" sz="1050" dirty="0">
-                <a:solidFill>
-                  <a:srgbClr val="9BAAC0"/>
-                </a:solidFill>
-                <a:latin typeface="Arial" pitchFamily="34" charset="0"/>
-                <a:ea typeface="Arial" pitchFamily="34" charset="-122"/>
-                <a:cs typeface="Arial" pitchFamily="34" charset="-120"/>
-              </a:rPr>
-              <a:t>Criada e vazia. Fatos e dimensões vêm depois</a:t>
-            </a:r>
-            <a:endParaRPr lang="en-US" sz="1050" dirty="0"/>
-          </a:p>
-        </p:txBody>
-      </p:sp>
-      <p:sp>
-        <p:nvSpPr>
-          <p:cNvPr id="16" name="Shape 14"/>
-          <p:cNvSpPr/>
-          <p:nvPr/>
-        </p:nvSpPr>
-        <p:spPr>
-          <a:xfrm>
-            <a:off x="6775704" y="2194560"/>
-            <a:ext cx="1956816" cy="1737360"/>
-          </a:xfrm>
-          <a:prstGeom prst="roundRect">
-            <a:avLst>
-              <a:gd name="adj" fmla="val 2632"/>
-            </a:avLst>
+        <p:txBody>
+          <a:bodyPr/>
+          <a:p/>
+        </p:txBody>
+      </p:sp>
+      <p:sp>
+        <p:nvSpPr>
+          <p:cNvPr id="9" name="Text 7"/>
+          <p:cNvSpPr/>
+          <p:nvPr/>
+        </p:nvSpPr>
+        <p:spPr>
+          <a:xfrm>
+            <a:off x="713232" y="2898648"/>
+            <a:ext cx="7955280" cy="347472"/>
+          </a:xfrm>
+          <a:prstGeom prst="rect">
+            <a:avLst/>
+          </a:prstGeom>
+          <a:noFill/>
+          <a:ln/>
+        </p:spPr>
+        <p:txBody>
+          <a:bodyPr wrap="square" lIns="0" tIns="0" rIns="0" bIns="0" rtlCol="0" anchor="ctr"/>
+          <a:lstStyle/>
+          <a:p>
+            <a:pPr indent="0" marL="0">
+              <a:buNone/>
+            </a:pPr>
+            <a:r>
+              <a:rPr lang="en-US" sz="1500" dirty="0">
+                <a:solidFill>
+                  <a:srgbClr val="D9CFD1"/>
+                </a:solidFill>
+                <a:latin typeface="Arial" pitchFamily="34" charset="0"/>
+                <a:ea typeface="Arial" pitchFamily="34" charset="-122"/>
+                <a:cs typeface="Arial" pitchFamily="34" charset="-120"/>
+              </a:rPr>
+              <a:t>Não é resposta errada em silêncio: é erro na cara, e isso é melhor</a:t>
+            </a:r>
+            <a:endParaRPr lang="en-US" sz="1500" dirty="0"/>
+          </a:p>
+        </p:txBody>
+      </p:sp>
+      <p:sp>
+        <p:nvSpPr>
+          <p:cNvPr id="10" name="Shape 8"/>
+          <p:cNvSpPr/>
+          <p:nvPr/>
+        </p:nvSpPr>
+        <p:spPr>
+          <a:xfrm>
+            <a:off x="457200" y="3419856"/>
+            <a:ext cx="91440" cy="91440"/>
+          </a:xfrm>
+          <a:prstGeom prst="ellipse">
+            <a:avLst/>
           </a:prstGeom>
           <a:solidFill>
-            <a:srgbClr val="0D1522"/>
+            <a:srgbClr val="3B9DF5"/>
           </a:solidFill>
           <a:ln w="12700">
             <a:solidFill>
-              <a:srgbClr val="1F3A5A"/>
+              <a:srgbClr val="333333"/>
             </a:solidFill>
             <a:prstDash val="solid"/>
           </a:ln>
         </p:spPr>
-      </p:sp>
-      <p:sp>
-        <p:nvSpPr>
-          <p:cNvPr id="17" name="Text 15"/>
-          <p:cNvSpPr/>
-          <p:nvPr/>
-        </p:nvSpPr>
-        <p:spPr>
-          <a:xfrm>
-            <a:off x="6976872" y="2359152"/>
-            <a:ext cx="1554480" cy="274320"/>
-          </a:xfrm>
-          <a:prstGeom prst="rect">
-            <a:avLst/>
-          </a:prstGeom>
-          <a:noFill/>
-          <a:ln/>
-        </p:spPr>
-        <p:txBody>
-          <a:bodyPr wrap="square" lIns="0" tIns="0" rIns="0" bIns="0" rtlCol="0" anchor="ctr"/>
-          <a:lstStyle/>
-          <a:p>
-            <a:pPr indent="0" marL="0">
-              <a:buNone/>
-            </a:pPr>
-            <a:r>
-              <a:rPr lang="en-US" sz="1100" b="1" dirty="0">
-                <a:solidFill>
-                  <a:srgbClr val="3B9DF5"/>
-                </a:solidFill>
-                <a:latin typeface="Arial" pitchFamily="34" charset="0"/>
-                <a:ea typeface="Arial" pitchFamily="34" charset="-122"/>
-                <a:cs typeface="Arial" pitchFamily="34" charset="-120"/>
-              </a:rPr>
-              <a:t>04</a:t>
-            </a:r>
-            <a:endParaRPr lang="en-US" sz="1100" dirty="0"/>
-          </a:p>
-        </p:txBody>
-      </p:sp>
-      <p:sp>
-        <p:nvSpPr>
-          <p:cNvPr id="18" name="Text 16"/>
-          <p:cNvSpPr/>
-          <p:nvPr/>
-        </p:nvSpPr>
-        <p:spPr>
-          <a:xfrm>
-            <a:off x="6976872" y="2633472"/>
-            <a:ext cx="1554480" cy="512064"/>
-          </a:xfrm>
-          <a:prstGeom prst="rect">
-            <a:avLst/>
-          </a:prstGeom>
-          <a:noFill/>
-          <a:ln/>
-        </p:spPr>
-        <p:txBody>
-          <a:bodyPr wrap="square" lIns="0" tIns="0" rIns="0" bIns="0" rtlCol="0" anchor="t"/>
-          <a:lstStyle/>
-          <a:p>
-            <a:pPr indent="0" marL="0">
-              <a:lnSpc>
-                <a:spcPts val="1800"/>
-              </a:lnSpc>
-              <a:buNone/>
-            </a:pPr>
-            <a:r>
-              <a:rPr lang="en-US" sz="1450" b="1" dirty="0">
-                <a:solidFill>
-                  <a:srgbClr val="FFFFFF"/>
-                </a:solidFill>
-                <a:latin typeface="Arial" pitchFamily="34" charset="0"/>
-                <a:ea typeface="Arial" pitchFamily="34" charset="-122"/>
-                <a:cs typeface="Arial" pitchFamily="34" charset="-120"/>
-              </a:rPr>
-              <a:t>job</a:t>
-            </a:r>
-            <a:endParaRPr lang="en-US" sz="1450" dirty="0"/>
-          </a:p>
-        </p:txBody>
-      </p:sp>
-      <p:sp>
-        <p:nvSpPr>
-          <p:cNvPr id="19" name="Text 17"/>
-          <p:cNvSpPr/>
-          <p:nvPr/>
-        </p:nvSpPr>
-        <p:spPr>
-          <a:xfrm>
-            <a:off x="6976872" y="3163824"/>
-            <a:ext cx="1554480" cy="621792"/>
-          </a:xfrm>
-          <a:prstGeom prst="rect">
-            <a:avLst/>
-          </a:prstGeom>
-          <a:noFill/>
-          <a:ln/>
-        </p:spPr>
-        <p:txBody>
-          <a:bodyPr wrap="square" lIns="0" tIns="0" rIns="0" bIns="0" rtlCol="0" anchor="ctr"/>
-          <a:lstStyle/>
-          <a:p>
-            <a:pPr indent="0" marL="0">
-              <a:lnSpc>
-                <a:spcPts val="1400"/>
-              </a:lnSpc>
-              <a:buNone/>
-            </a:pPr>
-            <a:r>
-              <a:rPr lang="en-US" sz="1050" dirty="0">
-                <a:solidFill>
-                  <a:srgbClr val="9BAAC0"/>
-                </a:solidFill>
-                <a:latin typeface="Arial" pitchFamily="34" charset="0"/>
-                <a:ea typeface="Arial" pitchFamily="34" charset="-122"/>
-                <a:cs typeface="Arial" pitchFamily="34" charset="-120"/>
-              </a:rPr>
-              <a:t>Deploy por bundle, 2 tarefas, 9 verificações passando</a:t>
-            </a:r>
-            <a:endParaRPr lang="en-US" sz="1050" dirty="0"/>
-          </a:p>
-        </p:txBody>
-      </p:sp>
-      <p:sp>
-        <p:nvSpPr>
-          <p:cNvPr id="20" name="Text 18"/>
+        <p:txBody>
+          <a:bodyPr/>
+          <a:p/>
+        </p:txBody>
+      </p:sp>
+      <p:sp>
+        <p:nvSpPr>
+          <p:cNvPr id="11" name="Text 9"/>
+          <p:cNvSpPr/>
+          <p:nvPr/>
+        </p:nvSpPr>
+        <p:spPr>
+          <a:xfrm>
+            <a:off x="713232" y="3319272"/>
+            <a:ext cx="7955280" cy="347472"/>
+          </a:xfrm>
+          <a:prstGeom prst="rect">
+            <a:avLst/>
+          </a:prstGeom>
+          <a:noFill/>
+          <a:ln/>
+        </p:spPr>
+        <p:txBody>
+          <a:bodyPr wrap="square" lIns="0" tIns="0" rIns="0" bIns="0" rtlCol="0" anchor="ctr"/>
+          <a:lstStyle/>
+          <a:p>
+            <a:pPr indent="0" marL="0">
+              <a:buNone/>
+            </a:pPr>
+            <a:r>
+              <a:rPr lang="en-US" sz="1500" dirty="0">
+                <a:solidFill>
+                  <a:srgbClr val="D9CFD1"/>
+                </a:solidFill>
+                <a:latin typeface="Arial" pitchFamily="34" charset="0"/>
+                <a:ea typeface="Arial" pitchFamily="34" charset="-122"/>
+                <a:cs typeface="Arial" pitchFamily="34" charset="-120"/>
+              </a:rPr>
+              <a:t>try_to_date devolve NULL em vez de quebrar — aí o coalesce tenta os dois formatos</a:t>
+            </a:r>
+            <a:endParaRPr lang="en-US" sz="1500" dirty="0"/>
+          </a:p>
+        </p:txBody>
+      </p:sp>
+      <p:sp>
+        <p:nvSpPr>
+          <p:cNvPr id="12" name="Shape 10"/>
+          <p:cNvSpPr/>
+          <p:nvPr/>
+        </p:nvSpPr>
+        <p:spPr>
+          <a:xfrm>
+            <a:off x="457200" y="3840480"/>
+            <a:ext cx="91440" cy="91440"/>
+          </a:xfrm>
+          <a:prstGeom prst="ellipse">
+            <a:avLst/>
+          </a:prstGeom>
+          <a:solidFill>
+            <a:srgbClr val="3B9DF5"/>
+          </a:solidFill>
+          <a:ln w="12700">
+            <a:solidFill>
+              <a:srgbClr val="333333"/>
+            </a:solidFill>
+            <a:prstDash val="solid"/>
+          </a:ln>
+        </p:spPr>
+        <p:txBody>
+          <a:bodyPr/>
+          <a:p/>
+        </p:txBody>
+      </p:sp>
+      <p:sp>
+        <p:nvSpPr>
+          <p:cNvPr id="13" name="Text 11"/>
+          <p:cNvSpPr/>
+          <p:nvPr/>
+        </p:nvSpPr>
+        <p:spPr>
+          <a:xfrm>
+            <a:off x="713232" y="3739896"/>
+            <a:ext cx="7955280" cy="347472"/>
+          </a:xfrm>
+          <a:prstGeom prst="rect">
+            <a:avLst/>
+          </a:prstGeom>
+          <a:noFill/>
+          <a:ln/>
+        </p:spPr>
+        <p:txBody>
+          <a:bodyPr wrap="square" lIns="0" tIns="0" rIns="0" bIns="0" rtlCol="0" anchor="ctr"/>
+          <a:lstStyle/>
+          <a:p>
+            <a:pPr indent="0" marL="0">
+              <a:buNone/>
+            </a:pPr>
+            <a:r>
+              <a:rPr lang="en-US" sz="1500" dirty="0">
+                <a:solidFill>
+                  <a:srgbClr val="D9CFD1"/>
+                </a:solidFill>
+                <a:latin typeface="Arial" pitchFamily="34" charset="0"/>
+                <a:ea typeface="Arial" pitchFamily="34" charset="-122"/>
+                <a:cs typeface="Arial" pitchFamily="34" charset="-120"/>
+              </a:rPr>
+              <a:t>Esse coalesce é um rascunho da camada silver. Amanhã ele vira pipeline</a:t>
+            </a:r>
+            <a:endParaRPr lang="en-US" sz="1500" dirty="0"/>
+          </a:p>
+        </p:txBody>
+      </p:sp>
+      <p:sp>
+        <p:nvSpPr>
+          <p:cNvPr id="14" name="Text 12"/>
+          <p:cNvSpPr/>
+          <p:nvPr/>
+        </p:nvSpPr>
+        <p:spPr>
+          <a:xfrm>
+            <a:off x="411480" y="4297680"/>
+            <a:ext cx="8229600" cy="365760"/>
+          </a:xfrm>
+          <a:prstGeom prst="rect">
+            <a:avLst/>
+          </a:prstGeom>
+          <a:noFill/>
+          <a:ln/>
+        </p:spPr>
+        <p:txBody>
+          <a:bodyPr wrap="square" lIns="0" tIns="0" rIns="0" bIns="0" rtlCol="0" anchor="ctr"/>
+          <a:lstStyle/>
+          <a:p>
+            <a:pPr indent="0" marL="0">
+              <a:buNone/>
+            </a:pPr>
+            <a:r>
+              <a:rPr lang="en-US" sz="1300" dirty="0">
+                <a:solidFill>
+                  <a:srgbClr val="7CC8FF"/>
+                </a:solidFill>
+                <a:latin typeface="Arial" pitchFamily="34" charset="0"/>
+                <a:ea typeface="Arial" pitchFamily="34" charset="-122"/>
+                <a:cs typeface="Arial" pitchFamily="34" charset="-120"/>
+              </a:rPr>
+              <a:t>Repara na ordem: eu rodo a query errada primeiro, de propósito. O erro é que explica por que a noite 2 existe.</a:t>
+            </a:r>
+            <a:endParaRPr lang="en-US" sz="1300" dirty="0"/>
+          </a:p>
+        </p:txBody>
+      </p:sp>
+      <p:sp>
+        <p:nvSpPr>
+          <p:cNvPr id="15" name="Text 13"/>
           <p:cNvSpPr/>
           <p:nvPr/>
         </p:nvSpPr>
@@ -39343,6 +39122,744 @@
 </file>
 
 <file path=ppt/slides/slide60.xml><?xml version="1.0" encoding="utf-8"?>
+<p:sld xmlns:a="http://schemas.openxmlformats.org/drawingml/2006/main" xmlns:p="http://schemas.openxmlformats.org/presentationml/2006/main" xmlns:r="http://schemas.openxmlformats.org/officeDocument/2006/relationships">
+  <p:cSld>
+    <p:spTree>
+      <p:nvGrpSpPr>
+        <p:cNvPr id="1" name=""/>
+        <p:cNvGrpSpPr/>
+        <p:nvPr/>
+      </p:nvGrpSpPr>
+      <p:grpSpPr/>
+      <p:sp>
+        <p:nvSpPr>
+          <p:cNvPr id="2" name="Text 0"/>
+          <p:cNvSpPr/>
+          <p:nvPr/>
+        </p:nvSpPr>
+        <p:spPr>
+          <a:xfrm>
+            <a:off x="411480" y="411480"/>
+            <a:ext cx="7315200" cy="256032"/>
+          </a:xfrm>
+          <a:prstGeom prst="rect">
+            <a:avLst/>
+          </a:prstGeom>
+          <a:noFill/>
+          <a:ln/>
+        </p:spPr>
+        <p:txBody>
+          <a:bodyPr wrap="square" lIns="0" tIns="0" rIns="0" bIns="0" rtlCol="0" anchor="ctr"/>
+          <a:lstStyle/>
+          <a:p>
+            <a:pPr indent="0" marL="0">
+              <a:buNone/>
+            </a:pPr>
+            <a:r>
+              <a:rPr lang="en-US" sz="1100" b="1" spc="160" kern="0" dirty="0">
+                <a:solidFill>
+                  <a:srgbClr val="3B9DF5"/>
+                </a:solidFill>
+                <a:latin typeface="Arial" pitchFamily="34" charset="0"/>
+                <a:ea typeface="Arial" pitchFamily="34" charset="-122"/>
+                <a:cs typeface="Arial" pitchFamily="34" charset="-120"/>
+              </a:rPr>
+              <a:t>ARQUITETURA MEDALLION</a:t>
+            </a:r>
+            <a:endParaRPr lang="en-US" sz="1100" dirty="0"/>
+          </a:p>
+        </p:txBody>
+      </p:sp>
+      <p:sp>
+        <p:nvSpPr>
+          <p:cNvPr id="3" name="Text 1"/>
+          <p:cNvSpPr/>
+          <p:nvPr/>
+        </p:nvSpPr>
+        <p:spPr>
+          <a:xfrm>
+            <a:off x="411480" y="822960"/>
+            <a:ext cx="8321040" cy="1005840"/>
+          </a:xfrm>
+          <a:prstGeom prst="rect">
+            <a:avLst/>
+          </a:prstGeom>
+          <a:noFill/>
+          <a:ln/>
+        </p:spPr>
+        <p:txBody>
+          <a:bodyPr wrap="square" lIns="0" tIns="0" rIns="0" bIns="0" rtlCol="0" anchor="ctr"/>
+          <a:lstStyle/>
+          <a:p>
+            <a:pPr indent="0" marL="0">
+              <a:lnSpc>
+                <a:spcPts val="4000"/>
+              </a:lnSpc>
+              <a:buNone/>
+            </a:pPr>
+            <a:r>
+              <a:rPr lang="en-US" sz="3200" b="1" dirty="0">
+                <a:solidFill>
+                  <a:srgbClr val="FFFFFF"/>
+                </a:solidFill>
+                <a:latin typeface="Arial" pitchFamily="34" charset="0"/>
+                <a:ea typeface="Arial" pitchFamily="34" charset="-122"/>
+                <a:cs typeface="Arial" pitchFamily="34" charset="-120"/>
+              </a:rPr>
+              <a:t>O que ficou de pé no catálogo</a:t>
+            </a:r>
+            <a:endParaRPr lang="en-US" sz="3200" dirty="0"/>
+          </a:p>
+        </p:txBody>
+      </p:sp>
+      <p:sp>
+        <p:nvSpPr>
+          <p:cNvPr id="4" name="Shape 2"/>
+          <p:cNvSpPr/>
+          <p:nvPr/>
+        </p:nvSpPr>
+        <p:spPr>
+          <a:xfrm>
+            <a:off x="411480" y="2194560"/>
+            <a:ext cx="1956816" cy="1737360"/>
+          </a:xfrm>
+          <a:prstGeom prst="roundRect">
+            <a:avLst>
+              <a:gd name="adj" fmla="val 2632"/>
+            </a:avLst>
+          </a:prstGeom>
+          <a:solidFill>
+            <a:srgbClr val="0D1522"/>
+          </a:solidFill>
+          <a:ln w="12700">
+            <a:solidFill>
+              <a:srgbClr val="1F3A5A"/>
+            </a:solidFill>
+            <a:prstDash val="solid"/>
+          </a:ln>
+        </p:spPr>
+      </p:sp>
+      <p:sp>
+        <p:nvSpPr>
+          <p:cNvPr id="5" name="Text 3"/>
+          <p:cNvSpPr/>
+          <p:nvPr/>
+        </p:nvSpPr>
+        <p:spPr>
+          <a:xfrm>
+            <a:off x="612648" y="2359152"/>
+            <a:ext cx="1554480" cy="274320"/>
+          </a:xfrm>
+          <a:prstGeom prst="rect">
+            <a:avLst/>
+          </a:prstGeom>
+          <a:noFill/>
+          <a:ln/>
+        </p:spPr>
+        <p:txBody>
+          <a:bodyPr wrap="square" lIns="0" tIns="0" rIns="0" bIns="0" rtlCol="0" anchor="ctr"/>
+          <a:lstStyle/>
+          <a:p>
+            <a:pPr indent="0" marL="0">
+              <a:buNone/>
+            </a:pPr>
+            <a:r>
+              <a:rPr lang="en-US" sz="1100" b="1" dirty="0">
+                <a:solidFill>
+                  <a:srgbClr val="3B9DF5"/>
+                </a:solidFill>
+                <a:latin typeface="Arial" pitchFamily="34" charset="0"/>
+                <a:ea typeface="Arial" pitchFamily="34" charset="-122"/>
+                <a:cs typeface="Arial" pitchFamily="34" charset="-120"/>
+              </a:rPr>
+              <a:t>01</a:t>
+            </a:r>
+            <a:endParaRPr lang="en-US" sz="1100" dirty="0"/>
+          </a:p>
+        </p:txBody>
+      </p:sp>
+      <p:sp>
+        <p:nvSpPr>
+          <p:cNvPr id="6" name="Text 4"/>
+          <p:cNvSpPr/>
+          <p:nvPr/>
+        </p:nvSpPr>
+        <p:spPr>
+          <a:xfrm>
+            <a:off x="612648" y="2633472"/>
+            <a:ext cx="1554480" cy="512064"/>
+          </a:xfrm>
+          <a:prstGeom prst="rect">
+            <a:avLst/>
+          </a:prstGeom>
+          <a:noFill/>
+          <a:ln/>
+        </p:spPr>
+        <p:txBody>
+          <a:bodyPr wrap="square" lIns="0" tIns="0" rIns="0" bIns="0" rtlCol="0" anchor="t"/>
+          <a:lstStyle/>
+          <a:p>
+            <a:pPr indent="0" marL="0">
+              <a:lnSpc>
+                <a:spcPts val="1800"/>
+              </a:lnSpc>
+              <a:buNone/>
+            </a:pPr>
+            <a:r>
+              <a:rPr lang="en-US" sz="1450" b="1" dirty="0">
+                <a:solidFill>
+                  <a:srgbClr val="FFFFFF"/>
+                </a:solidFill>
+                <a:latin typeface="Arial" pitchFamily="34" charset="0"/>
+                <a:ea typeface="Arial" pitchFamily="34" charset="-122"/>
+                <a:cs typeface="Arial" pitchFamily="34" charset="-120"/>
+              </a:rPr>
+              <a:t>bronze</a:t>
+            </a:r>
+            <a:endParaRPr lang="en-US" sz="1450" dirty="0"/>
+          </a:p>
+        </p:txBody>
+      </p:sp>
+      <p:sp>
+        <p:nvSpPr>
+          <p:cNvPr id="7" name="Text 5"/>
+          <p:cNvSpPr/>
+          <p:nvPr/>
+        </p:nvSpPr>
+        <p:spPr>
+          <a:xfrm>
+            <a:off x="612648" y="3163824"/>
+            <a:ext cx="1554480" cy="621792"/>
+          </a:xfrm>
+          <a:prstGeom prst="rect">
+            <a:avLst/>
+          </a:prstGeom>
+          <a:noFill/>
+          <a:ln/>
+        </p:spPr>
+        <p:txBody>
+          <a:bodyPr wrap="square" lIns="0" tIns="0" rIns="0" bIns="0" rtlCol="0" anchor="ctr"/>
+          <a:lstStyle/>
+          <a:p>
+            <a:pPr indent="0" marL="0">
+              <a:lnSpc>
+                <a:spcPts val="1400"/>
+              </a:lnSpc>
+              <a:buNone/>
+            </a:pPr>
+            <a:r>
+              <a:rPr lang="en-US" sz="1050" dirty="0">
+                <a:solidFill>
+                  <a:srgbClr val="9BAAC0"/>
+                </a:solidFill>
+                <a:latin typeface="Arial" pitchFamily="34" charset="0"/>
+                <a:ea typeface="Arial" pitchFamily="34" charset="-122"/>
+                <a:cs typeface="Arial" pitchFamily="34" charset="-120"/>
+              </a:rPr>
+              <a:t>10 tabelas, 313.551 linhas. Tudo texto, sujeira preservada</a:t>
+            </a:r>
+            <a:endParaRPr lang="en-US" sz="1050" dirty="0"/>
+          </a:p>
+        </p:txBody>
+      </p:sp>
+      <p:sp>
+        <p:nvSpPr>
+          <p:cNvPr id="8" name="Shape 6"/>
+          <p:cNvSpPr/>
+          <p:nvPr/>
+        </p:nvSpPr>
+        <p:spPr>
+          <a:xfrm>
+            <a:off x="2532888" y="2194560"/>
+            <a:ext cx="1956816" cy="1737360"/>
+          </a:xfrm>
+          <a:prstGeom prst="roundRect">
+            <a:avLst>
+              <a:gd name="adj" fmla="val 2632"/>
+            </a:avLst>
+          </a:prstGeom>
+          <a:solidFill>
+            <a:srgbClr val="0D1522"/>
+          </a:solidFill>
+          <a:ln w="12700">
+            <a:solidFill>
+              <a:srgbClr val="1F3A5A"/>
+            </a:solidFill>
+            <a:prstDash val="solid"/>
+          </a:ln>
+        </p:spPr>
+      </p:sp>
+      <p:sp>
+        <p:nvSpPr>
+          <p:cNvPr id="9" name="Text 7"/>
+          <p:cNvSpPr/>
+          <p:nvPr/>
+        </p:nvSpPr>
+        <p:spPr>
+          <a:xfrm>
+            <a:off x="2734056" y="2359152"/>
+            <a:ext cx="1554480" cy="274320"/>
+          </a:xfrm>
+          <a:prstGeom prst="rect">
+            <a:avLst/>
+          </a:prstGeom>
+          <a:noFill/>
+          <a:ln/>
+        </p:spPr>
+        <p:txBody>
+          <a:bodyPr wrap="square" lIns="0" tIns="0" rIns="0" bIns="0" rtlCol="0" anchor="ctr"/>
+          <a:lstStyle/>
+          <a:p>
+            <a:pPr indent="0" marL="0">
+              <a:buNone/>
+            </a:pPr>
+            <a:r>
+              <a:rPr lang="en-US" sz="1100" b="1" dirty="0">
+                <a:solidFill>
+                  <a:srgbClr val="3B9DF5"/>
+                </a:solidFill>
+                <a:latin typeface="Arial" pitchFamily="34" charset="0"/>
+                <a:ea typeface="Arial" pitchFamily="34" charset="-122"/>
+                <a:cs typeface="Arial" pitchFamily="34" charset="-120"/>
+              </a:rPr>
+              <a:t>02</a:t>
+            </a:r>
+            <a:endParaRPr lang="en-US" sz="1100" dirty="0"/>
+          </a:p>
+        </p:txBody>
+      </p:sp>
+      <p:sp>
+        <p:nvSpPr>
+          <p:cNvPr id="10" name="Text 8"/>
+          <p:cNvSpPr/>
+          <p:nvPr/>
+        </p:nvSpPr>
+        <p:spPr>
+          <a:xfrm>
+            <a:off x="2734056" y="2633472"/>
+            <a:ext cx="1554480" cy="512064"/>
+          </a:xfrm>
+          <a:prstGeom prst="rect">
+            <a:avLst/>
+          </a:prstGeom>
+          <a:noFill/>
+          <a:ln/>
+        </p:spPr>
+        <p:txBody>
+          <a:bodyPr wrap="square" lIns="0" tIns="0" rIns="0" bIns="0" rtlCol="0" anchor="t"/>
+          <a:lstStyle/>
+          <a:p>
+            <a:pPr indent="0" marL="0">
+              <a:lnSpc>
+                <a:spcPts val="1800"/>
+              </a:lnSpc>
+              <a:buNone/>
+            </a:pPr>
+            <a:r>
+              <a:rPr lang="en-US" sz="1450" b="1" dirty="0">
+                <a:solidFill>
+                  <a:srgbClr val="FFFFFF"/>
+                </a:solidFill>
+                <a:latin typeface="Arial" pitchFamily="34" charset="0"/>
+                <a:ea typeface="Arial" pitchFamily="34" charset="-122"/>
+                <a:cs typeface="Arial" pitchFamily="34" charset="-120"/>
+              </a:rPr>
+              <a:t>silver</a:t>
+            </a:r>
+            <a:endParaRPr lang="en-US" sz="1450" dirty="0"/>
+          </a:p>
+        </p:txBody>
+      </p:sp>
+      <p:sp>
+        <p:nvSpPr>
+          <p:cNvPr id="11" name="Text 9"/>
+          <p:cNvSpPr/>
+          <p:nvPr/>
+        </p:nvSpPr>
+        <p:spPr>
+          <a:xfrm>
+            <a:off x="2734056" y="3163824"/>
+            <a:ext cx="1554480" cy="621792"/>
+          </a:xfrm>
+          <a:prstGeom prst="rect">
+            <a:avLst/>
+          </a:prstGeom>
+          <a:noFill/>
+          <a:ln/>
+        </p:spPr>
+        <p:txBody>
+          <a:bodyPr wrap="square" lIns="0" tIns="0" rIns="0" bIns="0" rtlCol="0" anchor="ctr"/>
+          <a:lstStyle/>
+          <a:p>
+            <a:pPr indent="0" marL="0">
+              <a:lnSpc>
+                <a:spcPts val="1400"/>
+              </a:lnSpc>
+              <a:buNone/>
+            </a:pPr>
+            <a:r>
+              <a:rPr lang="en-US" sz="1050" dirty="0">
+                <a:solidFill>
+                  <a:srgbClr val="9BAAC0"/>
+                </a:solidFill>
+                <a:latin typeface="Arial" pitchFamily="34" charset="0"/>
+                <a:ea typeface="Arial" pitchFamily="34" charset="-122"/>
+                <a:cs typeface="Arial" pitchFamily="34" charset="-120"/>
+              </a:rPr>
+              <a:t>Criada e vazia. É o trabalho de amanhã</a:t>
+            </a:r>
+            <a:endParaRPr lang="en-US" sz="1050" dirty="0"/>
+          </a:p>
+        </p:txBody>
+      </p:sp>
+      <p:sp>
+        <p:nvSpPr>
+          <p:cNvPr id="12" name="Shape 10"/>
+          <p:cNvSpPr/>
+          <p:nvPr/>
+        </p:nvSpPr>
+        <p:spPr>
+          <a:xfrm>
+            <a:off x="4654296" y="2194560"/>
+            <a:ext cx="1956816" cy="1737360"/>
+          </a:xfrm>
+          <a:prstGeom prst="roundRect">
+            <a:avLst>
+              <a:gd name="adj" fmla="val 2632"/>
+            </a:avLst>
+          </a:prstGeom>
+          <a:solidFill>
+            <a:srgbClr val="0D1522"/>
+          </a:solidFill>
+          <a:ln w="12700">
+            <a:solidFill>
+              <a:srgbClr val="1F3A5A"/>
+            </a:solidFill>
+            <a:prstDash val="solid"/>
+          </a:ln>
+        </p:spPr>
+      </p:sp>
+      <p:sp>
+        <p:nvSpPr>
+          <p:cNvPr id="13" name="Text 11"/>
+          <p:cNvSpPr/>
+          <p:nvPr/>
+        </p:nvSpPr>
+        <p:spPr>
+          <a:xfrm>
+            <a:off x="4855464" y="2359152"/>
+            <a:ext cx="1554480" cy="274320"/>
+          </a:xfrm>
+          <a:prstGeom prst="rect">
+            <a:avLst/>
+          </a:prstGeom>
+          <a:noFill/>
+          <a:ln/>
+        </p:spPr>
+        <p:txBody>
+          <a:bodyPr wrap="square" lIns="0" tIns="0" rIns="0" bIns="0" rtlCol="0" anchor="ctr"/>
+          <a:lstStyle/>
+          <a:p>
+            <a:pPr indent="0" marL="0">
+              <a:buNone/>
+            </a:pPr>
+            <a:r>
+              <a:rPr lang="en-US" sz="1100" b="1" dirty="0">
+                <a:solidFill>
+                  <a:srgbClr val="3B9DF5"/>
+                </a:solidFill>
+                <a:latin typeface="Arial" pitchFamily="34" charset="0"/>
+                <a:ea typeface="Arial" pitchFamily="34" charset="-122"/>
+                <a:cs typeface="Arial" pitchFamily="34" charset="-120"/>
+              </a:rPr>
+              <a:t>03</a:t>
+            </a:r>
+            <a:endParaRPr lang="en-US" sz="1100" dirty="0"/>
+          </a:p>
+        </p:txBody>
+      </p:sp>
+      <p:sp>
+        <p:nvSpPr>
+          <p:cNvPr id="14" name="Text 12"/>
+          <p:cNvSpPr/>
+          <p:nvPr/>
+        </p:nvSpPr>
+        <p:spPr>
+          <a:xfrm>
+            <a:off x="4855464" y="2633472"/>
+            <a:ext cx="1554480" cy="512064"/>
+          </a:xfrm>
+          <a:prstGeom prst="rect">
+            <a:avLst/>
+          </a:prstGeom>
+          <a:noFill/>
+          <a:ln/>
+        </p:spPr>
+        <p:txBody>
+          <a:bodyPr wrap="square" lIns="0" tIns="0" rIns="0" bIns="0" rtlCol="0" anchor="t"/>
+          <a:lstStyle/>
+          <a:p>
+            <a:pPr indent="0" marL="0">
+              <a:lnSpc>
+                <a:spcPts val="1800"/>
+              </a:lnSpc>
+              <a:buNone/>
+            </a:pPr>
+            <a:r>
+              <a:rPr lang="en-US" sz="1450" b="1" dirty="0">
+                <a:solidFill>
+                  <a:srgbClr val="FFFFFF"/>
+                </a:solidFill>
+                <a:latin typeface="Arial" pitchFamily="34" charset="0"/>
+                <a:ea typeface="Arial" pitchFamily="34" charset="-122"/>
+                <a:cs typeface="Arial" pitchFamily="34" charset="-120"/>
+              </a:rPr>
+              <a:t>gold</a:t>
+            </a:r>
+            <a:endParaRPr lang="en-US" sz="1450" dirty="0"/>
+          </a:p>
+        </p:txBody>
+      </p:sp>
+      <p:sp>
+        <p:nvSpPr>
+          <p:cNvPr id="15" name="Text 13"/>
+          <p:cNvSpPr/>
+          <p:nvPr/>
+        </p:nvSpPr>
+        <p:spPr>
+          <a:xfrm>
+            <a:off x="4855464" y="3163824"/>
+            <a:ext cx="1554480" cy="621792"/>
+          </a:xfrm>
+          <a:prstGeom prst="rect">
+            <a:avLst/>
+          </a:prstGeom>
+          <a:noFill/>
+          <a:ln/>
+        </p:spPr>
+        <p:txBody>
+          <a:bodyPr wrap="square" lIns="0" tIns="0" rIns="0" bIns="0" rtlCol="0" anchor="ctr"/>
+          <a:lstStyle/>
+          <a:p>
+            <a:pPr indent="0" marL="0">
+              <a:lnSpc>
+                <a:spcPts val="1400"/>
+              </a:lnSpc>
+              <a:buNone/>
+            </a:pPr>
+            <a:r>
+              <a:rPr lang="en-US" sz="1050" dirty="0">
+                <a:solidFill>
+                  <a:srgbClr val="9BAAC0"/>
+                </a:solidFill>
+                <a:latin typeface="Arial" pitchFamily="34" charset="0"/>
+                <a:ea typeface="Arial" pitchFamily="34" charset="-122"/>
+                <a:cs typeface="Arial" pitchFamily="34" charset="-120"/>
+              </a:rPr>
+              <a:t>Criada e vazia. Fatos e dimensões vêm depois</a:t>
+            </a:r>
+            <a:endParaRPr lang="en-US" sz="1050" dirty="0"/>
+          </a:p>
+        </p:txBody>
+      </p:sp>
+      <p:sp>
+        <p:nvSpPr>
+          <p:cNvPr id="16" name="Shape 14"/>
+          <p:cNvSpPr/>
+          <p:nvPr/>
+        </p:nvSpPr>
+        <p:spPr>
+          <a:xfrm>
+            <a:off x="6775704" y="2194560"/>
+            <a:ext cx="1956816" cy="1737360"/>
+          </a:xfrm>
+          <a:prstGeom prst="roundRect">
+            <a:avLst>
+              <a:gd name="adj" fmla="val 2632"/>
+            </a:avLst>
+          </a:prstGeom>
+          <a:solidFill>
+            <a:srgbClr val="0D1522"/>
+          </a:solidFill>
+          <a:ln w="12700">
+            <a:solidFill>
+              <a:srgbClr val="1F3A5A"/>
+            </a:solidFill>
+            <a:prstDash val="solid"/>
+          </a:ln>
+        </p:spPr>
+      </p:sp>
+      <p:sp>
+        <p:nvSpPr>
+          <p:cNvPr id="17" name="Text 15"/>
+          <p:cNvSpPr/>
+          <p:nvPr/>
+        </p:nvSpPr>
+        <p:spPr>
+          <a:xfrm>
+            <a:off x="6976872" y="2359152"/>
+            <a:ext cx="1554480" cy="274320"/>
+          </a:xfrm>
+          <a:prstGeom prst="rect">
+            <a:avLst/>
+          </a:prstGeom>
+          <a:noFill/>
+          <a:ln/>
+        </p:spPr>
+        <p:txBody>
+          <a:bodyPr wrap="square" lIns="0" tIns="0" rIns="0" bIns="0" rtlCol="0" anchor="ctr"/>
+          <a:lstStyle/>
+          <a:p>
+            <a:pPr indent="0" marL="0">
+              <a:buNone/>
+            </a:pPr>
+            <a:r>
+              <a:rPr lang="en-US" sz="1100" b="1" dirty="0">
+                <a:solidFill>
+                  <a:srgbClr val="3B9DF5"/>
+                </a:solidFill>
+                <a:latin typeface="Arial" pitchFamily="34" charset="0"/>
+                <a:ea typeface="Arial" pitchFamily="34" charset="-122"/>
+                <a:cs typeface="Arial" pitchFamily="34" charset="-120"/>
+              </a:rPr>
+              <a:t>04</a:t>
+            </a:r>
+            <a:endParaRPr lang="en-US" sz="1100" dirty="0"/>
+          </a:p>
+        </p:txBody>
+      </p:sp>
+      <p:sp>
+        <p:nvSpPr>
+          <p:cNvPr id="18" name="Text 16"/>
+          <p:cNvSpPr/>
+          <p:nvPr/>
+        </p:nvSpPr>
+        <p:spPr>
+          <a:xfrm>
+            <a:off x="6976872" y="2633472"/>
+            <a:ext cx="1554480" cy="512064"/>
+          </a:xfrm>
+          <a:prstGeom prst="rect">
+            <a:avLst/>
+          </a:prstGeom>
+          <a:noFill/>
+          <a:ln/>
+        </p:spPr>
+        <p:txBody>
+          <a:bodyPr wrap="square" lIns="0" tIns="0" rIns="0" bIns="0" rtlCol="0" anchor="t"/>
+          <a:lstStyle/>
+          <a:p>
+            <a:pPr indent="0" marL="0">
+              <a:lnSpc>
+                <a:spcPts val="1800"/>
+              </a:lnSpc>
+              <a:buNone/>
+            </a:pPr>
+            <a:r>
+              <a:rPr lang="en-US" sz="1450" b="1" dirty="0">
+                <a:solidFill>
+                  <a:srgbClr val="FFFFFF"/>
+                </a:solidFill>
+                <a:latin typeface="Arial" pitchFamily="34" charset="0"/>
+                <a:ea typeface="Arial" pitchFamily="34" charset="-122"/>
+                <a:cs typeface="Arial" pitchFamily="34" charset="-120"/>
+              </a:rPr>
+              <a:t>job</a:t>
+            </a:r>
+            <a:endParaRPr lang="en-US" sz="1450" dirty="0"/>
+          </a:p>
+        </p:txBody>
+      </p:sp>
+      <p:sp>
+        <p:nvSpPr>
+          <p:cNvPr id="19" name="Text 17"/>
+          <p:cNvSpPr/>
+          <p:nvPr/>
+        </p:nvSpPr>
+        <p:spPr>
+          <a:xfrm>
+            <a:off x="6976872" y="3163824"/>
+            <a:ext cx="1554480" cy="621792"/>
+          </a:xfrm>
+          <a:prstGeom prst="rect">
+            <a:avLst/>
+          </a:prstGeom>
+          <a:noFill/>
+          <a:ln/>
+        </p:spPr>
+        <p:txBody>
+          <a:bodyPr wrap="square" lIns="0" tIns="0" rIns="0" bIns="0" rtlCol="0" anchor="ctr"/>
+          <a:lstStyle/>
+          <a:p>
+            <a:pPr indent="0" marL="0">
+              <a:lnSpc>
+                <a:spcPts val="1400"/>
+              </a:lnSpc>
+              <a:buNone/>
+            </a:pPr>
+            <a:r>
+              <a:rPr lang="en-US" sz="1050" dirty="0">
+                <a:solidFill>
+                  <a:srgbClr val="9BAAC0"/>
+                </a:solidFill>
+                <a:latin typeface="Arial" pitchFamily="34" charset="0"/>
+                <a:ea typeface="Arial" pitchFamily="34" charset="-122"/>
+                <a:cs typeface="Arial" pitchFamily="34" charset="-120"/>
+              </a:rPr>
+              <a:t>Deploy por bundle, 2 tarefas, 9 verificações passando</a:t>
+            </a:r>
+            <a:endParaRPr lang="en-US" sz="1050" dirty="0"/>
+          </a:p>
+        </p:txBody>
+      </p:sp>
+      <p:sp>
+        <p:nvSpPr>
+          <p:cNvPr id="20" name="Text 18"/>
+          <p:cNvSpPr/>
+          <p:nvPr/>
+        </p:nvSpPr>
+        <p:spPr>
+          <a:xfrm>
+            <a:off x="411480" y="4681728"/>
+            <a:ext cx="2743200" cy="228600"/>
+          </a:xfrm>
+          <a:prstGeom prst="rect">
+            <a:avLst/>
+          </a:prstGeom>
+          <a:noFill/>
+          <a:ln/>
+        </p:spPr>
+        <p:txBody>
+          <a:bodyPr wrap="square" lIns="0" tIns="0" rIns="0" bIns="0" rtlCol="0" anchor="ctr"/>
+          <a:lstStyle/>
+          <a:p>
+            <a:pPr indent="0" marL="0">
+              <a:buNone/>
+            </a:pPr>
+            <a:r>
+              <a:rPr lang="en-US" sz="800" b="1" spc="200" kern="0" dirty="0">
+                <a:solidFill>
+                  <a:srgbClr val="566A85"/>
+                </a:solidFill>
+                <a:latin typeface="Arial" pitchFamily="34" charset="0"/>
+                <a:ea typeface="Arial" pitchFamily="34" charset="-122"/>
+                <a:cs typeface="Arial" pitchFamily="34" charset="-120"/>
+              </a:rPr>
+              <a:t>JORNADA DE DADOS</a:t>
+            </a:r>
+            <a:endParaRPr lang="en-US" sz="800" dirty="0"/>
+          </a:p>
+        </p:txBody>
+      </p:sp>
+    </p:spTree>
+  </p:cSld>
+  <p:clrMapOvr>
+    <a:masterClrMapping/>
+  </p:clrMapOvr>
+</p:sld>
+</file>
+
+<file path=ppt/slides/slide61.xml><?xml version="1.0" encoding="utf-8"?>
 <p:sld xmlns:a="http://schemas.openxmlformats.org/drawingml/2006/main" xmlns:r="http://schemas.openxmlformats.org/officeDocument/2006/relationships" xmlns:p="http://schemas.openxmlformats.org/presentationml/2006/main">
   <p:cSld name="Slide 42">
     <p:bg>
@@ -40094,7 +40611,7 @@
 </p:sld>
 </file>
 
-<file path=ppt/slides/slide61.xml><?xml version="1.0" encoding="utf-8"?>
+<file path=ppt/slides/slide62.xml><?xml version="1.0" encoding="utf-8"?>
 <p:sld xmlns:a="http://schemas.openxmlformats.org/drawingml/2006/main" xmlns:r="http://schemas.openxmlformats.org/officeDocument/2006/relationships" xmlns:p="http://schemas.openxmlformats.org/presentationml/2006/main">
   <p:cSld name="Slide 43">
     <p:bg>
@@ -40542,7 +41059,7 @@
 </p:sld>
 </file>
 
-<file path=ppt/slides/slide62.xml><?xml version="1.0" encoding="utf-8"?>
+<file path=ppt/slides/slide63.xml><?xml version="1.0" encoding="utf-8"?>
 <p:sld xmlns:a="http://schemas.openxmlformats.org/drawingml/2006/main" xmlns:r="http://schemas.openxmlformats.org/officeDocument/2006/relationships" xmlns:p="http://schemas.openxmlformats.org/presentationml/2006/main">
   <p:cSld name="Slide 44">
     <p:bg>
@@ -42014,7 +42531,7 @@
 </p:sld>
 </file>
 
-<file path=ppt/slides/slide63.xml><?xml version="1.0" encoding="utf-8"?>
+<file path=ppt/slides/slide64.xml><?xml version="1.0" encoding="utf-8"?>
 <p:sld xmlns:a="http://schemas.openxmlformats.org/drawingml/2006/main" xmlns:r="http://schemas.openxmlformats.org/officeDocument/2006/relationships" xmlns:p="http://schemas.openxmlformats.org/presentationml/2006/main">
   <p:cSld name="Slide 45">
     <p:bg>
@@ -42572,7 +43089,7 @@
 </p:sld>
 </file>
 
-<file path=ppt/slides/slide64.xml><?xml version="1.0" encoding="utf-8"?>
+<file path=ppt/slides/slide65.xml><?xml version="1.0" encoding="utf-8"?>
 <p:sld xmlns:a="http://schemas.openxmlformats.org/drawingml/2006/main" xmlns:r="http://schemas.openxmlformats.org/officeDocument/2006/relationships" xmlns:p="http://schemas.openxmlformats.org/presentationml/2006/main">
   <p:cSld name="Slide 46">
     <p:bg>
@@ -43315,7 +43832,7 @@
 </p:sld>
 </file>
 
-<file path=ppt/slides/slide65.xml><?xml version="1.0" encoding="utf-8"?>
+<file path=ppt/slides/slide66.xml><?xml version="1.0" encoding="utf-8"?>
 <p:sld xmlns:a="http://schemas.openxmlformats.org/drawingml/2006/main" xmlns:r="http://schemas.openxmlformats.org/officeDocument/2006/relationships" xmlns:p="http://schemas.openxmlformats.org/presentationml/2006/main">
   <p:cSld name="Slide 47">
     <p:bg>
@@ -43732,7 +44249,7 @@
 </p:sld>
 </file>
 
-<file path=ppt/slides/slide66.xml><?xml version="1.0" encoding="utf-8"?>
+<file path=ppt/slides/slide67.xml><?xml version="1.0" encoding="utf-8"?>
 <p:sld xmlns:a="http://schemas.openxmlformats.org/drawingml/2006/main" xmlns:r="http://schemas.openxmlformats.org/officeDocument/2006/relationships" xmlns:p="http://schemas.openxmlformats.org/presentationml/2006/main">
   <p:cSld name="Slide 48">
     <p:bg>
@@ -44514,7 +45031,7 @@
 </p:sld>
 </file>
 
-<file path=ppt/slides/slide67.xml><?xml version="1.0" encoding="utf-8"?>
+<file path=ppt/slides/slide68.xml><?xml version="1.0" encoding="utf-8"?>
 <p:sld xmlns:a="http://schemas.openxmlformats.org/drawingml/2006/main" xmlns:r="http://schemas.openxmlformats.org/officeDocument/2006/relationships" xmlns:p="http://schemas.openxmlformats.org/presentationml/2006/main">
   <p:cSld name="Slide 49">
     <p:bg>
@@ -44748,523 +45265,6 @@
       <p:sp>
         <p:nvSpPr>
           <p:cNvPr id="7" name="Text 5"/>
-          <p:cNvSpPr/>
-          <p:nvPr/>
-        </p:nvSpPr>
-        <p:spPr>
-          <a:xfrm>
-            <a:off x="411480" y="4681728"/>
-            <a:ext cx="2743200" cy="228600"/>
-          </a:xfrm>
-          <a:prstGeom prst="rect">
-            <a:avLst/>
-          </a:prstGeom>
-          <a:noFill/>
-          <a:ln/>
-        </p:spPr>
-        <p:txBody>
-          <a:bodyPr wrap="square" lIns="0" tIns="0" rIns="0" bIns="0" rtlCol="0" anchor="ctr"/>
-          <a:lstStyle/>
-          <a:p>
-            <a:pPr indent="0" marL="0">
-              <a:buNone/>
-            </a:pPr>
-            <a:r>
-              <a:rPr lang="en-US" sz="800" b="1" spc="200" kern="0" dirty="0">
-                <a:solidFill>
-                  <a:srgbClr val="566A85"/>
-                </a:solidFill>
-                <a:latin typeface="Arial" pitchFamily="34" charset="0"/>
-                <a:ea typeface="Arial" pitchFamily="34" charset="-122"/>
-                <a:cs typeface="Arial" pitchFamily="34" charset="-120"/>
-              </a:rPr>
-              <a:t>JORNADA DE DADOS</a:t>
-            </a:r>
-            <a:endParaRPr lang="en-US" sz="800" dirty="0"/>
-          </a:p>
-        </p:txBody>
-      </p:sp>
-    </p:spTree>
-  </p:cSld>
-  <p:clrMapOvr>
-    <a:masterClrMapping/>
-  </p:clrMapOvr>
-</p:sld>
-</file>
-
-<file path=ppt/slides/slide68.xml><?xml version="1.0" encoding="utf-8"?>
-<p:sld xmlns:a="http://schemas.openxmlformats.org/drawingml/2006/main" xmlns:p="http://schemas.openxmlformats.org/presentationml/2006/main" xmlns:r="http://schemas.openxmlformats.org/officeDocument/2006/relationships">
-  <p:cSld>
-    <p:spTree>
-      <p:nvGrpSpPr>
-        <p:cNvPr id="1" name=""/>
-        <p:cNvGrpSpPr/>
-        <p:nvPr/>
-      </p:nvGrpSpPr>
-      <p:grpSpPr/>
-      <p:sp>
-        <p:nvSpPr>
-          <p:cNvPr id="2" name="Text 0"/>
-          <p:cNvSpPr/>
-          <p:nvPr/>
-        </p:nvSpPr>
-        <p:spPr>
-          <a:xfrm>
-            <a:off x="411480" y="411480"/>
-            <a:ext cx="7315200" cy="256032"/>
-          </a:xfrm>
-          <a:prstGeom prst="rect">
-            <a:avLst/>
-          </a:prstGeom>
-          <a:noFill/>
-          <a:ln/>
-        </p:spPr>
-        <p:txBody>
-          <a:bodyPr wrap="square" lIns="0" tIns="0" rIns="0" bIns="0" rtlCol="0" anchor="ctr"/>
-          <a:lstStyle/>
-          <a:p>
-            <a:pPr indent="0" marL="0">
-              <a:buNone/>
-            </a:pPr>
-            <a:r>
-              <a:rPr lang="en-US" sz="1100" b="1" spc="160" kern="0" dirty="0">
-                <a:solidFill>
-                  <a:srgbClr val="3B9DF5"/>
-                </a:solidFill>
-                <a:latin typeface="Arial" pitchFamily="34" charset="0"/>
-                <a:ea typeface="Arial" pitchFamily="34" charset="-122"/>
-                <a:cs typeface="Arial" pitchFamily="34" charset="-120"/>
-              </a:rPr>
-              <a:t>DA DINÂMICA PARA O CÓDIGO</a:t>
-            </a:r>
-            <a:endParaRPr lang="en-US" sz="1100" dirty="0"/>
-          </a:p>
-        </p:txBody>
-      </p:sp>
-      <p:sp>
-        <p:nvSpPr>
-          <p:cNvPr id="3" name="Text 1"/>
-          <p:cNvSpPr/>
-          <p:nvPr/>
-        </p:nvSpPr>
-        <p:spPr>
-          <a:xfrm>
-            <a:off x="411480" y="822960"/>
-            <a:ext cx="8321040" cy="1005840"/>
-          </a:xfrm>
-          <a:prstGeom prst="rect">
-            <a:avLst/>
-          </a:prstGeom>
-          <a:noFill/>
-          <a:ln/>
-        </p:spPr>
-        <p:txBody>
-          <a:bodyPr wrap="square" lIns="0" tIns="0" rIns="0" bIns="0" rtlCol="0" anchor="ctr"/>
-          <a:lstStyle/>
-          <a:p>
-            <a:pPr indent="0" marL="0">
-              <a:lnSpc>
-                <a:spcPts val="4000"/>
-              </a:lnSpc>
-              <a:buNone/>
-            </a:pPr>
-            <a:r>
-              <a:rPr lang="en-US" sz="3100" b="1" dirty="0">
-                <a:solidFill>
-                  <a:srgbClr val="FFFFFF"/>
-                </a:solidFill>
-                <a:latin typeface="Arial" pitchFamily="34" charset="0"/>
-                <a:ea typeface="Arial" pitchFamily="34" charset="-122"/>
-                <a:cs typeface="Arial" pitchFamily="34" charset="-120"/>
-              </a:rPr>
-              <a:t>Cada pergunta vira uma query</a:t>
-            </a:r>
-            <a:endParaRPr lang="en-US" sz="3100" dirty="0"/>
-          </a:p>
-        </p:txBody>
-      </p:sp>
-      <p:sp>
-        <p:nvSpPr>
-          <p:cNvPr id="4" name="Shape 2"/>
-          <p:cNvSpPr/>
-          <p:nvPr/>
-        </p:nvSpPr>
-        <p:spPr>
-          <a:xfrm>
-            <a:off x="457200" y="2157984"/>
-            <a:ext cx="91440" cy="91440"/>
-          </a:xfrm>
-          <a:prstGeom prst="ellipse">
-            <a:avLst/>
-          </a:prstGeom>
-          <a:solidFill>
-            <a:srgbClr val="3B9DF5"/>
-          </a:solidFill>
-          <a:ln w="12700">
-            <a:solidFill>
-              <a:srgbClr val="333333"/>
-            </a:solidFill>
-            <a:prstDash val="solid"/>
-          </a:ln>
-        </p:spPr>
-        <p:txBody>
-          <a:bodyPr/>
-          <a:p/>
-        </p:txBody>
-      </p:sp>
-      <p:sp>
-        <p:nvSpPr>
-          <p:cNvPr id="5" name="Text 3"/>
-          <p:cNvSpPr/>
-          <p:nvPr/>
-        </p:nvSpPr>
-        <p:spPr>
-          <a:xfrm>
-            <a:off x="713232" y="2057400"/>
-            <a:ext cx="7955280" cy="347472"/>
-          </a:xfrm>
-          <a:prstGeom prst="rect">
-            <a:avLst/>
-          </a:prstGeom>
-          <a:noFill/>
-          <a:ln/>
-        </p:spPr>
-        <p:txBody>
-          <a:bodyPr wrap="square" lIns="0" tIns="0" rIns="0" bIns="0" rtlCol="0" anchor="ctr"/>
-          <a:lstStyle/>
-          <a:p>
-            <a:pPr indent="0" marL="0">
-              <a:buNone/>
-            </a:pPr>
-            <a:r>
-              <a:rPr lang="en-US" sz="1500" dirty="0">
-                <a:solidFill>
-                  <a:srgbClr val="D9CFD1"/>
-                </a:solidFill>
-                <a:latin typeface="Arial" pitchFamily="34" charset="0"/>
-                <a:ea typeface="Arial" pitchFamily="34" charset="-122"/>
-                <a:cs typeface="Arial" pitchFamily="34" charset="-120"/>
-              </a:rPr>
-              <a:t>'Quem vai comprar?' → última compra + ritmo do cliente · noite 3, exemplo 01</a:t>
-            </a:r>
-            <a:endParaRPr lang="en-US" sz="1500" dirty="0"/>
-          </a:p>
-        </p:txBody>
-      </p:sp>
-      <p:sp>
-        <p:nvSpPr>
-          <p:cNvPr id="6" name="Shape 4"/>
-          <p:cNvSpPr/>
-          <p:nvPr/>
-        </p:nvSpPr>
-        <p:spPr>
-          <a:xfrm>
-            <a:off x="457200" y="2578608"/>
-            <a:ext cx="91440" cy="91440"/>
-          </a:xfrm>
-          <a:prstGeom prst="ellipse">
-            <a:avLst/>
-          </a:prstGeom>
-          <a:solidFill>
-            <a:srgbClr val="3B9DF5"/>
-          </a:solidFill>
-          <a:ln w="12700">
-            <a:solidFill>
-              <a:srgbClr val="333333"/>
-            </a:solidFill>
-            <a:prstDash val="solid"/>
-          </a:ln>
-        </p:spPr>
-        <p:txBody>
-          <a:bodyPr/>
-          <a:p/>
-        </p:txBody>
-      </p:sp>
-      <p:sp>
-        <p:nvSpPr>
-          <p:cNvPr id="7" name="Text 5"/>
-          <p:cNvSpPr/>
-          <p:nvPr/>
-        </p:nvSpPr>
-        <p:spPr>
-          <a:xfrm>
-            <a:off x="713232" y="2478024"/>
-            <a:ext cx="7955280" cy="347472"/>
-          </a:xfrm>
-          <a:prstGeom prst="rect">
-            <a:avLst/>
-          </a:prstGeom>
-          <a:noFill/>
-          <a:ln/>
-        </p:spPr>
-        <p:txBody>
-          <a:bodyPr wrap="square" lIns="0" tIns="0" rIns="0" bIns="0" rtlCol="0" anchor="ctr"/>
-          <a:lstStyle/>
-          <a:p>
-            <a:pPr indent="0" marL="0">
-              <a:buNone/>
-            </a:pPr>
-            <a:r>
-              <a:rPr lang="en-US" sz="1500" dirty="0">
-                <a:solidFill>
-                  <a:srgbClr val="D9CFD1"/>
-                </a:solidFill>
-                <a:latin typeface="Arial" pitchFamily="34" charset="0"/>
-                <a:ea typeface="Arial" pitchFamily="34" charset="-122"/>
-                <a:cs typeface="Arial" pitchFamily="34" charset="-120"/>
-              </a:rPr>
-              <a:t>'Quem está sumindo?' → recência contra o ritmo dele · noite 3, exemplo 02</a:t>
-            </a:r>
-            <a:endParaRPr lang="en-US" sz="1500" dirty="0"/>
-          </a:p>
-        </p:txBody>
-      </p:sp>
-      <p:sp>
-        <p:nvSpPr>
-          <p:cNvPr id="8" name="Shape 6"/>
-          <p:cNvSpPr/>
-          <p:nvPr/>
-        </p:nvSpPr>
-        <p:spPr>
-          <a:xfrm>
-            <a:off x="457200" y="2999232"/>
-            <a:ext cx="91440" cy="91440"/>
-          </a:xfrm>
-          <a:prstGeom prst="ellipse">
-            <a:avLst/>
-          </a:prstGeom>
-          <a:solidFill>
-            <a:srgbClr val="3B9DF5"/>
-          </a:solidFill>
-          <a:ln w="12700">
-            <a:solidFill>
-              <a:srgbClr val="333333"/>
-            </a:solidFill>
-            <a:prstDash val="solid"/>
-          </a:ln>
-        </p:spPr>
-        <p:txBody>
-          <a:bodyPr/>
-          <a:p/>
-        </p:txBody>
-      </p:sp>
-      <p:sp>
-        <p:nvSpPr>
-          <p:cNvPr id="9" name="Text 7"/>
-          <p:cNvSpPr/>
-          <p:nvPr/>
-        </p:nvSpPr>
-        <p:spPr>
-          <a:xfrm>
-            <a:off x="713232" y="2898648"/>
-            <a:ext cx="7955280" cy="347472"/>
-          </a:xfrm>
-          <a:prstGeom prst="rect">
-            <a:avLst/>
-          </a:prstGeom>
-          <a:noFill/>
-          <a:ln/>
-        </p:spPr>
-        <p:txBody>
-          <a:bodyPr wrap="square" lIns="0" tIns="0" rIns="0" bIns="0" rtlCol="0" anchor="ctr"/>
-          <a:lstStyle/>
-          <a:p>
-            <a:pPr indent="0" marL="0">
-              <a:buNone/>
-            </a:pPr>
-            <a:r>
-              <a:rPr lang="en-US" sz="1500" dirty="0">
-                <a:solidFill>
-                  <a:srgbClr val="D9CFD1"/>
-                </a:solidFill>
-                <a:latin typeface="Arial" pitchFamily="34" charset="0"/>
-                <a:ea typeface="Arial" pitchFamily="34" charset="-122"/>
-                <a:cs typeface="Arial" pitchFamily="34" charset="-120"/>
-              </a:rPr>
-              <a:t>'Quanto vamos vender?' → índice sazonal por mês · noite 3, exemplo 03</a:t>
-            </a:r>
-            <a:endParaRPr lang="en-US" sz="1500" dirty="0"/>
-          </a:p>
-        </p:txBody>
-      </p:sp>
-      <p:sp>
-        <p:nvSpPr>
-          <p:cNvPr id="10" name="Shape 8"/>
-          <p:cNvSpPr/>
-          <p:nvPr/>
-        </p:nvSpPr>
-        <p:spPr>
-          <a:xfrm>
-            <a:off x="457200" y="3419856"/>
-            <a:ext cx="91440" cy="91440"/>
-          </a:xfrm>
-          <a:prstGeom prst="ellipse">
-            <a:avLst/>
-          </a:prstGeom>
-          <a:solidFill>
-            <a:srgbClr val="3B9DF5"/>
-          </a:solidFill>
-          <a:ln w="12700">
-            <a:solidFill>
-              <a:srgbClr val="333333"/>
-            </a:solidFill>
-            <a:prstDash val="solid"/>
-          </a:ln>
-        </p:spPr>
-        <p:txBody>
-          <a:bodyPr/>
-          <a:p/>
-        </p:txBody>
-      </p:sp>
-      <p:sp>
-        <p:nvSpPr>
-          <p:cNvPr id="11" name="Text 9"/>
-          <p:cNvSpPr/>
-          <p:nvPr/>
-        </p:nvSpPr>
-        <p:spPr>
-          <a:xfrm>
-            <a:off x="713232" y="3319272"/>
-            <a:ext cx="7955280" cy="347472"/>
-          </a:xfrm>
-          <a:prstGeom prst="rect">
-            <a:avLst/>
-          </a:prstGeom>
-          <a:noFill/>
-          <a:ln/>
-        </p:spPr>
-        <p:txBody>
-          <a:bodyPr wrap="square" lIns="0" tIns="0" rIns="0" bIns="0" rtlCol="0" anchor="ctr"/>
-          <a:lstStyle/>
-          <a:p>
-            <a:pPr indent="0" marL="0">
-              <a:buNone/>
-            </a:pPr>
-            <a:r>
-              <a:rPr lang="en-US" sz="1500" dirty="0">
-                <a:solidFill>
-                  <a:srgbClr val="D9CFD1"/>
-                </a:solidFill>
-                <a:latin typeface="Arial" pitchFamily="34" charset="0"/>
-                <a:ea typeface="Arial" pitchFamily="34" charset="-122"/>
-                <a:cs typeface="Arial" pitchFamily="34" charset="-120"/>
-              </a:rPr>
-              <a:t>'Vender mais dá lucro?' → margem por categoria · HOJE, exemplo 06</a:t>
-            </a:r>
-            <a:endParaRPr lang="en-US" sz="1500" dirty="0"/>
-          </a:p>
-        </p:txBody>
-      </p:sp>
-      <p:sp>
-        <p:nvSpPr>
-          <p:cNvPr id="12" name="Shape 10"/>
-          <p:cNvSpPr/>
-          <p:nvPr/>
-        </p:nvSpPr>
-        <p:spPr>
-          <a:xfrm>
-            <a:off x="457200" y="3840480"/>
-            <a:ext cx="91440" cy="91440"/>
-          </a:xfrm>
-          <a:prstGeom prst="ellipse">
-            <a:avLst/>
-          </a:prstGeom>
-          <a:solidFill>
-            <a:srgbClr val="3B9DF5"/>
-          </a:solidFill>
-          <a:ln w="12700">
-            <a:solidFill>
-              <a:srgbClr val="333333"/>
-            </a:solidFill>
-            <a:prstDash val="solid"/>
-          </a:ln>
-        </p:spPr>
-        <p:txBody>
-          <a:bodyPr/>
-          <a:p/>
-        </p:txBody>
-      </p:sp>
-      <p:sp>
-        <p:nvSpPr>
-          <p:cNvPr id="13" name="Text 11"/>
-          <p:cNvSpPr/>
-          <p:nvPr/>
-        </p:nvSpPr>
-        <p:spPr>
-          <a:xfrm>
-            <a:off x="713232" y="3739896"/>
-            <a:ext cx="7955280" cy="347472"/>
-          </a:xfrm>
-          <a:prstGeom prst="rect">
-            <a:avLst/>
-          </a:prstGeom>
-          <a:noFill/>
-          <a:ln/>
-        </p:spPr>
-        <p:txBody>
-          <a:bodyPr wrap="square" lIns="0" tIns="0" rIns="0" bIns="0" rtlCol="0" anchor="ctr"/>
-          <a:lstStyle/>
-          <a:p>
-            <a:pPr indent="0" marL="0">
-              <a:buNone/>
-            </a:pPr>
-            <a:r>
-              <a:rPr lang="en-US" sz="1500" dirty="0">
-                <a:solidFill>
-                  <a:srgbClr val="D9CFD1"/>
-                </a:solidFill>
-                <a:latin typeface="Arial" pitchFamily="34" charset="0"/>
-                <a:ea typeface="Arial" pitchFamily="34" charset="-122"/>
-                <a:cs typeface="Arial" pitchFamily="34" charset="-120"/>
-              </a:rPr>
-              <a:t>'Onde a receita concentra?' → curva ABC de marca · HOJE, exemplo 06</a:t>
-            </a:r>
-            <a:endParaRPr lang="en-US" sz="1500" dirty="0"/>
-          </a:p>
-        </p:txBody>
-      </p:sp>
-      <p:sp>
-        <p:nvSpPr>
-          <p:cNvPr id="14" name="Text 12"/>
-          <p:cNvSpPr/>
-          <p:nvPr/>
-        </p:nvSpPr>
-        <p:spPr>
-          <a:xfrm>
-            <a:off x="411480" y="4297680"/>
-            <a:ext cx="8229600" cy="365760"/>
-          </a:xfrm>
-          <a:prstGeom prst="rect">
-            <a:avLst/>
-          </a:prstGeom>
-          <a:noFill/>
-          <a:ln/>
-        </p:spPr>
-        <p:txBody>
-          <a:bodyPr wrap="square" lIns="0" tIns="0" rIns="0" bIns="0" rtlCol="0" anchor="ctr"/>
-          <a:lstStyle/>
-          <a:p>
-            <a:pPr indent="0" marL="0">
-              <a:buNone/>
-            </a:pPr>
-            <a:r>
-              <a:rPr lang="en-US" sz="1300" dirty="0">
-                <a:solidFill>
-                  <a:srgbClr val="7CC8FF"/>
-                </a:solidFill>
-                <a:latin typeface="Arial" pitchFamily="34" charset="0"/>
-                <a:ea typeface="Arial" pitchFamily="34" charset="-122"/>
-                <a:cs typeface="Arial" pitchFamily="34" charset="-120"/>
-              </a:rPr>
-              <a:t>Repare: duas das cinco perguntas a gente responde HOJE, com SQL. As outras três precisam do dado limpo — e é por isso que existe a noite 2.</a:t>
-            </a:r>
-            <a:endParaRPr lang="en-US" sz="1300" dirty="0"/>
-          </a:p>
-        </p:txBody>
-      </p:sp>
-      <p:sp>
-        <p:nvSpPr>
-          <p:cNvPr id="15" name="Text 13"/>
           <p:cNvSpPr/>
           <p:nvPr/>
         </p:nvSpPr>
